--- a/M&A/カンテサンス/カンテサンス_M&Aスキーム図.pptx
+++ b/M&A/カンテサンス/カンテサンス_M&Aスキーム図.pptx
@@ -7,9 +7,10 @@
   <p:sldIdLst>
     <p:sldId id="256" r:id="rId2"/>
     <p:sldId id="257" r:id="rId3"/>
+    <p:sldId id="258" r:id="rId4"/>
   </p:sldIdLst>
   <p:notesMasterIdLst>
-    <p:notesMasterId r:id="rId4"/>
+    <p:notesMasterId r:id="rId5"/>
   </p:notesMasterIdLst>
   <p:sldSz cx="12192000" cy="6858000"/>
   <p:notesSz cx="6858000" cy="12192000"/>
@@ -615,6 +616,94 @@
             <a:fld id="{F7021451-1387-4CA6-816F-3879F97B5CBC}" type="slidenum">
               <a:rPr lang="en-US"/>
               <a:t>2</a:t>
+            </a:fld>
+            <a:endParaRPr lang="en-US"/>
+          </a:p>
+        </p:txBody>
+      </p:sp>
+    </p:spTree>
+    <p:extLst>
+      <p:ext uri="{BB962C8B-B14F-4D97-AF65-F5344CB8AC3E}">
+        <p14:creationId xmlns:p14="http://schemas.microsoft.com/office/powerpoint/2010/main" val="1024086991"/>
+      </p:ext>
+    </p:extLst>
+  </p:cSld>
+  <p:clrMapOvr>
+    <a:masterClrMapping/>
+  </p:clrMapOvr>
+</p:notes>
+</file>
+
+<file path=ppt/notesSlides/notesSlide3.xml><?xml version="1.0" encoding="utf-8"?>
+<p:notes xmlns:a="http://schemas.openxmlformats.org/drawingml/2006/main" xmlns:r="http://schemas.openxmlformats.org/officeDocument/2006/relationships" xmlns:p="http://schemas.openxmlformats.org/presentationml/2006/main">
+  <p:cSld>
+    <p:spTree>
+      <p:nvGrpSpPr>
+        <p:cNvPr id="1" name=""/>
+        <p:cNvGrpSpPr/>
+        <p:nvPr/>
+      </p:nvGrpSpPr>
+      <p:grpSpPr>
+        <a:xfrm>
+          <a:off x="0" y="0"/>
+          <a:ext cx="0" cy="0"/>
+          <a:chOff x="0" y="0"/>
+          <a:chExt cx="0" cy="0"/>
+        </a:xfrm>
+      </p:grpSpPr>
+      <p:sp>
+        <p:nvSpPr>
+          <p:cNvPr id="2" name="Slide Image Placeholder 1"/>
+          <p:cNvSpPr>
+            <a:spLocks noGrp="1" noRot="1" noChangeAspect="1"/>
+          </p:cNvSpPr>
+          <p:nvPr>
+            <p:ph type="sldImg"/>
+          </p:nvPr>
+        </p:nvSpPr>
+        <p:spPr/>
+      </p:sp>
+      <p:sp>
+        <p:nvSpPr>
+          <p:cNvPr id="3" name="Notes Placeholder 2"/>
+          <p:cNvSpPr>
+            <a:spLocks noGrp="1"/>
+          </p:cNvSpPr>
+          <p:nvPr>
+            <p:ph type="body" idx="1"/>
+          </p:nvPr>
+        </p:nvSpPr>
+        <p:spPr/>
+        <p:txBody>
+          <a:bodyPr/>
+          <a:lstStyle/>
+          <a:p>
+            <a:r>
+              <a:rPr lang="en-US" dirty="0"/>
+              <a:t/>
+            </a:r>
+            <a:endParaRPr lang="en-US" dirty="0"/>
+          </a:p>
+        </p:txBody>
+      </p:sp>
+      <p:sp>
+        <p:nvSpPr>
+          <p:cNvPr id="4" name="Slide Number Placeholder 3"/>
+          <p:cNvSpPr>
+            <a:spLocks noGrp="1"/>
+          </p:cNvSpPr>
+          <p:nvPr>
+            <p:ph type="sldNum" sz="quarter" idx="10"/>
+          </p:nvPr>
+        </p:nvSpPr>
+        <p:spPr/>
+        <p:txBody>
+          <a:bodyPr/>
+          <a:lstStyle/>
+          <a:p>
+            <a:fld id="{F7021451-1387-4CA6-816F-3879F97B5CBC}" type="slidenum">
+              <a:rPr lang="en-US"/>
+              <a:t>3</a:t>
             </a:fld>
             <a:endParaRPr lang="en-US"/>
           </a:p>
@@ -1029,7 +1118,7 @@
                 <a:ea typeface="Cambria" pitchFamily="34" charset="-122"/>
                 <a:cs typeface="Cambria" pitchFamily="34" charset="-120"/>
               </a:rPr>
-              <a:t>M&amp;Aスキーム</a:t>
+              <a:t>M&amp;Aスキーム（SPC方式）</a:t>
             </a:r>
             <a:endParaRPr lang="en-US" sz="2900" dirty="0"/>
           </a:p>
@@ -1071,7 +1160,7 @@
                 <a:ea typeface="Calibri" pitchFamily="34" charset="-122"/>
                 <a:cs typeface="Calibri" pitchFamily="34" charset="-120"/>
               </a:rPr>
-              <a:t>買収目的会社（SPC）を設立し、投資家およびWineBankの出資30.0億円とLBOローン20.0億円をもって、対象会社の全株式を50.0億円で取得する。</a:t>
+              <a:t>資本金10万円のSPCを設立し、みずほ銀行のローンと投資家の出資をもって対象会社の全株式を取得。クロージング後にSPCと対象会社を合併する。</a:t>
             </a:r>
             <a:endParaRPr lang="en-US" sz="1250" dirty="0"/>
           </a:p>
@@ -1085,12 +1174,12 @@
         </p:nvSpPr>
         <p:spPr>
           <a:xfrm>
-            <a:off x="3931920" y="1481328"/>
-            <a:ext cx="2240280" cy="731520"/>
+            <a:off x="4297680" y="1444752"/>
+            <a:ext cx="2011680" cy="768096"/>
           </a:xfrm>
           <a:prstGeom prst="roundRect">
             <a:avLst>
-              <a:gd name="adj" fmla="val 6250"/>
+              <a:gd name="adj" fmla="val 5952"/>
             </a:avLst>
           </a:prstGeom>
           <a:solidFill>
@@ -1112,8 +1201,8 @@
         </p:nvSpPr>
         <p:spPr>
           <a:xfrm>
-            <a:off x="4059936" y="1600200"/>
-            <a:ext cx="1984248" cy="274320"/>
+            <a:off x="4407408" y="1563624"/>
+            <a:ext cx="1792224" cy="274320"/>
           </a:xfrm>
           <a:prstGeom prst="rect">
             <a:avLst/>
@@ -1137,7 +1226,7 @@
                 <a:ea typeface="Calibri" pitchFamily="34" charset="-122"/>
                 <a:cs typeface="Calibri" pitchFamily="34" charset="-120"/>
               </a:rPr>
-              <a:t>投資家</a:t>
+              <a:t>中野 邦人 氏</a:t>
             </a:r>
             <a:endParaRPr lang="en-US" sz="1250" dirty="0"/>
           </a:p>
@@ -1151,8 +1240,8 @@
         </p:nvSpPr>
         <p:spPr>
           <a:xfrm>
-            <a:off x="4041648" y="1874520"/>
-            <a:ext cx="2020824" cy="256032"/>
+            <a:off x="4389120" y="1837944"/>
+            <a:ext cx="1828800" cy="292608"/>
           </a:xfrm>
           <a:prstGeom prst="rect">
             <a:avLst/>
@@ -1166,12 +1255,12 @@
           <a:p>
             <a:pPr algn="ctr" indent="0" marL="0">
               <a:lnSpc>
-                <a:spcPts val="1300"/>
+                <a:spcPts val="1200"/>
               </a:lnSpc>
               <a:buNone/>
             </a:pPr>
             <a:r>
-              <a:rPr lang="en-US" sz="950" dirty="0">
+              <a:rPr lang="en-US" sz="900" dirty="0">
                 <a:solidFill>
                   <a:srgbClr val="6E6368"/>
                 </a:solidFill>
@@ -1179,29 +1268,9 @@
                 <a:ea typeface="Calibri" pitchFamily="34" charset="-122"/>
                 <a:cs typeface="Calibri" pitchFamily="34" charset="-120"/>
               </a:rPr>
-              <a:t>穐田 誉輝 氏</a:t>
+              <a:t>SPC設立者</a:t>
             </a:r>
-            <a:endParaRPr lang="en-US" sz="950" dirty="0"/>
-          </a:p>
-          <a:p>
-            <a:pPr algn="ctr" indent="0" marL="0">
-              <a:lnSpc>
-                <a:spcPts val="1300"/>
-              </a:lnSpc>
-              <a:buNone/>
-            </a:pPr>
-            <a:r>
-              <a:rPr lang="en-US" sz="950" dirty="0">
-                <a:solidFill>
-                  <a:srgbClr val="6E6368"/>
-                </a:solidFill>
-                <a:latin typeface="Calibri" pitchFamily="34" charset="0"/>
-                <a:ea typeface="Calibri" pitchFamily="34" charset="-122"/>
-                <a:cs typeface="Calibri" pitchFamily="34" charset="-120"/>
-              </a:rPr>
-              <a:t>榊原 氏</a:t>
-            </a:r>
-            <a:endParaRPr lang="en-US" sz="950" dirty="0"/>
+            <a:endParaRPr lang="en-US" sz="900" dirty="0"/>
           </a:p>
         </p:txBody>
       </p:sp>
@@ -1213,12 +1282,12 @@
         </p:nvSpPr>
         <p:spPr>
           <a:xfrm>
-            <a:off x="6492240" y="1481328"/>
-            <a:ext cx="2240280" cy="731520"/>
+            <a:off x="6492240" y="1444752"/>
+            <a:ext cx="2011680" cy="768096"/>
           </a:xfrm>
           <a:prstGeom prst="roundRect">
             <a:avLst>
-              <a:gd name="adj" fmla="val 6250"/>
+              <a:gd name="adj" fmla="val 5952"/>
             </a:avLst>
           </a:prstGeom>
           <a:solidFill>
@@ -1240,8 +1309,8 @@
         </p:nvSpPr>
         <p:spPr>
           <a:xfrm>
-            <a:off x="6620256" y="1600200"/>
-            <a:ext cx="1984248" cy="274320"/>
+            <a:off x="6601968" y="1563624"/>
+            <a:ext cx="1792224" cy="274320"/>
           </a:xfrm>
           <a:prstGeom prst="rect">
             <a:avLst/>
@@ -1265,7 +1334,7 @@
                 <a:ea typeface="Calibri" pitchFamily="34" charset="-122"/>
                 <a:cs typeface="Calibri" pitchFamily="34" charset="-120"/>
               </a:rPr>
-              <a:t>株式会社WineBank</a:t>
+              <a:t>榊原 氏</a:t>
             </a:r>
             <a:endParaRPr lang="en-US" sz="1250" dirty="0"/>
           </a:p>
@@ -1279,8 +1348,8 @@
         </p:nvSpPr>
         <p:spPr>
           <a:xfrm>
-            <a:off x="6601968" y="1874520"/>
-            <a:ext cx="2020824" cy="256032"/>
+            <a:off x="6583680" y="1837944"/>
+            <a:ext cx="1828800" cy="292608"/>
           </a:xfrm>
           <a:prstGeom prst="rect">
             <a:avLst/>
@@ -1294,12 +1363,12 @@
           <a:p>
             <a:pPr algn="ctr" indent="0" marL="0">
               <a:lnSpc>
-                <a:spcPts val="1300"/>
+                <a:spcPts val="1200"/>
               </a:lnSpc>
               <a:buNone/>
             </a:pPr>
             <a:r>
-              <a:rPr lang="en-US" sz="950" dirty="0">
+              <a:rPr lang="en-US" sz="900" dirty="0">
                 <a:solidFill>
                   <a:srgbClr val="6E6368"/>
                 </a:solidFill>
@@ -1307,9 +1376,9 @@
                 <a:ea typeface="Calibri" pitchFamily="34" charset="-122"/>
                 <a:cs typeface="Calibri" pitchFamily="34" charset="-120"/>
               </a:rPr>
-              <a:t>買収の実行主体</a:t>
+              <a:t>投資家</a:t>
             </a:r>
-            <a:endParaRPr lang="en-US" sz="950" dirty="0"/>
+            <a:endParaRPr lang="en-US" sz="900" dirty="0"/>
           </a:p>
         </p:txBody>
       </p:sp>
@@ -1321,8 +1390,8 @@
         </p:nvSpPr>
         <p:spPr>
           <a:xfrm>
-            <a:off x="5052060" y="2212848"/>
-            <a:ext cx="0" cy="621792"/>
+            <a:off x="5303520" y="2212848"/>
+            <a:ext cx="0" cy="585216"/>
           </a:xfrm>
           <a:prstGeom prst="line">
             <a:avLst/>
@@ -1345,8 +1414,8 @@
         </p:nvSpPr>
         <p:spPr>
           <a:xfrm>
-            <a:off x="7612380" y="2212848"/>
-            <a:ext cx="0" cy="621792"/>
+            <a:off x="7498080" y="2212848"/>
+            <a:ext cx="0" cy="585216"/>
           </a:xfrm>
           <a:prstGeom prst="line">
             <a:avLst/>
@@ -1369,8 +1438,70 @@
         </p:nvSpPr>
         <p:spPr>
           <a:xfrm>
-            <a:off x="5138928" y="2304288"/>
-            <a:ext cx="1371600" cy="310896"/>
+            <a:off x="5376672" y="2267712"/>
+            <a:ext cx="1691640" cy="329184"/>
+          </a:xfrm>
+          <a:prstGeom prst="rect">
+            <a:avLst/>
+          </a:prstGeom>
+          <a:noFill/>
+          <a:ln/>
+        </p:spPr>
+        <p:txBody>
+          <a:bodyPr wrap="square" lIns="0" tIns="0" rIns="0" bIns="0" rtlCol="0" anchor="ctr"/>
+          <a:lstStyle/>
+          <a:p>
+            <a:pPr algn="ctr" indent="0" marL="0">
+              <a:lnSpc>
+                <a:spcPts val="1100"/>
+              </a:lnSpc>
+              <a:buNone/>
+            </a:pPr>
+            <a:r>
+              <a:rPr lang="en-US" sz="850" b="1" dirty="0">
+                <a:solidFill>
+                  <a:srgbClr val="6D2E46"/>
+                </a:solidFill>
+                <a:latin typeface="Calibri" pitchFamily="34" charset="0"/>
+                <a:ea typeface="Calibri" pitchFamily="34" charset="-122"/>
+                <a:cs typeface="Calibri" pitchFamily="34" charset="-120"/>
+              </a:rPr>
+              <a:t>出資10万円（67%）</a:t>
+            </a:r>
+            <a:endParaRPr lang="en-US" sz="850" dirty="0"/>
+          </a:p>
+          <a:p>
+            <a:pPr algn="ctr" indent="0" marL="0">
+              <a:lnSpc>
+                <a:spcPts val="1100"/>
+              </a:lnSpc>
+              <a:buNone/>
+            </a:pPr>
+            <a:r>
+              <a:rPr lang="en-US" sz="850" b="1" dirty="0">
+                <a:solidFill>
+                  <a:srgbClr val="6D2E46"/>
+                </a:solidFill>
+                <a:latin typeface="Calibri" pitchFamily="34" charset="0"/>
+                <a:ea typeface="Calibri" pitchFamily="34" charset="-122"/>
+                <a:cs typeface="Calibri" pitchFamily="34" charset="-120"/>
+              </a:rPr>
+              <a:t>＋ 株主貸付 5.1億円</a:t>
+            </a:r>
+            <a:endParaRPr lang="en-US" sz="850" dirty="0"/>
+          </a:p>
+        </p:txBody>
+      </p:sp>
+      <p:sp>
+        <p:nvSpPr>
+          <p:cNvPr id="14" name="Text 12"/>
+          <p:cNvSpPr txBox="1"/>
+          <p:nvPr/>
+        </p:nvSpPr>
+        <p:spPr>
+          <a:xfrm>
+            <a:off x="7571232" y="2267712"/>
+            <a:ext cx="1554480" cy="329184"/>
           </a:xfrm>
           <a:prstGeom prst="rect">
             <a:avLst/>
@@ -1417,7 +1548,7 @@
                 <a:ea typeface="Calibri" pitchFamily="34" charset="-122"/>
                 <a:cs typeface="Calibri" pitchFamily="34" charset="-120"/>
               </a:rPr>
-              <a:t>33.3%</a:t>
+              <a:t>（33%）</a:t>
             </a:r>
             <a:endParaRPr lang="en-US" sz="850" dirty="0"/>
           </a:p>
@@ -1425,80 +1556,18 @@
       </p:sp>
       <p:sp>
         <p:nvSpPr>
-          <p:cNvPr id="14" name="Text 12"/>
-          <p:cNvSpPr txBox="1"/>
-          <p:nvPr/>
-        </p:nvSpPr>
-        <p:spPr>
-          <a:xfrm>
-            <a:off x="7699248" y="2304288"/>
-            <a:ext cx="1371600" cy="310896"/>
-          </a:xfrm>
-          <a:prstGeom prst="rect">
-            <a:avLst/>
-          </a:prstGeom>
-          <a:noFill/>
-          <a:ln/>
-        </p:spPr>
-        <p:txBody>
-          <a:bodyPr wrap="square" lIns="0" tIns="0" rIns="0" bIns="0" rtlCol="0" anchor="ctr"/>
-          <a:lstStyle/>
-          <a:p>
-            <a:pPr algn="ctr" indent="0" marL="0">
-              <a:lnSpc>
-                <a:spcPts val="1100"/>
-              </a:lnSpc>
-              <a:buNone/>
-            </a:pPr>
-            <a:r>
-              <a:rPr lang="en-US" sz="850" b="1" dirty="0">
-                <a:solidFill>
-                  <a:srgbClr val="6D2E46"/>
-                </a:solidFill>
-                <a:latin typeface="Calibri" pitchFamily="34" charset="0"/>
-                <a:ea typeface="Calibri" pitchFamily="34" charset="-122"/>
-                <a:cs typeface="Calibri" pitchFamily="34" charset="-120"/>
-              </a:rPr>
-              <a:t>出資 20.0億円</a:t>
-            </a:r>
-            <a:endParaRPr lang="en-US" sz="850" dirty="0"/>
-          </a:p>
-          <a:p>
-            <a:pPr algn="ctr" indent="0" marL="0">
-              <a:lnSpc>
-                <a:spcPts val="1100"/>
-              </a:lnSpc>
-              <a:buNone/>
-            </a:pPr>
-            <a:r>
-              <a:rPr lang="en-US" sz="850" b="1" dirty="0">
-                <a:solidFill>
-                  <a:srgbClr val="6D2E46"/>
-                </a:solidFill>
-                <a:latin typeface="Calibri" pitchFamily="34" charset="0"/>
-                <a:ea typeface="Calibri" pitchFamily="34" charset="-122"/>
-                <a:cs typeface="Calibri" pitchFamily="34" charset="-120"/>
-              </a:rPr>
-              <a:t>66.7%</a:t>
-            </a:r>
-            <a:endParaRPr lang="en-US" sz="850" dirty="0"/>
-          </a:p>
-        </p:txBody>
-      </p:sp>
-      <p:sp>
-        <p:nvSpPr>
           <p:cNvPr id="15" name="Shape 13"/>
           <p:cNvSpPr/>
           <p:nvPr/>
         </p:nvSpPr>
         <p:spPr>
           <a:xfrm>
-            <a:off x="566928" y="2834640"/>
-            <a:ext cx="2468880" cy="841248"/>
+            <a:off x="566928" y="2798064"/>
+            <a:ext cx="2331720" cy="877824"/>
           </a:xfrm>
           <a:prstGeom prst="roundRect">
             <a:avLst>
-              <a:gd name="adj" fmla="val 5435"/>
+              <a:gd name="adj" fmla="val 5208"/>
             </a:avLst>
           </a:prstGeom>
           <a:solidFill>
@@ -1520,8 +1589,8 @@
         </p:nvSpPr>
         <p:spPr>
           <a:xfrm>
-            <a:off x="694944" y="2953512"/>
-            <a:ext cx="2212848" cy="274320"/>
+            <a:off x="676656" y="2916936"/>
+            <a:ext cx="2112264" cy="274320"/>
           </a:xfrm>
           <a:prstGeom prst="rect">
             <a:avLst/>
@@ -1559,8 +1628,8 @@
         </p:nvSpPr>
         <p:spPr>
           <a:xfrm>
-            <a:off x="676656" y="3227832"/>
-            <a:ext cx="2249424" cy="365760"/>
+            <a:off x="658368" y="3191256"/>
+            <a:ext cx="2148840" cy="402336"/>
           </a:xfrm>
           <a:prstGeom prst="rect">
             <a:avLst/>
@@ -1574,12 +1643,12 @@
           <a:p>
             <a:pPr algn="ctr" indent="0" marL="0">
               <a:lnSpc>
-                <a:spcPts val="1300"/>
+                <a:spcPts val="1200"/>
               </a:lnSpc>
               <a:buNone/>
             </a:pPr>
             <a:r>
-              <a:rPr lang="en-US" sz="950" dirty="0">
+              <a:rPr lang="en-US" sz="900" dirty="0">
                 <a:solidFill>
                   <a:srgbClr val="6E6368"/>
                 </a:solidFill>
@@ -1589,7 +1658,7 @@
               </a:rPr>
               <a:t>買収ファイナンス</a:t>
             </a:r>
-            <a:endParaRPr lang="en-US" sz="950" dirty="0"/>
+            <a:endParaRPr lang="en-US" sz="900" dirty="0"/>
           </a:p>
         </p:txBody>
       </p:sp>
@@ -1601,12 +1670,12 @@
         </p:nvSpPr>
         <p:spPr>
           <a:xfrm>
-            <a:off x="3931920" y="2834640"/>
-            <a:ext cx="4297680" cy="841248"/>
+            <a:off x="4069080" y="2798064"/>
+            <a:ext cx="4023360" cy="877824"/>
           </a:xfrm>
           <a:prstGeom prst="roundRect">
             <a:avLst>
-              <a:gd name="adj" fmla="val 5435"/>
+              <a:gd name="adj" fmla="val 5208"/>
             </a:avLst>
           </a:prstGeom>
           <a:solidFill>
@@ -1628,8 +1697,8 @@
         </p:nvSpPr>
         <p:spPr>
           <a:xfrm>
-            <a:off x="4059936" y="2953512"/>
-            <a:ext cx="4041648" cy="274320"/>
+            <a:off x="4178808" y="2916936"/>
+            <a:ext cx="3803904" cy="274320"/>
           </a:xfrm>
           <a:prstGeom prst="rect">
             <a:avLst/>
@@ -1667,8 +1736,8 @@
         </p:nvSpPr>
         <p:spPr>
           <a:xfrm>
-            <a:off x="4041648" y="3227832"/>
-            <a:ext cx="4078224" cy="365760"/>
+            <a:off x="4160520" y="3191256"/>
+            <a:ext cx="3840480" cy="402336"/>
           </a:xfrm>
           <a:prstGeom prst="rect">
             <a:avLst/>
@@ -1682,12 +1751,12 @@
           <a:p>
             <a:pPr algn="ctr" indent="0" marL="0">
               <a:lnSpc>
-                <a:spcPts val="1300"/>
+                <a:spcPts val="1200"/>
               </a:lnSpc>
               <a:buNone/>
             </a:pPr>
             <a:r>
-              <a:rPr lang="en-US" sz="950" dirty="0">
+              <a:rPr lang="en-US" sz="900" dirty="0">
                 <a:solidFill>
                   <a:srgbClr val="E3D2D7"/>
                 </a:solidFill>
@@ -1695,9 +1764,9 @@
                 <a:ea typeface="Calibri" pitchFamily="34" charset="-122"/>
                 <a:cs typeface="Calibri" pitchFamily="34" charset="-120"/>
               </a:rPr>
-              <a:t>資本金 30.0億円／借入 20.0億円</a:t>
+              <a:t>資本金10万円／借入36.4億円</a:t>
             </a:r>
-            <a:endParaRPr lang="en-US" sz="950" dirty="0"/>
+            <a:endParaRPr lang="en-US" sz="900" dirty="0"/>
           </a:p>
         </p:txBody>
       </p:sp>
@@ -1709,12 +1778,12 @@
         </p:nvSpPr>
         <p:spPr>
           <a:xfrm>
-            <a:off x="9144000" y="2834640"/>
-            <a:ext cx="2478024" cy="841248"/>
+            <a:off x="9189720" y="2798064"/>
+            <a:ext cx="2432304" cy="877824"/>
           </a:xfrm>
           <a:prstGeom prst="roundRect">
             <a:avLst>
-              <a:gd name="adj" fmla="val 5435"/>
+              <a:gd name="adj" fmla="val 5208"/>
             </a:avLst>
           </a:prstGeom>
           <a:solidFill>
@@ -1736,8 +1805,8 @@
         </p:nvSpPr>
         <p:spPr>
           <a:xfrm>
-            <a:off x="9272016" y="2953512"/>
-            <a:ext cx="2221992" cy="274320"/>
+            <a:off x="9299448" y="2916936"/>
+            <a:ext cx="2212848" cy="274320"/>
           </a:xfrm>
           <a:prstGeom prst="rect">
             <a:avLst/>
@@ -1775,8 +1844,8 @@
         </p:nvSpPr>
         <p:spPr>
           <a:xfrm>
-            <a:off x="9253728" y="3227832"/>
-            <a:ext cx="2258568" cy="365760"/>
+            <a:off x="9281160" y="3191256"/>
+            <a:ext cx="2249424" cy="402336"/>
           </a:xfrm>
           <a:prstGeom prst="rect">
             <a:avLst/>
@@ -1790,12 +1859,12 @@
           <a:p>
             <a:pPr algn="ctr" indent="0" marL="0">
               <a:lnSpc>
-                <a:spcPts val="1300"/>
+                <a:spcPts val="1200"/>
               </a:lnSpc>
               <a:buNone/>
             </a:pPr>
             <a:r>
-              <a:rPr lang="en-US" sz="950" dirty="0">
+              <a:rPr lang="en-US" sz="900" dirty="0">
                 <a:solidFill>
                   <a:srgbClr val="6E6368"/>
                 </a:solidFill>
@@ -1803,9 +1872,9 @@
                 <a:ea typeface="Calibri" pitchFamily="34" charset="-122"/>
                 <a:cs typeface="Calibri" pitchFamily="34" charset="-120"/>
               </a:rPr>
-              <a:t>対象会社 発行済株式100%を保有</a:t>
+              <a:t>対象会社株式100%を保有</a:t>
             </a:r>
-            <a:endParaRPr lang="en-US" sz="950" dirty="0"/>
+            <a:endParaRPr lang="en-US" sz="900" dirty="0"/>
           </a:p>
         </p:txBody>
       </p:sp>
@@ -1817,8 +1886,8 @@
         </p:nvSpPr>
         <p:spPr>
           <a:xfrm>
-            <a:off x="3017520" y="2889504"/>
-            <a:ext cx="950976" cy="310896"/>
+            <a:off x="2916936" y="2834640"/>
+            <a:ext cx="1133856" cy="329184"/>
           </a:xfrm>
           <a:prstGeom prst="rect">
             <a:avLst/>
@@ -1839,13 +1908,13 @@
             <a:r>
               <a:rPr lang="en-US" sz="850" b="1" dirty="0">
                 <a:solidFill>
-                  <a:srgbClr val="6D2E46"/>
+                  <a:srgbClr val="9B2C2C"/>
                 </a:solidFill>
                 <a:latin typeface="Calibri" pitchFamily="34" charset="0"/>
                 <a:ea typeface="Calibri" pitchFamily="34" charset="-122"/>
                 <a:cs typeface="Calibri" pitchFamily="34" charset="-120"/>
               </a:rPr>
-              <a:t>LBOローン</a:t>
+              <a:t>ターム 20.0億円</a:t>
             </a:r>
             <a:endParaRPr lang="en-US" sz="850" dirty="0"/>
           </a:p>
@@ -1859,13 +1928,13 @@
             <a:r>
               <a:rPr lang="en-US" sz="850" b="1" dirty="0">
                 <a:solidFill>
-                  <a:srgbClr val="6D2E46"/>
+                  <a:srgbClr val="9B2C2C"/>
                 </a:solidFill>
                 <a:latin typeface="Calibri" pitchFamily="34" charset="0"/>
                 <a:ea typeface="Calibri" pitchFamily="34" charset="-122"/>
                 <a:cs typeface="Calibri" pitchFamily="34" charset="-120"/>
               </a:rPr>
-              <a:t>20.0億円</a:t>
+              <a:t>＋ブリッジ 16.4億円</a:t>
             </a:r>
             <a:endParaRPr lang="en-US" sz="850" dirty="0"/>
           </a:p>
@@ -1879,8 +1948,8 @@
         </p:nvSpPr>
         <p:spPr>
           <a:xfrm>
-            <a:off x="3054096" y="3346704"/>
-            <a:ext cx="859536" cy="0"/>
+            <a:off x="2935224" y="3310128"/>
+            <a:ext cx="1115568" cy="0"/>
           </a:xfrm>
           <a:prstGeom prst="line">
             <a:avLst/>
@@ -1891,7 +1960,6 @@
               <a:srgbClr val="A26769"/>
             </a:solidFill>
             <a:prstDash val="solid"/>
-            <a:headEnd type="none"/>
             <a:tailEnd type="triangle"/>
           </a:ln>
         </p:spPr>
@@ -1904,8 +1972,8 @@
         </p:nvSpPr>
         <p:spPr>
           <a:xfrm>
-            <a:off x="8211312" y="2871216"/>
-            <a:ext cx="950976" cy="182880"/>
+            <a:off x="8092440" y="2852928"/>
+            <a:ext cx="1097280" cy="182880"/>
           </a:xfrm>
           <a:prstGeom prst="rect">
             <a:avLst/>
@@ -1946,8 +2014,8 @@
         </p:nvSpPr>
         <p:spPr>
           <a:xfrm>
-            <a:off x="8247888" y="3108960"/>
-            <a:ext cx="877824" cy="0"/>
+            <a:off x="8110728" y="3072384"/>
+            <a:ext cx="1060704" cy="0"/>
           </a:xfrm>
           <a:prstGeom prst="line">
             <a:avLst/>
@@ -1958,7 +2026,6 @@
               <a:srgbClr val="A26769"/>
             </a:solidFill>
             <a:prstDash val="solid"/>
-            <a:headEnd type="none"/>
             <a:tailEnd type="triangle"/>
           </a:ln>
         </p:spPr>
@@ -1971,8 +2038,8 @@
         </p:nvSpPr>
         <p:spPr>
           <a:xfrm>
-            <a:off x="8247888" y="3383280"/>
-            <a:ext cx="877824" cy="0"/>
+            <a:off x="8110728" y="3364992"/>
+            <a:ext cx="1060704" cy="0"/>
           </a:xfrm>
           <a:prstGeom prst="line">
             <a:avLst/>
@@ -1983,7 +2050,6 @@
               <a:srgbClr val="6D2E46"/>
             </a:solidFill>
             <a:prstDash val="solid"/>
-            <a:headEnd type="none"/>
             <a:tailEnd type="triangle"/>
           </a:ln>
         </p:spPr>
@@ -1996,8 +2062,8 @@
         </p:nvSpPr>
         <p:spPr>
           <a:xfrm>
-            <a:off x="8211312" y="3438144"/>
-            <a:ext cx="950976" cy="310896"/>
+            <a:off x="8092440" y="3419856"/>
+            <a:ext cx="1097280" cy="329184"/>
           </a:xfrm>
           <a:prstGeom prst="rect">
             <a:avLst/>
@@ -2083,7 +2149,7 @@
         <p:spPr>
           <a:xfrm>
             <a:off x="6172200" y="3749040"/>
-            <a:ext cx="2103120" cy="201168"/>
+            <a:ext cx="2194560" cy="201168"/>
           </a:xfrm>
           <a:prstGeom prst="rect">
             <a:avLst/>
@@ -2124,8 +2190,8 @@
         </p:nvSpPr>
         <p:spPr>
           <a:xfrm>
-            <a:off x="3931920" y="4224528"/>
-            <a:ext cx="4297680" cy="822960"/>
+            <a:off x="4069080" y="4224528"/>
+            <a:ext cx="4023360" cy="822960"/>
           </a:xfrm>
           <a:prstGeom prst="roundRect">
             <a:avLst>
@@ -2151,8 +2217,8 @@
         </p:nvSpPr>
         <p:spPr>
           <a:xfrm>
-            <a:off x="4059936" y="4343400"/>
-            <a:ext cx="4041648" cy="274320"/>
+            <a:off x="4178808" y="4343400"/>
+            <a:ext cx="3803904" cy="274320"/>
           </a:xfrm>
           <a:prstGeom prst="rect">
             <a:avLst/>
@@ -2190,8 +2256,8 @@
         </p:nvSpPr>
         <p:spPr>
           <a:xfrm>
-            <a:off x="4041648" y="4617720"/>
-            <a:ext cx="4078224" cy="347472"/>
+            <a:off x="4160520" y="4617720"/>
+            <a:ext cx="3840480" cy="347472"/>
           </a:xfrm>
           <a:prstGeom prst="rect">
             <a:avLst/>
@@ -2204,48 +2270,6 @@
           <a:lstStyle/>
           <a:p>
             <a:pPr algn="ctr" indent="0" marL="0">
-              <a:lnSpc>
-                <a:spcPts val="1300"/>
-              </a:lnSpc>
-              <a:buNone/>
-            </a:pPr>
-            <a:r>
-              <a:rPr lang="en-US" sz="950" dirty="0">
-                <a:solidFill>
-                  <a:srgbClr val="6E6368"/>
-                </a:solidFill>
-                <a:latin typeface="Calibri" pitchFamily="34" charset="0"/>
-                <a:ea typeface="Calibri" pitchFamily="34" charset="-122"/>
-                <a:cs typeface="Calibri" pitchFamily="34" charset="-120"/>
-              </a:rPr>
-              <a:t>岸田氏は3年間、代表取締役として在任</a:t>
-            </a:r>
-            <a:endParaRPr lang="en-US" sz="950" dirty="0"/>
-          </a:p>
-        </p:txBody>
-      </p:sp>
-      <p:sp>
-        <p:nvSpPr>
-          <p:cNvPr id="35" name="Text 33"/>
-          <p:cNvSpPr txBox="1"/>
-          <p:nvPr/>
-        </p:nvSpPr>
-        <p:spPr>
-          <a:xfrm>
-            <a:off x="9144000" y="4224528"/>
-            <a:ext cx="2478024" cy="402336"/>
-          </a:xfrm>
-          <a:prstGeom prst="rect">
-            <a:avLst/>
-          </a:prstGeom>
-          <a:noFill/>
-          <a:ln/>
-        </p:spPr>
-        <p:txBody>
-          <a:bodyPr wrap="square" lIns="0" tIns="0" rIns="0" bIns="0" rtlCol="0" anchor="ctr"/>
-          <a:lstStyle/>
-          <a:p>
-            <a:pPr indent="0" marL="0">
               <a:lnSpc>
                 <a:spcPts val="1200"/>
               </a:lnSpc>
@@ -2260,7 +2284,89 @@
                 <a:ea typeface="Calibri" pitchFamily="34" charset="-122"/>
                 <a:cs typeface="Calibri" pitchFamily="34" charset="-120"/>
               </a:rPr>
-              <a:t>※ クロージング時に役員貸付金5.0億円を現金精算</a:t>
+              <a:t>現預金17.4億円／岸田氏は3年間 代表取締役として在任</a:t>
+            </a:r>
+            <a:endParaRPr lang="en-US" sz="900" dirty="0"/>
+          </a:p>
+        </p:txBody>
+      </p:sp>
+      <p:sp>
+        <p:nvSpPr>
+          <p:cNvPr id="35" name="Text 33"/>
+          <p:cNvSpPr txBox="1"/>
+          <p:nvPr/>
+        </p:nvSpPr>
+        <p:spPr>
+          <a:xfrm>
+            <a:off x="8503920" y="4224528"/>
+            <a:ext cx="3118104" cy="786384"/>
+          </a:xfrm>
+          <a:prstGeom prst="rect">
+            <a:avLst/>
+          </a:prstGeom>
+          <a:noFill/>
+          <a:ln/>
+        </p:spPr>
+        <p:txBody>
+          <a:bodyPr wrap="square" lIns="0" tIns="0" rIns="0" bIns="0" rtlCol="0" anchor="ctr"/>
+          <a:lstStyle/>
+          <a:p>
+            <a:pPr indent="0" marL="0">
+              <a:lnSpc>
+                <a:spcPts val="1200"/>
+              </a:lnSpc>
+              <a:buNone/>
+            </a:pPr>
+            <a:r>
+              <a:rPr lang="en-US" sz="900" dirty="0">
+                <a:solidFill>
+                  <a:srgbClr val="1F1A1C"/>
+                </a:solidFill>
+                <a:latin typeface="Calibri" pitchFamily="34" charset="0"/>
+                <a:ea typeface="Calibri" pitchFamily="34" charset="-122"/>
+                <a:cs typeface="Calibri" pitchFamily="34" charset="-120"/>
+              </a:rPr>
+              <a:t>合併後、対象会社の余剰現金16.4億円</a:t>
+            </a:r>
+            <a:endParaRPr lang="en-US" sz="900" dirty="0"/>
+          </a:p>
+          <a:p>
+            <a:pPr indent="0" marL="0">
+              <a:lnSpc>
+                <a:spcPts val="1200"/>
+              </a:lnSpc>
+              <a:buNone/>
+            </a:pPr>
+            <a:r>
+              <a:rPr lang="en-US" sz="900" dirty="0">
+                <a:solidFill>
+                  <a:srgbClr val="1F1A1C"/>
+                </a:solidFill>
+                <a:latin typeface="Calibri" pitchFamily="34" charset="0"/>
+                <a:ea typeface="Calibri" pitchFamily="34" charset="-122"/>
+                <a:cs typeface="Calibri" pitchFamily="34" charset="-120"/>
+              </a:rPr>
+              <a:t>（現預金17.4＋役員貸付金5.0−留保6.0）</a:t>
+            </a:r>
+            <a:endParaRPr lang="en-US" sz="900" dirty="0"/>
+          </a:p>
+          <a:p>
+            <a:pPr indent="0" marL="0">
+              <a:lnSpc>
+                <a:spcPts val="1200"/>
+              </a:lnSpc>
+              <a:buNone/>
+            </a:pPr>
+            <a:r>
+              <a:rPr lang="en-US" sz="900" dirty="0">
+                <a:solidFill>
+                  <a:srgbClr val="1F1A1C"/>
+                </a:solidFill>
+                <a:latin typeface="Calibri" pitchFamily="34" charset="0"/>
+                <a:ea typeface="Calibri" pitchFamily="34" charset="-122"/>
+                <a:cs typeface="Calibri" pitchFamily="34" charset="-120"/>
+              </a:rPr>
+              <a:t>をもってブリッジローンを全額返済</a:t>
             </a:r>
             <a:endParaRPr lang="en-US" sz="900" dirty="0"/>
           </a:p>
@@ -2301,8 +2407,8 @@
         </p:nvSpPr>
         <p:spPr>
           <a:xfrm>
-            <a:off x="749808" y="5321808"/>
-            <a:ext cx="2194560" cy="219456"/>
+            <a:off x="731520" y="5321808"/>
+            <a:ext cx="2231136" cy="219456"/>
           </a:xfrm>
           <a:prstGeom prst="rect">
             <a:avLst/>
@@ -2326,7 +2432,7 @@
                 <a:ea typeface="Calibri" pitchFamily="34" charset="-122"/>
                 <a:cs typeface="Calibri" pitchFamily="34" charset="-120"/>
               </a:rPr>
-              <a:t>株式譲受代金</a:t>
+              <a:t>持分</a:t>
             </a:r>
             <a:endParaRPr lang="en-US" sz="950" dirty="0"/>
           </a:p>
@@ -2340,8 +2446,8 @@
         </p:nvSpPr>
         <p:spPr>
           <a:xfrm>
-            <a:off x="749808" y="5522976"/>
-            <a:ext cx="2194560" cy="365760"/>
+            <a:off x="731520" y="5522976"/>
+            <a:ext cx="2231136" cy="365760"/>
           </a:xfrm>
           <a:prstGeom prst="rect">
             <a:avLst/>
@@ -2357,7 +2463,7 @@
               <a:buNone/>
             </a:pPr>
             <a:r>
-              <a:rPr lang="en-US" sz="2100" b="1" dirty="0">
+              <a:rPr lang="en-US" sz="2000" b="1" dirty="0">
                 <a:solidFill>
                   <a:srgbClr val="6D2E46"/>
                 </a:solidFill>
@@ -2365,15 +2471,54 @@
                 <a:ea typeface="Cambria" pitchFamily="34" charset="-122"/>
                 <a:cs typeface="Cambria" pitchFamily="34" charset="-120"/>
               </a:rPr>
-              <a:t>50.0億円</a:t>
+              <a:t>67％ ／ 33％</a:t>
             </a:r>
-            <a:endParaRPr lang="en-US" sz="2100" dirty="0"/>
+            <a:endParaRPr lang="en-US" sz="2000" dirty="0"/>
           </a:p>
         </p:txBody>
       </p:sp>
       <p:sp>
         <p:nvSpPr>
-          <p:cNvPr id="39" name="Shape 37"/>
+          <p:cNvPr id="39" name="Text 37"/>
+          <p:cNvSpPr txBox="1"/>
+          <p:nvPr/>
+        </p:nvSpPr>
+        <p:spPr>
+          <a:xfrm>
+            <a:off x="731520" y="5888736"/>
+            <a:ext cx="2286000" cy="201168"/>
+          </a:xfrm>
+          <a:prstGeom prst="rect">
+            <a:avLst/>
+          </a:prstGeom>
+          <a:noFill/>
+          <a:ln/>
+        </p:spPr>
+        <p:txBody>
+          <a:bodyPr wrap="square" lIns="0" tIns="0" rIns="0" bIns="0" rtlCol="0" anchor="ctr"/>
+          <a:lstStyle/>
+          <a:p>
+            <a:pPr indent="0" marL="0">
+              <a:buNone/>
+            </a:pPr>
+            <a:r>
+              <a:rPr lang="en-US" sz="850" dirty="0">
+                <a:solidFill>
+                  <a:srgbClr val="6E6368"/>
+                </a:solidFill>
+                <a:latin typeface="Calibri" pitchFamily="34" charset="0"/>
+                <a:ea typeface="Calibri" pitchFamily="34" charset="-122"/>
+                <a:cs typeface="Calibri" pitchFamily="34" charset="-120"/>
+              </a:rPr>
+              <a:t>中野氏 ／ 榊原氏（合意による配分）</a:t>
+            </a:r>
+            <a:endParaRPr lang="en-US" sz="850" dirty="0"/>
+          </a:p>
+        </p:txBody>
+      </p:sp>
+      <p:sp>
+        <p:nvSpPr>
+          <p:cNvPr id="40" name="Shape 38"/>
           <p:cNvSpPr/>
           <p:nvPr/>
         </p:nvSpPr>
@@ -2400,14 +2545,14 @@
       </p:sp>
       <p:sp>
         <p:nvSpPr>
-          <p:cNvPr id="40" name="Text 38"/>
+          <p:cNvPr id="41" name="Text 39"/>
           <p:cNvSpPr txBox="1"/>
           <p:nvPr/>
         </p:nvSpPr>
         <p:spPr>
           <a:xfrm>
-            <a:off x="3538728" y="5321808"/>
-            <a:ext cx="2194560" cy="219456"/>
+            <a:off x="3520440" y="5321808"/>
+            <a:ext cx="2231136" cy="219456"/>
           </a:xfrm>
           <a:prstGeom prst="rect">
             <a:avLst/>
@@ -2431,7 +2576,7 @@
                 <a:ea typeface="Calibri" pitchFamily="34" charset="-122"/>
                 <a:cs typeface="Calibri" pitchFamily="34" charset="-120"/>
               </a:rPr>
-              <a:t>LBOローン</a:t>
+              <a:t>クロージング所要</a:t>
             </a:r>
             <a:endParaRPr lang="en-US" sz="950" dirty="0"/>
           </a:p>
@@ -2439,14 +2584,14 @@
       </p:sp>
       <p:sp>
         <p:nvSpPr>
-          <p:cNvPr id="41" name="Text 39"/>
+          <p:cNvPr id="42" name="Text 40"/>
           <p:cNvSpPr txBox="1"/>
           <p:nvPr/>
         </p:nvSpPr>
         <p:spPr>
           <a:xfrm>
-            <a:off x="3538728" y="5522976"/>
-            <a:ext cx="2194560" cy="365760"/>
+            <a:off x="3520440" y="5522976"/>
+            <a:ext cx="2231136" cy="365760"/>
           </a:xfrm>
           <a:prstGeom prst="rect">
             <a:avLst/>
@@ -2462,7 +2607,7 @@
               <a:buNone/>
             </a:pPr>
             <a:r>
-              <a:rPr lang="en-US" sz="2100" b="1" dirty="0">
+              <a:rPr lang="en-US" sz="2000" b="1" dirty="0">
                 <a:solidFill>
                   <a:srgbClr val="6D2E46"/>
                 </a:solidFill>
@@ -2470,21 +2615,21 @@
                 <a:ea typeface="Cambria" pitchFamily="34" charset="-122"/>
                 <a:cs typeface="Cambria" pitchFamily="34" charset="-120"/>
               </a:rPr>
-              <a:t>20.0億円</a:t>
+              <a:t>51.5億円</a:t>
             </a:r>
-            <a:endParaRPr lang="en-US" sz="2100" dirty="0"/>
+            <a:endParaRPr lang="en-US" sz="2000" dirty="0"/>
           </a:p>
         </p:txBody>
       </p:sp>
       <p:sp>
         <p:nvSpPr>
-          <p:cNvPr id="42" name="Text 40"/>
+          <p:cNvPr id="43" name="Text 41"/>
           <p:cNvSpPr txBox="1"/>
           <p:nvPr/>
         </p:nvSpPr>
         <p:spPr>
           <a:xfrm>
-            <a:off x="3538728" y="5888736"/>
+            <a:off x="3520440" y="5888736"/>
             <a:ext cx="2286000" cy="201168"/>
           </a:xfrm>
           <a:prstGeom prst="rect">
@@ -2509,7 +2654,7 @@
                 <a:ea typeface="Calibri" pitchFamily="34" charset="-122"/>
                 <a:cs typeface="Calibri" pitchFamily="34" charset="-120"/>
               </a:rPr>
-              <a:t>TLA14億＋TLB6億</a:t>
+              <a:t>株価50.0＋費用1.5</a:t>
             </a:r>
             <a:endParaRPr lang="en-US" sz="850" dirty="0"/>
           </a:p>
@@ -2517,157 +2662,13 @@
       </p:sp>
       <p:sp>
         <p:nvSpPr>
-          <p:cNvPr id="43" name="Shape 41"/>
+          <p:cNvPr id="44" name="Shape 42"/>
           <p:cNvSpPr/>
           <p:nvPr/>
         </p:nvSpPr>
         <p:spPr>
           <a:xfrm>
             <a:off x="6144768" y="5230368"/>
-            <a:ext cx="2560320" cy="914400"/>
-          </a:xfrm>
-          <a:prstGeom prst="roundRect">
-            <a:avLst>
-              <a:gd name="adj" fmla="val 5000"/>
-            </a:avLst>
-          </a:prstGeom>
-          <a:solidFill>
-            <a:srgbClr val="F7F3F4"/>
-          </a:solidFill>
-          <a:ln w="9525">
-            <a:solidFill>
-              <a:srgbClr val="E4DADD"/>
-            </a:solidFill>
-            <a:prstDash val="solid"/>
-          </a:ln>
-        </p:spPr>
-      </p:sp>
-      <p:sp>
-        <p:nvSpPr>
-          <p:cNvPr id="44" name="Text 42"/>
-          <p:cNvSpPr txBox="1"/>
-          <p:nvPr/>
-        </p:nvSpPr>
-        <p:spPr>
-          <a:xfrm>
-            <a:off x="6327648" y="5321808"/>
-            <a:ext cx="2194560" cy="219456"/>
-          </a:xfrm>
-          <a:prstGeom prst="rect">
-            <a:avLst/>
-          </a:prstGeom>
-          <a:noFill/>
-          <a:ln/>
-        </p:spPr>
-        <p:txBody>
-          <a:bodyPr wrap="square" lIns="0" tIns="0" rIns="0" bIns="0" rtlCol="0" anchor="ctr"/>
-          <a:lstStyle/>
-          <a:p>
-            <a:pPr indent="0" marL="0">
-              <a:buNone/>
-            </a:pPr>
-            <a:r>
-              <a:rPr lang="en-US" sz="950" b="1" dirty="0">
-                <a:solidFill>
-                  <a:srgbClr val="B58B2A"/>
-                </a:solidFill>
-                <a:latin typeface="Calibri" pitchFamily="34" charset="0"/>
-                <a:ea typeface="Calibri" pitchFamily="34" charset="-122"/>
-                <a:cs typeface="Calibri" pitchFamily="34" charset="-120"/>
-              </a:rPr>
-              <a:t>エクイティ</a:t>
-            </a:r>
-            <a:endParaRPr lang="en-US" sz="950" dirty="0"/>
-          </a:p>
-        </p:txBody>
-      </p:sp>
-      <p:sp>
-        <p:nvSpPr>
-          <p:cNvPr id="45" name="Text 43"/>
-          <p:cNvSpPr txBox="1"/>
-          <p:nvPr/>
-        </p:nvSpPr>
-        <p:spPr>
-          <a:xfrm>
-            <a:off x="6327648" y="5522976"/>
-            <a:ext cx="2194560" cy="365760"/>
-          </a:xfrm>
-          <a:prstGeom prst="rect">
-            <a:avLst/>
-          </a:prstGeom>
-          <a:noFill/>
-          <a:ln/>
-        </p:spPr>
-        <p:txBody>
-          <a:bodyPr wrap="square" lIns="0" tIns="0" rIns="0" bIns="0" rtlCol="0" anchor="ctr"/>
-          <a:lstStyle/>
-          <a:p>
-            <a:pPr indent="0" marL="0">
-              <a:buNone/>
-            </a:pPr>
-            <a:r>
-              <a:rPr lang="en-US" sz="2100" b="1" dirty="0">
-                <a:solidFill>
-                  <a:srgbClr val="6D2E46"/>
-                </a:solidFill>
-                <a:latin typeface="Cambria" pitchFamily="34" charset="0"/>
-                <a:ea typeface="Cambria" pitchFamily="34" charset="-122"/>
-                <a:cs typeface="Cambria" pitchFamily="34" charset="-120"/>
-              </a:rPr>
-              <a:t>30.0億円</a:t>
-            </a:r>
-            <a:endParaRPr lang="en-US" sz="2100" dirty="0"/>
-          </a:p>
-        </p:txBody>
-      </p:sp>
-      <p:sp>
-        <p:nvSpPr>
-          <p:cNvPr id="46" name="Text 44"/>
-          <p:cNvSpPr txBox="1"/>
-          <p:nvPr/>
-        </p:nvSpPr>
-        <p:spPr>
-          <a:xfrm>
-            <a:off x="6327648" y="5888736"/>
-            <a:ext cx="2286000" cy="201168"/>
-          </a:xfrm>
-          <a:prstGeom prst="rect">
-            <a:avLst/>
-          </a:prstGeom>
-          <a:noFill/>
-          <a:ln/>
-        </p:spPr>
-        <p:txBody>
-          <a:bodyPr wrap="square" lIns="0" tIns="0" rIns="0" bIns="0" rtlCol="0" anchor="ctr"/>
-          <a:lstStyle/>
-          <a:p>
-            <a:pPr indent="0" marL="0">
-              <a:buNone/>
-            </a:pPr>
-            <a:r>
-              <a:rPr lang="en-US" sz="850" dirty="0">
-                <a:solidFill>
-                  <a:srgbClr val="6E6368"/>
-                </a:solidFill>
-                <a:latin typeface="Calibri" pitchFamily="34" charset="0"/>
-                <a:ea typeface="Calibri" pitchFamily="34" charset="-122"/>
-                <a:cs typeface="Calibri" pitchFamily="34" charset="-120"/>
-              </a:rPr>
-              <a:t>投資家10.0／WineBank20.0</a:t>
-            </a:r>
-            <a:endParaRPr lang="en-US" sz="850" dirty="0"/>
-          </a:p>
-        </p:txBody>
-      </p:sp>
-      <p:sp>
-        <p:nvSpPr>
-          <p:cNvPr id="47" name="Shape 45"/>
-          <p:cNvSpPr/>
-          <p:nvPr/>
-        </p:nvSpPr>
-        <p:spPr>
-          <a:xfrm>
-            <a:off x="8933688" y="5230368"/>
             <a:ext cx="2560320" cy="914400"/>
           </a:xfrm>
           <a:prstGeom prst="roundRect">
@@ -2688,14 +2689,14 @@
       </p:sp>
       <p:sp>
         <p:nvSpPr>
-          <p:cNvPr id="48" name="Text 46"/>
+          <p:cNvPr id="45" name="Text 43"/>
           <p:cNvSpPr txBox="1"/>
           <p:nvPr/>
         </p:nvSpPr>
         <p:spPr>
           <a:xfrm>
-            <a:off x="9116568" y="5321808"/>
-            <a:ext cx="2194560" cy="219456"/>
+            <a:off x="6309360" y="5321808"/>
+            <a:ext cx="2231136" cy="219456"/>
           </a:xfrm>
           <a:prstGeom prst="rect">
             <a:avLst/>
@@ -2719,7 +2720,7 @@
                 <a:ea typeface="Calibri" pitchFamily="34" charset="-122"/>
                 <a:cs typeface="Calibri" pitchFamily="34" charset="-120"/>
               </a:rPr>
-              <a:t>合併後ネットキャッシュ</a:t>
+              <a:t>みずほへの依頼</a:t>
             </a:r>
             <a:endParaRPr lang="en-US" sz="950" dirty="0"/>
           </a:p>
@@ -2727,14 +2728,14 @@
       </p:sp>
       <p:sp>
         <p:nvSpPr>
-          <p:cNvPr id="49" name="Text 47"/>
+          <p:cNvPr id="46" name="Text 44"/>
           <p:cNvSpPr txBox="1"/>
           <p:nvPr/>
         </p:nvSpPr>
         <p:spPr>
           <a:xfrm>
-            <a:off x="9116568" y="5522976"/>
-            <a:ext cx="2194560" cy="365760"/>
+            <a:off x="6309360" y="5522976"/>
+            <a:ext cx="2231136" cy="365760"/>
           </a:xfrm>
           <a:prstGeom prst="rect">
             <a:avLst/>
@@ -2750,7 +2751,7 @@
               <a:buNone/>
             </a:pPr>
             <a:r>
-              <a:rPr lang="en-US" sz="2100" b="1" dirty="0">
+              <a:rPr lang="en-US" sz="2000" b="1" dirty="0">
                 <a:solidFill>
                   <a:srgbClr val="FFFFFF"/>
                 </a:solidFill>
@@ -2758,21 +2759,21 @@
                 <a:ea typeface="Cambria" pitchFamily="34" charset="-122"/>
                 <a:cs typeface="Cambria" pitchFamily="34" charset="-120"/>
               </a:rPr>
-              <a:t>＋2.4億円</a:t>
+              <a:t>36.4億円</a:t>
             </a:r>
-            <a:endParaRPr lang="en-US" sz="2100" dirty="0"/>
+            <a:endParaRPr lang="en-US" sz="2000" dirty="0"/>
           </a:p>
         </p:txBody>
       </p:sp>
       <p:sp>
         <p:nvSpPr>
-          <p:cNvPr id="50" name="Text 48"/>
+          <p:cNvPr id="47" name="Text 45"/>
           <p:cNvSpPr txBox="1"/>
           <p:nvPr/>
         </p:nvSpPr>
         <p:spPr>
           <a:xfrm>
-            <a:off x="9116568" y="5888736"/>
+            <a:off x="6309360" y="5888736"/>
             <a:ext cx="2286000" cy="201168"/>
           </a:xfrm>
           <a:prstGeom prst="rect">
@@ -2797,7 +2798,7 @@
                 <a:ea typeface="Calibri" pitchFamily="34" charset="-122"/>
                 <a:cs typeface="Calibri" pitchFamily="34" charset="-120"/>
               </a:rPr>
-              <a:t>実質無借金を維持</a:t>
+              <a:t>ターム20.0＋ブリッジ16.4</a:t>
             </a:r>
             <a:endParaRPr lang="en-US" sz="850" dirty="0"/>
           </a:p>
@@ -2805,7 +2806,151 @@
       </p:sp>
       <p:sp>
         <p:nvSpPr>
+          <p:cNvPr id="48" name="Shape 46"/>
+          <p:cNvSpPr/>
+          <p:nvPr/>
+        </p:nvSpPr>
+        <p:spPr>
+          <a:xfrm>
+            <a:off x="8933688" y="5230368"/>
+            <a:ext cx="2560320" cy="914400"/>
+          </a:xfrm>
+          <a:prstGeom prst="roundRect">
+            <a:avLst>
+              <a:gd name="adj" fmla="val 5000"/>
+            </a:avLst>
+          </a:prstGeom>
+          <a:solidFill>
+            <a:srgbClr val="6D2E46"/>
+          </a:solidFill>
+          <a:ln w="9525">
+            <a:solidFill>
+              <a:srgbClr val="6D2E46"/>
+            </a:solidFill>
+            <a:prstDash val="solid"/>
+          </a:ln>
+        </p:spPr>
+      </p:sp>
+      <p:sp>
+        <p:nvSpPr>
+          <p:cNvPr id="49" name="Text 47"/>
+          <p:cNvSpPr txBox="1"/>
+          <p:nvPr/>
+        </p:nvSpPr>
+        <p:spPr>
+          <a:xfrm>
+            <a:off x="9098280" y="5321808"/>
+            <a:ext cx="2231136" cy="219456"/>
+          </a:xfrm>
+          <a:prstGeom prst="rect">
+            <a:avLst/>
+          </a:prstGeom>
+          <a:noFill/>
+          <a:ln/>
+        </p:spPr>
+        <p:txBody>
+          <a:bodyPr wrap="square" lIns="0" tIns="0" rIns="0" bIns="0" rtlCol="0" anchor="ctr"/>
+          <a:lstStyle/>
+          <a:p>
+            <a:pPr indent="0" marL="0">
+              <a:buNone/>
+            </a:pPr>
+            <a:r>
+              <a:rPr lang="en-US" sz="950" b="1" dirty="0">
+                <a:solidFill>
+                  <a:srgbClr val="E8D6DB"/>
+                </a:solidFill>
+                <a:latin typeface="Calibri" pitchFamily="34" charset="0"/>
+                <a:ea typeface="Calibri" pitchFamily="34" charset="-122"/>
+                <a:cs typeface="Calibri" pitchFamily="34" charset="-120"/>
+              </a:rPr>
+              <a:t>中野氏の実弾</a:t>
+            </a:r>
+            <a:endParaRPr lang="en-US" sz="950" dirty="0"/>
+          </a:p>
+        </p:txBody>
+      </p:sp>
+      <p:sp>
+        <p:nvSpPr>
+          <p:cNvPr id="50" name="Text 48"/>
+          <p:cNvSpPr txBox="1"/>
+          <p:nvPr/>
+        </p:nvSpPr>
+        <p:spPr>
+          <a:xfrm>
+            <a:off x="9098280" y="5522976"/>
+            <a:ext cx="2231136" cy="365760"/>
+          </a:xfrm>
+          <a:prstGeom prst="rect">
+            <a:avLst/>
+          </a:prstGeom>
+          <a:noFill/>
+          <a:ln/>
+        </p:spPr>
+        <p:txBody>
+          <a:bodyPr wrap="square" lIns="0" tIns="0" rIns="0" bIns="0" rtlCol="0" anchor="ctr"/>
+          <a:lstStyle/>
+          <a:p>
+            <a:pPr indent="0" marL="0">
+              <a:buNone/>
+            </a:pPr>
+            <a:r>
+              <a:rPr lang="en-US" sz="2000" b="1" dirty="0">
+                <a:solidFill>
+                  <a:srgbClr val="FFFFFF"/>
+                </a:solidFill>
+                <a:latin typeface="Cambria" pitchFamily="34" charset="0"/>
+                <a:ea typeface="Cambria" pitchFamily="34" charset="-122"/>
+                <a:cs typeface="Cambria" pitchFamily="34" charset="-120"/>
+              </a:rPr>
+              <a:t>5.1億円</a:t>
+            </a:r>
+            <a:endParaRPr lang="en-US" sz="2000" dirty="0"/>
+          </a:p>
+        </p:txBody>
+      </p:sp>
+      <p:sp>
+        <p:nvSpPr>
           <p:cNvPr id="51" name="Text 49"/>
+          <p:cNvSpPr txBox="1"/>
+          <p:nvPr/>
+        </p:nvSpPr>
+        <p:spPr>
+          <a:xfrm>
+            <a:off x="9098280" y="5888736"/>
+            <a:ext cx="2286000" cy="201168"/>
+          </a:xfrm>
+          <a:prstGeom prst="rect">
+            <a:avLst/>
+          </a:prstGeom>
+          <a:noFill/>
+          <a:ln/>
+        </p:spPr>
+        <p:txBody>
+          <a:bodyPr wrap="square" lIns="0" tIns="0" rIns="0" bIns="0" rtlCol="0" anchor="ctr"/>
+          <a:lstStyle/>
+          <a:p>
+            <a:pPr indent="0" marL="0">
+              <a:buNone/>
+            </a:pPr>
+            <a:r>
+              <a:rPr lang="en-US" sz="850" dirty="0">
+                <a:solidFill>
+                  <a:srgbClr val="C9AEB6"/>
+                </a:solidFill>
+                <a:latin typeface="Calibri" pitchFamily="34" charset="0"/>
+                <a:ea typeface="Calibri" pitchFamily="34" charset="-122"/>
+                <a:cs typeface="Calibri" pitchFamily="34" charset="-120"/>
+              </a:rPr>
+              <a:t>これ以下は成立しない</a:t>
+            </a:r>
+            <a:endParaRPr lang="en-US" sz="850" dirty="0"/>
+          </a:p>
+        </p:txBody>
+      </p:sp>
+      <p:sp>
+        <p:nvSpPr>
+          <p:cNvPr id="52" name="Text 50"/>
           <p:cNvSpPr txBox="1"/>
           <p:nvPr/>
         </p:nvSpPr>
@@ -2844,7 +2989,7 @@
       </p:sp>
       <p:sp>
         <p:nvSpPr>
-          <p:cNvPr id="52" name="Text 50"/>
+          <p:cNvPr id="53" name="Text 51"/>
           <p:cNvSpPr txBox="1"/>
           <p:nvPr/>
         </p:nvSpPr>
@@ -2939,7 +3084,7 @@
                 <a:ea typeface="Calibri" pitchFamily="34" charset="-122"/>
                 <a:cs typeface="Calibri" pitchFamily="34" charset="-120"/>
               </a:rPr>
-              <a:t>STRUCTURE 詳細</a:t>
+              <a:t>CASH FLOW</a:t>
             </a:r>
             <a:endParaRPr lang="en-US" sz="1100" dirty="0"/>
           </a:p>
@@ -2978,7 +3123,7 @@
                 <a:ea typeface="Cambria" pitchFamily="34" charset="-122"/>
                 <a:cs typeface="Cambria" pitchFamily="34" charset="-120"/>
               </a:rPr>
-              <a:t>資金の調達と使途、実行手順</a:t>
+              <a:t>資金の流れ ― クロージング時、合併直後、定常</a:t>
             </a:r>
             <a:endParaRPr lang="en-US" sz="2900" dirty="0"/>
           </a:p>
@@ -3020,7 +3165,7 @@
                 <a:ea typeface="Calibri" pitchFamily="34" charset="-122"/>
                 <a:cs typeface="Calibri" pitchFamily="34" charset="-120"/>
               </a:rPr>
-              <a:t>対象会社が保有する現預金を買収資金に充当しないため、合併後も実質無借金の状態を維持できる。</a:t>
+              <a:t>対象会社の現預金は買収した後にしか使えない。クロージング時の不足はブリッジローンで埋め、合併直後に対象会社の余剰現金で全額返済する。</a:t>
             </a:r>
             <a:endParaRPr lang="en-US" sz="1250" dirty="0"/>
           </a:p>
@@ -3059,7 +3204,7 @@
                 <a:ea typeface="Cambria" pitchFamily="34" charset="-122"/>
                 <a:cs typeface="Cambria" pitchFamily="34" charset="-120"/>
               </a:rPr>
-              <a:t>資金の使途と調達</a:t>
+              <a:t>① クロージング時</a:t>
             </a:r>
             <a:endParaRPr lang="en-US" sz="1350" dirty="0"/>
           </a:p>
@@ -3088,13 +3233,12 @@
             <a:tbl>
               <a:tblPr/>
               <a:tblGrid>
-                <a:gridCol w="1737360"/>
+                <a:gridCol w="1691640"/>
                 <a:gridCol w="1051560"/>
-                <a:gridCol w="2103120"/>
-                <a:gridCol w="1051560"/>
-                <a:gridCol w="731520"/>
+                <a:gridCol w="2834640"/>
+                <a:gridCol w="1097280"/>
               </a:tblGrid>
-              <a:tr h="365760">
+              <a:tr h="347472">
                 <a:tc>
                   <a:txBody>
                     <a:bodyPr/>
@@ -3367,76 +3511,8 @@
                     </a:solidFill>
                   </a:tcPr>
                 </a:tc>
-                <a:tc>
-                  <a:txBody>
-                    <a:bodyPr/>
-                    <a:lstStyle/>
-                    <a:p>
-                      <a:pPr indent="0" marL="0">
-                        <a:buNone/>
-                      </a:pPr>
-                      <a:r>
-                        <a:rPr lang="en-US" sz="1000" b="1" dirty="0">
-                          <a:solidFill>
-                            <a:srgbClr val="FFFFFF"/>
-                          </a:solidFill>
-                          <a:latin typeface="Calibri" pitchFamily="34" charset="0"/>
-                          <a:ea typeface="Calibri" pitchFamily="34" charset="-122"/>
-                          <a:cs typeface="Calibri" pitchFamily="34" charset="-120"/>
-                        </a:rPr>
-                        <a:t>持分</a:t>
-                      </a:r>
-                      <a:endParaRPr lang="en-US" sz="1000" dirty="0">
-                        <a:latin typeface="Calibri" charset="0"/>
-                        <a:ea typeface="Calibri" charset="0"/>
-                        <a:cs typeface="Calibri" charset="0"/>
-                      </a:endParaRPr>
-                    </a:p>
-                  </a:txBody>
-                  <a:tcPr marL="91440" marR="91440" marT="45720" marB="45720" anchor="ctr">
-                    <a:lnL w="6350" cap="flat" cmpd="sng" algn="ctr">
-                      <a:solidFill>
-                        <a:srgbClr val="E4DADD"/>
-                      </a:solidFill>
-                      <a:prstDash val="solid"/>
-                      <a:round/>
-                      <a:headEnd type="none" w="med" len="med"/>
-                      <a:tailEnd type="none" w="med" len="med"/>
-                    </a:lnL>
-                    <a:lnR w="6350" cap="flat" cmpd="sng" algn="ctr">
-                      <a:solidFill>
-                        <a:srgbClr val="E4DADD"/>
-                      </a:solidFill>
-                      <a:prstDash val="solid"/>
-                      <a:round/>
-                      <a:headEnd type="none" w="med" len="med"/>
-                      <a:tailEnd type="none" w="med" len="med"/>
-                    </a:lnR>
-                    <a:lnT w="6350" cap="flat" cmpd="sng" algn="ctr">
-                      <a:solidFill>
-                        <a:srgbClr val="E4DADD"/>
-                      </a:solidFill>
-                      <a:prstDash val="solid"/>
-                      <a:round/>
-                      <a:headEnd type="none" w="med" len="med"/>
-                      <a:tailEnd type="none" w="med" len="med"/>
-                    </a:lnT>
-                    <a:lnB w="6350" cap="flat" cmpd="sng" algn="ctr">
-                      <a:solidFill>
-                        <a:srgbClr val="E4DADD"/>
-                      </a:solidFill>
-                      <a:prstDash val="solid"/>
-                      <a:round/>
-                      <a:headEnd type="none" w="med" len="med"/>
-                      <a:tailEnd type="none" w="med" len="med"/>
-                    </a:lnB>
-                    <a:solidFill>
-                      <a:srgbClr val="6D2E46"/>
-                    </a:solidFill>
-                  </a:tcPr>
-                </a:tc>
               </a:tr>
-              <a:tr h="365760">
+              <a:tr h="347472">
                 <a:tc>
                   <a:txBody>
                     <a:bodyPr/>
@@ -3584,7 +3660,7 @@
                           <a:ea typeface="Calibri" pitchFamily="34" charset="-122"/>
                           <a:cs typeface="Calibri" pitchFamily="34" charset="-120"/>
                         </a:rPr>
-                        <a:t>LBOローン（みずほ銀行）</a:t>
+                        <a:t>みずほ　タームローン</a:t>
                       </a:r>
                       <a:endParaRPr lang="en-US" sz="1000" dirty="0">
                         <a:latin typeface="Calibri" charset="0"/>
@@ -3697,6 +3773,73 @@
                     </a:lnB>
                   </a:tcPr>
                 </a:tc>
+              </a:tr>
+              <a:tr h="347472">
+                <a:tc>
+                  <a:txBody>
+                    <a:bodyPr/>
+                    <a:lstStyle/>
+                    <a:p>
+                      <a:pPr indent="0" marL="0">
+                        <a:buNone/>
+                      </a:pPr>
+                      <a:r>
+                        <a:rPr lang="en-US" sz="1000" dirty="0">
+                          <a:solidFill>
+                            <a:srgbClr val="1F1A1C"/>
+                          </a:solidFill>
+                          <a:latin typeface="Calibri" pitchFamily="34" charset="0"/>
+                          <a:ea typeface="Calibri" pitchFamily="34" charset="-122"/>
+                          <a:cs typeface="Calibri" pitchFamily="34" charset="-120"/>
+                        </a:rPr>
+                        <a:t>取得関連費用</a:t>
+                      </a:r>
+                      <a:endParaRPr lang="en-US" sz="1000" dirty="0">
+                        <a:latin typeface="Calibri" charset="0"/>
+                        <a:ea typeface="Calibri" charset="0"/>
+                        <a:cs typeface="Calibri" charset="0"/>
+                      </a:endParaRPr>
+                    </a:p>
+                  </a:txBody>
+                  <a:tcPr marL="91440" marR="91440" marT="45720" marB="45720" anchor="ctr">
+                    <a:lnL w="6350" cap="flat" cmpd="sng" algn="ctr">
+                      <a:solidFill>
+                        <a:srgbClr val="E4DADD"/>
+                      </a:solidFill>
+                      <a:prstDash val="solid"/>
+                      <a:round/>
+                      <a:headEnd type="none" w="med" len="med"/>
+                      <a:tailEnd type="none" w="med" len="med"/>
+                    </a:lnL>
+                    <a:lnR w="6350" cap="flat" cmpd="sng" algn="ctr">
+                      <a:solidFill>
+                        <a:srgbClr val="E4DADD"/>
+                      </a:solidFill>
+                      <a:prstDash val="solid"/>
+                      <a:round/>
+                      <a:headEnd type="none" w="med" len="med"/>
+                      <a:tailEnd type="none" w="med" len="med"/>
+                    </a:lnR>
+                    <a:lnT w="6350" cap="flat" cmpd="sng" algn="ctr">
+                      <a:solidFill>
+                        <a:srgbClr val="E4DADD"/>
+                      </a:solidFill>
+                      <a:prstDash val="solid"/>
+                      <a:round/>
+                      <a:headEnd type="none" w="med" len="med"/>
+                      <a:tailEnd type="none" w="med" len="med"/>
+                    </a:lnT>
+                    <a:lnB w="6350" cap="flat" cmpd="sng" algn="ctr">
+                      <a:solidFill>
+                        <a:srgbClr val="E4DADD"/>
+                      </a:solidFill>
+                      <a:prstDash val="solid"/>
+                      <a:round/>
+                      <a:headEnd type="none" w="med" len="med"/>
+                      <a:tailEnd type="none" w="med" len="med"/>
+                    </a:lnB>
+                  </a:tcPr>
+                </a:tc>
                 <a:tc>
                   <a:txBody>
                     <a:bodyPr/>
@@ -3714,7 +3857,7 @@
                           <a:ea typeface="Calibri" pitchFamily="34" charset="-122"/>
                           <a:cs typeface="Calibri" pitchFamily="34" charset="-120"/>
                         </a:rPr>
-                        <a:t>―</a:t>
+                        <a:t>1.5億円</a:t>
                       </a:r>
                       <a:endParaRPr lang="en-US" sz="1000" dirty="0">
                         <a:latin typeface="Calibri" charset="0"/>
@@ -3762,8 +3905,138 @@
                     </a:lnB>
                   </a:tcPr>
                 </a:tc>
+                <a:tc>
+                  <a:txBody>
+                    <a:bodyPr/>
+                    <a:lstStyle/>
+                    <a:p>
+                      <a:pPr indent="0" marL="0">
+                        <a:buNone/>
+                      </a:pPr>
+                      <a:r>
+                        <a:rPr lang="en-US" sz="1000" dirty="0">
+                          <a:solidFill>
+                            <a:srgbClr val="9B2C2C"/>
+                          </a:solidFill>
+                          <a:latin typeface="Calibri" pitchFamily="34" charset="0"/>
+                          <a:ea typeface="Calibri" pitchFamily="34" charset="-122"/>
+                          <a:cs typeface="Calibri" pitchFamily="34" charset="-120"/>
+                        </a:rPr>
+                        <a:t>みずほ　ブリッジローン</a:t>
+                      </a:r>
+                      <a:endParaRPr lang="en-US" sz="1000" dirty="0">
+                        <a:latin typeface="Calibri" charset="0"/>
+                        <a:ea typeface="Calibri" charset="0"/>
+                        <a:cs typeface="Calibri" charset="0"/>
+                      </a:endParaRPr>
+                    </a:p>
+                  </a:txBody>
+                  <a:tcPr marL="91440" marR="91440" marT="45720" marB="45720" anchor="ctr">
+                    <a:lnL w="6350" cap="flat" cmpd="sng" algn="ctr">
+                      <a:solidFill>
+                        <a:srgbClr val="E4DADD"/>
+                      </a:solidFill>
+                      <a:prstDash val="solid"/>
+                      <a:round/>
+                      <a:headEnd type="none" w="med" len="med"/>
+                      <a:tailEnd type="none" w="med" len="med"/>
+                    </a:lnL>
+                    <a:lnR w="6350" cap="flat" cmpd="sng" algn="ctr">
+                      <a:solidFill>
+                        <a:srgbClr val="E4DADD"/>
+                      </a:solidFill>
+                      <a:prstDash val="solid"/>
+                      <a:round/>
+                      <a:headEnd type="none" w="med" len="med"/>
+                      <a:tailEnd type="none" w="med" len="med"/>
+                    </a:lnR>
+                    <a:lnT w="6350" cap="flat" cmpd="sng" algn="ctr">
+                      <a:solidFill>
+                        <a:srgbClr val="E4DADD"/>
+                      </a:solidFill>
+                      <a:prstDash val="solid"/>
+                      <a:round/>
+                      <a:headEnd type="none" w="med" len="med"/>
+                      <a:tailEnd type="none" w="med" len="med"/>
+                    </a:lnT>
+                    <a:lnB w="6350" cap="flat" cmpd="sng" algn="ctr">
+                      <a:solidFill>
+                        <a:srgbClr val="E4DADD"/>
+                      </a:solidFill>
+                      <a:prstDash val="solid"/>
+                      <a:round/>
+                      <a:headEnd type="none" w="med" len="med"/>
+                      <a:tailEnd type="none" w="med" len="med"/>
+                    </a:lnB>
+                  </a:tcPr>
+                </a:tc>
+                <a:tc>
+                  <a:txBody>
+                    <a:bodyPr/>
+                    <a:lstStyle/>
+                    <a:p>
+                      <a:pPr algn="r" indent="0" marL="0">
+                        <a:buNone/>
+                      </a:pPr>
+                      <a:r>
+                        <a:rPr lang="en-US" sz="1000" b="1" dirty="0">
+                          <a:solidFill>
+                            <a:srgbClr val="9B2C2C"/>
+                          </a:solidFill>
+                          <a:latin typeface="Calibri" pitchFamily="34" charset="0"/>
+                          <a:ea typeface="Calibri" pitchFamily="34" charset="-122"/>
+                          <a:cs typeface="Calibri" pitchFamily="34" charset="-120"/>
+                        </a:rPr>
+                        <a:t>16.4億円</a:t>
+                      </a:r>
+                      <a:endParaRPr lang="en-US" sz="1000" dirty="0">
+                        <a:latin typeface="Calibri" charset="0"/>
+                        <a:ea typeface="Calibri" charset="0"/>
+                        <a:cs typeface="Calibri" charset="0"/>
+                      </a:endParaRPr>
+                    </a:p>
+                  </a:txBody>
+                  <a:tcPr marL="91440" marR="91440" marT="45720" marB="45720" anchor="ctr">
+                    <a:lnL w="6350" cap="flat" cmpd="sng" algn="ctr">
+                      <a:solidFill>
+                        <a:srgbClr val="E4DADD"/>
+                      </a:solidFill>
+                      <a:prstDash val="solid"/>
+                      <a:round/>
+                      <a:headEnd type="none" w="med" len="med"/>
+                      <a:tailEnd type="none" w="med" len="med"/>
+                    </a:lnL>
+                    <a:lnR w="6350" cap="flat" cmpd="sng" algn="ctr">
+                      <a:solidFill>
+                        <a:srgbClr val="E4DADD"/>
+                      </a:solidFill>
+                      <a:prstDash val="solid"/>
+                      <a:round/>
+                      <a:headEnd type="none" w="med" len="med"/>
+                      <a:tailEnd type="none" w="med" len="med"/>
+                    </a:lnR>
+                    <a:lnT w="6350" cap="flat" cmpd="sng" algn="ctr">
+                      <a:solidFill>
+                        <a:srgbClr val="E4DADD"/>
+                      </a:solidFill>
+                      <a:prstDash val="solid"/>
+                      <a:round/>
+                      <a:headEnd type="none" w="med" len="med"/>
+                      <a:tailEnd type="none" w="med" len="med"/>
+                    </a:lnT>
+                    <a:lnB w="6350" cap="flat" cmpd="sng" algn="ctr">
+                      <a:solidFill>
+                        <a:srgbClr val="E4DADD"/>
+                      </a:solidFill>
+                      <a:prstDash val="solid"/>
+                      <a:round/>
+                      <a:headEnd type="none" w="med" len="med"/>
+                      <a:tailEnd type="none" w="med" len="med"/>
+                    </a:lnB>
+                  </a:tcPr>
+                </a:tc>
               </a:tr>
-              <a:tr h="365760">
+              <a:tr h="347472">
                 <a:tc>
                   <a:txBody>
                     <a:bodyPr/>
@@ -3889,7 +4162,7 @@
                           <a:ea typeface="Calibri" pitchFamily="34" charset="-122"/>
                           <a:cs typeface="Calibri" pitchFamily="34" charset="-120"/>
                         </a:rPr>
-                        <a:t>投資家 出資</a:t>
+                        <a:t>榊原氏　出資</a:t>
                       </a:r>
                       <a:endParaRPr lang="en-US" sz="1000" dirty="0">
                         <a:latin typeface="Calibri" charset="0"/>
@@ -4002,73 +4275,8 @@
                     </a:lnB>
                   </a:tcPr>
                 </a:tc>
-                <a:tc>
-                  <a:txBody>
-                    <a:bodyPr/>
-                    <a:lstStyle/>
-                    <a:p>
-                      <a:pPr algn="r" indent="0" marL="0">
-                        <a:buNone/>
-                      </a:pPr>
-                      <a:r>
-                        <a:rPr lang="en-US" sz="1000" b="1" dirty="0">
-                          <a:solidFill>
-                            <a:srgbClr val="6D2E46"/>
-                          </a:solidFill>
-                          <a:latin typeface="Calibri" pitchFamily="34" charset="0"/>
-                          <a:ea typeface="Calibri" pitchFamily="34" charset="-122"/>
-                          <a:cs typeface="Calibri" pitchFamily="34" charset="-120"/>
-                        </a:rPr>
-                        <a:t>33.3%</a:t>
-                      </a:r>
-                      <a:endParaRPr lang="en-US" sz="1000" dirty="0">
-                        <a:latin typeface="Calibri" charset="0"/>
-                        <a:ea typeface="Calibri" charset="0"/>
-                        <a:cs typeface="Calibri" charset="0"/>
-                      </a:endParaRPr>
-                    </a:p>
-                  </a:txBody>
-                  <a:tcPr marL="91440" marR="91440" marT="45720" marB="45720" anchor="ctr">
-                    <a:lnL w="6350" cap="flat" cmpd="sng" algn="ctr">
-                      <a:solidFill>
-                        <a:srgbClr val="E4DADD"/>
-                      </a:solidFill>
-                      <a:prstDash val="solid"/>
-                      <a:round/>
-                      <a:headEnd type="none" w="med" len="med"/>
-                      <a:tailEnd type="none" w="med" len="med"/>
-                    </a:lnL>
-                    <a:lnR w="6350" cap="flat" cmpd="sng" algn="ctr">
-                      <a:solidFill>
-                        <a:srgbClr val="E4DADD"/>
-                      </a:solidFill>
-                      <a:prstDash val="solid"/>
-                      <a:round/>
-                      <a:headEnd type="none" w="med" len="med"/>
-                      <a:tailEnd type="none" w="med" len="med"/>
-                    </a:lnR>
-                    <a:lnT w="6350" cap="flat" cmpd="sng" algn="ctr">
-                      <a:solidFill>
-                        <a:srgbClr val="E4DADD"/>
-                      </a:solidFill>
-                      <a:prstDash val="solid"/>
-                      <a:round/>
-                      <a:headEnd type="none" w="med" len="med"/>
-                      <a:tailEnd type="none" w="med" len="med"/>
-                    </a:lnT>
-                    <a:lnB w="6350" cap="flat" cmpd="sng" algn="ctr">
-                      <a:solidFill>
-                        <a:srgbClr val="E4DADD"/>
-                      </a:solidFill>
-                      <a:prstDash val="solid"/>
-                      <a:round/>
-                      <a:headEnd type="none" w="med" len="med"/>
-                      <a:tailEnd type="none" w="med" len="med"/>
-                    </a:lnB>
-                  </a:tcPr>
-                </a:tc>
               </a:tr>
-              <a:tr h="365760">
+              <a:tr h="347472">
                 <a:tc>
                   <a:txBody>
                     <a:bodyPr/>
@@ -4194,7 +4402,7 @@
                           <a:ea typeface="Calibri" pitchFamily="34" charset="-122"/>
                           <a:cs typeface="Calibri" pitchFamily="34" charset="-120"/>
                         </a:rPr>
-                        <a:t>WineBank 出資</a:t>
+                        <a:t>中野氏　出資10万円＋株主貸付</a:t>
                       </a:r>
                       <a:endParaRPr lang="en-US" sz="1000" dirty="0">
                         <a:latin typeface="Calibri" charset="0"/>
@@ -4259,7 +4467,7 @@
                           <a:ea typeface="Calibri" pitchFamily="34" charset="-122"/>
                           <a:cs typeface="Calibri" pitchFamily="34" charset="-120"/>
                         </a:rPr>
-                        <a:t>20.0億円</a:t>
+                        <a:t>5.1億円</a:t>
                       </a:r>
                       <a:endParaRPr lang="en-US" sz="1000" dirty="0">
                         <a:latin typeface="Calibri" charset="0"/>
@@ -4307,73 +4515,8 @@
                     </a:lnB>
                   </a:tcPr>
                 </a:tc>
-                <a:tc>
-                  <a:txBody>
-                    <a:bodyPr/>
-                    <a:lstStyle/>
-                    <a:p>
-                      <a:pPr algn="r" indent="0" marL="0">
-                        <a:buNone/>
-                      </a:pPr>
-                      <a:r>
-                        <a:rPr lang="en-US" sz="1000" b="1" dirty="0">
-                          <a:solidFill>
-                            <a:srgbClr val="1F1A1C"/>
-                          </a:solidFill>
-                          <a:latin typeface="Calibri" pitchFamily="34" charset="0"/>
-                          <a:ea typeface="Calibri" pitchFamily="34" charset="-122"/>
-                          <a:cs typeface="Calibri" pitchFamily="34" charset="-120"/>
-                        </a:rPr>
-                        <a:t>66.7%</a:t>
-                      </a:r>
-                      <a:endParaRPr lang="en-US" sz="1000" dirty="0">
-                        <a:latin typeface="Calibri" charset="0"/>
-                        <a:ea typeface="Calibri" charset="0"/>
-                        <a:cs typeface="Calibri" charset="0"/>
-                      </a:endParaRPr>
-                    </a:p>
-                  </a:txBody>
-                  <a:tcPr marL="91440" marR="91440" marT="45720" marB="45720" anchor="ctr">
-                    <a:lnL w="6350" cap="flat" cmpd="sng" algn="ctr">
-                      <a:solidFill>
-                        <a:srgbClr val="E4DADD"/>
-                      </a:solidFill>
-                      <a:prstDash val="solid"/>
-                      <a:round/>
-                      <a:headEnd type="none" w="med" len="med"/>
-                      <a:tailEnd type="none" w="med" len="med"/>
-                    </a:lnL>
-                    <a:lnR w="6350" cap="flat" cmpd="sng" algn="ctr">
-                      <a:solidFill>
-                        <a:srgbClr val="E4DADD"/>
-                      </a:solidFill>
-                      <a:prstDash val="solid"/>
-                      <a:round/>
-                      <a:headEnd type="none" w="med" len="med"/>
-                      <a:tailEnd type="none" w="med" len="med"/>
-                    </a:lnR>
-                    <a:lnT w="6350" cap="flat" cmpd="sng" algn="ctr">
-                      <a:solidFill>
-                        <a:srgbClr val="E4DADD"/>
-                      </a:solidFill>
-                      <a:prstDash val="solid"/>
-                      <a:round/>
-                      <a:headEnd type="none" w="med" len="med"/>
-                      <a:tailEnd type="none" w="med" len="med"/>
-                    </a:lnT>
-                    <a:lnB w="6350" cap="flat" cmpd="sng" algn="ctr">
-                      <a:solidFill>
-                        <a:srgbClr val="E4DADD"/>
-                      </a:solidFill>
-                      <a:prstDash val="solid"/>
-                      <a:round/>
-                      <a:headEnd type="none" w="med" len="med"/>
-                      <a:tailEnd type="none" w="med" len="med"/>
-                    </a:lnB>
-                  </a:tcPr>
-                </a:tc>
               </a:tr>
-              <a:tr h="365760">
+              <a:tr h="347472">
                 <a:tc>
                   <a:txBody>
                     <a:bodyPr/>
@@ -4459,7 +4602,7 @@
                           <a:ea typeface="Calibri" pitchFamily="34" charset="-122"/>
                           <a:cs typeface="Calibri" pitchFamily="34" charset="-120"/>
                         </a:rPr>
-                        <a:t>50.0億円</a:t>
+                        <a:t>51.5億円</a:t>
                       </a:r>
                       <a:endParaRPr lang="en-US" sz="1000" dirty="0">
                         <a:latin typeface="Calibri" charset="0"/>
@@ -4595,75 +4738,7 @@
                           <a:ea typeface="Calibri" pitchFamily="34" charset="-122"/>
                           <a:cs typeface="Calibri" pitchFamily="34" charset="-120"/>
                         </a:rPr>
-                        <a:t>50.0億円</a:t>
-                      </a:r>
-                      <a:endParaRPr lang="en-US" sz="1000" dirty="0">
-                        <a:latin typeface="Calibri" charset="0"/>
-                        <a:ea typeface="Calibri" charset="0"/>
-                        <a:cs typeface="Calibri" charset="0"/>
-                      </a:endParaRPr>
-                    </a:p>
-                  </a:txBody>
-                  <a:tcPr marL="91440" marR="91440" marT="45720" marB="45720" anchor="ctr">
-                    <a:lnL w="6350" cap="flat" cmpd="sng" algn="ctr">
-                      <a:solidFill>
-                        <a:srgbClr val="E4DADD"/>
-                      </a:solidFill>
-                      <a:prstDash val="solid"/>
-                      <a:round/>
-                      <a:headEnd type="none" w="med" len="med"/>
-                      <a:tailEnd type="none" w="med" len="med"/>
-                    </a:lnL>
-                    <a:lnR w="6350" cap="flat" cmpd="sng" algn="ctr">
-                      <a:solidFill>
-                        <a:srgbClr val="E4DADD"/>
-                      </a:solidFill>
-                      <a:prstDash val="solid"/>
-                      <a:round/>
-                      <a:headEnd type="none" w="med" len="med"/>
-                      <a:tailEnd type="none" w="med" len="med"/>
-                    </a:lnR>
-                    <a:lnT w="6350" cap="flat" cmpd="sng" algn="ctr">
-                      <a:solidFill>
-                        <a:srgbClr val="E4DADD"/>
-                      </a:solidFill>
-                      <a:prstDash val="solid"/>
-                      <a:round/>
-                      <a:headEnd type="none" w="med" len="med"/>
-                      <a:tailEnd type="none" w="med" len="med"/>
-                    </a:lnT>
-                    <a:lnB w="6350" cap="flat" cmpd="sng" algn="ctr">
-                      <a:solidFill>
-                        <a:srgbClr val="E4DADD"/>
-                      </a:solidFill>
-                      <a:prstDash val="solid"/>
-                      <a:round/>
-                      <a:headEnd type="none" w="med" len="med"/>
-                      <a:tailEnd type="none" w="med" len="med"/>
-                    </a:lnB>
-                    <a:solidFill>
-                      <a:srgbClr val="F7F3F4"/>
-                    </a:solidFill>
-                  </a:tcPr>
-                </a:tc>
-                <a:tc>
-                  <a:txBody>
-                    <a:bodyPr/>
-                    <a:lstStyle/>
-                    <a:p>
-                      <a:pPr algn="r" indent="0" marL="0">
-                        <a:buNone/>
-                      </a:pPr>
-                      <a:r>
-                        <a:rPr lang="en-US" sz="1000" b="1" dirty="0">
-                          <a:solidFill>
-                            <a:srgbClr val="1F1A1C"/>
-                          </a:solidFill>
-                          <a:latin typeface="Calibri" pitchFamily="34" charset="0"/>
-                          <a:ea typeface="Calibri" pitchFamily="34" charset="-122"/>
-                          <a:cs typeface="Calibri" pitchFamily="34" charset="-120"/>
-                        </a:rPr>
-                        <a:t>100%</a:t>
+                        <a:t>51.5億円</a:t>
                       </a:r>
                       <a:endParaRPr lang="en-US" sz="1000" dirty="0">
                         <a:latin typeface="Calibri" charset="0"/>
@@ -4727,46 +4802,7 @@
         </p:nvSpPr>
         <p:spPr>
           <a:xfrm>
-            <a:off x="566928" y="3712464"/>
-            <a:ext cx="6675120" cy="256032"/>
-          </a:xfrm>
-          <a:prstGeom prst="rect">
-            <a:avLst/>
-          </a:prstGeom>
-          <a:noFill/>
-          <a:ln/>
-        </p:spPr>
-        <p:txBody>
-          <a:bodyPr wrap="square" lIns="0" tIns="0" rIns="0" bIns="0" rtlCol="0" anchor="ctr"/>
-          <a:lstStyle/>
-          <a:p>
-            <a:pPr indent="0" marL="0">
-              <a:buNone/>
-            </a:pPr>
-            <a:r>
-              <a:rPr lang="en-US" sz="900" dirty="0">
-                <a:solidFill>
-                  <a:srgbClr val="6E6368"/>
-                </a:solidFill>
-                <a:latin typeface="Calibri" pitchFamily="34" charset="0"/>
-                <a:ea typeface="Calibri" pitchFamily="34" charset="-122"/>
-                <a:cs typeface="Calibri" pitchFamily="34" charset="-120"/>
-              </a:rPr>
-              <a:t>※ 取得関連費用（1.5億円程度）はWineBankが自己資金にて別途負担し、持分比率には影響させない。</a:t>
-            </a:r>
-            <a:endParaRPr lang="en-US" sz="900" dirty="0"/>
-          </a:p>
-        </p:txBody>
-      </p:sp>
-      <p:sp>
-        <p:nvSpPr>
-          <p:cNvPr id="8" name="Text 5"/>
-          <p:cNvSpPr txBox="1"/>
-          <p:nvPr/>
-        </p:nvSpPr>
-        <p:spPr>
-          <a:xfrm>
-            <a:off x="566928" y="4005072"/>
+            <a:off x="566928" y="4041648"/>
             <a:ext cx="4572000" cy="256032"/>
           </a:xfrm>
           <a:prstGeom prst="rect">
@@ -4791,7 +4827,7 @@
                 <a:ea typeface="Cambria" pitchFamily="34" charset="-122"/>
                 <a:cs typeface="Cambria" pitchFamily="34" charset="-120"/>
               </a:rPr>
-              <a:t>合併後の財務</a:t>
+              <a:t>② 合併直後</a:t>
             </a:r>
             <a:endParaRPr lang="en-US" sz="1350" dirty="0"/>
           </a:p>
@@ -4812,7 +4848,7 @@
           </p:nvPr>
         </p:nvGraphicFramePr>
         <p:xfrm>
-          <a:off x="566928" y="4315968"/>
+          <a:off x="566928" y="4352544"/>
           <a:ext cx="6675120" cy="914400"/>
         </p:xfrm>
         <a:graphic>
@@ -4820,11 +4856,11 @@
             <a:tbl>
               <a:tblPr/>
               <a:tblGrid>
-                <a:gridCol w="1508760"/>
-                <a:gridCol w="1143000"/>
-                <a:gridCol w="4023360"/>
+                <a:gridCol w="1920240"/>
+                <a:gridCol w="1097280"/>
+                <a:gridCol w="3657600"/>
               </a:tblGrid>
-              <a:tr h="338328">
+              <a:tr h="329184">
                 <a:tc>
                   <a:txBody>
                     <a:bodyPr/>
@@ -4842,7 +4878,7 @@
                           <a:ea typeface="Calibri" pitchFamily="34" charset="-122"/>
                           <a:cs typeface="Calibri" pitchFamily="34" charset="-120"/>
                         </a:rPr>
-                        <a:t>項目</a:t>
+                        <a:t>対象会社の現預金</a:t>
                       </a:r>
                       <a:endParaRPr lang="en-US" sz="1000" dirty="0">
                         <a:latin typeface="Calibri" charset="0"/>
@@ -4978,7 +5014,7 @@
                           <a:ea typeface="Calibri" pitchFamily="34" charset="-122"/>
                           <a:cs typeface="Calibri" pitchFamily="34" charset="-120"/>
                         </a:rPr>
-                        <a:t>補足</a:t>
+                        <a:t>充当先</a:t>
                       </a:r>
                       <a:endParaRPr lang="en-US" sz="1000" dirty="0">
                         <a:latin typeface="Calibri" charset="0"/>
@@ -5030,7 +5066,7 @@
                   </a:tcPr>
                 </a:tc>
               </a:tr>
-              <a:tr h="338328">
+              <a:tr h="329184">
                 <a:tc>
                   <a:txBody>
                     <a:bodyPr/>
@@ -5048,7 +5084,3761 @@
                           <a:ea typeface="Calibri" pitchFamily="34" charset="-122"/>
                           <a:cs typeface="Calibri" pitchFamily="34" charset="-120"/>
                         </a:rPr>
-                        <a:t>有利子負債</a:t>
+                        <a:t>現預金</a:t>
+                      </a:r>
+                      <a:endParaRPr lang="en-US" sz="1000" dirty="0">
+                        <a:latin typeface="Calibri" charset="0"/>
+                        <a:ea typeface="Calibri" charset="0"/>
+                        <a:cs typeface="Calibri" charset="0"/>
+                      </a:endParaRPr>
+                    </a:p>
+                  </a:txBody>
+                  <a:tcPr marL="91440" marR="91440" marT="45720" marB="45720" anchor="ctr">
+                    <a:lnL w="6350" cap="flat" cmpd="sng" algn="ctr">
+                      <a:solidFill>
+                        <a:srgbClr val="E4DADD"/>
+                      </a:solidFill>
+                      <a:prstDash val="solid"/>
+                      <a:round/>
+                      <a:headEnd type="none" w="med" len="med"/>
+                      <a:tailEnd type="none" w="med" len="med"/>
+                    </a:lnL>
+                    <a:lnR w="6350" cap="flat" cmpd="sng" algn="ctr">
+                      <a:solidFill>
+                        <a:srgbClr val="E4DADD"/>
+                      </a:solidFill>
+                      <a:prstDash val="solid"/>
+                      <a:round/>
+                      <a:headEnd type="none" w="med" len="med"/>
+                      <a:tailEnd type="none" w="med" len="med"/>
+                    </a:lnR>
+                    <a:lnT w="6350" cap="flat" cmpd="sng" algn="ctr">
+                      <a:solidFill>
+                        <a:srgbClr val="E4DADD"/>
+                      </a:solidFill>
+                      <a:prstDash val="solid"/>
+                      <a:round/>
+                      <a:headEnd type="none" w="med" len="med"/>
+                      <a:tailEnd type="none" w="med" len="med"/>
+                    </a:lnT>
+                    <a:lnB w="6350" cap="flat" cmpd="sng" algn="ctr">
+                      <a:solidFill>
+                        <a:srgbClr val="E4DADD"/>
+                      </a:solidFill>
+                      <a:prstDash val="solid"/>
+                      <a:round/>
+                      <a:headEnd type="none" w="med" len="med"/>
+                      <a:tailEnd type="none" w="med" len="med"/>
+                    </a:lnB>
+                  </a:tcPr>
+                </a:tc>
+                <a:tc>
+                  <a:txBody>
+                    <a:bodyPr/>
+                    <a:lstStyle/>
+                    <a:p>
+                      <a:pPr algn="r" indent="0" marL="0">
+                        <a:buNone/>
+                      </a:pPr>
+                      <a:r>
+                        <a:rPr lang="en-US" sz="1000" dirty="0">
+                          <a:solidFill>
+                            <a:srgbClr val="1F1A1C"/>
+                          </a:solidFill>
+                          <a:latin typeface="Calibri" pitchFamily="34" charset="0"/>
+                          <a:ea typeface="Calibri" pitchFamily="34" charset="-122"/>
+                          <a:cs typeface="Calibri" pitchFamily="34" charset="-120"/>
+                        </a:rPr>
+                        <a:t>17.4億円</a:t>
+                      </a:r>
+                      <a:endParaRPr lang="en-US" sz="1000" dirty="0">
+                        <a:latin typeface="Calibri" charset="0"/>
+                        <a:ea typeface="Calibri" charset="0"/>
+                        <a:cs typeface="Calibri" charset="0"/>
+                      </a:endParaRPr>
+                    </a:p>
+                  </a:txBody>
+                  <a:tcPr marL="91440" marR="91440" marT="45720" marB="45720" anchor="ctr">
+                    <a:lnL w="6350" cap="flat" cmpd="sng" algn="ctr">
+                      <a:solidFill>
+                        <a:srgbClr val="E4DADD"/>
+                      </a:solidFill>
+                      <a:prstDash val="solid"/>
+                      <a:round/>
+                      <a:headEnd type="none" w="med" len="med"/>
+                      <a:tailEnd type="none" w="med" len="med"/>
+                    </a:lnL>
+                    <a:lnR w="6350" cap="flat" cmpd="sng" algn="ctr">
+                      <a:solidFill>
+                        <a:srgbClr val="E4DADD"/>
+                      </a:solidFill>
+                      <a:prstDash val="solid"/>
+                      <a:round/>
+                      <a:headEnd type="none" w="med" len="med"/>
+                      <a:tailEnd type="none" w="med" len="med"/>
+                    </a:lnR>
+                    <a:lnT w="6350" cap="flat" cmpd="sng" algn="ctr">
+                      <a:solidFill>
+                        <a:srgbClr val="E4DADD"/>
+                      </a:solidFill>
+                      <a:prstDash val="solid"/>
+                      <a:round/>
+                      <a:headEnd type="none" w="med" len="med"/>
+                      <a:tailEnd type="none" w="med" len="med"/>
+                    </a:lnT>
+                    <a:lnB w="6350" cap="flat" cmpd="sng" algn="ctr">
+                      <a:solidFill>
+                        <a:srgbClr val="E4DADD"/>
+                      </a:solidFill>
+                      <a:prstDash val="solid"/>
+                      <a:round/>
+                      <a:headEnd type="none" w="med" len="med"/>
+                      <a:tailEnd type="none" w="med" len="med"/>
+                    </a:lnB>
+                  </a:tcPr>
+                </a:tc>
+                <a:tc>
+                  <a:txBody>
+                    <a:bodyPr/>
+                    <a:lstStyle/>
+                    <a:p>
+                      <a:pPr indent="0" marL="0">
+                        <a:buNone/>
+                      </a:pPr>
+                      <a:r>
+                        <a:rPr lang="en-US" sz="950" dirty="0">
+                          <a:solidFill>
+                            <a:srgbClr val="1F1A1C"/>
+                          </a:solidFill>
+                          <a:latin typeface="Calibri" pitchFamily="34" charset="0"/>
+                          <a:ea typeface="Calibri" pitchFamily="34" charset="-122"/>
+                          <a:cs typeface="Calibri" pitchFamily="34" charset="-120"/>
+                        </a:rPr>
+                        <a:t>うち6.0億円は運転資金として留保</a:t>
+                      </a:r>
+                      <a:endParaRPr lang="en-US" sz="950" dirty="0">
+                        <a:latin typeface="Calibri" charset="0"/>
+                        <a:ea typeface="Calibri" charset="0"/>
+                        <a:cs typeface="Calibri" charset="0"/>
+                      </a:endParaRPr>
+                    </a:p>
+                  </a:txBody>
+                  <a:tcPr marL="91440" marR="91440" marT="45720" marB="45720" anchor="ctr">
+                    <a:lnL w="6350" cap="flat" cmpd="sng" algn="ctr">
+                      <a:solidFill>
+                        <a:srgbClr val="E4DADD"/>
+                      </a:solidFill>
+                      <a:prstDash val="solid"/>
+                      <a:round/>
+                      <a:headEnd type="none" w="med" len="med"/>
+                      <a:tailEnd type="none" w="med" len="med"/>
+                    </a:lnL>
+                    <a:lnR w="6350" cap="flat" cmpd="sng" algn="ctr">
+                      <a:solidFill>
+                        <a:srgbClr val="E4DADD"/>
+                      </a:solidFill>
+                      <a:prstDash val="solid"/>
+                      <a:round/>
+                      <a:headEnd type="none" w="med" len="med"/>
+                      <a:tailEnd type="none" w="med" len="med"/>
+                    </a:lnR>
+                    <a:lnT w="6350" cap="flat" cmpd="sng" algn="ctr">
+                      <a:solidFill>
+                        <a:srgbClr val="E4DADD"/>
+                      </a:solidFill>
+                      <a:prstDash val="solid"/>
+                      <a:round/>
+                      <a:headEnd type="none" w="med" len="med"/>
+                      <a:tailEnd type="none" w="med" len="med"/>
+                    </a:lnT>
+                    <a:lnB w="6350" cap="flat" cmpd="sng" algn="ctr">
+                      <a:solidFill>
+                        <a:srgbClr val="E4DADD"/>
+                      </a:solidFill>
+                      <a:prstDash val="solid"/>
+                      <a:round/>
+                      <a:headEnd type="none" w="med" len="med"/>
+                      <a:tailEnd type="none" w="med" len="med"/>
+                    </a:lnB>
+                  </a:tcPr>
+                </a:tc>
+              </a:tr>
+              <a:tr h="329184">
+                <a:tc>
+                  <a:txBody>
+                    <a:bodyPr/>
+                    <a:lstStyle/>
+                    <a:p>
+                      <a:pPr indent="0" marL="0">
+                        <a:buNone/>
+                      </a:pPr>
+                      <a:r>
+                        <a:rPr lang="en-US" sz="1000" dirty="0">
+                          <a:solidFill>
+                            <a:srgbClr val="1F1A1C"/>
+                          </a:solidFill>
+                          <a:latin typeface="Calibri" pitchFamily="34" charset="0"/>
+                          <a:ea typeface="Calibri" pitchFamily="34" charset="-122"/>
+                          <a:cs typeface="Calibri" pitchFamily="34" charset="-120"/>
+                        </a:rPr>
+                        <a:t>役員貸付金の精算</a:t>
+                      </a:r>
+                      <a:endParaRPr lang="en-US" sz="1000" dirty="0">
+                        <a:latin typeface="Calibri" charset="0"/>
+                        <a:ea typeface="Calibri" charset="0"/>
+                        <a:cs typeface="Calibri" charset="0"/>
+                      </a:endParaRPr>
+                    </a:p>
+                  </a:txBody>
+                  <a:tcPr marL="91440" marR="91440" marT="45720" marB="45720" anchor="ctr">
+                    <a:lnL w="6350" cap="flat" cmpd="sng" algn="ctr">
+                      <a:solidFill>
+                        <a:srgbClr val="E4DADD"/>
+                      </a:solidFill>
+                      <a:prstDash val="solid"/>
+                      <a:round/>
+                      <a:headEnd type="none" w="med" len="med"/>
+                      <a:tailEnd type="none" w="med" len="med"/>
+                    </a:lnL>
+                    <a:lnR w="6350" cap="flat" cmpd="sng" algn="ctr">
+                      <a:solidFill>
+                        <a:srgbClr val="E4DADD"/>
+                      </a:solidFill>
+                      <a:prstDash val="solid"/>
+                      <a:round/>
+                      <a:headEnd type="none" w="med" len="med"/>
+                      <a:tailEnd type="none" w="med" len="med"/>
+                    </a:lnR>
+                    <a:lnT w="6350" cap="flat" cmpd="sng" algn="ctr">
+                      <a:solidFill>
+                        <a:srgbClr val="E4DADD"/>
+                      </a:solidFill>
+                      <a:prstDash val="solid"/>
+                      <a:round/>
+                      <a:headEnd type="none" w="med" len="med"/>
+                      <a:tailEnd type="none" w="med" len="med"/>
+                    </a:lnT>
+                    <a:lnB w="6350" cap="flat" cmpd="sng" algn="ctr">
+                      <a:solidFill>
+                        <a:srgbClr val="E4DADD"/>
+                      </a:solidFill>
+                      <a:prstDash val="solid"/>
+                      <a:round/>
+                      <a:headEnd type="none" w="med" len="med"/>
+                      <a:tailEnd type="none" w="med" len="med"/>
+                    </a:lnB>
+                  </a:tcPr>
+                </a:tc>
+                <a:tc>
+                  <a:txBody>
+                    <a:bodyPr/>
+                    <a:lstStyle/>
+                    <a:p>
+                      <a:pPr algn="r" indent="0" marL="0">
+                        <a:buNone/>
+                      </a:pPr>
+                      <a:r>
+                        <a:rPr lang="en-US" sz="1000" dirty="0">
+                          <a:solidFill>
+                            <a:srgbClr val="1F1A1C"/>
+                          </a:solidFill>
+                          <a:latin typeface="Calibri" pitchFamily="34" charset="0"/>
+                          <a:ea typeface="Calibri" pitchFamily="34" charset="-122"/>
+                          <a:cs typeface="Calibri" pitchFamily="34" charset="-120"/>
+                        </a:rPr>
+                        <a:t>5.0億円</a:t>
+                      </a:r>
+                      <a:endParaRPr lang="en-US" sz="1000" dirty="0">
+                        <a:latin typeface="Calibri" charset="0"/>
+                        <a:ea typeface="Calibri" charset="0"/>
+                        <a:cs typeface="Calibri" charset="0"/>
+                      </a:endParaRPr>
+                    </a:p>
+                  </a:txBody>
+                  <a:tcPr marL="91440" marR="91440" marT="45720" marB="45720" anchor="ctr">
+                    <a:lnL w="6350" cap="flat" cmpd="sng" algn="ctr">
+                      <a:solidFill>
+                        <a:srgbClr val="E4DADD"/>
+                      </a:solidFill>
+                      <a:prstDash val="solid"/>
+                      <a:round/>
+                      <a:headEnd type="none" w="med" len="med"/>
+                      <a:tailEnd type="none" w="med" len="med"/>
+                    </a:lnL>
+                    <a:lnR w="6350" cap="flat" cmpd="sng" algn="ctr">
+                      <a:solidFill>
+                        <a:srgbClr val="E4DADD"/>
+                      </a:solidFill>
+                      <a:prstDash val="solid"/>
+                      <a:round/>
+                      <a:headEnd type="none" w="med" len="med"/>
+                      <a:tailEnd type="none" w="med" len="med"/>
+                    </a:lnR>
+                    <a:lnT w="6350" cap="flat" cmpd="sng" algn="ctr">
+                      <a:solidFill>
+                        <a:srgbClr val="E4DADD"/>
+                      </a:solidFill>
+                      <a:prstDash val="solid"/>
+                      <a:round/>
+                      <a:headEnd type="none" w="med" len="med"/>
+                      <a:tailEnd type="none" w="med" len="med"/>
+                    </a:lnT>
+                    <a:lnB w="6350" cap="flat" cmpd="sng" algn="ctr">
+                      <a:solidFill>
+                        <a:srgbClr val="E4DADD"/>
+                      </a:solidFill>
+                      <a:prstDash val="solid"/>
+                      <a:round/>
+                      <a:headEnd type="none" w="med" len="med"/>
+                      <a:tailEnd type="none" w="med" len="med"/>
+                    </a:lnB>
+                  </a:tcPr>
+                </a:tc>
+                <a:tc>
+                  <a:txBody>
+                    <a:bodyPr/>
+                    <a:lstStyle/>
+                    <a:p>
+                      <a:pPr indent="0" marL="0">
+                        <a:buNone/>
+                      </a:pPr>
+                      <a:r>
+                        <a:rPr lang="en-US" sz="950" dirty="0">
+                          <a:solidFill>
+                            <a:srgbClr val="1F1A1C"/>
+                          </a:solidFill>
+                          <a:latin typeface="Calibri" pitchFamily="34" charset="0"/>
+                          <a:ea typeface="Calibri" pitchFamily="34" charset="-122"/>
+                          <a:cs typeface="Calibri" pitchFamily="34" charset="-120"/>
+                        </a:rPr>
+                        <a:t>クロージング時に岸田氏が現金返済</a:t>
+                      </a:r>
+                      <a:endParaRPr lang="en-US" sz="950" dirty="0">
+                        <a:latin typeface="Calibri" charset="0"/>
+                        <a:ea typeface="Calibri" charset="0"/>
+                        <a:cs typeface="Calibri" charset="0"/>
+                      </a:endParaRPr>
+                    </a:p>
+                  </a:txBody>
+                  <a:tcPr marL="91440" marR="91440" marT="45720" marB="45720" anchor="ctr">
+                    <a:lnL w="6350" cap="flat" cmpd="sng" algn="ctr">
+                      <a:solidFill>
+                        <a:srgbClr val="E4DADD"/>
+                      </a:solidFill>
+                      <a:prstDash val="solid"/>
+                      <a:round/>
+                      <a:headEnd type="none" w="med" len="med"/>
+                      <a:tailEnd type="none" w="med" len="med"/>
+                    </a:lnL>
+                    <a:lnR w="6350" cap="flat" cmpd="sng" algn="ctr">
+                      <a:solidFill>
+                        <a:srgbClr val="E4DADD"/>
+                      </a:solidFill>
+                      <a:prstDash val="solid"/>
+                      <a:round/>
+                      <a:headEnd type="none" w="med" len="med"/>
+                      <a:tailEnd type="none" w="med" len="med"/>
+                    </a:lnR>
+                    <a:lnT w="6350" cap="flat" cmpd="sng" algn="ctr">
+                      <a:solidFill>
+                        <a:srgbClr val="E4DADD"/>
+                      </a:solidFill>
+                      <a:prstDash val="solid"/>
+                      <a:round/>
+                      <a:headEnd type="none" w="med" len="med"/>
+                      <a:tailEnd type="none" w="med" len="med"/>
+                    </a:lnT>
+                    <a:lnB w="6350" cap="flat" cmpd="sng" algn="ctr">
+                      <a:solidFill>
+                        <a:srgbClr val="E4DADD"/>
+                      </a:solidFill>
+                      <a:prstDash val="solid"/>
+                      <a:round/>
+                      <a:headEnd type="none" w="med" len="med"/>
+                      <a:tailEnd type="none" w="med" len="med"/>
+                    </a:lnB>
+                  </a:tcPr>
+                </a:tc>
+              </a:tr>
+              <a:tr h="329184">
+                <a:tc>
+                  <a:txBody>
+                    <a:bodyPr/>
+                    <a:lstStyle/>
+                    <a:p>
+                      <a:pPr indent="0" marL="0">
+                        <a:buNone/>
+                      </a:pPr>
+                      <a:r>
+                        <a:rPr lang="en-US" sz="1000" b="1" dirty="0">
+                          <a:solidFill>
+                            <a:srgbClr val="1F1A1C"/>
+                          </a:solidFill>
+                          <a:latin typeface="Calibri" pitchFamily="34" charset="0"/>
+                          <a:ea typeface="Calibri" pitchFamily="34" charset="-122"/>
+                          <a:cs typeface="Calibri" pitchFamily="34" charset="-120"/>
+                        </a:rPr>
+                        <a:t>ブリッジ返済原資</a:t>
+                      </a:r>
+                      <a:endParaRPr lang="en-US" sz="1000" dirty="0">
+                        <a:latin typeface="Calibri" charset="0"/>
+                        <a:ea typeface="Calibri" charset="0"/>
+                        <a:cs typeface="Calibri" charset="0"/>
+                      </a:endParaRPr>
+                    </a:p>
+                  </a:txBody>
+                  <a:tcPr marL="91440" marR="91440" marT="45720" marB="45720" anchor="ctr">
+                    <a:lnL w="6350" cap="flat" cmpd="sng" algn="ctr">
+                      <a:solidFill>
+                        <a:srgbClr val="E4DADD"/>
+                      </a:solidFill>
+                      <a:prstDash val="solid"/>
+                      <a:round/>
+                      <a:headEnd type="none" w="med" len="med"/>
+                      <a:tailEnd type="none" w="med" len="med"/>
+                    </a:lnL>
+                    <a:lnR w="6350" cap="flat" cmpd="sng" algn="ctr">
+                      <a:solidFill>
+                        <a:srgbClr val="E4DADD"/>
+                      </a:solidFill>
+                      <a:prstDash val="solid"/>
+                      <a:round/>
+                      <a:headEnd type="none" w="med" len="med"/>
+                      <a:tailEnd type="none" w="med" len="med"/>
+                    </a:lnR>
+                    <a:lnT w="6350" cap="flat" cmpd="sng" algn="ctr">
+                      <a:solidFill>
+                        <a:srgbClr val="E4DADD"/>
+                      </a:solidFill>
+                      <a:prstDash val="solid"/>
+                      <a:round/>
+                      <a:headEnd type="none" w="med" len="med"/>
+                      <a:tailEnd type="none" w="med" len="med"/>
+                    </a:lnT>
+                    <a:lnB w="6350" cap="flat" cmpd="sng" algn="ctr">
+                      <a:solidFill>
+                        <a:srgbClr val="E4DADD"/>
+                      </a:solidFill>
+                      <a:prstDash val="solid"/>
+                      <a:round/>
+                      <a:headEnd type="none" w="med" len="med"/>
+                      <a:tailEnd type="none" w="med" len="med"/>
+                    </a:lnB>
+                    <a:solidFill>
+                      <a:srgbClr val="F7F3F4"/>
+                    </a:solidFill>
+                  </a:tcPr>
+                </a:tc>
+                <a:tc>
+                  <a:txBody>
+                    <a:bodyPr/>
+                    <a:lstStyle/>
+                    <a:p>
+                      <a:pPr algn="r" indent="0" marL="0">
+                        <a:buNone/>
+                      </a:pPr>
+                      <a:r>
+                        <a:rPr lang="en-US" sz="1000" b="1" dirty="0">
+                          <a:solidFill>
+                            <a:srgbClr val="1F1A1C"/>
+                          </a:solidFill>
+                          <a:latin typeface="Calibri" pitchFamily="34" charset="0"/>
+                          <a:ea typeface="Calibri" pitchFamily="34" charset="-122"/>
+                          <a:cs typeface="Calibri" pitchFamily="34" charset="-120"/>
+                        </a:rPr>
+                        <a:t>16.4億円</a:t>
+                      </a:r>
+                      <a:endParaRPr lang="en-US" sz="1000" dirty="0">
+                        <a:latin typeface="Calibri" charset="0"/>
+                        <a:ea typeface="Calibri" charset="0"/>
+                        <a:cs typeface="Calibri" charset="0"/>
+                      </a:endParaRPr>
+                    </a:p>
+                  </a:txBody>
+                  <a:tcPr marL="91440" marR="91440" marT="45720" marB="45720" anchor="ctr">
+                    <a:lnL w="6350" cap="flat" cmpd="sng" algn="ctr">
+                      <a:solidFill>
+                        <a:srgbClr val="E4DADD"/>
+                      </a:solidFill>
+                      <a:prstDash val="solid"/>
+                      <a:round/>
+                      <a:headEnd type="none" w="med" len="med"/>
+                      <a:tailEnd type="none" w="med" len="med"/>
+                    </a:lnL>
+                    <a:lnR w="6350" cap="flat" cmpd="sng" algn="ctr">
+                      <a:solidFill>
+                        <a:srgbClr val="E4DADD"/>
+                      </a:solidFill>
+                      <a:prstDash val="solid"/>
+                      <a:round/>
+                      <a:headEnd type="none" w="med" len="med"/>
+                      <a:tailEnd type="none" w="med" len="med"/>
+                    </a:lnR>
+                    <a:lnT w="6350" cap="flat" cmpd="sng" algn="ctr">
+                      <a:solidFill>
+                        <a:srgbClr val="E4DADD"/>
+                      </a:solidFill>
+                      <a:prstDash val="solid"/>
+                      <a:round/>
+                      <a:headEnd type="none" w="med" len="med"/>
+                      <a:tailEnd type="none" w="med" len="med"/>
+                    </a:lnT>
+                    <a:lnB w="6350" cap="flat" cmpd="sng" algn="ctr">
+                      <a:solidFill>
+                        <a:srgbClr val="E4DADD"/>
+                      </a:solidFill>
+                      <a:prstDash val="solid"/>
+                      <a:round/>
+                      <a:headEnd type="none" w="med" len="med"/>
+                      <a:tailEnd type="none" w="med" len="med"/>
+                    </a:lnB>
+                    <a:solidFill>
+                      <a:srgbClr val="F7F3F4"/>
+                    </a:solidFill>
+                  </a:tcPr>
+                </a:tc>
+                <a:tc>
+                  <a:txBody>
+                    <a:bodyPr/>
+                    <a:lstStyle/>
+                    <a:p>
+                      <a:pPr indent="0" marL="0">
+                        <a:buNone/>
+                      </a:pPr>
+                      <a:r>
+                        <a:rPr lang="en-US" sz="950" b="1" dirty="0">
+                          <a:solidFill>
+                            <a:srgbClr val="1F1A1C"/>
+                          </a:solidFill>
+                          <a:latin typeface="Calibri" pitchFamily="34" charset="0"/>
+                          <a:ea typeface="Calibri" pitchFamily="34" charset="-122"/>
+                          <a:cs typeface="Calibri" pitchFamily="34" charset="-120"/>
+                        </a:rPr>
+                        <a:t>ブリッジローンを全額返済</a:t>
+                      </a:r>
+                      <a:endParaRPr lang="en-US" sz="950" dirty="0">
+                        <a:latin typeface="Calibri" charset="0"/>
+                        <a:ea typeface="Calibri" charset="0"/>
+                        <a:cs typeface="Calibri" charset="0"/>
+                      </a:endParaRPr>
+                    </a:p>
+                  </a:txBody>
+                  <a:tcPr marL="91440" marR="91440" marT="45720" marB="45720" anchor="ctr">
+                    <a:lnL w="6350" cap="flat" cmpd="sng" algn="ctr">
+                      <a:solidFill>
+                        <a:srgbClr val="E4DADD"/>
+                      </a:solidFill>
+                      <a:prstDash val="solid"/>
+                      <a:round/>
+                      <a:headEnd type="none" w="med" len="med"/>
+                      <a:tailEnd type="none" w="med" len="med"/>
+                    </a:lnL>
+                    <a:lnR w="6350" cap="flat" cmpd="sng" algn="ctr">
+                      <a:solidFill>
+                        <a:srgbClr val="E4DADD"/>
+                      </a:solidFill>
+                      <a:prstDash val="solid"/>
+                      <a:round/>
+                      <a:headEnd type="none" w="med" len="med"/>
+                      <a:tailEnd type="none" w="med" len="med"/>
+                    </a:lnR>
+                    <a:lnT w="6350" cap="flat" cmpd="sng" algn="ctr">
+                      <a:solidFill>
+                        <a:srgbClr val="E4DADD"/>
+                      </a:solidFill>
+                      <a:prstDash val="solid"/>
+                      <a:round/>
+                      <a:headEnd type="none" w="med" len="med"/>
+                      <a:tailEnd type="none" w="med" len="med"/>
+                    </a:lnT>
+                    <a:lnB w="6350" cap="flat" cmpd="sng" algn="ctr">
+                      <a:solidFill>
+                        <a:srgbClr val="E4DADD"/>
+                      </a:solidFill>
+                      <a:prstDash val="solid"/>
+                      <a:round/>
+                      <a:headEnd type="none" w="med" len="med"/>
+                      <a:tailEnd type="none" w="med" len="med"/>
+                    </a:lnB>
+                    <a:solidFill>
+                      <a:srgbClr val="F7F3F4"/>
+                    </a:solidFill>
+                  </a:tcPr>
+                </a:tc>
+              </a:tr>
+            </a:tbl>
+          </a:graphicData>
+        </a:graphic>
+      </p:graphicFrame>
+      <p:sp>
+        <p:nvSpPr>
+          <p:cNvPr id="9" name="Shape 5"/>
+          <p:cNvSpPr/>
+          <p:nvPr/>
+        </p:nvSpPr>
+        <p:spPr>
+          <a:xfrm>
+            <a:off x="7498080" y="1517904"/>
+            <a:ext cx="4123944" cy="2889504"/>
+          </a:xfrm>
+          <a:prstGeom prst="roundRect">
+            <a:avLst>
+              <a:gd name="adj" fmla="val 1582"/>
+            </a:avLst>
+          </a:prstGeom>
+          <a:solidFill>
+            <a:srgbClr val="F7F3F4"/>
+          </a:solidFill>
+          <a:ln w="9525">
+            <a:solidFill>
+              <a:srgbClr val="E4DADD"/>
+            </a:solidFill>
+            <a:prstDash val="solid"/>
+          </a:ln>
+        </p:spPr>
+      </p:sp>
+      <p:sp>
+        <p:nvSpPr>
+          <p:cNvPr id="10" name="Text 6"/>
+          <p:cNvSpPr txBox="1"/>
+          <p:nvPr/>
+        </p:nvSpPr>
+        <p:spPr>
+          <a:xfrm>
+            <a:off x="7717536" y="1627632"/>
+            <a:ext cx="3657600" cy="237744"/>
+          </a:xfrm>
+          <a:prstGeom prst="rect">
+            <a:avLst/>
+          </a:prstGeom>
+          <a:noFill/>
+          <a:ln/>
+        </p:spPr>
+        <p:txBody>
+          <a:bodyPr wrap="square" lIns="0" tIns="0" rIns="0" bIns="0" rtlCol="0" anchor="ctr"/>
+          <a:lstStyle/>
+          <a:p>
+            <a:pPr indent="0" marL="0">
+              <a:buNone/>
+            </a:pPr>
+            <a:r>
+              <a:rPr lang="en-US" sz="1000" b="1" dirty="0">
+                <a:solidFill>
+                  <a:srgbClr val="B58B2A"/>
+                </a:solidFill>
+                <a:latin typeface="Calibri" pitchFamily="34" charset="0"/>
+                <a:ea typeface="Calibri" pitchFamily="34" charset="-122"/>
+                <a:cs typeface="Calibri" pitchFamily="34" charset="-120"/>
+              </a:rPr>
+              <a:t>③ 定常状態（合併後）</a:t>
+            </a:r>
+            <a:endParaRPr lang="en-US" sz="1000" dirty="0"/>
+          </a:p>
+        </p:txBody>
+      </p:sp>
+      <p:sp>
+        <p:nvSpPr>
+          <p:cNvPr id="11" name="Text 7"/>
+          <p:cNvSpPr txBox="1"/>
+          <p:nvPr/>
+        </p:nvSpPr>
+        <p:spPr>
+          <a:xfrm>
+            <a:off x="7717536" y="1956816"/>
+            <a:ext cx="1600200" cy="237744"/>
+          </a:xfrm>
+          <a:prstGeom prst="rect">
+            <a:avLst/>
+          </a:prstGeom>
+          <a:noFill/>
+          <a:ln/>
+        </p:spPr>
+        <p:txBody>
+          <a:bodyPr wrap="square" lIns="0" tIns="0" rIns="0" bIns="0" rtlCol="0" anchor="ctr"/>
+          <a:lstStyle/>
+          <a:p>
+            <a:pPr indent="0" marL="0">
+              <a:buNone/>
+            </a:pPr>
+            <a:r>
+              <a:rPr lang="en-US" sz="1000" dirty="0">
+                <a:solidFill>
+                  <a:srgbClr val="6E6368"/>
+                </a:solidFill>
+                <a:latin typeface="Calibri" pitchFamily="34" charset="0"/>
+                <a:ea typeface="Calibri" pitchFamily="34" charset="-122"/>
+                <a:cs typeface="Calibri" pitchFamily="34" charset="-120"/>
+              </a:rPr>
+              <a:t>有利子負債</a:t>
+            </a:r>
+            <a:endParaRPr lang="en-US" sz="1000" dirty="0"/>
+          </a:p>
+        </p:txBody>
+      </p:sp>
+      <p:sp>
+        <p:nvSpPr>
+          <p:cNvPr id="12" name="Text 8"/>
+          <p:cNvSpPr txBox="1"/>
+          <p:nvPr/>
+        </p:nvSpPr>
+        <p:spPr>
+          <a:xfrm>
+            <a:off x="9290304" y="1956816"/>
+            <a:ext cx="1188720" cy="237744"/>
+          </a:xfrm>
+          <a:prstGeom prst="rect">
+            <a:avLst/>
+          </a:prstGeom>
+          <a:noFill/>
+          <a:ln/>
+        </p:spPr>
+        <p:txBody>
+          <a:bodyPr wrap="square" lIns="0" tIns="0" rIns="0" bIns="0" rtlCol="0" anchor="ctr"/>
+          <a:lstStyle/>
+          <a:p>
+            <a:pPr algn="r" indent="0" marL="0">
+              <a:buNone/>
+            </a:pPr>
+            <a:r>
+              <a:rPr lang="en-US" sz="1150" b="1" dirty="0">
+                <a:solidFill>
+                  <a:srgbClr val="1F1A1C"/>
+                </a:solidFill>
+                <a:latin typeface="Calibri" pitchFamily="34" charset="0"/>
+                <a:ea typeface="Calibri" pitchFamily="34" charset="-122"/>
+                <a:cs typeface="Calibri" pitchFamily="34" charset="-120"/>
+              </a:rPr>
+              <a:t>20.0億円</a:t>
+            </a:r>
+            <a:endParaRPr lang="en-US" sz="1150" dirty="0"/>
+          </a:p>
+        </p:txBody>
+      </p:sp>
+      <p:sp>
+        <p:nvSpPr>
+          <p:cNvPr id="13" name="Text 9"/>
+          <p:cNvSpPr txBox="1"/>
+          <p:nvPr/>
+        </p:nvSpPr>
+        <p:spPr>
+          <a:xfrm>
+            <a:off x="7717536" y="2176272"/>
+            <a:ext cx="3657600" cy="219456"/>
+          </a:xfrm>
+          <a:prstGeom prst="rect">
+            <a:avLst/>
+          </a:prstGeom>
+          <a:noFill/>
+          <a:ln/>
+        </p:spPr>
+        <p:txBody>
+          <a:bodyPr wrap="square" lIns="0" tIns="0" rIns="0" bIns="0" rtlCol="0" anchor="ctr"/>
+          <a:lstStyle/>
+          <a:p>
+            <a:pPr indent="0" marL="0">
+              <a:buNone/>
+            </a:pPr>
+            <a:r>
+              <a:rPr lang="en-US" sz="850" dirty="0">
+                <a:solidFill>
+                  <a:srgbClr val="6E6368"/>
+                </a:solidFill>
+                <a:latin typeface="Calibri" pitchFamily="34" charset="0"/>
+                <a:ea typeface="Calibri" pitchFamily="34" charset="-122"/>
+                <a:cs typeface="Calibri" pitchFamily="34" charset="-120"/>
+              </a:rPr>
+              <a:t>TLA14.0億（元金均等7年）＋TLB6.0億（期限一括）</a:t>
+            </a:r>
+            <a:endParaRPr lang="en-US" sz="850" dirty="0"/>
+          </a:p>
+        </p:txBody>
+      </p:sp>
+      <p:sp>
+        <p:nvSpPr>
+          <p:cNvPr id="14" name="Text 10"/>
+          <p:cNvSpPr txBox="1"/>
+          <p:nvPr/>
+        </p:nvSpPr>
+        <p:spPr>
+          <a:xfrm>
+            <a:off x="7717536" y="2450592"/>
+            <a:ext cx="1600200" cy="237744"/>
+          </a:xfrm>
+          <a:prstGeom prst="rect">
+            <a:avLst/>
+          </a:prstGeom>
+          <a:noFill/>
+          <a:ln/>
+        </p:spPr>
+        <p:txBody>
+          <a:bodyPr wrap="square" lIns="0" tIns="0" rIns="0" bIns="0" rtlCol="0" anchor="ctr"/>
+          <a:lstStyle/>
+          <a:p>
+            <a:pPr indent="0" marL="0">
+              <a:buNone/>
+            </a:pPr>
+            <a:r>
+              <a:rPr lang="en-US" sz="1000" dirty="0">
+                <a:solidFill>
+                  <a:srgbClr val="6E6368"/>
+                </a:solidFill>
+                <a:latin typeface="Calibri" pitchFamily="34" charset="0"/>
+                <a:ea typeface="Calibri" pitchFamily="34" charset="-122"/>
+                <a:cs typeface="Calibri" pitchFamily="34" charset="-120"/>
+              </a:rPr>
+              <a:t>現預金</a:t>
+            </a:r>
+            <a:endParaRPr lang="en-US" sz="1000" dirty="0"/>
+          </a:p>
+        </p:txBody>
+      </p:sp>
+      <p:sp>
+        <p:nvSpPr>
+          <p:cNvPr id="15" name="Text 11"/>
+          <p:cNvSpPr txBox="1"/>
+          <p:nvPr/>
+        </p:nvSpPr>
+        <p:spPr>
+          <a:xfrm>
+            <a:off x="9290304" y="2450592"/>
+            <a:ext cx="1188720" cy="237744"/>
+          </a:xfrm>
+          <a:prstGeom prst="rect">
+            <a:avLst/>
+          </a:prstGeom>
+          <a:noFill/>
+          <a:ln/>
+        </p:spPr>
+        <p:txBody>
+          <a:bodyPr wrap="square" lIns="0" tIns="0" rIns="0" bIns="0" rtlCol="0" anchor="ctr"/>
+          <a:lstStyle/>
+          <a:p>
+            <a:pPr algn="r" indent="0" marL="0">
+              <a:buNone/>
+            </a:pPr>
+            <a:r>
+              <a:rPr lang="en-US" sz="1150" b="1" dirty="0">
+                <a:solidFill>
+                  <a:srgbClr val="1F1A1C"/>
+                </a:solidFill>
+                <a:latin typeface="Calibri" pitchFamily="34" charset="0"/>
+                <a:ea typeface="Calibri" pitchFamily="34" charset="-122"/>
+                <a:cs typeface="Calibri" pitchFamily="34" charset="-120"/>
+              </a:rPr>
+              <a:t>6.0億円</a:t>
+            </a:r>
+            <a:endParaRPr lang="en-US" sz="1150" dirty="0"/>
+          </a:p>
+        </p:txBody>
+      </p:sp>
+      <p:sp>
+        <p:nvSpPr>
+          <p:cNvPr id="16" name="Text 12"/>
+          <p:cNvSpPr txBox="1"/>
+          <p:nvPr/>
+        </p:nvSpPr>
+        <p:spPr>
+          <a:xfrm>
+            <a:off x="7717536" y="2670048"/>
+            <a:ext cx="3657600" cy="219456"/>
+          </a:xfrm>
+          <a:prstGeom prst="rect">
+            <a:avLst/>
+          </a:prstGeom>
+          <a:noFill/>
+          <a:ln/>
+        </p:spPr>
+        <p:txBody>
+          <a:bodyPr wrap="square" lIns="0" tIns="0" rIns="0" bIns="0" rtlCol="0" anchor="ctr"/>
+          <a:lstStyle/>
+          <a:p>
+            <a:pPr indent="0" marL="0">
+              <a:buNone/>
+            </a:pPr>
+            <a:r>
+              <a:rPr lang="en-US" sz="850" dirty="0">
+                <a:solidFill>
+                  <a:srgbClr val="6E6368"/>
+                </a:solidFill>
+                <a:latin typeface="Calibri" pitchFamily="34" charset="0"/>
+                <a:ea typeface="Calibri" pitchFamily="34" charset="-122"/>
+                <a:cs typeface="Calibri" pitchFamily="34" charset="-120"/>
+              </a:rPr>
+              <a:t>運転資金として留保</a:t>
+            </a:r>
+            <a:endParaRPr lang="en-US" sz="850" dirty="0"/>
+          </a:p>
+        </p:txBody>
+      </p:sp>
+      <p:sp>
+        <p:nvSpPr>
+          <p:cNvPr id="17" name="Text 13"/>
+          <p:cNvSpPr txBox="1"/>
+          <p:nvPr/>
+        </p:nvSpPr>
+        <p:spPr>
+          <a:xfrm>
+            <a:off x="7717536" y="2944368"/>
+            <a:ext cx="1600200" cy="237744"/>
+          </a:xfrm>
+          <a:prstGeom prst="rect">
+            <a:avLst/>
+          </a:prstGeom>
+          <a:noFill/>
+          <a:ln/>
+        </p:spPr>
+        <p:txBody>
+          <a:bodyPr wrap="square" lIns="0" tIns="0" rIns="0" bIns="0" rtlCol="0" anchor="ctr"/>
+          <a:lstStyle/>
+          <a:p>
+            <a:pPr indent="0" marL="0">
+              <a:buNone/>
+            </a:pPr>
+            <a:r>
+              <a:rPr lang="en-US" sz="1000" dirty="0">
+                <a:solidFill>
+                  <a:srgbClr val="6E6368"/>
+                </a:solidFill>
+                <a:latin typeface="Calibri" pitchFamily="34" charset="0"/>
+                <a:ea typeface="Calibri" pitchFamily="34" charset="-122"/>
+                <a:cs typeface="Calibri" pitchFamily="34" charset="-120"/>
+              </a:rPr>
+              <a:t>ネットデット</a:t>
+            </a:r>
+            <a:endParaRPr lang="en-US" sz="1000" dirty="0"/>
+          </a:p>
+        </p:txBody>
+      </p:sp>
+      <p:sp>
+        <p:nvSpPr>
+          <p:cNvPr id="18" name="Text 14"/>
+          <p:cNvSpPr txBox="1"/>
+          <p:nvPr/>
+        </p:nvSpPr>
+        <p:spPr>
+          <a:xfrm>
+            <a:off x="9290304" y="2944368"/>
+            <a:ext cx="1188720" cy="237744"/>
+          </a:xfrm>
+          <a:prstGeom prst="rect">
+            <a:avLst/>
+          </a:prstGeom>
+          <a:noFill/>
+          <a:ln/>
+        </p:spPr>
+        <p:txBody>
+          <a:bodyPr wrap="square" lIns="0" tIns="0" rIns="0" bIns="0" rtlCol="0" anchor="ctr"/>
+          <a:lstStyle/>
+          <a:p>
+            <a:pPr algn="r" indent="0" marL="0">
+              <a:buNone/>
+            </a:pPr>
+            <a:r>
+              <a:rPr lang="en-US" sz="1150" b="1" dirty="0">
+                <a:solidFill>
+                  <a:srgbClr val="1F1A1C"/>
+                </a:solidFill>
+                <a:latin typeface="Calibri" pitchFamily="34" charset="0"/>
+                <a:ea typeface="Calibri" pitchFamily="34" charset="-122"/>
+                <a:cs typeface="Calibri" pitchFamily="34" charset="-120"/>
+              </a:rPr>
+              <a:t>14.0億円</a:t>
+            </a:r>
+            <a:endParaRPr lang="en-US" sz="1150" dirty="0"/>
+          </a:p>
+        </p:txBody>
+      </p:sp>
+      <p:sp>
+        <p:nvSpPr>
+          <p:cNvPr id="19" name="Text 15"/>
+          <p:cNvSpPr txBox="1"/>
+          <p:nvPr/>
+        </p:nvSpPr>
+        <p:spPr>
+          <a:xfrm>
+            <a:off x="7717536" y="3163824"/>
+            <a:ext cx="3657600" cy="219456"/>
+          </a:xfrm>
+          <a:prstGeom prst="rect">
+            <a:avLst/>
+          </a:prstGeom>
+          <a:noFill/>
+          <a:ln/>
+        </p:spPr>
+        <p:txBody>
+          <a:bodyPr wrap="square" lIns="0" tIns="0" rIns="0" bIns="0" rtlCol="0" anchor="ctr"/>
+          <a:lstStyle/>
+          <a:p>
+            <a:pPr indent="0" marL="0">
+              <a:buNone/>
+            </a:pPr>
+            <a:r>
+              <a:rPr lang="en-US" sz="850" dirty="0">
+                <a:solidFill>
+                  <a:srgbClr val="6E6368"/>
+                </a:solidFill>
+                <a:latin typeface="Calibri" pitchFamily="34" charset="0"/>
+                <a:ea typeface="Calibri" pitchFamily="34" charset="-122"/>
+                <a:cs typeface="Calibri" pitchFamily="34" charset="-120"/>
+              </a:rPr>
+              <a:t>EBITDA 2.6倍</a:t>
+            </a:r>
+            <a:endParaRPr lang="en-US" sz="850" dirty="0"/>
+          </a:p>
+        </p:txBody>
+      </p:sp>
+      <p:sp>
+        <p:nvSpPr>
+          <p:cNvPr id="20" name="Text 16"/>
+          <p:cNvSpPr txBox="1"/>
+          <p:nvPr/>
+        </p:nvSpPr>
+        <p:spPr>
+          <a:xfrm>
+            <a:off x="7717536" y="3438144"/>
+            <a:ext cx="1600200" cy="237744"/>
+          </a:xfrm>
+          <a:prstGeom prst="rect">
+            <a:avLst/>
+          </a:prstGeom>
+          <a:noFill/>
+          <a:ln/>
+        </p:spPr>
+        <p:txBody>
+          <a:bodyPr wrap="square" lIns="0" tIns="0" rIns="0" bIns="0" rtlCol="0" anchor="ctr"/>
+          <a:lstStyle/>
+          <a:p>
+            <a:pPr indent="0" marL="0">
+              <a:buNone/>
+            </a:pPr>
+            <a:r>
+              <a:rPr lang="en-US" sz="1000" dirty="0">
+                <a:solidFill>
+                  <a:srgbClr val="6E6368"/>
+                </a:solidFill>
+                <a:latin typeface="Calibri" pitchFamily="34" charset="0"/>
+                <a:ea typeface="Calibri" pitchFamily="34" charset="-122"/>
+                <a:cs typeface="Calibri" pitchFamily="34" charset="-120"/>
+              </a:rPr>
+              <a:t>初年度DSCR</a:t>
+            </a:r>
+            <a:endParaRPr lang="en-US" sz="1000" dirty="0"/>
+          </a:p>
+        </p:txBody>
+      </p:sp>
+      <p:sp>
+        <p:nvSpPr>
+          <p:cNvPr id="21" name="Text 17"/>
+          <p:cNvSpPr txBox="1"/>
+          <p:nvPr/>
+        </p:nvSpPr>
+        <p:spPr>
+          <a:xfrm>
+            <a:off x="9290304" y="3438144"/>
+            <a:ext cx="1188720" cy="237744"/>
+          </a:xfrm>
+          <a:prstGeom prst="rect">
+            <a:avLst/>
+          </a:prstGeom>
+          <a:noFill/>
+          <a:ln/>
+        </p:spPr>
+        <p:txBody>
+          <a:bodyPr wrap="square" lIns="0" tIns="0" rIns="0" bIns="0" rtlCol="0" anchor="ctr"/>
+          <a:lstStyle/>
+          <a:p>
+            <a:pPr algn="r" indent="0" marL="0">
+              <a:buNone/>
+            </a:pPr>
+            <a:r>
+              <a:rPr lang="en-US" sz="1150" b="1" dirty="0">
+                <a:solidFill>
+                  <a:srgbClr val="2E6F4E"/>
+                </a:solidFill>
+                <a:latin typeface="Calibri" pitchFamily="34" charset="0"/>
+                <a:ea typeface="Calibri" pitchFamily="34" charset="-122"/>
+                <a:cs typeface="Calibri" pitchFamily="34" charset="-120"/>
+              </a:rPr>
+              <a:t>1.35倍</a:t>
+            </a:r>
+            <a:endParaRPr lang="en-US" sz="1150" dirty="0"/>
+          </a:p>
+        </p:txBody>
+      </p:sp>
+      <p:sp>
+        <p:nvSpPr>
+          <p:cNvPr id="22" name="Text 18"/>
+          <p:cNvSpPr txBox="1"/>
+          <p:nvPr/>
+        </p:nvSpPr>
+        <p:spPr>
+          <a:xfrm>
+            <a:off x="7717536" y="3657600"/>
+            <a:ext cx="3657600" cy="219456"/>
+          </a:xfrm>
+          <a:prstGeom prst="rect">
+            <a:avLst/>
+          </a:prstGeom>
+          <a:noFill/>
+          <a:ln/>
+        </p:spPr>
+        <p:txBody>
+          <a:bodyPr wrap="square" lIns="0" tIns="0" rIns="0" bIns="0" rtlCol="0" anchor="ctr"/>
+          <a:lstStyle/>
+          <a:p>
+            <a:pPr indent="0" marL="0">
+              <a:buNone/>
+            </a:pPr>
+            <a:r>
+              <a:rPr lang="en-US" sz="850" dirty="0">
+                <a:solidFill>
+                  <a:srgbClr val="6E6368"/>
+                </a:solidFill>
+                <a:latin typeface="Calibri" pitchFamily="34" charset="0"/>
+                <a:ea typeface="Calibri" pitchFamily="34" charset="-122"/>
+                <a:cs typeface="Calibri" pitchFamily="34" charset="-120"/>
+              </a:rPr>
+              <a:t>返済2.60億円 vs FCF 3.50億円</a:t>
+            </a:r>
+            <a:endParaRPr lang="en-US" sz="850" dirty="0"/>
+          </a:p>
+        </p:txBody>
+      </p:sp>
+      <p:sp>
+        <p:nvSpPr>
+          <p:cNvPr id="23" name="Text 19"/>
+          <p:cNvSpPr txBox="1"/>
+          <p:nvPr/>
+        </p:nvSpPr>
+        <p:spPr>
+          <a:xfrm>
+            <a:off x="7717536" y="3931920"/>
+            <a:ext cx="1600200" cy="237744"/>
+          </a:xfrm>
+          <a:prstGeom prst="rect">
+            <a:avLst/>
+          </a:prstGeom>
+          <a:noFill/>
+          <a:ln/>
+        </p:spPr>
+        <p:txBody>
+          <a:bodyPr wrap="square" lIns="0" tIns="0" rIns="0" bIns="0" rtlCol="0" anchor="ctr"/>
+          <a:lstStyle/>
+          <a:p>
+            <a:pPr indent="0" marL="0">
+              <a:buNone/>
+            </a:pPr>
+            <a:r>
+              <a:rPr lang="en-US" sz="1000" dirty="0">
+                <a:solidFill>
+                  <a:srgbClr val="6E6368"/>
+                </a:solidFill>
+                <a:latin typeface="Calibri" pitchFamily="34" charset="0"/>
+                <a:ea typeface="Calibri" pitchFamily="34" charset="-122"/>
+                <a:cs typeface="Calibri" pitchFamily="34" charset="-120"/>
+              </a:rPr>
+              <a:t>7年累積余剰CF</a:t>
+            </a:r>
+            <a:endParaRPr lang="en-US" sz="1000" dirty="0"/>
+          </a:p>
+        </p:txBody>
+      </p:sp>
+      <p:sp>
+        <p:nvSpPr>
+          <p:cNvPr id="24" name="Text 20"/>
+          <p:cNvSpPr txBox="1"/>
+          <p:nvPr/>
+        </p:nvSpPr>
+        <p:spPr>
+          <a:xfrm>
+            <a:off x="9290304" y="3931920"/>
+            <a:ext cx="1188720" cy="237744"/>
+          </a:xfrm>
+          <a:prstGeom prst="rect">
+            <a:avLst/>
+          </a:prstGeom>
+          <a:noFill/>
+          <a:ln/>
+        </p:spPr>
+        <p:txBody>
+          <a:bodyPr wrap="square" lIns="0" tIns="0" rIns="0" bIns="0" rtlCol="0" anchor="ctr"/>
+          <a:lstStyle/>
+          <a:p>
+            <a:pPr algn="r" indent="0" marL="0">
+              <a:buNone/>
+            </a:pPr>
+            <a:r>
+              <a:rPr lang="en-US" sz="1150" b="1" dirty="0">
+                <a:solidFill>
+                  <a:srgbClr val="2E6F4E"/>
+                </a:solidFill>
+                <a:latin typeface="Calibri" pitchFamily="34" charset="0"/>
+                <a:ea typeface="Calibri" pitchFamily="34" charset="-122"/>
+                <a:cs typeface="Calibri" pitchFamily="34" charset="-120"/>
+              </a:rPr>
+              <a:t>7.56億円</a:t>
+            </a:r>
+            <a:endParaRPr lang="en-US" sz="1150" dirty="0"/>
+          </a:p>
+        </p:txBody>
+      </p:sp>
+      <p:sp>
+        <p:nvSpPr>
+          <p:cNvPr id="25" name="Text 21"/>
+          <p:cNvSpPr txBox="1"/>
+          <p:nvPr/>
+        </p:nvSpPr>
+        <p:spPr>
+          <a:xfrm>
+            <a:off x="7717536" y="4151376"/>
+            <a:ext cx="3657600" cy="219456"/>
+          </a:xfrm>
+          <a:prstGeom prst="rect">
+            <a:avLst/>
+          </a:prstGeom>
+          <a:noFill/>
+          <a:ln/>
+        </p:spPr>
+        <p:txBody>
+          <a:bodyPr wrap="square" lIns="0" tIns="0" rIns="0" bIns="0" rtlCol="0" anchor="ctr"/>
+          <a:lstStyle/>
+          <a:p>
+            <a:pPr indent="0" marL="0">
+              <a:buNone/>
+            </a:pPr>
+            <a:r>
+              <a:rPr lang="en-US" sz="850" dirty="0">
+                <a:solidFill>
+                  <a:srgbClr val="6E6368"/>
+                </a:solidFill>
+                <a:latin typeface="Calibri" pitchFamily="34" charset="0"/>
+                <a:ea typeface="Calibri" pitchFamily="34" charset="-122"/>
+                <a:cs typeface="Calibri" pitchFamily="34" charset="-120"/>
+              </a:rPr>
+              <a:t>期限一括6.0億円を上回る</a:t>
+            </a:r>
+            <a:endParaRPr lang="en-US" sz="850" dirty="0"/>
+          </a:p>
+        </p:txBody>
+      </p:sp>
+      <p:sp>
+        <p:nvSpPr>
+          <p:cNvPr id="26" name="Shape 22"/>
+          <p:cNvSpPr/>
+          <p:nvPr/>
+        </p:nvSpPr>
+        <p:spPr>
+          <a:xfrm>
+            <a:off x="7498080" y="4535424"/>
+            <a:ext cx="4123944" cy="1133856"/>
+          </a:xfrm>
+          <a:prstGeom prst="roundRect">
+            <a:avLst>
+              <a:gd name="adj" fmla="val 4032"/>
+            </a:avLst>
+          </a:prstGeom>
+          <a:solidFill>
+            <a:srgbClr val="FFFFFF"/>
+          </a:solidFill>
+          <a:ln w="9525">
+            <a:solidFill>
+              <a:srgbClr val="E4DADD"/>
+            </a:solidFill>
+            <a:prstDash val="solid"/>
+          </a:ln>
+        </p:spPr>
+      </p:sp>
+      <p:sp>
+        <p:nvSpPr>
+          <p:cNvPr id="27" name="Text 23"/>
+          <p:cNvSpPr txBox="1"/>
+          <p:nvPr/>
+        </p:nvSpPr>
+        <p:spPr>
+          <a:xfrm>
+            <a:off x="7717536" y="4626864"/>
+            <a:ext cx="3657600" cy="219456"/>
+          </a:xfrm>
+          <a:prstGeom prst="rect">
+            <a:avLst/>
+          </a:prstGeom>
+          <a:noFill/>
+          <a:ln/>
+        </p:spPr>
+        <p:txBody>
+          <a:bodyPr wrap="square" lIns="0" tIns="0" rIns="0" bIns="0" rtlCol="0" anchor="ctr"/>
+          <a:lstStyle/>
+          <a:p>
+            <a:pPr indent="0" marL="0">
+              <a:buNone/>
+            </a:pPr>
+            <a:r>
+              <a:rPr lang="en-US" sz="1000" b="1" dirty="0">
+                <a:solidFill>
+                  <a:srgbClr val="B58B2A"/>
+                </a:solidFill>
+                <a:latin typeface="Calibri" pitchFamily="34" charset="0"/>
+                <a:ea typeface="Calibri" pitchFamily="34" charset="-122"/>
+                <a:cs typeface="Calibri" pitchFamily="34" charset="-120"/>
+              </a:rPr>
+              <a:t>日程</a:t>
+            </a:r>
+            <a:endParaRPr lang="en-US" sz="1000" dirty="0"/>
+          </a:p>
+        </p:txBody>
+      </p:sp>
+      <p:sp>
+        <p:nvSpPr>
+          <p:cNvPr id="28" name="Text 24"/>
+          <p:cNvSpPr txBox="1"/>
+          <p:nvPr/>
+        </p:nvSpPr>
+        <p:spPr>
+          <a:xfrm>
+            <a:off x="7717536" y="4864608"/>
+            <a:ext cx="1920240" cy="237744"/>
+          </a:xfrm>
+          <a:prstGeom prst="rect">
+            <a:avLst/>
+          </a:prstGeom>
+          <a:noFill/>
+          <a:ln/>
+        </p:spPr>
+        <p:txBody>
+          <a:bodyPr wrap="square" lIns="0" tIns="0" rIns="0" bIns="0" rtlCol="0" anchor="ctr"/>
+          <a:lstStyle/>
+          <a:p>
+            <a:pPr indent="0" marL="0">
+              <a:buNone/>
+            </a:pPr>
+            <a:r>
+              <a:rPr lang="en-US" sz="950" dirty="0">
+                <a:solidFill>
+                  <a:srgbClr val="6E6368"/>
+                </a:solidFill>
+                <a:latin typeface="Calibri" pitchFamily="34" charset="0"/>
+                <a:ea typeface="Calibri" pitchFamily="34" charset="-122"/>
+                <a:cs typeface="Calibri" pitchFamily="34" charset="-120"/>
+              </a:rPr>
+              <a:t>意向表明書提出</a:t>
+            </a:r>
+            <a:endParaRPr lang="en-US" sz="950" dirty="0"/>
+          </a:p>
+        </p:txBody>
+      </p:sp>
+      <p:sp>
+        <p:nvSpPr>
+          <p:cNvPr id="29" name="Text 25"/>
+          <p:cNvSpPr txBox="1"/>
+          <p:nvPr/>
+        </p:nvSpPr>
+        <p:spPr>
+          <a:xfrm>
+            <a:off x="9601200" y="4864608"/>
+            <a:ext cx="1801368" cy="237744"/>
+          </a:xfrm>
+          <a:prstGeom prst="rect">
+            <a:avLst/>
+          </a:prstGeom>
+          <a:noFill/>
+          <a:ln/>
+        </p:spPr>
+        <p:txBody>
+          <a:bodyPr wrap="square" lIns="0" tIns="0" rIns="0" bIns="0" rtlCol="0" anchor="ctr"/>
+          <a:lstStyle/>
+          <a:p>
+            <a:pPr algn="r" indent="0" marL="0">
+              <a:buNone/>
+            </a:pPr>
+            <a:r>
+              <a:rPr lang="en-US" sz="950" b="1" dirty="0">
+                <a:solidFill>
+                  <a:srgbClr val="1F1A1C"/>
+                </a:solidFill>
+                <a:latin typeface="Calibri" pitchFamily="34" charset="0"/>
+                <a:ea typeface="Calibri" pitchFamily="34" charset="-122"/>
+                <a:cs typeface="Calibri" pitchFamily="34" charset="-120"/>
+              </a:rPr>
+              <a:t>2026年9月30日</a:t>
+            </a:r>
+            <a:endParaRPr lang="en-US" sz="950" dirty="0"/>
+          </a:p>
+        </p:txBody>
+      </p:sp>
+      <p:sp>
+        <p:nvSpPr>
+          <p:cNvPr id="30" name="Text 26"/>
+          <p:cNvSpPr txBox="1"/>
+          <p:nvPr/>
+        </p:nvSpPr>
+        <p:spPr>
+          <a:xfrm>
+            <a:off x="7717536" y="5120640"/>
+            <a:ext cx="1920240" cy="237744"/>
+          </a:xfrm>
+          <a:prstGeom prst="rect">
+            <a:avLst/>
+          </a:prstGeom>
+          <a:noFill/>
+          <a:ln/>
+        </p:spPr>
+        <p:txBody>
+          <a:bodyPr wrap="square" lIns="0" tIns="0" rIns="0" bIns="0" rtlCol="0" anchor="ctr"/>
+          <a:lstStyle/>
+          <a:p>
+            <a:pPr indent="0" marL="0">
+              <a:buNone/>
+            </a:pPr>
+            <a:r>
+              <a:rPr lang="en-US" sz="950" dirty="0">
+                <a:solidFill>
+                  <a:srgbClr val="6E6368"/>
+                </a:solidFill>
+                <a:latin typeface="Calibri" pitchFamily="34" charset="0"/>
+                <a:ea typeface="Calibri" pitchFamily="34" charset="-122"/>
+                <a:cs typeface="Calibri" pitchFamily="34" charset="-120"/>
+              </a:rPr>
+              <a:t>DD</a:t>
+            </a:r>
+            <a:endParaRPr lang="en-US" sz="950" dirty="0"/>
+          </a:p>
+        </p:txBody>
+      </p:sp>
+      <p:sp>
+        <p:nvSpPr>
+          <p:cNvPr id="31" name="Text 27"/>
+          <p:cNvSpPr txBox="1"/>
+          <p:nvPr/>
+        </p:nvSpPr>
+        <p:spPr>
+          <a:xfrm>
+            <a:off x="9601200" y="5120640"/>
+            <a:ext cx="1801368" cy="237744"/>
+          </a:xfrm>
+          <a:prstGeom prst="rect">
+            <a:avLst/>
+          </a:prstGeom>
+          <a:noFill/>
+          <a:ln/>
+        </p:spPr>
+        <p:txBody>
+          <a:bodyPr wrap="square" lIns="0" tIns="0" rIns="0" bIns="0" rtlCol="0" anchor="ctr"/>
+          <a:lstStyle/>
+          <a:p>
+            <a:pPr algn="r" indent="0" marL="0">
+              <a:buNone/>
+            </a:pPr>
+            <a:r>
+              <a:rPr lang="en-US" sz="950" b="1" dirty="0">
+                <a:solidFill>
+                  <a:srgbClr val="1F1A1C"/>
+                </a:solidFill>
+                <a:latin typeface="Calibri" pitchFamily="34" charset="0"/>
+                <a:ea typeface="Calibri" pitchFamily="34" charset="-122"/>
+                <a:cs typeface="Calibri" pitchFamily="34" charset="-120"/>
+              </a:rPr>
+              <a:t>10月上旬〜11月中旬</a:t>
+            </a:r>
+            <a:endParaRPr lang="en-US" sz="950" dirty="0"/>
+          </a:p>
+        </p:txBody>
+      </p:sp>
+      <p:sp>
+        <p:nvSpPr>
+          <p:cNvPr id="32" name="Text 28"/>
+          <p:cNvSpPr txBox="1"/>
+          <p:nvPr/>
+        </p:nvSpPr>
+        <p:spPr>
+          <a:xfrm>
+            <a:off x="7717536" y="5376672"/>
+            <a:ext cx="1920240" cy="237744"/>
+          </a:xfrm>
+          <a:prstGeom prst="rect">
+            <a:avLst/>
+          </a:prstGeom>
+          <a:noFill/>
+          <a:ln/>
+        </p:spPr>
+        <p:txBody>
+          <a:bodyPr wrap="square" lIns="0" tIns="0" rIns="0" bIns="0" rtlCol="0" anchor="ctr"/>
+          <a:lstStyle/>
+          <a:p>
+            <a:pPr indent="0" marL="0">
+              <a:buNone/>
+            </a:pPr>
+            <a:r>
+              <a:rPr lang="en-US" sz="950" dirty="0">
+                <a:solidFill>
+                  <a:srgbClr val="6E6368"/>
+                </a:solidFill>
+                <a:latin typeface="Calibri" pitchFamily="34" charset="0"/>
+                <a:ea typeface="Calibri" pitchFamily="34" charset="-122"/>
+                <a:cs typeface="Calibri" pitchFamily="34" charset="-120"/>
+              </a:rPr>
+              <a:t>クロージング</a:t>
+            </a:r>
+            <a:endParaRPr lang="en-US" sz="950" dirty="0"/>
+          </a:p>
+        </p:txBody>
+      </p:sp>
+      <p:sp>
+        <p:nvSpPr>
+          <p:cNvPr id="33" name="Text 29"/>
+          <p:cNvSpPr txBox="1"/>
+          <p:nvPr/>
+        </p:nvSpPr>
+        <p:spPr>
+          <a:xfrm>
+            <a:off x="9601200" y="5376672"/>
+            <a:ext cx="1801368" cy="237744"/>
+          </a:xfrm>
+          <a:prstGeom prst="rect">
+            <a:avLst/>
+          </a:prstGeom>
+          <a:noFill/>
+          <a:ln/>
+        </p:spPr>
+        <p:txBody>
+          <a:bodyPr wrap="square" lIns="0" tIns="0" rIns="0" bIns="0" rtlCol="0" anchor="ctr"/>
+          <a:lstStyle/>
+          <a:p>
+            <a:pPr algn="r" indent="0" marL="0">
+              <a:buNone/>
+            </a:pPr>
+            <a:r>
+              <a:rPr lang="en-US" sz="950" b="1" dirty="0">
+                <a:solidFill>
+                  <a:srgbClr val="1F1A1C"/>
+                </a:solidFill>
+                <a:latin typeface="Calibri" pitchFamily="34" charset="0"/>
+                <a:ea typeface="Calibri" pitchFamily="34" charset="-122"/>
+                <a:cs typeface="Calibri" pitchFamily="34" charset="-120"/>
+              </a:rPr>
+              <a:t>11月末（最短）〜年末</a:t>
+            </a:r>
+            <a:endParaRPr lang="en-US" sz="950" dirty="0"/>
+          </a:p>
+        </p:txBody>
+      </p:sp>
+      <p:sp>
+        <p:nvSpPr>
+          <p:cNvPr id="34" name="Shape 30"/>
+          <p:cNvSpPr/>
+          <p:nvPr/>
+        </p:nvSpPr>
+        <p:spPr>
+          <a:xfrm>
+            <a:off x="566928" y="5760720"/>
+            <a:ext cx="11055096" cy="512064"/>
+          </a:xfrm>
+          <a:prstGeom prst="roundRect">
+            <a:avLst>
+              <a:gd name="adj" fmla="val 7143"/>
+            </a:avLst>
+          </a:prstGeom>
+          <a:solidFill>
+            <a:srgbClr val="6D2E46"/>
+          </a:solidFill>
+          <a:ln/>
+        </p:spPr>
+      </p:sp>
+      <p:sp>
+        <p:nvSpPr>
+          <p:cNvPr id="35" name="Text 31"/>
+          <p:cNvSpPr txBox="1"/>
+          <p:nvPr/>
+        </p:nvSpPr>
+        <p:spPr>
+          <a:xfrm>
+            <a:off x="804672" y="5815584"/>
+            <a:ext cx="10579608" cy="402336"/>
+          </a:xfrm>
+          <a:prstGeom prst="rect">
+            <a:avLst/>
+          </a:prstGeom>
+          <a:noFill/>
+          <a:ln/>
+        </p:spPr>
+        <p:txBody>
+          <a:bodyPr wrap="square" lIns="0" tIns="0" rIns="0" bIns="0" rtlCol="0" anchor="ctr"/>
+          <a:lstStyle/>
+          <a:p>
+            <a:pPr indent="0" marL="0">
+              <a:lnSpc>
+                <a:spcPts val="1500"/>
+              </a:lnSpc>
+              <a:buNone/>
+            </a:pPr>
+            <a:r>
+              <a:rPr lang="en-US" sz="1100" b="1" dirty="0">
+                <a:solidFill>
+                  <a:srgbClr val="FFFFFF"/>
+                </a:solidFill>
+              </a:rPr>
+              <a:t>みずほ銀行への依頼は20.0億円ではなく36.4億円　</a:t>
+            </a:r>
+            <a:pPr indent="0" marL="0">
+              <a:lnSpc>
+                <a:spcPts val="1500"/>
+              </a:lnSpc>
+              <a:buNone/>
+            </a:pPr>
+            <a:r>
+              <a:rPr lang="en-US" sz="1000" dirty="0">
+                <a:solidFill>
+                  <a:srgbClr val="EBDCE1"/>
+                </a:solidFill>
+              </a:rPr>
+              <a:t>タームローン20.0億円に加え、クロージング時の資金繰りを埋めるブリッジローン16.4億円が必要。ブリッジは合併直後に対象会社の余剰現金で全額返済する。</a:t>
+            </a:r>
+            <a:endParaRPr lang="en-US" sz="1100" dirty="0"/>
+          </a:p>
+        </p:txBody>
+      </p:sp>
+      <p:sp>
+        <p:nvSpPr>
+          <p:cNvPr id="36" name="Text 32"/>
+          <p:cNvSpPr txBox="1"/>
+          <p:nvPr/>
+        </p:nvSpPr>
+        <p:spPr>
+          <a:xfrm>
+            <a:off x="566928" y="6419088"/>
+            <a:ext cx="8686800" cy="228600"/>
+          </a:xfrm>
+          <a:prstGeom prst="rect">
+            <a:avLst/>
+          </a:prstGeom>
+          <a:noFill/>
+          <a:ln/>
+        </p:spPr>
+        <p:txBody>
+          <a:bodyPr wrap="square" lIns="0" tIns="0" rIns="0" bIns="0" rtlCol="0" anchor="ctr"/>
+          <a:lstStyle/>
+          <a:p>
+            <a:pPr indent="0" marL="0">
+              <a:buNone/>
+            </a:pPr>
+            <a:r>
+              <a:rPr lang="en-US" sz="800" dirty="0">
+                <a:solidFill>
+                  <a:srgbClr val="6E6368"/>
+                </a:solidFill>
+                <a:latin typeface="Calibri" pitchFamily="34" charset="0"/>
+                <a:ea typeface="Calibri" pitchFamily="34" charset="-122"/>
+                <a:cs typeface="Calibri" pitchFamily="34" charset="-120"/>
+              </a:rPr>
+              <a:t>カンテサンス（株式会社プティ・ボノム）M&amp;Aスキーム ／ 2026年9月20日 株式会社WineBank</a:t>
+            </a:r>
+            <a:endParaRPr lang="en-US" sz="800" dirty="0"/>
+          </a:p>
+        </p:txBody>
+      </p:sp>
+      <p:sp>
+        <p:nvSpPr>
+          <p:cNvPr id="37" name="Text 33"/>
+          <p:cNvSpPr txBox="1"/>
+          <p:nvPr/>
+        </p:nvSpPr>
+        <p:spPr>
+          <a:xfrm>
+            <a:off x="10799064" y="6419088"/>
+            <a:ext cx="822960" cy="228600"/>
+          </a:xfrm>
+          <a:prstGeom prst="rect">
+            <a:avLst/>
+          </a:prstGeom>
+          <a:noFill/>
+          <a:ln/>
+        </p:spPr>
+        <p:txBody>
+          <a:bodyPr wrap="square" lIns="0" tIns="0" rIns="0" bIns="0" rtlCol="0" anchor="ctr"/>
+          <a:lstStyle/>
+          <a:p>
+            <a:pPr algn="r" indent="0" marL="0">
+              <a:buNone/>
+            </a:pPr>
+            <a:r>
+              <a:rPr lang="en-US" sz="900" dirty="0">
+                <a:solidFill>
+                  <a:srgbClr val="6E6368"/>
+                </a:solidFill>
+                <a:latin typeface="Calibri" pitchFamily="34" charset="0"/>
+                <a:ea typeface="Calibri" pitchFamily="34" charset="-122"/>
+                <a:cs typeface="Calibri" pitchFamily="34" charset="-120"/>
+              </a:rPr>
+              <a:t>2</a:t>
+            </a:r>
+            <a:endParaRPr lang="en-US" sz="900" dirty="0"/>
+          </a:p>
+        </p:txBody>
+      </p:sp>
+    </p:spTree>
+  </p:cSld>
+  <p:clrMapOvr>
+    <a:masterClrMapping/>
+  </p:clrMapOvr>
+</p:sld>
+</file>
+
+<file path=ppt/slides/slide3.xml><?xml version="1.0" encoding="utf-8"?>
+<p:sld xmlns:a="http://schemas.openxmlformats.org/drawingml/2006/main" xmlns:r="http://schemas.openxmlformats.org/officeDocument/2006/relationships" xmlns:p="http://schemas.openxmlformats.org/presentationml/2006/main">
+  <p:cSld name="Slide 3">
+    <p:spTree>
+      <p:nvGrpSpPr>
+        <p:cNvPr id="1" name=""/>
+        <p:cNvGrpSpPr/>
+        <p:nvPr/>
+      </p:nvGrpSpPr>
+      <p:grpSpPr>
+        <a:xfrm>
+          <a:off x="0" y="0"/>
+          <a:ext cx="0" cy="0"/>
+          <a:chOff x="0" y="0"/>
+          <a:chExt cx="0" cy="0"/>
+        </a:xfrm>
+      </p:grpSpPr>
+      <p:sp>
+        <p:nvSpPr>
+          <p:cNvPr id="2" name="Text 0"/>
+          <p:cNvSpPr txBox="1"/>
+          <p:nvPr/>
+        </p:nvSpPr>
+        <p:spPr>
+          <a:xfrm>
+            <a:off x="566928" y="310896"/>
+            <a:ext cx="9144000" cy="237744"/>
+          </a:xfrm>
+          <a:prstGeom prst="rect">
+            <a:avLst/>
+          </a:prstGeom>
+          <a:noFill/>
+          <a:ln/>
+        </p:spPr>
+        <p:txBody>
+          <a:bodyPr wrap="square" lIns="0" tIns="0" rIns="0" bIns="0" rtlCol="0" anchor="ctr"/>
+          <a:lstStyle/>
+          <a:p>
+            <a:pPr indent="0" marL="0">
+              <a:buNone/>
+            </a:pPr>
+            <a:r>
+              <a:rPr lang="en-US" sz="1100" b="1" spc="140" kern="0" dirty="0">
+                <a:solidFill>
+                  <a:srgbClr val="B58B2A"/>
+                </a:solidFill>
+                <a:latin typeface="Calibri" pitchFamily="34" charset="0"/>
+                <a:ea typeface="Calibri" pitchFamily="34" charset="-122"/>
+                <a:cs typeface="Calibri" pitchFamily="34" charset="-120"/>
+              </a:rPr>
+              <a:t>SENSITIVITY</a:t>
+            </a:r>
+            <a:endParaRPr lang="en-US" sz="1100" dirty="0"/>
+          </a:p>
+        </p:txBody>
+      </p:sp>
+      <p:sp>
+        <p:nvSpPr>
+          <p:cNvPr id="3" name="Text 1"/>
+          <p:cNvSpPr txBox="1"/>
+          <p:nvPr/>
+        </p:nvSpPr>
+        <p:spPr>
+          <a:xfrm>
+            <a:off x="566928" y="566928"/>
+            <a:ext cx="11055096" cy="475488"/>
+          </a:xfrm>
+          <a:prstGeom prst="rect">
+            <a:avLst/>
+          </a:prstGeom>
+          <a:noFill/>
+          <a:ln/>
+        </p:spPr>
+        <p:txBody>
+          <a:bodyPr wrap="square" lIns="0" tIns="0" rIns="0" bIns="0" rtlCol="0" anchor="ctr"/>
+          <a:lstStyle/>
+          <a:p>
+            <a:pPr indent="0" marL="0">
+              <a:buNone/>
+            </a:pPr>
+            <a:r>
+              <a:rPr lang="en-US" sz="2900" b="1" dirty="0">
+                <a:solidFill>
+                  <a:srgbClr val="1F1A1C"/>
+                </a:solidFill>
+                <a:latin typeface="Cambria" pitchFamily="34" charset="0"/>
+                <a:ea typeface="Cambria" pitchFamily="34" charset="-122"/>
+                <a:cs typeface="Cambria" pitchFamily="34" charset="-120"/>
+              </a:rPr>
+              <a:t>中野氏の拠出額によって、成立するかどうかが決まる</a:t>
+            </a:r>
+            <a:endParaRPr lang="en-US" sz="2900" dirty="0"/>
+          </a:p>
+        </p:txBody>
+      </p:sp>
+      <p:sp>
+        <p:nvSpPr>
+          <p:cNvPr id="4" name="Text 2"/>
+          <p:cNvSpPr txBox="1"/>
+          <p:nvPr/>
+        </p:nvSpPr>
+        <p:spPr>
+          <a:xfrm>
+            <a:off x="566928" y="1088136"/>
+            <a:ext cx="11055096" cy="329184"/>
+          </a:xfrm>
+          <a:prstGeom prst="rect">
+            <a:avLst/>
+          </a:prstGeom>
+          <a:noFill/>
+          <a:ln/>
+        </p:spPr>
+        <p:txBody>
+          <a:bodyPr wrap="square" lIns="0" tIns="0" rIns="0" bIns="0" rtlCol="0" anchor="ctr"/>
+          <a:lstStyle/>
+          <a:p>
+            <a:pPr indent="0" marL="0">
+              <a:lnSpc>
+                <a:spcPts val="1700"/>
+              </a:lnSpc>
+              <a:buNone/>
+            </a:pPr>
+            <a:r>
+              <a:rPr lang="en-US" sz="1250" dirty="0">
+                <a:solidFill>
+                  <a:srgbClr val="6E6368"/>
+                </a:solidFill>
+                <a:latin typeface="Calibri" pitchFamily="34" charset="0"/>
+                <a:ea typeface="Calibri" pitchFamily="34" charset="-122"/>
+                <a:cs typeface="Calibri" pitchFamily="34" charset="-120"/>
+              </a:rPr>
+              <a:t>榊原氏の10.0億円は固定。中野氏の拠出額を変えると、合併後に残る有利子負債が動き、返済可能性が変わる。</a:t>
+            </a:r>
+            <a:endParaRPr lang="en-US" sz="1250" dirty="0"/>
+          </a:p>
+        </p:txBody>
+      </p:sp>
+      <p:graphicFrame>
+        <p:nvGraphicFramePr>
+          <p:cNvPr id="4" name="Table 0"/>
+          <p:cNvGraphicFramePr>
+            <a:graphicFrameLocks noGrp="1"/>
+          </p:cNvGraphicFramePr>
+          <p:nvPr>
+            <p:extLst>
+              <p:ext uri="{D42A27DB-BD31-4B8C-83A1-F6EECF244321}">
+                <p14:modId xmlns:p14="http://schemas.microsoft.com/office/powerpoint/2010/main" val="1579011935"/>
+              </p:ext>
+            </p:extLst>
+          </p:nvPr>
+        </p:nvGraphicFramePr>
+        <p:xfrm>
+          <a:off x="566928" y="1792224"/>
+          <a:ext cx="11055096" cy="914400"/>
+        </p:xfrm>
+        <a:graphic>
+          <a:graphicData uri="http://schemas.openxmlformats.org/drawingml/2006/table">
+            <a:tbl>
+              <a:tblPr/>
+              <a:tblGrid>
+                <a:gridCol w="1828800"/>
+                <a:gridCol w="1691640"/>
+                <a:gridCol w="1691640"/>
+                <a:gridCol w="1143000"/>
+                <a:gridCol w="1097280"/>
+                <a:gridCol w="1920240"/>
+                <a:gridCol w="1682496"/>
+              </a:tblGrid>
+              <a:tr h="457200">
+                <a:tc>
+                  <a:txBody>
+                    <a:bodyPr/>
+                    <a:lstStyle/>
+                    <a:p>
+                      <a:pPr indent="0" marL="0">
+                        <a:buNone/>
+                      </a:pPr>
+                      <a:r>
+                        <a:rPr lang="en-US" sz="1000" b="1" dirty="0">
+                          <a:solidFill>
+                            <a:srgbClr val="FFFFFF"/>
+                          </a:solidFill>
+                          <a:latin typeface="Calibri" pitchFamily="34" charset="0"/>
+                          <a:ea typeface="Calibri" pitchFamily="34" charset="-122"/>
+                          <a:cs typeface="Calibri" pitchFamily="34" charset="-120"/>
+                        </a:rPr>
+                        <a:t>中野氏の拠出</a:t>
+                      </a:r>
+                      <a:endParaRPr lang="en-US" sz="1000" dirty="0">
+                        <a:latin typeface="Calibri" charset="0"/>
+                        <a:ea typeface="Calibri" charset="0"/>
+                        <a:cs typeface="Calibri" charset="0"/>
+                      </a:endParaRPr>
+                    </a:p>
+                  </a:txBody>
+                  <a:tcPr marL="91440" marR="91440" marT="45720" marB="45720" anchor="ctr">
+                    <a:lnL w="6350" cap="flat" cmpd="sng" algn="ctr">
+                      <a:solidFill>
+                        <a:srgbClr val="E4DADD"/>
+                      </a:solidFill>
+                      <a:prstDash val="solid"/>
+                      <a:round/>
+                      <a:headEnd type="none" w="med" len="med"/>
+                      <a:tailEnd type="none" w="med" len="med"/>
+                    </a:lnL>
+                    <a:lnR w="6350" cap="flat" cmpd="sng" algn="ctr">
+                      <a:solidFill>
+                        <a:srgbClr val="E4DADD"/>
+                      </a:solidFill>
+                      <a:prstDash val="solid"/>
+                      <a:round/>
+                      <a:headEnd type="none" w="med" len="med"/>
+                      <a:tailEnd type="none" w="med" len="med"/>
+                    </a:lnR>
+                    <a:lnT w="6350" cap="flat" cmpd="sng" algn="ctr">
+                      <a:solidFill>
+                        <a:srgbClr val="E4DADD"/>
+                      </a:solidFill>
+                      <a:prstDash val="solid"/>
+                      <a:round/>
+                      <a:headEnd type="none" w="med" len="med"/>
+                      <a:tailEnd type="none" w="med" len="med"/>
+                    </a:lnT>
+                    <a:lnB w="6350" cap="flat" cmpd="sng" algn="ctr">
+                      <a:solidFill>
+                        <a:srgbClr val="E4DADD"/>
+                      </a:solidFill>
+                      <a:prstDash val="solid"/>
+                      <a:round/>
+                      <a:headEnd type="none" w="med" len="med"/>
+                      <a:tailEnd type="none" w="med" len="med"/>
+                    </a:lnB>
+                    <a:solidFill>
+                      <a:srgbClr val="6D2E46"/>
+                    </a:solidFill>
+                  </a:tcPr>
+                </a:tc>
+                <a:tc>
+                  <a:txBody>
+                    <a:bodyPr/>
+                    <a:lstStyle/>
+                    <a:p>
+                      <a:pPr indent="0" marL="0">
+                        <a:buNone/>
+                      </a:pPr>
+                      <a:r>
+                        <a:rPr lang="en-US" sz="1000" b="1" dirty="0">
+                          <a:solidFill>
+                            <a:srgbClr val="FFFFFF"/>
+                          </a:solidFill>
+                          <a:latin typeface="Calibri" pitchFamily="34" charset="0"/>
+                          <a:ea typeface="Calibri" pitchFamily="34" charset="-122"/>
+                          <a:cs typeface="Calibri" pitchFamily="34" charset="-120"/>
+                        </a:rPr>
+                        <a:t>クロージング時の借入</a:t>
+                      </a:r>
+                      <a:endParaRPr lang="en-US" sz="1000" dirty="0">
+                        <a:latin typeface="Calibri" charset="0"/>
+                        <a:ea typeface="Calibri" charset="0"/>
+                        <a:cs typeface="Calibri" charset="0"/>
+                      </a:endParaRPr>
+                    </a:p>
+                  </a:txBody>
+                  <a:tcPr marL="91440" marR="91440" marT="45720" marB="45720" anchor="ctr">
+                    <a:lnL w="6350" cap="flat" cmpd="sng" algn="ctr">
+                      <a:solidFill>
+                        <a:srgbClr val="E4DADD"/>
+                      </a:solidFill>
+                      <a:prstDash val="solid"/>
+                      <a:round/>
+                      <a:headEnd type="none" w="med" len="med"/>
+                      <a:tailEnd type="none" w="med" len="med"/>
+                    </a:lnL>
+                    <a:lnR w="6350" cap="flat" cmpd="sng" algn="ctr">
+                      <a:solidFill>
+                        <a:srgbClr val="E4DADD"/>
+                      </a:solidFill>
+                      <a:prstDash val="solid"/>
+                      <a:round/>
+                      <a:headEnd type="none" w="med" len="med"/>
+                      <a:tailEnd type="none" w="med" len="med"/>
+                    </a:lnR>
+                    <a:lnT w="6350" cap="flat" cmpd="sng" algn="ctr">
+                      <a:solidFill>
+                        <a:srgbClr val="E4DADD"/>
+                      </a:solidFill>
+                      <a:prstDash val="solid"/>
+                      <a:round/>
+                      <a:headEnd type="none" w="med" len="med"/>
+                      <a:tailEnd type="none" w="med" len="med"/>
+                    </a:lnT>
+                    <a:lnB w="6350" cap="flat" cmpd="sng" algn="ctr">
+                      <a:solidFill>
+                        <a:srgbClr val="E4DADD"/>
+                      </a:solidFill>
+                      <a:prstDash val="solid"/>
+                      <a:round/>
+                      <a:headEnd type="none" w="med" len="med"/>
+                      <a:tailEnd type="none" w="med" len="med"/>
+                    </a:lnB>
+                    <a:solidFill>
+                      <a:srgbClr val="6D2E46"/>
+                    </a:solidFill>
+                  </a:tcPr>
+                </a:tc>
+                <a:tc>
+                  <a:txBody>
+                    <a:bodyPr/>
+                    <a:lstStyle/>
+                    <a:p>
+                      <a:pPr indent="0" marL="0">
+                        <a:buNone/>
+                      </a:pPr>
+                      <a:r>
+                        <a:rPr lang="en-US" sz="1000" b="1" dirty="0">
+                          <a:solidFill>
+                            <a:srgbClr val="FFFFFF"/>
+                          </a:solidFill>
+                          <a:latin typeface="Calibri" pitchFamily="34" charset="0"/>
+                          <a:ea typeface="Calibri" pitchFamily="34" charset="-122"/>
+                          <a:cs typeface="Calibri" pitchFamily="34" charset="-120"/>
+                        </a:rPr>
+                        <a:t>合併後の有利子負債</a:t>
+                      </a:r>
+                      <a:endParaRPr lang="en-US" sz="1000" dirty="0">
+                        <a:latin typeface="Calibri" charset="0"/>
+                        <a:ea typeface="Calibri" charset="0"/>
+                        <a:cs typeface="Calibri" charset="0"/>
+                      </a:endParaRPr>
+                    </a:p>
+                  </a:txBody>
+                  <a:tcPr marL="91440" marR="91440" marT="45720" marB="45720" anchor="ctr">
+                    <a:lnL w="6350" cap="flat" cmpd="sng" algn="ctr">
+                      <a:solidFill>
+                        <a:srgbClr val="E4DADD"/>
+                      </a:solidFill>
+                      <a:prstDash val="solid"/>
+                      <a:round/>
+                      <a:headEnd type="none" w="med" len="med"/>
+                      <a:tailEnd type="none" w="med" len="med"/>
+                    </a:lnL>
+                    <a:lnR w="6350" cap="flat" cmpd="sng" algn="ctr">
+                      <a:solidFill>
+                        <a:srgbClr val="E4DADD"/>
+                      </a:solidFill>
+                      <a:prstDash val="solid"/>
+                      <a:round/>
+                      <a:headEnd type="none" w="med" len="med"/>
+                      <a:tailEnd type="none" w="med" len="med"/>
+                    </a:lnR>
+                    <a:lnT w="6350" cap="flat" cmpd="sng" algn="ctr">
+                      <a:solidFill>
+                        <a:srgbClr val="E4DADD"/>
+                      </a:solidFill>
+                      <a:prstDash val="solid"/>
+                      <a:round/>
+                      <a:headEnd type="none" w="med" len="med"/>
+                      <a:tailEnd type="none" w="med" len="med"/>
+                    </a:lnT>
+                    <a:lnB w="6350" cap="flat" cmpd="sng" algn="ctr">
+                      <a:solidFill>
+                        <a:srgbClr val="E4DADD"/>
+                      </a:solidFill>
+                      <a:prstDash val="solid"/>
+                      <a:round/>
+                      <a:headEnd type="none" w="med" len="med"/>
+                      <a:tailEnd type="none" w="med" len="med"/>
+                    </a:lnB>
+                    <a:solidFill>
+                      <a:srgbClr val="6D2E46"/>
+                    </a:solidFill>
+                  </a:tcPr>
+                </a:tc>
+                <a:tc>
+                  <a:txBody>
+                    <a:bodyPr/>
+                    <a:lstStyle/>
+                    <a:p>
+                      <a:pPr indent="0" marL="0">
+                        <a:buNone/>
+                      </a:pPr>
+                      <a:r>
+                        <a:rPr lang="en-US" sz="1000" b="1" dirty="0">
+                          <a:solidFill>
+                            <a:srgbClr val="FFFFFF"/>
+                          </a:solidFill>
+                          <a:latin typeface="Calibri" pitchFamily="34" charset="0"/>
+                          <a:ea typeface="Calibri" pitchFamily="34" charset="-122"/>
+                          <a:cs typeface="Calibri" pitchFamily="34" charset="-120"/>
+                        </a:rPr>
+                        <a:t>Debt/EBITDA</a:t>
+                      </a:r>
+                      <a:endParaRPr lang="en-US" sz="1000" dirty="0">
+                        <a:latin typeface="Calibri" charset="0"/>
+                        <a:ea typeface="Calibri" charset="0"/>
+                        <a:cs typeface="Calibri" charset="0"/>
+                      </a:endParaRPr>
+                    </a:p>
+                  </a:txBody>
+                  <a:tcPr marL="91440" marR="91440" marT="45720" marB="45720" anchor="ctr">
+                    <a:lnL w="6350" cap="flat" cmpd="sng" algn="ctr">
+                      <a:solidFill>
+                        <a:srgbClr val="E4DADD"/>
+                      </a:solidFill>
+                      <a:prstDash val="solid"/>
+                      <a:round/>
+                      <a:headEnd type="none" w="med" len="med"/>
+                      <a:tailEnd type="none" w="med" len="med"/>
+                    </a:lnL>
+                    <a:lnR w="6350" cap="flat" cmpd="sng" algn="ctr">
+                      <a:solidFill>
+                        <a:srgbClr val="E4DADD"/>
+                      </a:solidFill>
+                      <a:prstDash val="solid"/>
+                      <a:round/>
+                      <a:headEnd type="none" w="med" len="med"/>
+                      <a:tailEnd type="none" w="med" len="med"/>
+                    </a:lnR>
+                    <a:lnT w="6350" cap="flat" cmpd="sng" algn="ctr">
+                      <a:solidFill>
+                        <a:srgbClr val="E4DADD"/>
+                      </a:solidFill>
+                      <a:prstDash val="solid"/>
+                      <a:round/>
+                      <a:headEnd type="none" w="med" len="med"/>
+                      <a:tailEnd type="none" w="med" len="med"/>
+                    </a:lnT>
+                    <a:lnB w="6350" cap="flat" cmpd="sng" algn="ctr">
+                      <a:solidFill>
+                        <a:srgbClr val="E4DADD"/>
+                      </a:solidFill>
+                      <a:prstDash val="solid"/>
+                      <a:round/>
+                      <a:headEnd type="none" w="med" len="med"/>
+                      <a:tailEnd type="none" w="med" len="med"/>
+                    </a:lnB>
+                    <a:solidFill>
+                      <a:srgbClr val="6D2E46"/>
+                    </a:solidFill>
+                  </a:tcPr>
+                </a:tc>
+                <a:tc>
+                  <a:txBody>
+                    <a:bodyPr/>
+                    <a:lstStyle/>
+                    <a:p>
+                      <a:pPr indent="0" marL="0">
+                        <a:buNone/>
+                      </a:pPr>
+                      <a:r>
+                        <a:rPr lang="en-US" sz="1000" b="1" dirty="0">
+                          <a:solidFill>
+                            <a:srgbClr val="FFFFFF"/>
+                          </a:solidFill>
+                          <a:latin typeface="Calibri" pitchFamily="34" charset="0"/>
+                          <a:ea typeface="Calibri" pitchFamily="34" charset="-122"/>
+                          <a:cs typeface="Calibri" pitchFamily="34" charset="-120"/>
+                        </a:rPr>
+                        <a:t>初年度DSCR</a:t>
+                      </a:r>
+                      <a:endParaRPr lang="en-US" sz="1000" dirty="0">
+                        <a:latin typeface="Calibri" charset="0"/>
+                        <a:ea typeface="Calibri" charset="0"/>
+                        <a:cs typeface="Calibri" charset="0"/>
+                      </a:endParaRPr>
+                    </a:p>
+                  </a:txBody>
+                  <a:tcPr marL="91440" marR="91440" marT="45720" marB="45720" anchor="ctr">
+                    <a:lnL w="6350" cap="flat" cmpd="sng" algn="ctr">
+                      <a:solidFill>
+                        <a:srgbClr val="E4DADD"/>
+                      </a:solidFill>
+                      <a:prstDash val="solid"/>
+                      <a:round/>
+                      <a:headEnd type="none" w="med" len="med"/>
+                      <a:tailEnd type="none" w="med" len="med"/>
+                    </a:lnL>
+                    <a:lnR w="6350" cap="flat" cmpd="sng" algn="ctr">
+                      <a:solidFill>
+                        <a:srgbClr val="E4DADD"/>
+                      </a:solidFill>
+                      <a:prstDash val="solid"/>
+                      <a:round/>
+                      <a:headEnd type="none" w="med" len="med"/>
+                      <a:tailEnd type="none" w="med" len="med"/>
+                    </a:lnR>
+                    <a:lnT w="6350" cap="flat" cmpd="sng" algn="ctr">
+                      <a:solidFill>
+                        <a:srgbClr val="E4DADD"/>
+                      </a:solidFill>
+                      <a:prstDash val="solid"/>
+                      <a:round/>
+                      <a:headEnd type="none" w="med" len="med"/>
+                      <a:tailEnd type="none" w="med" len="med"/>
+                    </a:lnT>
+                    <a:lnB w="6350" cap="flat" cmpd="sng" algn="ctr">
+                      <a:solidFill>
+                        <a:srgbClr val="E4DADD"/>
+                      </a:solidFill>
+                      <a:prstDash val="solid"/>
+                      <a:round/>
+                      <a:headEnd type="none" w="med" len="med"/>
+                      <a:tailEnd type="none" w="med" len="med"/>
+                    </a:lnB>
+                    <a:solidFill>
+                      <a:srgbClr val="6D2E46"/>
+                    </a:solidFill>
+                  </a:tcPr>
+                </a:tc>
+                <a:tc>
+                  <a:txBody>
+                    <a:bodyPr/>
+                    <a:lstStyle/>
+                    <a:p>
+                      <a:pPr indent="0" marL="0">
+                        <a:buNone/>
+                      </a:pPr>
+                      <a:r>
+                        <a:rPr lang="en-US" sz="1000" b="1" dirty="0">
+                          <a:solidFill>
+                            <a:srgbClr val="FFFFFF"/>
+                          </a:solidFill>
+                          <a:latin typeface="Calibri" pitchFamily="34" charset="0"/>
+                          <a:ea typeface="Calibri" pitchFamily="34" charset="-122"/>
+                          <a:cs typeface="Calibri" pitchFamily="34" charset="-120"/>
+                        </a:rPr>
+                        <a:t>7年累積余剰CF vs 期限一括</a:t>
+                      </a:r>
+                      <a:endParaRPr lang="en-US" sz="1000" dirty="0">
+                        <a:latin typeface="Calibri" charset="0"/>
+                        <a:ea typeface="Calibri" charset="0"/>
+                        <a:cs typeface="Calibri" charset="0"/>
+                      </a:endParaRPr>
+                    </a:p>
+                  </a:txBody>
+                  <a:tcPr marL="91440" marR="91440" marT="45720" marB="45720" anchor="ctr">
+                    <a:lnL w="6350" cap="flat" cmpd="sng" algn="ctr">
+                      <a:solidFill>
+                        <a:srgbClr val="E4DADD"/>
+                      </a:solidFill>
+                      <a:prstDash val="solid"/>
+                      <a:round/>
+                      <a:headEnd type="none" w="med" len="med"/>
+                      <a:tailEnd type="none" w="med" len="med"/>
+                    </a:lnL>
+                    <a:lnR w="6350" cap="flat" cmpd="sng" algn="ctr">
+                      <a:solidFill>
+                        <a:srgbClr val="E4DADD"/>
+                      </a:solidFill>
+                      <a:prstDash val="solid"/>
+                      <a:round/>
+                      <a:headEnd type="none" w="med" len="med"/>
+                      <a:tailEnd type="none" w="med" len="med"/>
+                    </a:lnR>
+                    <a:lnT w="6350" cap="flat" cmpd="sng" algn="ctr">
+                      <a:solidFill>
+                        <a:srgbClr val="E4DADD"/>
+                      </a:solidFill>
+                      <a:prstDash val="solid"/>
+                      <a:round/>
+                      <a:headEnd type="none" w="med" len="med"/>
+                      <a:tailEnd type="none" w="med" len="med"/>
+                    </a:lnT>
+                    <a:lnB w="6350" cap="flat" cmpd="sng" algn="ctr">
+                      <a:solidFill>
+                        <a:srgbClr val="E4DADD"/>
+                      </a:solidFill>
+                      <a:prstDash val="solid"/>
+                      <a:round/>
+                      <a:headEnd type="none" w="med" len="med"/>
+                      <a:tailEnd type="none" w="med" len="med"/>
+                    </a:lnB>
+                    <a:solidFill>
+                      <a:srgbClr val="6D2E46"/>
+                    </a:solidFill>
+                  </a:tcPr>
+                </a:tc>
+                <a:tc>
+                  <a:txBody>
+                    <a:bodyPr/>
+                    <a:lstStyle/>
+                    <a:p>
+                      <a:pPr indent="0" marL="0">
+                        <a:buNone/>
+                      </a:pPr>
+                      <a:r>
+                        <a:rPr lang="en-US" sz="1000" b="1" dirty="0">
+                          <a:solidFill>
+                            <a:srgbClr val="FFFFFF"/>
+                          </a:solidFill>
+                          <a:latin typeface="Calibri" pitchFamily="34" charset="0"/>
+                          <a:ea typeface="Calibri" pitchFamily="34" charset="-122"/>
+                          <a:cs typeface="Calibri" pitchFamily="34" charset="-120"/>
+                        </a:rPr>
+                        <a:t>判定</a:t>
+                      </a:r>
+                      <a:endParaRPr lang="en-US" sz="1000" dirty="0">
+                        <a:latin typeface="Calibri" charset="0"/>
+                        <a:ea typeface="Calibri" charset="0"/>
+                        <a:cs typeface="Calibri" charset="0"/>
+                      </a:endParaRPr>
+                    </a:p>
+                  </a:txBody>
+                  <a:tcPr marL="91440" marR="91440" marT="45720" marB="45720" anchor="ctr">
+                    <a:lnL w="6350" cap="flat" cmpd="sng" algn="ctr">
+                      <a:solidFill>
+                        <a:srgbClr val="E4DADD"/>
+                      </a:solidFill>
+                      <a:prstDash val="solid"/>
+                      <a:round/>
+                      <a:headEnd type="none" w="med" len="med"/>
+                      <a:tailEnd type="none" w="med" len="med"/>
+                    </a:lnL>
+                    <a:lnR w="6350" cap="flat" cmpd="sng" algn="ctr">
+                      <a:solidFill>
+                        <a:srgbClr val="E4DADD"/>
+                      </a:solidFill>
+                      <a:prstDash val="solid"/>
+                      <a:round/>
+                      <a:headEnd type="none" w="med" len="med"/>
+                      <a:tailEnd type="none" w="med" len="med"/>
+                    </a:lnR>
+                    <a:lnT w="6350" cap="flat" cmpd="sng" algn="ctr">
+                      <a:solidFill>
+                        <a:srgbClr val="E4DADD"/>
+                      </a:solidFill>
+                      <a:prstDash val="solid"/>
+                      <a:round/>
+                      <a:headEnd type="none" w="med" len="med"/>
+                      <a:tailEnd type="none" w="med" len="med"/>
+                    </a:lnT>
+                    <a:lnB w="6350" cap="flat" cmpd="sng" algn="ctr">
+                      <a:solidFill>
+                        <a:srgbClr val="E4DADD"/>
+                      </a:solidFill>
+                      <a:prstDash val="solid"/>
+                      <a:round/>
+                      <a:headEnd type="none" w="med" len="med"/>
+                      <a:tailEnd type="none" w="med" len="med"/>
+                    </a:lnB>
+                    <a:solidFill>
+                      <a:srgbClr val="6D2E46"/>
+                    </a:solidFill>
+                  </a:tcPr>
+                </a:tc>
+              </a:tr>
+              <a:tr h="457200">
+                <a:tc>
+                  <a:txBody>
+                    <a:bodyPr/>
+                    <a:lstStyle/>
+                    <a:p>
+                      <a:pPr indent="0" marL="0">
+                        <a:buNone/>
+                      </a:pPr>
+                      <a:r>
+                        <a:rPr lang="en-US" sz="1000" b="1" dirty="0">
+                          <a:solidFill>
+                            <a:srgbClr val="1F1A1C"/>
+                          </a:solidFill>
+                          <a:latin typeface="Calibri" pitchFamily="34" charset="0"/>
+                          <a:ea typeface="Calibri" pitchFamily="34" charset="-122"/>
+                          <a:cs typeface="Calibri" pitchFamily="34" charset="-120"/>
+                        </a:rPr>
+                        <a:t>0円（資本金10万円のみ）</a:t>
+                      </a:r>
+                      <a:endParaRPr lang="en-US" sz="1000" dirty="0">
+                        <a:latin typeface="Calibri" charset="0"/>
+                        <a:ea typeface="Calibri" charset="0"/>
+                        <a:cs typeface="Calibri" charset="0"/>
+                      </a:endParaRPr>
+                    </a:p>
+                  </a:txBody>
+                  <a:tcPr marL="91440" marR="91440" marT="45720" marB="45720" anchor="ctr">
+                    <a:lnL w="6350" cap="flat" cmpd="sng" algn="ctr">
+                      <a:solidFill>
+                        <a:srgbClr val="E4DADD"/>
+                      </a:solidFill>
+                      <a:prstDash val="solid"/>
+                      <a:round/>
+                      <a:headEnd type="none" w="med" len="med"/>
+                      <a:tailEnd type="none" w="med" len="med"/>
+                    </a:lnL>
+                    <a:lnR w="6350" cap="flat" cmpd="sng" algn="ctr">
+                      <a:solidFill>
+                        <a:srgbClr val="E4DADD"/>
+                      </a:solidFill>
+                      <a:prstDash val="solid"/>
+                      <a:round/>
+                      <a:headEnd type="none" w="med" len="med"/>
+                      <a:tailEnd type="none" w="med" len="med"/>
+                    </a:lnR>
+                    <a:lnT w="6350" cap="flat" cmpd="sng" algn="ctr">
+                      <a:solidFill>
+                        <a:srgbClr val="E4DADD"/>
+                      </a:solidFill>
+                      <a:prstDash val="solid"/>
+                      <a:round/>
+                      <a:headEnd type="none" w="med" len="med"/>
+                      <a:tailEnd type="none" w="med" len="med"/>
+                    </a:lnT>
+                    <a:lnB w="6350" cap="flat" cmpd="sng" algn="ctr">
+                      <a:solidFill>
+                        <a:srgbClr val="E4DADD"/>
+                      </a:solidFill>
+                      <a:prstDash val="solid"/>
+                      <a:round/>
+                      <a:headEnd type="none" w="med" len="med"/>
+                      <a:tailEnd type="none" w="med" len="med"/>
+                    </a:lnB>
+                  </a:tcPr>
+                </a:tc>
+                <a:tc>
+                  <a:txBody>
+                    <a:bodyPr/>
+                    <a:lstStyle/>
+                    <a:p>
+                      <a:pPr algn="r" indent="0" marL="0">
+                        <a:buNone/>
+                      </a:pPr>
+                      <a:r>
+                        <a:rPr lang="en-US" sz="1000" dirty="0">
+                          <a:solidFill>
+                            <a:srgbClr val="1F1A1C"/>
+                          </a:solidFill>
+                          <a:latin typeface="Calibri" pitchFamily="34" charset="0"/>
+                          <a:ea typeface="Calibri" pitchFamily="34" charset="-122"/>
+                          <a:cs typeface="Calibri" pitchFamily="34" charset="-120"/>
+                        </a:rPr>
+                        <a:t>41.5億円</a:t>
+                      </a:r>
+                      <a:endParaRPr lang="en-US" sz="1000" dirty="0">
+                        <a:latin typeface="Calibri" charset="0"/>
+                        <a:ea typeface="Calibri" charset="0"/>
+                        <a:cs typeface="Calibri" charset="0"/>
+                      </a:endParaRPr>
+                    </a:p>
+                  </a:txBody>
+                  <a:tcPr marL="91440" marR="91440" marT="45720" marB="45720" anchor="ctr">
+                    <a:lnL w="6350" cap="flat" cmpd="sng" algn="ctr">
+                      <a:solidFill>
+                        <a:srgbClr val="E4DADD"/>
+                      </a:solidFill>
+                      <a:prstDash val="solid"/>
+                      <a:round/>
+                      <a:headEnd type="none" w="med" len="med"/>
+                      <a:tailEnd type="none" w="med" len="med"/>
+                    </a:lnL>
+                    <a:lnR w="6350" cap="flat" cmpd="sng" algn="ctr">
+                      <a:solidFill>
+                        <a:srgbClr val="E4DADD"/>
+                      </a:solidFill>
+                      <a:prstDash val="solid"/>
+                      <a:round/>
+                      <a:headEnd type="none" w="med" len="med"/>
+                      <a:tailEnd type="none" w="med" len="med"/>
+                    </a:lnR>
+                    <a:lnT w="6350" cap="flat" cmpd="sng" algn="ctr">
+                      <a:solidFill>
+                        <a:srgbClr val="E4DADD"/>
+                      </a:solidFill>
+                      <a:prstDash val="solid"/>
+                      <a:round/>
+                      <a:headEnd type="none" w="med" len="med"/>
+                      <a:tailEnd type="none" w="med" len="med"/>
+                    </a:lnT>
+                    <a:lnB w="6350" cap="flat" cmpd="sng" algn="ctr">
+                      <a:solidFill>
+                        <a:srgbClr val="E4DADD"/>
+                      </a:solidFill>
+                      <a:prstDash val="solid"/>
+                      <a:round/>
+                      <a:headEnd type="none" w="med" len="med"/>
+                      <a:tailEnd type="none" w="med" len="med"/>
+                    </a:lnB>
+                  </a:tcPr>
+                </a:tc>
+                <a:tc>
+                  <a:txBody>
+                    <a:bodyPr/>
+                    <a:lstStyle/>
+                    <a:p>
+                      <a:pPr algn="r" indent="0" marL="0">
+                        <a:buNone/>
+                      </a:pPr>
+                      <a:r>
+                        <a:rPr lang="en-US" sz="1000" dirty="0">
+                          <a:solidFill>
+                            <a:srgbClr val="1F1A1C"/>
+                          </a:solidFill>
+                          <a:latin typeface="Calibri" pitchFamily="34" charset="0"/>
+                          <a:ea typeface="Calibri" pitchFamily="34" charset="-122"/>
+                          <a:cs typeface="Calibri" pitchFamily="34" charset="-120"/>
+                        </a:rPr>
+                        <a:t>25.1億円</a:t>
+                      </a:r>
+                      <a:endParaRPr lang="en-US" sz="1000" dirty="0">
+                        <a:latin typeface="Calibri" charset="0"/>
+                        <a:ea typeface="Calibri" charset="0"/>
+                        <a:cs typeface="Calibri" charset="0"/>
+                      </a:endParaRPr>
+                    </a:p>
+                  </a:txBody>
+                  <a:tcPr marL="91440" marR="91440" marT="45720" marB="45720" anchor="ctr">
+                    <a:lnL w="6350" cap="flat" cmpd="sng" algn="ctr">
+                      <a:solidFill>
+                        <a:srgbClr val="E4DADD"/>
+                      </a:solidFill>
+                      <a:prstDash val="solid"/>
+                      <a:round/>
+                      <a:headEnd type="none" w="med" len="med"/>
+                      <a:tailEnd type="none" w="med" len="med"/>
+                    </a:lnL>
+                    <a:lnR w="6350" cap="flat" cmpd="sng" algn="ctr">
+                      <a:solidFill>
+                        <a:srgbClr val="E4DADD"/>
+                      </a:solidFill>
+                      <a:prstDash val="solid"/>
+                      <a:round/>
+                      <a:headEnd type="none" w="med" len="med"/>
+                      <a:tailEnd type="none" w="med" len="med"/>
+                    </a:lnR>
+                    <a:lnT w="6350" cap="flat" cmpd="sng" algn="ctr">
+                      <a:solidFill>
+                        <a:srgbClr val="E4DADD"/>
+                      </a:solidFill>
+                      <a:prstDash val="solid"/>
+                      <a:round/>
+                      <a:headEnd type="none" w="med" len="med"/>
+                      <a:tailEnd type="none" w="med" len="med"/>
+                    </a:lnT>
+                    <a:lnB w="6350" cap="flat" cmpd="sng" algn="ctr">
+                      <a:solidFill>
+                        <a:srgbClr val="E4DADD"/>
+                      </a:solidFill>
+                      <a:prstDash val="solid"/>
+                      <a:round/>
+                      <a:headEnd type="none" w="med" len="med"/>
+                      <a:tailEnd type="none" w="med" len="med"/>
+                    </a:lnB>
+                  </a:tcPr>
+                </a:tc>
+                <a:tc>
+                  <a:txBody>
+                    <a:bodyPr/>
+                    <a:lstStyle/>
+                    <a:p>
+                      <a:pPr algn="r" indent="0" marL="0">
+                        <a:buNone/>
+                      </a:pPr>
+                      <a:r>
+                        <a:rPr lang="en-US" sz="1000" dirty="0">
+                          <a:solidFill>
+                            <a:srgbClr val="9B2C2C"/>
+                          </a:solidFill>
+                          <a:latin typeface="Calibri" pitchFamily="34" charset="0"/>
+                          <a:ea typeface="Calibri" pitchFamily="34" charset="-122"/>
+                          <a:cs typeface="Calibri" pitchFamily="34" charset="-120"/>
+                        </a:rPr>
+                        <a:t>4.7倍</a:t>
+                      </a:r>
+                      <a:endParaRPr lang="en-US" sz="1000" dirty="0">
+                        <a:latin typeface="Calibri" charset="0"/>
+                        <a:ea typeface="Calibri" charset="0"/>
+                        <a:cs typeface="Calibri" charset="0"/>
+                      </a:endParaRPr>
+                    </a:p>
+                  </a:txBody>
+                  <a:tcPr marL="91440" marR="91440" marT="45720" marB="45720" anchor="ctr">
+                    <a:lnL w="6350" cap="flat" cmpd="sng" algn="ctr">
+                      <a:solidFill>
+                        <a:srgbClr val="E4DADD"/>
+                      </a:solidFill>
+                      <a:prstDash val="solid"/>
+                      <a:round/>
+                      <a:headEnd type="none" w="med" len="med"/>
+                      <a:tailEnd type="none" w="med" len="med"/>
+                    </a:lnL>
+                    <a:lnR w="6350" cap="flat" cmpd="sng" algn="ctr">
+                      <a:solidFill>
+                        <a:srgbClr val="E4DADD"/>
+                      </a:solidFill>
+                      <a:prstDash val="solid"/>
+                      <a:round/>
+                      <a:headEnd type="none" w="med" len="med"/>
+                      <a:tailEnd type="none" w="med" len="med"/>
+                    </a:lnR>
+                    <a:lnT w="6350" cap="flat" cmpd="sng" algn="ctr">
+                      <a:solidFill>
+                        <a:srgbClr val="E4DADD"/>
+                      </a:solidFill>
+                      <a:prstDash val="solid"/>
+                      <a:round/>
+                      <a:headEnd type="none" w="med" len="med"/>
+                      <a:tailEnd type="none" w="med" len="med"/>
+                    </a:lnT>
+                    <a:lnB w="6350" cap="flat" cmpd="sng" algn="ctr">
+                      <a:solidFill>
+                        <a:srgbClr val="E4DADD"/>
+                      </a:solidFill>
+                      <a:prstDash val="solid"/>
+                      <a:round/>
+                      <a:headEnd type="none" w="med" len="med"/>
+                      <a:tailEnd type="none" w="med" len="med"/>
+                    </a:lnB>
+                  </a:tcPr>
+                </a:tc>
+                <a:tc>
+                  <a:txBody>
+                    <a:bodyPr/>
+                    <a:lstStyle/>
+                    <a:p>
+                      <a:pPr algn="r" indent="0" marL="0">
+                        <a:buNone/>
+                      </a:pPr>
+                      <a:r>
+                        <a:rPr lang="en-US" sz="1000" dirty="0">
+                          <a:solidFill>
+                            <a:srgbClr val="A8741A"/>
+                          </a:solidFill>
+                          <a:latin typeface="Calibri" pitchFamily="34" charset="0"/>
+                          <a:ea typeface="Calibri" pitchFamily="34" charset="-122"/>
+                          <a:cs typeface="Calibri" pitchFamily="34" charset="-120"/>
+                        </a:rPr>
+                        <a:t>1.07</a:t>
+                      </a:r>
+                      <a:endParaRPr lang="en-US" sz="1000" dirty="0">
+                        <a:latin typeface="Calibri" charset="0"/>
+                        <a:ea typeface="Calibri" charset="0"/>
+                        <a:cs typeface="Calibri" charset="0"/>
+                      </a:endParaRPr>
+                    </a:p>
+                  </a:txBody>
+                  <a:tcPr marL="91440" marR="91440" marT="45720" marB="45720" anchor="ctr">
+                    <a:lnL w="6350" cap="flat" cmpd="sng" algn="ctr">
+                      <a:solidFill>
+                        <a:srgbClr val="E4DADD"/>
+                      </a:solidFill>
+                      <a:prstDash val="solid"/>
+                      <a:round/>
+                      <a:headEnd type="none" w="med" len="med"/>
+                      <a:tailEnd type="none" w="med" len="med"/>
+                    </a:lnL>
+                    <a:lnR w="6350" cap="flat" cmpd="sng" algn="ctr">
+                      <a:solidFill>
+                        <a:srgbClr val="E4DADD"/>
+                      </a:solidFill>
+                      <a:prstDash val="solid"/>
+                      <a:round/>
+                      <a:headEnd type="none" w="med" len="med"/>
+                      <a:tailEnd type="none" w="med" len="med"/>
+                    </a:lnR>
+                    <a:lnT w="6350" cap="flat" cmpd="sng" algn="ctr">
+                      <a:solidFill>
+                        <a:srgbClr val="E4DADD"/>
+                      </a:solidFill>
+                      <a:prstDash val="solid"/>
+                      <a:round/>
+                      <a:headEnd type="none" w="med" len="med"/>
+                      <a:tailEnd type="none" w="med" len="med"/>
+                    </a:lnT>
+                    <a:lnB w="6350" cap="flat" cmpd="sng" algn="ctr">
+                      <a:solidFill>
+                        <a:srgbClr val="E4DADD"/>
+                      </a:solidFill>
+                      <a:prstDash val="solid"/>
+                      <a:round/>
+                      <a:headEnd type="none" w="med" len="med"/>
+                      <a:tailEnd type="none" w="med" len="med"/>
+                    </a:lnB>
+                  </a:tcPr>
+                </a:tc>
+                <a:tc>
+                  <a:txBody>
+                    <a:bodyPr/>
+                    <a:lstStyle/>
+                    <a:p>
+                      <a:pPr indent="0" marL="0">
+                        <a:buNone/>
+                      </a:pPr>
+                      <a:r>
+                        <a:rPr lang="en-US" sz="1000" dirty="0">
+                          <a:solidFill>
+                            <a:srgbClr val="9B2C2C"/>
+                          </a:solidFill>
+                          <a:latin typeface="Calibri" pitchFamily="34" charset="0"/>
+                          <a:ea typeface="Calibri" pitchFamily="34" charset="-122"/>
+                          <a:cs typeface="Calibri" pitchFamily="34" charset="-120"/>
+                        </a:rPr>
+                        <a:t>3.27億円 &lt; 7.52億円</a:t>
+                      </a:r>
+                      <a:endParaRPr lang="en-US" sz="1000" dirty="0">
+                        <a:latin typeface="Calibri" charset="0"/>
+                        <a:ea typeface="Calibri" charset="0"/>
+                        <a:cs typeface="Calibri" charset="0"/>
+                      </a:endParaRPr>
+                    </a:p>
+                  </a:txBody>
+                  <a:tcPr marL="91440" marR="91440" marT="45720" marB="45720" anchor="ctr">
+                    <a:lnL w="6350" cap="flat" cmpd="sng" algn="ctr">
+                      <a:solidFill>
+                        <a:srgbClr val="E4DADD"/>
+                      </a:solidFill>
+                      <a:prstDash val="solid"/>
+                      <a:round/>
+                      <a:headEnd type="none" w="med" len="med"/>
+                      <a:tailEnd type="none" w="med" len="med"/>
+                    </a:lnL>
+                    <a:lnR w="6350" cap="flat" cmpd="sng" algn="ctr">
+                      <a:solidFill>
+                        <a:srgbClr val="E4DADD"/>
+                      </a:solidFill>
+                      <a:prstDash val="solid"/>
+                      <a:round/>
+                      <a:headEnd type="none" w="med" len="med"/>
+                      <a:tailEnd type="none" w="med" len="med"/>
+                    </a:lnR>
+                    <a:lnT w="6350" cap="flat" cmpd="sng" algn="ctr">
+                      <a:solidFill>
+                        <a:srgbClr val="E4DADD"/>
+                      </a:solidFill>
+                      <a:prstDash val="solid"/>
+                      <a:round/>
+                      <a:headEnd type="none" w="med" len="med"/>
+                      <a:tailEnd type="none" w="med" len="med"/>
+                    </a:lnT>
+                    <a:lnB w="6350" cap="flat" cmpd="sng" algn="ctr">
+                      <a:solidFill>
+                        <a:srgbClr val="E4DADD"/>
+                      </a:solidFill>
+                      <a:prstDash val="solid"/>
+                      <a:round/>
+                      <a:headEnd type="none" w="med" len="med"/>
+                      <a:tailEnd type="none" w="med" len="med"/>
+                    </a:lnB>
+                  </a:tcPr>
+                </a:tc>
+                <a:tc>
+                  <a:txBody>
+                    <a:bodyPr/>
+                    <a:lstStyle/>
+                    <a:p>
+                      <a:pPr indent="0" marL="0">
+                        <a:buNone/>
+                      </a:pPr>
+                      <a:r>
+                        <a:rPr lang="en-US" sz="1000" b="1" dirty="0">
+                          <a:solidFill>
+                            <a:srgbClr val="9B2C2C"/>
+                          </a:solidFill>
+                          <a:latin typeface="Calibri" pitchFamily="34" charset="0"/>
+                          <a:ea typeface="Calibri" pitchFamily="34" charset="-122"/>
+                          <a:cs typeface="Calibri" pitchFamily="34" charset="-120"/>
+                        </a:rPr>
+                        <a:t>× 7年で返し切れない</a:t>
+                      </a:r>
+                      <a:endParaRPr lang="en-US" sz="1000" dirty="0">
+                        <a:latin typeface="Calibri" charset="0"/>
+                        <a:ea typeface="Calibri" charset="0"/>
+                        <a:cs typeface="Calibri" charset="0"/>
+                      </a:endParaRPr>
+                    </a:p>
+                  </a:txBody>
+                  <a:tcPr marL="91440" marR="91440" marT="45720" marB="45720" anchor="ctr">
+                    <a:lnL w="6350" cap="flat" cmpd="sng" algn="ctr">
+                      <a:solidFill>
+                        <a:srgbClr val="E4DADD"/>
+                      </a:solidFill>
+                      <a:prstDash val="solid"/>
+                      <a:round/>
+                      <a:headEnd type="none" w="med" len="med"/>
+                      <a:tailEnd type="none" w="med" len="med"/>
+                    </a:lnL>
+                    <a:lnR w="6350" cap="flat" cmpd="sng" algn="ctr">
+                      <a:solidFill>
+                        <a:srgbClr val="E4DADD"/>
+                      </a:solidFill>
+                      <a:prstDash val="solid"/>
+                      <a:round/>
+                      <a:headEnd type="none" w="med" len="med"/>
+                      <a:tailEnd type="none" w="med" len="med"/>
+                    </a:lnR>
+                    <a:lnT w="6350" cap="flat" cmpd="sng" algn="ctr">
+                      <a:solidFill>
+                        <a:srgbClr val="E4DADD"/>
+                      </a:solidFill>
+                      <a:prstDash val="solid"/>
+                      <a:round/>
+                      <a:headEnd type="none" w="med" len="med"/>
+                      <a:tailEnd type="none" w="med" len="med"/>
+                    </a:lnT>
+                    <a:lnB w="6350" cap="flat" cmpd="sng" algn="ctr">
+                      <a:solidFill>
+                        <a:srgbClr val="E4DADD"/>
+                      </a:solidFill>
+                      <a:prstDash val="solid"/>
+                      <a:round/>
+                      <a:headEnd type="none" w="med" len="med"/>
+                      <a:tailEnd type="none" w="med" len="med"/>
+                    </a:lnB>
+                  </a:tcPr>
+                </a:tc>
+              </a:tr>
+              <a:tr h="457200">
+                <a:tc>
+                  <a:txBody>
+                    <a:bodyPr/>
+                    <a:lstStyle/>
+                    <a:p>
+                      <a:pPr indent="0" marL="0">
+                        <a:buNone/>
+                      </a:pPr>
+                      <a:r>
+                        <a:rPr lang="en-US" sz="1000" b="1" dirty="0">
+                          <a:solidFill>
+                            <a:srgbClr val="1F1A1C"/>
+                          </a:solidFill>
+                          <a:latin typeface="Calibri" pitchFamily="34" charset="0"/>
+                          <a:ea typeface="Calibri" pitchFamily="34" charset="-122"/>
+                          <a:cs typeface="Calibri" pitchFamily="34" charset="-120"/>
+                        </a:rPr>
+                        <a:t>5.1億円</a:t>
+                      </a:r>
+                      <a:endParaRPr lang="en-US" sz="1000" dirty="0">
+                        <a:latin typeface="Calibri" charset="0"/>
+                        <a:ea typeface="Calibri" charset="0"/>
+                        <a:cs typeface="Calibri" charset="0"/>
+                      </a:endParaRPr>
+                    </a:p>
+                  </a:txBody>
+                  <a:tcPr marL="91440" marR="91440" marT="45720" marB="45720" anchor="ctr">
+                    <a:lnL w="6350" cap="flat" cmpd="sng" algn="ctr">
+                      <a:solidFill>
+                        <a:srgbClr val="E4DADD"/>
+                      </a:solidFill>
+                      <a:prstDash val="solid"/>
+                      <a:round/>
+                      <a:headEnd type="none" w="med" len="med"/>
+                      <a:tailEnd type="none" w="med" len="med"/>
+                    </a:lnL>
+                    <a:lnR w="6350" cap="flat" cmpd="sng" algn="ctr">
+                      <a:solidFill>
+                        <a:srgbClr val="E4DADD"/>
+                      </a:solidFill>
+                      <a:prstDash val="solid"/>
+                      <a:round/>
+                      <a:headEnd type="none" w="med" len="med"/>
+                      <a:tailEnd type="none" w="med" len="med"/>
+                    </a:lnR>
+                    <a:lnT w="6350" cap="flat" cmpd="sng" algn="ctr">
+                      <a:solidFill>
+                        <a:srgbClr val="E4DADD"/>
+                      </a:solidFill>
+                      <a:prstDash val="solid"/>
+                      <a:round/>
+                      <a:headEnd type="none" w="med" len="med"/>
+                      <a:tailEnd type="none" w="med" len="med"/>
+                    </a:lnT>
+                    <a:lnB w="6350" cap="flat" cmpd="sng" algn="ctr">
+                      <a:solidFill>
+                        <a:srgbClr val="E4DADD"/>
+                      </a:solidFill>
+                      <a:prstDash val="solid"/>
+                      <a:round/>
+                      <a:headEnd type="none" w="med" len="med"/>
+                      <a:tailEnd type="none" w="med" len="med"/>
+                    </a:lnB>
+                    <a:solidFill>
+                      <a:srgbClr val="EFE6E9"/>
+                    </a:solidFill>
+                  </a:tcPr>
+                </a:tc>
+                <a:tc>
+                  <a:txBody>
+                    <a:bodyPr/>
+                    <a:lstStyle/>
+                    <a:p>
+                      <a:pPr algn="r" indent="0" marL="0">
+                        <a:buNone/>
+                      </a:pPr>
+                      <a:r>
+                        <a:rPr lang="en-US" sz="1000" dirty="0">
+                          <a:solidFill>
+                            <a:srgbClr val="1F1A1C"/>
+                          </a:solidFill>
+                          <a:latin typeface="Calibri" pitchFamily="34" charset="0"/>
+                          <a:ea typeface="Calibri" pitchFamily="34" charset="-122"/>
+                          <a:cs typeface="Calibri" pitchFamily="34" charset="-120"/>
+                        </a:rPr>
+                        <a:t>36.4億円</a:t>
+                      </a:r>
+                      <a:endParaRPr lang="en-US" sz="1000" dirty="0">
+                        <a:latin typeface="Calibri" charset="0"/>
+                        <a:ea typeface="Calibri" charset="0"/>
+                        <a:cs typeface="Calibri" charset="0"/>
+                      </a:endParaRPr>
+                    </a:p>
+                  </a:txBody>
+                  <a:tcPr marL="91440" marR="91440" marT="45720" marB="45720" anchor="ctr">
+                    <a:lnL w="6350" cap="flat" cmpd="sng" algn="ctr">
+                      <a:solidFill>
+                        <a:srgbClr val="E4DADD"/>
+                      </a:solidFill>
+                      <a:prstDash val="solid"/>
+                      <a:round/>
+                      <a:headEnd type="none" w="med" len="med"/>
+                      <a:tailEnd type="none" w="med" len="med"/>
+                    </a:lnL>
+                    <a:lnR w="6350" cap="flat" cmpd="sng" algn="ctr">
+                      <a:solidFill>
+                        <a:srgbClr val="E4DADD"/>
+                      </a:solidFill>
+                      <a:prstDash val="solid"/>
+                      <a:round/>
+                      <a:headEnd type="none" w="med" len="med"/>
+                      <a:tailEnd type="none" w="med" len="med"/>
+                    </a:lnR>
+                    <a:lnT w="6350" cap="flat" cmpd="sng" algn="ctr">
+                      <a:solidFill>
+                        <a:srgbClr val="E4DADD"/>
+                      </a:solidFill>
+                      <a:prstDash val="solid"/>
+                      <a:round/>
+                      <a:headEnd type="none" w="med" len="med"/>
+                      <a:tailEnd type="none" w="med" len="med"/>
+                    </a:lnT>
+                    <a:lnB w="6350" cap="flat" cmpd="sng" algn="ctr">
+                      <a:solidFill>
+                        <a:srgbClr val="E4DADD"/>
+                      </a:solidFill>
+                      <a:prstDash val="solid"/>
+                      <a:round/>
+                      <a:headEnd type="none" w="med" len="med"/>
+                      <a:tailEnd type="none" w="med" len="med"/>
+                    </a:lnB>
+                    <a:solidFill>
+                      <a:srgbClr val="EFE6E9"/>
+                    </a:solidFill>
+                  </a:tcPr>
+                </a:tc>
+                <a:tc>
+                  <a:txBody>
+                    <a:bodyPr/>
+                    <a:lstStyle/>
+                    <a:p>
+                      <a:pPr algn="r" indent="0" marL="0">
+                        <a:buNone/>
+                      </a:pPr>
+                      <a:r>
+                        <a:rPr lang="en-US" sz="1000" b="1" dirty="0">
+                          <a:solidFill>
+                            <a:srgbClr val="1F1A1C"/>
+                          </a:solidFill>
+                          <a:latin typeface="Calibri" pitchFamily="34" charset="0"/>
+                          <a:ea typeface="Calibri" pitchFamily="34" charset="-122"/>
+                          <a:cs typeface="Calibri" pitchFamily="34" charset="-120"/>
+                        </a:rPr>
+                        <a:t>20.0億円</a:t>
+                      </a:r>
+                      <a:endParaRPr lang="en-US" sz="1000" dirty="0">
+                        <a:latin typeface="Calibri" charset="0"/>
+                        <a:ea typeface="Calibri" charset="0"/>
+                        <a:cs typeface="Calibri" charset="0"/>
+                      </a:endParaRPr>
+                    </a:p>
+                  </a:txBody>
+                  <a:tcPr marL="91440" marR="91440" marT="45720" marB="45720" anchor="ctr">
+                    <a:lnL w="6350" cap="flat" cmpd="sng" algn="ctr">
+                      <a:solidFill>
+                        <a:srgbClr val="E4DADD"/>
+                      </a:solidFill>
+                      <a:prstDash val="solid"/>
+                      <a:round/>
+                      <a:headEnd type="none" w="med" len="med"/>
+                      <a:tailEnd type="none" w="med" len="med"/>
+                    </a:lnL>
+                    <a:lnR w="6350" cap="flat" cmpd="sng" algn="ctr">
+                      <a:solidFill>
+                        <a:srgbClr val="E4DADD"/>
+                      </a:solidFill>
+                      <a:prstDash val="solid"/>
+                      <a:round/>
+                      <a:headEnd type="none" w="med" len="med"/>
+                      <a:tailEnd type="none" w="med" len="med"/>
+                    </a:lnR>
+                    <a:lnT w="6350" cap="flat" cmpd="sng" algn="ctr">
+                      <a:solidFill>
+                        <a:srgbClr val="E4DADD"/>
+                      </a:solidFill>
+                      <a:prstDash val="solid"/>
+                      <a:round/>
+                      <a:headEnd type="none" w="med" len="med"/>
+                      <a:tailEnd type="none" w="med" len="med"/>
+                    </a:lnT>
+                    <a:lnB w="6350" cap="flat" cmpd="sng" algn="ctr">
+                      <a:solidFill>
+                        <a:srgbClr val="E4DADD"/>
+                      </a:solidFill>
+                      <a:prstDash val="solid"/>
+                      <a:round/>
+                      <a:headEnd type="none" w="med" len="med"/>
+                      <a:tailEnd type="none" w="med" len="med"/>
+                    </a:lnB>
+                    <a:solidFill>
+                      <a:srgbClr val="EFE6E9"/>
+                    </a:solidFill>
+                  </a:tcPr>
+                </a:tc>
+                <a:tc>
+                  <a:txBody>
+                    <a:bodyPr/>
+                    <a:lstStyle/>
+                    <a:p>
+                      <a:pPr algn="r" indent="0" marL="0">
+                        <a:buNone/>
+                      </a:pPr>
+                      <a:r>
+                        <a:rPr lang="en-US" sz="1000" dirty="0">
+                          <a:solidFill>
+                            <a:srgbClr val="1F1A1C"/>
+                          </a:solidFill>
+                          <a:latin typeface="Calibri" pitchFamily="34" charset="0"/>
+                          <a:ea typeface="Calibri" pitchFamily="34" charset="-122"/>
+                          <a:cs typeface="Calibri" pitchFamily="34" charset="-120"/>
+                        </a:rPr>
+                        <a:t>3.8倍</a:t>
+                      </a:r>
+                      <a:endParaRPr lang="en-US" sz="1000" dirty="0">
+                        <a:latin typeface="Calibri" charset="0"/>
+                        <a:ea typeface="Calibri" charset="0"/>
+                        <a:cs typeface="Calibri" charset="0"/>
+                      </a:endParaRPr>
+                    </a:p>
+                  </a:txBody>
+                  <a:tcPr marL="91440" marR="91440" marT="45720" marB="45720" anchor="ctr">
+                    <a:lnL w="6350" cap="flat" cmpd="sng" algn="ctr">
+                      <a:solidFill>
+                        <a:srgbClr val="E4DADD"/>
+                      </a:solidFill>
+                      <a:prstDash val="solid"/>
+                      <a:round/>
+                      <a:headEnd type="none" w="med" len="med"/>
+                      <a:tailEnd type="none" w="med" len="med"/>
+                    </a:lnL>
+                    <a:lnR w="6350" cap="flat" cmpd="sng" algn="ctr">
+                      <a:solidFill>
+                        <a:srgbClr val="E4DADD"/>
+                      </a:solidFill>
+                      <a:prstDash val="solid"/>
+                      <a:round/>
+                      <a:headEnd type="none" w="med" len="med"/>
+                      <a:tailEnd type="none" w="med" len="med"/>
+                    </a:lnR>
+                    <a:lnT w="6350" cap="flat" cmpd="sng" algn="ctr">
+                      <a:solidFill>
+                        <a:srgbClr val="E4DADD"/>
+                      </a:solidFill>
+                      <a:prstDash val="solid"/>
+                      <a:round/>
+                      <a:headEnd type="none" w="med" len="med"/>
+                      <a:tailEnd type="none" w="med" len="med"/>
+                    </a:lnT>
+                    <a:lnB w="6350" cap="flat" cmpd="sng" algn="ctr">
+                      <a:solidFill>
+                        <a:srgbClr val="E4DADD"/>
+                      </a:solidFill>
+                      <a:prstDash val="solid"/>
+                      <a:round/>
+                      <a:headEnd type="none" w="med" len="med"/>
+                      <a:tailEnd type="none" w="med" len="med"/>
+                    </a:lnB>
+                    <a:solidFill>
+                      <a:srgbClr val="EFE6E9"/>
+                    </a:solidFill>
+                  </a:tcPr>
+                </a:tc>
+                <a:tc>
+                  <a:txBody>
+                    <a:bodyPr/>
+                    <a:lstStyle/>
+                    <a:p>
+                      <a:pPr algn="r" indent="0" marL="0">
+                        <a:buNone/>
+                      </a:pPr>
+                      <a:r>
+                        <a:rPr lang="en-US" sz="1000" b="1" dirty="0">
+                          <a:solidFill>
+                            <a:srgbClr val="2E6F4E"/>
+                          </a:solidFill>
+                          <a:latin typeface="Calibri" pitchFamily="34" charset="0"/>
+                          <a:ea typeface="Calibri" pitchFamily="34" charset="-122"/>
+                          <a:cs typeface="Calibri" pitchFamily="34" charset="-120"/>
+                        </a:rPr>
+                        <a:t>1.35</a:t>
+                      </a:r>
+                      <a:endParaRPr lang="en-US" sz="1000" dirty="0">
+                        <a:latin typeface="Calibri" charset="0"/>
+                        <a:ea typeface="Calibri" charset="0"/>
+                        <a:cs typeface="Calibri" charset="0"/>
+                      </a:endParaRPr>
+                    </a:p>
+                  </a:txBody>
+                  <a:tcPr marL="91440" marR="91440" marT="45720" marB="45720" anchor="ctr">
+                    <a:lnL w="6350" cap="flat" cmpd="sng" algn="ctr">
+                      <a:solidFill>
+                        <a:srgbClr val="E4DADD"/>
+                      </a:solidFill>
+                      <a:prstDash val="solid"/>
+                      <a:round/>
+                      <a:headEnd type="none" w="med" len="med"/>
+                      <a:tailEnd type="none" w="med" len="med"/>
+                    </a:lnL>
+                    <a:lnR w="6350" cap="flat" cmpd="sng" algn="ctr">
+                      <a:solidFill>
+                        <a:srgbClr val="E4DADD"/>
+                      </a:solidFill>
+                      <a:prstDash val="solid"/>
+                      <a:round/>
+                      <a:headEnd type="none" w="med" len="med"/>
+                      <a:tailEnd type="none" w="med" len="med"/>
+                    </a:lnR>
+                    <a:lnT w="6350" cap="flat" cmpd="sng" algn="ctr">
+                      <a:solidFill>
+                        <a:srgbClr val="E4DADD"/>
+                      </a:solidFill>
+                      <a:prstDash val="solid"/>
+                      <a:round/>
+                      <a:headEnd type="none" w="med" len="med"/>
+                      <a:tailEnd type="none" w="med" len="med"/>
+                    </a:lnT>
+                    <a:lnB w="6350" cap="flat" cmpd="sng" algn="ctr">
+                      <a:solidFill>
+                        <a:srgbClr val="E4DADD"/>
+                      </a:solidFill>
+                      <a:prstDash val="solid"/>
+                      <a:round/>
+                      <a:headEnd type="none" w="med" len="med"/>
+                      <a:tailEnd type="none" w="med" len="med"/>
+                    </a:lnB>
+                    <a:solidFill>
+                      <a:srgbClr val="EFE6E9"/>
+                    </a:solidFill>
+                  </a:tcPr>
+                </a:tc>
+                <a:tc>
+                  <a:txBody>
+                    <a:bodyPr/>
+                    <a:lstStyle/>
+                    <a:p>
+                      <a:pPr indent="0" marL="0">
+                        <a:buNone/>
+                      </a:pPr>
+                      <a:r>
+                        <a:rPr lang="en-US" sz="1000" dirty="0">
+                          <a:solidFill>
+                            <a:srgbClr val="2E6F4E"/>
+                          </a:solidFill>
+                          <a:latin typeface="Calibri" pitchFamily="34" charset="0"/>
+                          <a:ea typeface="Calibri" pitchFamily="34" charset="-122"/>
+                          <a:cs typeface="Calibri" pitchFamily="34" charset="-120"/>
+                        </a:rPr>
+                        <a:t>7.56億円 &gt; 6.00億円</a:t>
+                      </a:r>
+                      <a:endParaRPr lang="en-US" sz="1000" dirty="0">
+                        <a:latin typeface="Calibri" charset="0"/>
+                        <a:ea typeface="Calibri" charset="0"/>
+                        <a:cs typeface="Calibri" charset="0"/>
+                      </a:endParaRPr>
+                    </a:p>
+                  </a:txBody>
+                  <a:tcPr marL="91440" marR="91440" marT="45720" marB="45720" anchor="ctr">
+                    <a:lnL w="6350" cap="flat" cmpd="sng" algn="ctr">
+                      <a:solidFill>
+                        <a:srgbClr val="E4DADD"/>
+                      </a:solidFill>
+                      <a:prstDash val="solid"/>
+                      <a:round/>
+                      <a:headEnd type="none" w="med" len="med"/>
+                      <a:tailEnd type="none" w="med" len="med"/>
+                    </a:lnL>
+                    <a:lnR w="6350" cap="flat" cmpd="sng" algn="ctr">
+                      <a:solidFill>
+                        <a:srgbClr val="E4DADD"/>
+                      </a:solidFill>
+                      <a:prstDash val="solid"/>
+                      <a:round/>
+                      <a:headEnd type="none" w="med" len="med"/>
+                      <a:tailEnd type="none" w="med" len="med"/>
+                    </a:lnR>
+                    <a:lnT w="6350" cap="flat" cmpd="sng" algn="ctr">
+                      <a:solidFill>
+                        <a:srgbClr val="E4DADD"/>
+                      </a:solidFill>
+                      <a:prstDash val="solid"/>
+                      <a:round/>
+                      <a:headEnd type="none" w="med" len="med"/>
+                      <a:tailEnd type="none" w="med" len="med"/>
+                    </a:lnT>
+                    <a:lnB w="6350" cap="flat" cmpd="sng" algn="ctr">
+                      <a:solidFill>
+                        <a:srgbClr val="E4DADD"/>
+                      </a:solidFill>
+                      <a:prstDash val="solid"/>
+                      <a:round/>
+                      <a:headEnd type="none" w="med" len="med"/>
+                      <a:tailEnd type="none" w="med" len="med"/>
+                    </a:lnB>
+                    <a:solidFill>
+                      <a:srgbClr val="EFE6E9"/>
+                    </a:solidFill>
+                  </a:tcPr>
+                </a:tc>
+                <a:tc>
+                  <a:txBody>
+                    <a:bodyPr/>
+                    <a:lstStyle/>
+                    <a:p>
+                      <a:pPr indent="0" marL="0">
+                        <a:buNone/>
+                      </a:pPr>
+                      <a:r>
+                        <a:rPr lang="en-US" sz="1000" b="1" dirty="0">
+                          <a:solidFill>
+                            <a:srgbClr val="2E6F4E"/>
+                          </a:solidFill>
+                          <a:latin typeface="Calibri" pitchFamily="34" charset="0"/>
+                          <a:ea typeface="Calibri" pitchFamily="34" charset="-122"/>
+                          <a:cs typeface="Calibri" pitchFamily="34" charset="-120"/>
+                        </a:rPr>
+                        <a:t>◎ 最小構成</a:t>
+                      </a:r>
+                      <a:endParaRPr lang="en-US" sz="1000" dirty="0">
+                        <a:latin typeface="Calibri" charset="0"/>
+                        <a:ea typeface="Calibri" charset="0"/>
+                        <a:cs typeface="Calibri" charset="0"/>
+                      </a:endParaRPr>
+                    </a:p>
+                  </a:txBody>
+                  <a:tcPr marL="91440" marR="91440" marT="45720" marB="45720" anchor="ctr">
+                    <a:lnL w="6350" cap="flat" cmpd="sng" algn="ctr">
+                      <a:solidFill>
+                        <a:srgbClr val="E4DADD"/>
+                      </a:solidFill>
+                      <a:prstDash val="solid"/>
+                      <a:round/>
+                      <a:headEnd type="none" w="med" len="med"/>
+                      <a:tailEnd type="none" w="med" len="med"/>
+                    </a:lnL>
+                    <a:lnR w="6350" cap="flat" cmpd="sng" algn="ctr">
+                      <a:solidFill>
+                        <a:srgbClr val="E4DADD"/>
+                      </a:solidFill>
+                      <a:prstDash val="solid"/>
+                      <a:round/>
+                      <a:headEnd type="none" w="med" len="med"/>
+                      <a:tailEnd type="none" w="med" len="med"/>
+                    </a:lnR>
+                    <a:lnT w="6350" cap="flat" cmpd="sng" algn="ctr">
+                      <a:solidFill>
+                        <a:srgbClr val="E4DADD"/>
+                      </a:solidFill>
+                      <a:prstDash val="solid"/>
+                      <a:round/>
+                      <a:headEnd type="none" w="med" len="med"/>
+                      <a:tailEnd type="none" w="med" len="med"/>
+                    </a:lnT>
+                    <a:lnB w="6350" cap="flat" cmpd="sng" algn="ctr">
+                      <a:solidFill>
+                        <a:srgbClr val="E4DADD"/>
+                      </a:solidFill>
+                      <a:prstDash val="solid"/>
+                      <a:round/>
+                      <a:headEnd type="none" w="med" len="med"/>
+                      <a:tailEnd type="none" w="med" len="med"/>
+                    </a:lnB>
+                    <a:solidFill>
+                      <a:srgbClr val="EFE6E9"/>
+                    </a:solidFill>
+                  </a:tcPr>
+                </a:tc>
+              </a:tr>
+              <a:tr h="457200">
+                <a:tc>
+                  <a:txBody>
+                    <a:bodyPr/>
+                    <a:lstStyle/>
+                    <a:p>
+                      <a:pPr indent="0" marL="0">
+                        <a:buNone/>
+                      </a:pPr>
+                      <a:r>
+                        <a:rPr lang="en-US" sz="1000" b="1" dirty="0">
+                          <a:solidFill>
+                            <a:srgbClr val="1F1A1C"/>
+                          </a:solidFill>
+                          <a:latin typeface="Calibri" pitchFamily="34" charset="0"/>
+                          <a:ea typeface="Calibri" pitchFamily="34" charset="-122"/>
+                          <a:cs typeface="Calibri" pitchFamily="34" charset="-120"/>
+                        </a:rPr>
+                        <a:t>10.0億円</a:t>
+                      </a:r>
+                      <a:endParaRPr lang="en-US" sz="1000" dirty="0">
+                        <a:latin typeface="Calibri" charset="0"/>
+                        <a:ea typeface="Calibri" charset="0"/>
+                        <a:cs typeface="Calibri" charset="0"/>
+                      </a:endParaRPr>
+                    </a:p>
+                  </a:txBody>
+                  <a:tcPr marL="91440" marR="91440" marT="45720" marB="45720" anchor="ctr">
+                    <a:lnL w="6350" cap="flat" cmpd="sng" algn="ctr">
+                      <a:solidFill>
+                        <a:srgbClr val="E4DADD"/>
+                      </a:solidFill>
+                      <a:prstDash val="solid"/>
+                      <a:round/>
+                      <a:headEnd type="none" w="med" len="med"/>
+                      <a:tailEnd type="none" w="med" len="med"/>
+                    </a:lnL>
+                    <a:lnR w="6350" cap="flat" cmpd="sng" algn="ctr">
+                      <a:solidFill>
+                        <a:srgbClr val="E4DADD"/>
+                      </a:solidFill>
+                      <a:prstDash val="solid"/>
+                      <a:round/>
+                      <a:headEnd type="none" w="med" len="med"/>
+                      <a:tailEnd type="none" w="med" len="med"/>
+                    </a:lnR>
+                    <a:lnT w="6350" cap="flat" cmpd="sng" algn="ctr">
+                      <a:solidFill>
+                        <a:srgbClr val="E4DADD"/>
+                      </a:solidFill>
+                      <a:prstDash val="solid"/>
+                      <a:round/>
+                      <a:headEnd type="none" w="med" len="med"/>
+                      <a:tailEnd type="none" w="med" len="med"/>
+                    </a:lnT>
+                    <a:lnB w="6350" cap="flat" cmpd="sng" algn="ctr">
+                      <a:solidFill>
+                        <a:srgbClr val="E4DADD"/>
+                      </a:solidFill>
+                      <a:prstDash val="solid"/>
+                      <a:round/>
+                      <a:headEnd type="none" w="med" len="med"/>
+                      <a:tailEnd type="none" w="med" len="med"/>
+                    </a:lnB>
+                  </a:tcPr>
+                </a:tc>
+                <a:tc>
+                  <a:txBody>
+                    <a:bodyPr/>
+                    <a:lstStyle/>
+                    <a:p>
+                      <a:pPr algn="r" indent="0" marL="0">
+                        <a:buNone/>
+                      </a:pPr>
+                      <a:r>
+                        <a:rPr lang="en-US" sz="1000" dirty="0">
+                          <a:solidFill>
+                            <a:srgbClr val="1F1A1C"/>
+                          </a:solidFill>
+                          <a:latin typeface="Calibri" pitchFamily="34" charset="0"/>
+                          <a:ea typeface="Calibri" pitchFamily="34" charset="-122"/>
+                          <a:cs typeface="Calibri" pitchFamily="34" charset="-120"/>
+                        </a:rPr>
+                        <a:t>31.5億円</a:t>
+                      </a:r>
+                      <a:endParaRPr lang="en-US" sz="1000" dirty="0">
+                        <a:latin typeface="Calibri" charset="0"/>
+                        <a:ea typeface="Calibri" charset="0"/>
+                        <a:cs typeface="Calibri" charset="0"/>
+                      </a:endParaRPr>
+                    </a:p>
+                  </a:txBody>
+                  <a:tcPr marL="91440" marR="91440" marT="45720" marB="45720" anchor="ctr">
+                    <a:lnL w="6350" cap="flat" cmpd="sng" algn="ctr">
+                      <a:solidFill>
+                        <a:srgbClr val="E4DADD"/>
+                      </a:solidFill>
+                      <a:prstDash val="solid"/>
+                      <a:round/>
+                      <a:headEnd type="none" w="med" len="med"/>
+                      <a:tailEnd type="none" w="med" len="med"/>
+                    </a:lnL>
+                    <a:lnR w="6350" cap="flat" cmpd="sng" algn="ctr">
+                      <a:solidFill>
+                        <a:srgbClr val="E4DADD"/>
+                      </a:solidFill>
+                      <a:prstDash val="solid"/>
+                      <a:round/>
+                      <a:headEnd type="none" w="med" len="med"/>
+                      <a:tailEnd type="none" w="med" len="med"/>
+                    </a:lnR>
+                    <a:lnT w="6350" cap="flat" cmpd="sng" algn="ctr">
+                      <a:solidFill>
+                        <a:srgbClr val="E4DADD"/>
+                      </a:solidFill>
+                      <a:prstDash val="solid"/>
+                      <a:round/>
+                      <a:headEnd type="none" w="med" len="med"/>
+                      <a:tailEnd type="none" w="med" len="med"/>
+                    </a:lnT>
+                    <a:lnB w="6350" cap="flat" cmpd="sng" algn="ctr">
+                      <a:solidFill>
+                        <a:srgbClr val="E4DADD"/>
+                      </a:solidFill>
+                      <a:prstDash val="solid"/>
+                      <a:round/>
+                      <a:headEnd type="none" w="med" len="med"/>
+                      <a:tailEnd type="none" w="med" len="med"/>
+                    </a:lnB>
+                  </a:tcPr>
+                </a:tc>
+                <a:tc>
+                  <a:txBody>
+                    <a:bodyPr/>
+                    <a:lstStyle/>
+                    <a:p>
+                      <a:pPr algn="r" indent="0" marL="0">
+                        <a:buNone/>
+                      </a:pPr>
+                      <a:r>
+                        <a:rPr lang="en-US" sz="1000" dirty="0">
+                          <a:solidFill>
+                            <a:srgbClr val="1F1A1C"/>
+                          </a:solidFill>
+                          <a:latin typeface="Calibri" pitchFamily="34" charset="0"/>
+                          <a:ea typeface="Calibri" pitchFamily="34" charset="-122"/>
+                          <a:cs typeface="Calibri" pitchFamily="34" charset="-120"/>
+                        </a:rPr>
+                        <a:t>15.1億円</a:t>
+                      </a:r>
+                      <a:endParaRPr lang="en-US" sz="1000" dirty="0">
+                        <a:latin typeface="Calibri" charset="0"/>
+                        <a:ea typeface="Calibri" charset="0"/>
+                        <a:cs typeface="Calibri" charset="0"/>
+                      </a:endParaRPr>
+                    </a:p>
+                  </a:txBody>
+                  <a:tcPr marL="91440" marR="91440" marT="45720" marB="45720" anchor="ctr">
+                    <a:lnL w="6350" cap="flat" cmpd="sng" algn="ctr">
+                      <a:solidFill>
+                        <a:srgbClr val="E4DADD"/>
+                      </a:solidFill>
+                      <a:prstDash val="solid"/>
+                      <a:round/>
+                      <a:headEnd type="none" w="med" len="med"/>
+                      <a:tailEnd type="none" w="med" len="med"/>
+                    </a:lnL>
+                    <a:lnR w="6350" cap="flat" cmpd="sng" algn="ctr">
+                      <a:solidFill>
+                        <a:srgbClr val="E4DADD"/>
+                      </a:solidFill>
+                      <a:prstDash val="solid"/>
+                      <a:round/>
+                      <a:headEnd type="none" w="med" len="med"/>
+                      <a:tailEnd type="none" w="med" len="med"/>
+                    </a:lnR>
+                    <a:lnT w="6350" cap="flat" cmpd="sng" algn="ctr">
+                      <a:solidFill>
+                        <a:srgbClr val="E4DADD"/>
+                      </a:solidFill>
+                      <a:prstDash val="solid"/>
+                      <a:round/>
+                      <a:headEnd type="none" w="med" len="med"/>
+                      <a:tailEnd type="none" w="med" len="med"/>
+                    </a:lnT>
+                    <a:lnB w="6350" cap="flat" cmpd="sng" algn="ctr">
+                      <a:solidFill>
+                        <a:srgbClr val="E4DADD"/>
+                      </a:solidFill>
+                      <a:prstDash val="solid"/>
+                      <a:round/>
+                      <a:headEnd type="none" w="med" len="med"/>
+                      <a:tailEnd type="none" w="med" len="med"/>
+                    </a:lnB>
+                  </a:tcPr>
+                </a:tc>
+                <a:tc>
+                  <a:txBody>
+                    <a:bodyPr/>
+                    <a:lstStyle/>
+                    <a:p>
+                      <a:pPr algn="r" indent="0" marL="0">
+                        <a:buNone/>
+                      </a:pPr>
+                      <a:r>
+                        <a:rPr lang="en-US" sz="1000" dirty="0">
+                          <a:solidFill>
+                            <a:srgbClr val="1F1A1C"/>
+                          </a:solidFill>
+                          <a:latin typeface="Calibri" pitchFamily="34" charset="0"/>
+                          <a:ea typeface="Calibri" pitchFamily="34" charset="-122"/>
+                          <a:cs typeface="Calibri" pitchFamily="34" charset="-120"/>
+                        </a:rPr>
+                        <a:t>2.8倍</a:t>
+                      </a:r>
+                      <a:endParaRPr lang="en-US" sz="1000" dirty="0">
+                        <a:latin typeface="Calibri" charset="0"/>
+                        <a:ea typeface="Calibri" charset="0"/>
+                        <a:cs typeface="Calibri" charset="0"/>
+                      </a:endParaRPr>
+                    </a:p>
+                  </a:txBody>
+                  <a:tcPr marL="91440" marR="91440" marT="45720" marB="45720" anchor="ctr">
+                    <a:lnL w="6350" cap="flat" cmpd="sng" algn="ctr">
+                      <a:solidFill>
+                        <a:srgbClr val="E4DADD"/>
+                      </a:solidFill>
+                      <a:prstDash val="solid"/>
+                      <a:round/>
+                      <a:headEnd type="none" w="med" len="med"/>
+                      <a:tailEnd type="none" w="med" len="med"/>
+                    </a:lnL>
+                    <a:lnR w="6350" cap="flat" cmpd="sng" algn="ctr">
+                      <a:solidFill>
+                        <a:srgbClr val="E4DADD"/>
+                      </a:solidFill>
+                      <a:prstDash val="solid"/>
+                      <a:round/>
+                      <a:headEnd type="none" w="med" len="med"/>
+                      <a:tailEnd type="none" w="med" len="med"/>
+                    </a:lnR>
+                    <a:lnT w="6350" cap="flat" cmpd="sng" algn="ctr">
+                      <a:solidFill>
+                        <a:srgbClr val="E4DADD"/>
+                      </a:solidFill>
+                      <a:prstDash val="solid"/>
+                      <a:round/>
+                      <a:headEnd type="none" w="med" len="med"/>
+                      <a:tailEnd type="none" w="med" len="med"/>
+                    </a:lnT>
+                    <a:lnB w="6350" cap="flat" cmpd="sng" algn="ctr">
+                      <a:solidFill>
+                        <a:srgbClr val="E4DADD"/>
+                      </a:solidFill>
+                      <a:prstDash val="solid"/>
+                      <a:round/>
+                      <a:headEnd type="none" w="med" len="med"/>
+                      <a:tailEnd type="none" w="med" len="med"/>
+                    </a:lnB>
+                  </a:tcPr>
+                </a:tc>
+                <a:tc>
+                  <a:txBody>
+                    <a:bodyPr/>
+                    <a:lstStyle/>
+                    <a:p>
+                      <a:pPr algn="r" indent="0" marL="0">
+                        <a:buNone/>
+                      </a:pPr>
+                      <a:r>
+                        <a:rPr lang="en-US" sz="1000" dirty="0">
+                          <a:solidFill>
+                            <a:srgbClr val="2E6F4E"/>
+                          </a:solidFill>
+                          <a:latin typeface="Calibri" pitchFamily="34" charset="0"/>
+                          <a:ea typeface="Calibri" pitchFamily="34" charset="-122"/>
+                          <a:cs typeface="Calibri" pitchFamily="34" charset="-120"/>
+                        </a:rPr>
+                        <a:t>1.79</a:t>
+                      </a:r>
+                      <a:endParaRPr lang="en-US" sz="1000" dirty="0">
+                        <a:latin typeface="Calibri" charset="0"/>
+                        <a:ea typeface="Calibri" charset="0"/>
+                        <a:cs typeface="Calibri" charset="0"/>
+                      </a:endParaRPr>
+                    </a:p>
+                  </a:txBody>
+                  <a:tcPr marL="91440" marR="91440" marT="45720" marB="45720" anchor="ctr">
+                    <a:lnL w="6350" cap="flat" cmpd="sng" algn="ctr">
+                      <a:solidFill>
+                        <a:srgbClr val="E4DADD"/>
+                      </a:solidFill>
+                      <a:prstDash val="solid"/>
+                      <a:round/>
+                      <a:headEnd type="none" w="med" len="med"/>
+                      <a:tailEnd type="none" w="med" len="med"/>
+                    </a:lnL>
+                    <a:lnR w="6350" cap="flat" cmpd="sng" algn="ctr">
+                      <a:solidFill>
+                        <a:srgbClr val="E4DADD"/>
+                      </a:solidFill>
+                      <a:prstDash val="solid"/>
+                      <a:round/>
+                      <a:headEnd type="none" w="med" len="med"/>
+                      <a:tailEnd type="none" w="med" len="med"/>
+                    </a:lnR>
+                    <a:lnT w="6350" cap="flat" cmpd="sng" algn="ctr">
+                      <a:solidFill>
+                        <a:srgbClr val="E4DADD"/>
+                      </a:solidFill>
+                      <a:prstDash val="solid"/>
+                      <a:round/>
+                      <a:headEnd type="none" w="med" len="med"/>
+                      <a:tailEnd type="none" w="med" len="med"/>
+                    </a:lnT>
+                    <a:lnB w="6350" cap="flat" cmpd="sng" algn="ctr">
+                      <a:solidFill>
+                        <a:srgbClr val="E4DADD"/>
+                      </a:solidFill>
+                      <a:prstDash val="solid"/>
+                      <a:round/>
+                      <a:headEnd type="none" w="med" len="med"/>
+                      <a:tailEnd type="none" w="med" len="med"/>
+                    </a:lnB>
+                  </a:tcPr>
+                </a:tc>
+                <a:tc>
+                  <a:txBody>
+                    <a:bodyPr/>
+                    <a:lstStyle/>
+                    <a:p>
+                      <a:pPr indent="0" marL="0">
+                        <a:buNone/>
+                      </a:pPr>
+                      <a:r>
+                        <a:rPr lang="en-US" sz="1000" dirty="0">
+                          <a:solidFill>
+                            <a:srgbClr val="2E6F4E"/>
+                          </a:solidFill>
+                          <a:latin typeface="Calibri" pitchFamily="34" charset="0"/>
+                          <a:ea typeface="Calibri" pitchFamily="34" charset="-122"/>
+                          <a:cs typeface="Calibri" pitchFamily="34" charset="-120"/>
+                        </a:rPr>
+                        <a:t>11.74億円 &gt; 4.52億円</a:t>
+                      </a:r>
+                      <a:endParaRPr lang="en-US" sz="1000" dirty="0">
+                        <a:latin typeface="Calibri" charset="0"/>
+                        <a:ea typeface="Calibri" charset="0"/>
+                        <a:cs typeface="Calibri" charset="0"/>
+                      </a:endParaRPr>
+                    </a:p>
+                  </a:txBody>
+                  <a:tcPr marL="91440" marR="91440" marT="45720" marB="45720" anchor="ctr">
+                    <a:lnL w="6350" cap="flat" cmpd="sng" algn="ctr">
+                      <a:solidFill>
+                        <a:srgbClr val="E4DADD"/>
+                      </a:solidFill>
+                      <a:prstDash val="solid"/>
+                      <a:round/>
+                      <a:headEnd type="none" w="med" len="med"/>
+                      <a:tailEnd type="none" w="med" len="med"/>
+                    </a:lnL>
+                    <a:lnR w="6350" cap="flat" cmpd="sng" algn="ctr">
+                      <a:solidFill>
+                        <a:srgbClr val="E4DADD"/>
+                      </a:solidFill>
+                      <a:prstDash val="solid"/>
+                      <a:round/>
+                      <a:headEnd type="none" w="med" len="med"/>
+                      <a:tailEnd type="none" w="med" len="med"/>
+                    </a:lnR>
+                    <a:lnT w="6350" cap="flat" cmpd="sng" algn="ctr">
+                      <a:solidFill>
+                        <a:srgbClr val="E4DADD"/>
+                      </a:solidFill>
+                      <a:prstDash val="solid"/>
+                      <a:round/>
+                      <a:headEnd type="none" w="med" len="med"/>
+                      <a:tailEnd type="none" w="med" len="med"/>
+                    </a:lnT>
+                    <a:lnB w="6350" cap="flat" cmpd="sng" algn="ctr">
+                      <a:solidFill>
+                        <a:srgbClr val="E4DADD"/>
+                      </a:solidFill>
+                      <a:prstDash val="solid"/>
+                      <a:round/>
+                      <a:headEnd type="none" w="med" len="med"/>
+                      <a:tailEnd type="none" w="med" len="med"/>
+                    </a:lnB>
+                  </a:tcPr>
+                </a:tc>
+                <a:tc>
+                  <a:txBody>
+                    <a:bodyPr/>
+                    <a:lstStyle/>
+                    <a:p>
+                      <a:pPr indent="0" marL="0">
+                        <a:buNone/>
+                      </a:pPr>
+                      <a:r>
+                        <a:rPr lang="en-US" sz="1000" dirty="0">
+                          <a:solidFill>
+                            <a:srgbClr val="2E6F4E"/>
+                          </a:solidFill>
+                          <a:latin typeface="Calibri" pitchFamily="34" charset="0"/>
+                          <a:ea typeface="Calibri" pitchFamily="34" charset="-122"/>
+                          <a:cs typeface="Calibri" pitchFamily="34" charset="-120"/>
+                        </a:rPr>
+                        <a:t>◎ 余裕あり</a:t>
+                      </a:r>
+                      <a:endParaRPr lang="en-US" sz="1000" dirty="0">
+                        <a:latin typeface="Calibri" charset="0"/>
+                        <a:ea typeface="Calibri" charset="0"/>
+                        <a:cs typeface="Calibri" charset="0"/>
+                      </a:endParaRPr>
+                    </a:p>
+                  </a:txBody>
+                  <a:tcPr marL="91440" marR="91440" marT="45720" marB="45720" anchor="ctr">
+                    <a:lnL w="6350" cap="flat" cmpd="sng" algn="ctr">
+                      <a:solidFill>
+                        <a:srgbClr val="E4DADD"/>
+                      </a:solidFill>
+                      <a:prstDash val="solid"/>
+                      <a:round/>
+                      <a:headEnd type="none" w="med" len="med"/>
+                      <a:tailEnd type="none" w="med" len="med"/>
+                    </a:lnL>
+                    <a:lnR w="6350" cap="flat" cmpd="sng" algn="ctr">
+                      <a:solidFill>
+                        <a:srgbClr val="E4DADD"/>
+                      </a:solidFill>
+                      <a:prstDash val="solid"/>
+                      <a:round/>
+                      <a:headEnd type="none" w="med" len="med"/>
+                      <a:tailEnd type="none" w="med" len="med"/>
+                    </a:lnR>
+                    <a:lnT w="6350" cap="flat" cmpd="sng" algn="ctr">
+                      <a:solidFill>
+                        <a:srgbClr val="E4DADD"/>
+                      </a:solidFill>
+                      <a:prstDash val="solid"/>
+                      <a:round/>
+                      <a:headEnd type="none" w="med" len="med"/>
+                      <a:tailEnd type="none" w="med" len="med"/>
+                    </a:lnT>
+                    <a:lnB w="6350" cap="flat" cmpd="sng" algn="ctr">
+                      <a:solidFill>
+                        <a:srgbClr val="E4DADD"/>
+                      </a:solidFill>
+                      <a:prstDash val="solid"/>
+                      <a:round/>
+                      <a:headEnd type="none" w="med" len="med"/>
+                      <a:tailEnd type="none" w="med" len="med"/>
+                    </a:lnB>
+                  </a:tcPr>
+                </a:tc>
+              </a:tr>
+              <a:tr h="457200">
+                <a:tc>
+                  <a:txBody>
+                    <a:bodyPr/>
+                    <a:lstStyle/>
+                    <a:p>
+                      <a:pPr indent="0" marL="0">
+                        <a:buNone/>
+                      </a:pPr>
+                      <a:r>
+                        <a:rPr lang="en-US" sz="1000" b="1" dirty="0">
+                          <a:solidFill>
+                            <a:srgbClr val="1F1A1C"/>
+                          </a:solidFill>
+                          <a:latin typeface="Calibri" pitchFamily="34" charset="0"/>
+                          <a:ea typeface="Calibri" pitchFamily="34" charset="-122"/>
+                          <a:cs typeface="Calibri" pitchFamily="34" charset="-120"/>
+                        </a:rPr>
+                        <a:t>21.5億円</a:t>
                       </a:r>
                       <a:endParaRPr lang="en-US" sz="1000" dirty="0">
                         <a:latin typeface="Calibri" charset="0"/>
@@ -5166,74 +8956,7 @@
                     <a:bodyPr/>
                     <a:lstStyle/>
                     <a:p>
-                      <a:pPr indent="0" marL="0">
-                        <a:buNone/>
-                      </a:pPr>
-                      <a:r>
-                        <a:rPr lang="en-US" sz="950" dirty="0">
-                          <a:solidFill>
-                            <a:srgbClr val="1F1A1C"/>
-                          </a:solidFill>
-                          <a:latin typeface="Calibri" pitchFamily="34" charset="0"/>
-                          <a:ea typeface="Calibri" pitchFamily="34" charset="-122"/>
-                          <a:cs typeface="Calibri" pitchFamily="34" charset="-120"/>
-                        </a:rPr>
-                        <a:t>TLA14.0億（元金均等7年）＋TLB6.0億（期限一括）</a:t>
-                      </a:r>
-                      <a:endParaRPr lang="en-US" sz="950" dirty="0">
-                        <a:latin typeface="Calibri" charset="0"/>
-                        <a:ea typeface="Calibri" charset="0"/>
-                        <a:cs typeface="Calibri" charset="0"/>
-                      </a:endParaRPr>
-                    </a:p>
-                  </a:txBody>
-                  <a:tcPr marL="91440" marR="91440" marT="45720" marB="45720" anchor="ctr">
-                    <a:lnL w="6350" cap="flat" cmpd="sng" algn="ctr">
-                      <a:solidFill>
-                        <a:srgbClr val="E4DADD"/>
-                      </a:solidFill>
-                      <a:prstDash val="solid"/>
-                      <a:round/>
-                      <a:headEnd type="none" w="med" len="med"/>
-                      <a:tailEnd type="none" w="med" len="med"/>
-                    </a:lnL>
-                    <a:lnR w="6350" cap="flat" cmpd="sng" algn="ctr">
-                      <a:solidFill>
-                        <a:srgbClr val="E4DADD"/>
-                      </a:solidFill>
-                      <a:prstDash val="solid"/>
-                      <a:round/>
-                      <a:headEnd type="none" w="med" len="med"/>
-                      <a:tailEnd type="none" w="med" len="med"/>
-                    </a:lnR>
-                    <a:lnT w="6350" cap="flat" cmpd="sng" algn="ctr">
-                      <a:solidFill>
-                        <a:srgbClr val="E4DADD"/>
-                      </a:solidFill>
-                      <a:prstDash val="solid"/>
-                      <a:round/>
-                      <a:headEnd type="none" w="med" len="med"/>
-                      <a:tailEnd type="none" w="med" len="med"/>
-                    </a:lnT>
-                    <a:lnB w="6350" cap="flat" cmpd="sng" algn="ctr">
-                      <a:solidFill>
-                        <a:srgbClr val="E4DADD"/>
-                      </a:solidFill>
-                      <a:prstDash val="solid"/>
-                      <a:round/>
-                      <a:headEnd type="none" w="med" len="med"/>
-                      <a:tailEnd type="none" w="med" len="med"/>
-                    </a:lnB>
-                  </a:tcPr>
-                </a:tc>
-              </a:tr>
-              <a:tr h="338328">
-                <a:tc>
-                  <a:txBody>
-                    <a:bodyPr/>
-                    <a:lstStyle/>
-                    <a:p>
-                      <a:pPr indent="0" marL="0">
+                      <a:pPr algn="r" indent="0" marL="0">
                         <a:buNone/>
                       </a:pPr>
                       <a:r>
@@ -5245,7 +8968,7 @@
                           <a:ea typeface="Calibri" pitchFamily="34" charset="-122"/>
                           <a:cs typeface="Calibri" pitchFamily="34" charset="-120"/>
                         </a:rPr>
-                        <a:t>現預金</a:t>
+                        <a:t>20.0億円</a:t>
                       </a:r>
                       <a:endParaRPr lang="en-US" sz="1000" dirty="0">
                         <a:latin typeface="Calibri" charset="0"/>
@@ -5310,7 +9033,72 @@
                           <a:ea typeface="Calibri" pitchFamily="34" charset="-122"/>
                           <a:cs typeface="Calibri" pitchFamily="34" charset="-120"/>
                         </a:rPr>
-                        <a:t>22.4億円</a:t>
+                        <a:t>3.8倍</a:t>
+                      </a:r>
+                      <a:endParaRPr lang="en-US" sz="1000" dirty="0">
+                        <a:latin typeface="Calibri" charset="0"/>
+                        <a:ea typeface="Calibri" charset="0"/>
+                        <a:cs typeface="Calibri" charset="0"/>
+                      </a:endParaRPr>
+                    </a:p>
+                  </a:txBody>
+                  <a:tcPr marL="91440" marR="91440" marT="45720" marB="45720" anchor="ctr">
+                    <a:lnL w="6350" cap="flat" cmpd="sng" algn="ctr">
+                      <a:solidFill>
+                        <a:srgbClr val="E4DADD"/>
+                      </a:solidFill>
+                      <a:prstDash val="solid"/>
+                      <a:round/>
+                      <a:headEnd type="none" w="med" len="med"/>
+                      <a:tailEnd type="none" w="med" len="med"/>
+                    </a:lnL>
+                    <a:lnR w="6350" cap="flat" cmpd="sng" algn="ctr">
+                      <a:solidFill>
+                        <a:srgbClr val="E4DADD"/>
+                      </a:solidFill>
+                      <a:prstDash val="solid"/>
+                      <a:round/>
+                      <a:headEnd type="none" w="med" len="med"/>
+                      <a:tailEnd type="none" w="med" len="med"/>
+                    </a:lnR>
+                    <a:lnT w="6350" cap="flat" cmpd="sng" algn="ctr">
+                      <a:solidFill>
+                        <a:srgbClr val="E4DADD"/>
+                      </a:solidFill>
+                      <a:prstDash val="solid"/>
+                      <a:round/>
+                      <a:headEnd type="none" w="med" len="med"/>
+                      <a:tailEnd type="none" w="med" len="med"/>
+                    </a:lnT>
+                    <a:lnB w="6350" cap="flat" cmpd="sng" algn="ctr">
+                      <a:solidFill>
+                        <a:srgbClr val="E4DADD"/>
+                      </a:solidFill>
+                      <a:prstDash val="solid"/>
+                      <a:round/>
+                      <a:headEnd type="none" w="med" len="med"/>
+                      <a:tailEnd type="none" w="med" len="med"/>
+                    </a:lnB>
+                  </a:tcPr>
+                </a:tc>
+                <a:tc>
+                  <a:txBody>
+                    <a:bodyPr/>
+                    <a:lstStyle/>
+                    <a:p>
+                      <a:pPr algn="r" indent="0" marL="0">
+                        <a:buNone/>
+                      </a:pPr>
+                      <a:r>
+                        <a:rPr lang="en-US" sz="1000" dirty="0">
+                          <a:solidFill>
+                            <a:srgbClr val="2E6F4E"/>
+                          </a:solidFill>
+                          <a:latin typeface="Calibri" pitchFamily="34" charset="0"/>
+                          <a:ea typeface="Calibri" pitchFamily="34" charset="-122"/>
+                          <a:cs typeface="Calibri" pitchFamily="34" charset="-120"/>
+                        </a:rPr>
+                        <a:t>1.35</a:t>
                       </a:r>
                       <a:endParaRPr lang="en-US" sz="1000" dirty="0">
                         <a:latin typeface="Calibri" charset="0"/>
@@ -5367,7 +9155,7 @@
                         <a:buNone/>
                       </a:pPr>
                       <a:r>
-                        <a:rPr lang="en-US" sz="950" dirty="0">
+                        <a:rPr lang="en-US" sz="1000" dirty="0">
                           <a:solidFill>
                             <a:srgbClr val="1F1A1C"/>
                           </a:solidFill>
@@ -5375,74 +9163,7 @@
                           <a:ea typeface="Calibri" pitchFamily="34" charset="-122"/>
                           <a:cs typeface="Calibri" pitchFamily="34" charset="-120"/>
                         </a:rPr>
-                        <a:t>対象会社の現預金17.4億＋役員貸付金5.0億の精算</a:t>
-                      </a:r>
-                      <a:endParaRPr lang="en-US" sz="950" dirty="0">
-                        <a:latin typeface="Calibri" charset="0"/>
-                        <a:ea typeface="Calibri" charset="0"/>
-                        <a:cs typeface="Calibri" charset="0"/>
-                      </a:endParaRPr>
-                    </a:p>
-                  </a:txBody>
-                  <a:tcPr marL="91440" marR="91440" marT="45720" marB="45720" anchor="ctr">
-                    <a:lnL w="6350" cap="flat" cmpd="sng" algn="ctr">
-                      <a:solidFill>
-                        <a:srgbClr val="E4DADD"/>
-                      </a:solidFill>
-                      <a:prstDash val="solid"/>
-                      <a:round/>
-                      <a:headEnd type="none" w="med" len="med"/>
-                      <a:tailEnd type="none" w="med" len="med"/>
-                    </a:lnL>
-                    <a:lnR w="6350" cap="flat" cmpd="sng" algn="ctr">
-                      <a:solidFill>
-                        <a:srgbClr val="E4DADD"/>
-                      </a:solidFill>
-                      <a:prstDash val="solid"/>
-                      <a:round/>
-                      <a:headEnd type="none" w="med" len="med"/>
-                      <a:tailEnd type="none" w="med" len="med"/>
-                    </a:lnR>
-                    <a:lnT w="6350" cap="flat" cmpd="sng" algn="ctr">
-                      <a:solidFill>
-                        <a:srgbClr val="E4DADD"/>
-                      </a:solidFill>
-                      <a:prstDash val="solid"/>
-                      <a:round/>
-                      <a:headEnd type="none" w="med" len="med"/>
-                      <a:tailEnd type="none" w="med" len="med"/>
-                    </a:lnT>
-                    <a:lnB w="6350" cap="flat" cmpd="sng" algn="ctr">
-                      <a:solidFill>
-                        <a:srgbClr val="E4DADD"/>
-                      </a:solidFill>
-                      <a:prstDash val="solid"/>
-                      <a:round/>
-                      <a:headEnd type="none" w="med" len="med"/>
-                      <a:tailEnd type="none" w="med" len="med"/>
-                    </a:lnB>
-                  </a:tcPr>
-                </a:tc>
-              </a:tr>
-              <a:tr h="338328">
-                <a:tc>
-                  <a:txBody>
-                    <a:bodyPr/>
-                    <a:lstStyle/>
-                    <a:p>
-                      <a:pPr indent="0" marL="0">
-                        <a:buNone/>
-                      </a:pPr>
-                      <a:r>
-                        <a:rPr lang="en-US" sz="1000" b="1" dirty="0">
-                          <a:solidFill>
-                            <a:srgbClr val="1F1A1C"/>
-                          </a:solidFill>
-                          <a:latin typeface="Calibri" pitchFamily="34" charset="0"/>
-                          <a:ea typeface="Calibri" pitchFamily="34" charset="-122"/>
-                          <a:cs typeface="Calibri" pitchFamily="34" charset="-120"/>
-                        </a:rPr>
-                        <a:t>ネットキャッシュ</a:t>
+                        <a:t>ブリッジ不要</a:t>
                       </a:r>
                       <a:endParaRPr lang="en-US" sz="1000" dirty="0">
                         <a:latin typeface="Calibri" charset="0"/>
@@ -5488,77 +9209,6 @@
                       <a:headEnd type="none" w="med" len="med"/>
                       <a:tailEnd type="none" w="med" len="med"/>
                     </a:lnB>
-                    <a:solidFill>
-                      <a:srgbClr val="F7F3F4"/>
-                    </a:solidFill>
-                  </a:tcPr>
-                </a:tc>
-                <a:tc>
-                  <a:txBody>
-                    <a:bodyPr/>
-                    <a:lstStyle/>
-                    <a:p>
-                      <a:pPr algn="r" indent="0" marL="0">
-                        <a:buNone/>
-                      </a:pPr>
-                      <a:r>
-                        <a:rPr lang="en-US" sz="1000" b="1" dirty="0">
-                          <a:solidFill>
-                            <a:srgbClr val="2E6F4E"/>
-                          </a:solidFill>
-                          <a:latin typeface="Calibri" pitchFamily="34" charset="0"/>
-                          <a:ea typeface="Calibri" pitchFamily="34" charset="-122"/>
-                          <a:cs typeface="Calibri" pitchFamily="34" charset="-120"/>
-                        </a:rPr>
-                        <a:t>＋2.4億円</a:t>
-                      </a:r>
-                      <a:endParaRPr lang="en-US" sz="1000" dirty="0">
-                        <a:latin typeface="Calibri" charset="0"/>
-                        <a:ea typeface="Calibri" charset="0"/>
-                        <a:cs typeface="Calibri" charset="0"/>
-                      </a:endParaRPr>
-                    </a:p>
-                  </a:txBody>
-                  <a:tcPr marL="91440" marR="91440" marT="45720" marB="45720" anchor="ctr">
-                    <a:lnL w="6350" cap="flat" cmpd="sng" algn="ctr">
-                      <a:solidFill>
-                        <a:srgbClr val="E4DADD"/>
-                      </a:solidFill>
-                      <a:prstDash val="solid"/>
-                      <a:round/>
-                      <a:headEnd type="none" w="med" len="med"/>
-                      <a:tailEnd type="none" w="med" len="med"/>
-                    </a:lnL>
-                    <a:lnR w="6350" cap="flat" cmpd="sng" algn="ctr">
-                      <a:solidFill>
-                        <a:srgbClr val="E4DADD"/>
-                      </a:solidFill>
-                      <a:prstDash val="solid"/>
-                      <a:round/>
-                      <a:headEnd type="none" w="med" len="med"/>
-                      <a:tailEnd type="none" w="med" len="med"/>
-                    </a:lnR>
-                    <a:lnT w="6350" cap="flat" cmpd="sng" algn="ctr">
-                      <a:solidFill>
-                        <a:srgbClr val="E4DADD"/>
-                      </a:solidFill>
-                      <a:prstDash val="solid"/>
-                      <a:round/>
-                      <a:headEnd type="none" w="med" len="med"/>
-                      <a:tailEnd type="none" w="med" len="med"/>
-                    </a:lnT>
-                    <a:lnB w="6350" cap="flat" cmpd="sng" algn="ctr">
-                      <a:solidFill>
-                        <a:srgbClr val="E4DADD"/>
-                      </a:solidFill>
-                      <a:prstDash val="solid"/>
-                      <a:round/>
-                      <a:headEnd type="none" w="med" len="med"/>
-                      <a:tailEnd type="none" w="med" len="med"/>
-                    </a:lnB>
-                    <a:solidFill>
-                      <a:srgbClr val="F7F3F4"/>
-                    </a:solidFill>
                   </a:tcPr>
                 </a:tc>
                 <a:tc>
@@ -5570,17 +9220,17 @@
                         <a:buNone/>
                       </a:pPr>
                       <a:r>
-                        <a:rPr lang="en-US" sz="950" b="1" dirty="0">
+                        <a:rPr lang="en-US" sz="1000" dirty="0">
                           <a:solidFill>
-                            <a:srgbClr val="1F1A1C"/>
+                            <a:srgbClr val="2E6F4E"/>
                           </a:solidFill>
                           <a:latin typeface="Calibri" pitchFamily="34" charset="0"/>
                           <a:ea typeface="Calibri" pitchFamily="34" charset="-122"/>
                           <a:cs typeface="Calibri" pitchFamily="34" charset="-120"/>
                         </a:rPr>
-                        <a:t>買収後も実質無借金。初年度DSCR 1.35倍</a:t>
+                        <a:t>◎ 実質無借金</a:t>
                       </a:r>
-                      <a:endParaRPr lang="en-US" sz="950" dirty="0">
+                      <a:endParaRPr lang="en-US" sz="1000" dirty="0">
                         <a:latin typeface="Calibri" charset="0"/>
                         <a:ea typeface="Calibri" charset="0"/>
                         <a:cs typeface="Calibri" charset="0"/>
@@ -5624,9 +9274,6 @@
                       <a:headEnd type="none" w="med" len="med"/>
                       <a:tailEnd type="none" w="med" len="med"/>
                     </a:lnB>
-                    <a:solidFill>
-                      <a:srgbClr val="F7F3F4"/>
-                    </a:solidFill>
                   </a:tcPr>
                 </a:tc>
               </a:tr>
@@ -5636,18 +9283,57 @@
       </p:graphicFrame>
       <p:sp>
         <p:nvSpPr>
-          <p:cNvPr id="10" name="Shape 6"/>
+          <p:cNvPr id="6" name="Text 3"/>
+          <p:cNvSpPr txBox="1"/>
+          <p:nvPr/>
+        </p:nvSpPr>
+        <p:spPr>
+          <a:xfrm>
+            <a:off x="566928" y="4224528"/>
+            <a:ext cx="11055096" cy="237744"/>
+          </a:xfrm>
+          <a:prstGeom prst="rect">
+            <a:avLst/>
+          </a:prstGeom>
+          <a:noFill/>
+          <a:ln/>
+        </p:spPr>
+        <p:txBody>
+          <a:bodyPr wrap="square" lIns="0" tIns="0" rIns="0" bIns="0" rtlCol="0" anchor="ctr"/>
+          <a:lstStyle/>
+          <a:p>
+            <a:pPr indent="0" marL="0">
+              <a:buNone/>
+            </a:pPr>
+            <a:r>
+              <a:rPr lang="en-US" sz="900" dirty="0">
+                <a:solidFill>
+                  <a:srgbClr val="6E6368"/>
+                </a:solidFill>
+                <a:latin typeface="Calibri" pitchFamily="34" charset="0"/>
+                <a:ea typeface="Calibri" pitchFamily="34" charset="-122"/>
+                <a:cs typeface="Calibri" pitchFamily="34" charset="-120"/>
+              </a:rPr>
+              <a:t>※ 期限一括分はいずれも有利子負債の30%と仮定。7年・金利3%・元金均等。FCFは年3.50億円で一定。</a:t>
+            </a:r>
+            <a:endParaRPr lang="en-US" sz="900" dirty="0"/>
+          </a:p>
+        </p:txBody>
+      </p:sp>
+      <p:sp>
+        <p:nvSpPr>
+          <p:cNvPr id="7" name="Shape 4"/>
           <p:cNvSpPr/>
           <p:nvPr/>
         </p:nvSpPr>
         <p:spPr>
           <a:xfrm>
-            <a:off x="7498080" y="1517904"/>
-            <a:ext cx="4123944" cy="2834640"/>
+            <a:off x="566928" y="4572000"/>
+            <a:ext cx="3520440" cy="1700784"/>
           </a:xfrm>
           <a:prstGeom prst="roundRect">
             <a:avLst>
-              <a:gd name="adj" fmla="val 1613"/>
+              <a:gd name="adj" fmla="val 2688"/>
             </a:avLst>
           </a:prstGeom>
           <a:solidFill>
@@ -5663,112 +9349,14 @@
       </p:sp>
       <p:sp>
         <p:nvSpPr>
-          <p:cNvPr id="11" name="Text 7"/>
+          <p:cNvPr id="8" name="Text 5"/>
           <p:cNvSpPr txBox="1"/>
           <p:nvPr/>
         </p:nvSpPr>
         <p:spPr>
           <a:xfrm>
-            <a:off x="7717536" y="1627632"/>
-            <a:ext cx="3657600" cy="237744"/>
-          </a:xfrm>
-          <a:prstGeom prst="rect">
-            <a:avLst/>
-          </a:prstGeom>
-          <a:noFill/>
-          <a:ln/>
-        </p:spPr>
-        <p:txBody>
-          <a:bodyPr wrap="square" lIns="0" tIns="0" rIns="0" bIns="0" rtlCol="0" anchor="ctr"/>
-          <a:lstStyle/>
-          <a:p>
-            <a:pPr indent="0" marL="0">
-              <a:buNone/>
-            </a:pPr>
-            <a:r>
-              <a:rPr lang="en-US" sz="1000" b="1" dirty="0">
-                <a:solidFill>
-                  <a:srgbClr val="B58B2A"/>
-                </a:solidFill>
-                <a:latin typeface="Calibri" pitchFamily="34" charset="0"/>
-                <a:ea typeface="Calibri" pitchFamily="34" charset="-122"/>
-                <a:cs typeface="Calibri" pitchFamily="34" charset="-120"/>
-              </a:rPr>
-              <a:t>実行手順</a:t>
-            </a:r>
-            <a:endParaRPr lang="en-US" sz="1000" dirty="0"/>
-          </a:p>
-        </p:txBody>
-      </p:sp>
-      <p:sp>
-        <p:nvSpPr>
-          <p:cNvPr id="12" name="Shape 8"/>
-          <p:cNvSpPr/>
-          <p:nvPr/>
-        </p:nvSpPr>
-        <p:spPr>
-          <a:xfrm>
-            <a:off x="7717536" y="1947672"/>
-            <a:ext cx="256032" cy="256032"/>
-          </a:xfrm>
-          <a:prstGeom prst="ellipse">
-            <a:avLst/>
-          </a:prstGeom>
-          <a:solidFill>
-            <a:srgbClr val="6D2E46"/>
-          </a:solidFill>
-          <a:ln/>
-        </p:spPr>
-      </p:sp>
-      <p:sp>
-        <p:nvSpPr>
-          <p:cNvPr id="13" name="Text 9"/>
-          <p:cNvSpPr txBox="1"/>
-          <p:nvPr/>
-        </p:nvSpPr>
-        <p:spPr>
-          <a:xfrm>
-            <a:off x="7717536" y="1947672"/>
-            <a:ext cx="256032" cy="256032"/>
-          </a:xfrm>
-          <a:prstGeom prst="rect">
-            <a:avLst/>
-          </a:prstGeom>
-          <a:noFill/>
-          <a:ln/>
-        </p:spPr>
-        <p:txBody>
-          <a:bodyPr wrap="square" lIns="0" tIns="0" rIns="0" bIns="0" rtlCol="0" anchor="ctr"/>
-          <a:lstStyle/>
-          <a:p>
-            <a:pPr algn="ctr" indent="0" marL="0">
-              <a:buNone/>
-            </a:pPr>
-            <a:r>
-              <a:rPr lang="en-US" sz="1100" b="1" dirty="0">
-                <a:solidFill>
-                  <a:srgbClr val="FFFFFF"/>
-                </a:solidFill>
-                <a:latin typeface="Calibri" pitchFamily="34" charset="0"/>
-                <a:ea typeface="Calibri" pitchFamily="34" charset="-122"/>
-                <a:cs typeface="Calibri" pitchFamily="34" charset="-120"/>
-              </a:rPr>
-              <a:t>1</a:t>
-            </a:r>
-            <a:endParaRPr lang="en-US" sz="1100" dirty="0"/>
-          </a:p>
-        </p:txBody>
-      </p:sp>
-      <p:sp>
-        <p:nvSpPr>
-          <p:cNvPr id="14" name="Text 10"/>
-          <p:cNvSpPr txBox="1"/>
-          <p:nvPr/>
-        </p:nvSpPr>
-        <p:spPr>
-          <a:xfrm>
-            <a:off x="8065008" y="1901952"/>
-            <a:ext cx="3337560" cy="438912"/>
+            <a:off x="768096" y="4681728"/>
+            <a:ext cx="3127248" cy="420624"/>
           </a:xfrm>
           <a:prstGeom prst="rect">
             <a:avLst/>
@@ -5782,12 +9370,54 @@
           <a:p>
             <a:pPr indent="0" marL="0">
               <a:lnSpc>
-                <a:spcPts val="1300"/>
+                <a:spcPts val="1400"/>
               </a:lnSpc>
               <a:buNone/>
             </a:pPr>
             <a:r>
-              <a:rPr lang="en-US" sz="950" dirty="0">
+              <a:rPr lang="en-US" sz="1050" b="1" dirty="0">
+                <a:solidFill>
+                  <a:srgbClr val="6D2E46"/>
+                </a:solidFill>
+                <a:latin typeface="Calibri" pitchFamily="34" charset="0"/>
+                <a:ea typeface="Calibri" pitchFamily="34" charset="-122"/>
+                <a:cs typeface="Calibri" pitchFamily="34" charset="-120"/>
+              </a:rPr>
+              <a:t>① 中野氏の5.1億円は「出資」か「貸付」か</a:t>
+            </a:r>
+            <a:endParaRPr lang="en-US" sz="1050" dirty="0"/>
+          </a:p>
+        </p:txBody>
+      </p:sp>
+      <p:sp>
+        <p:nvSpPr>
+          <p:cNvPr id="9" name="Text 6"/>
+          <p:cNvSpPr txBox="1"/>
+          <p:nvPr/>
+        </p:nvSpPr>
+        <p:spPr>
+          <a:xfrm>
+            <a:off x="768096" y="5138928"/>
+            <a:ext cx="3127248" cy="1060704"/>
+          </a:xfrm>
+          <a:prstGeom prst="rect">
+            <a:avLst/>
+          </a:prstGeom>
+          <a:noFill/>
+          <a:ln/>
+        </p:spPr>
+        <p:txBody>
+          <a:bodyPr wrap="square" lIns="0" tIns="0" rIns="0" bIns="0" rtlCol="0" anchor="ctr"/>
+          <a:lstStyle/>
+          <a:p>
+            <a:pPr indent="0" marL="0">
+              <a:lnSpc>
+                <a:spcPts val="1250"/>
+              </a:lnSpc>
+              <a:buNone/>
+            </a:pPr>
+            <a:r>
+              <a:rPr lang="en-US" sz="900" dirty="0">
                 <a:solidFill>
                   <a:srgbClr val="1F1A1C"/>
                 </a:solidFill>
@@ -5795,81 +9425,49 @@
                 <a:ea typeface="Calibri" pitchFamily="34" charset="-122"/>
                 <a:cs typeface="Calibri" pitchFamily="34" charset="-120"/>
               </a:rPr>
-              <a:t>SPCを設立し、投資家10.0億円・WineBank20.0億円を払込み</a:t>
+              <a:t>株主貸付とすれば持分67%を維持したまま資金を入れられるが、榊原氏の10.0億円がリスクを負う資本であるのに対し、中野氏の5.1億円は資本より優先して回収される債権となる。榊原氏が同順位の出資を求める可能性が高い。</a:t>
             </a:r>
-            <a:endParaRPr lang="en-US" sz="950" dirty="0"/>
+            <a:endParaRPr lang="en-US" sz="900" dirty="0"/>
           </a:p>
         </p:txBody>
       </p:sp>
       <p:sp>
         <p:nvSpPr>
-          <p:cNvPr id="15" name="Shape 11"/>
+          <p:cNvPr id="10" name="Shape 7"/>
           <p:cNvSpPr/>
           <p:nvPr/>
         </p:nvSpPr>
         <p:spPr>
           <a:xfrm>
-            <a:off x="7717536" y="2423160"/>
-            <a:ext cx="256032" cy="256032"/>
-          </a:xfrm>
-          <a:prstGeom prst="ellipse">
-            <a:avLst/>
+            <a:off x="4297680" y="4572000"/>
+            <a:ext cx="3520440" cy="1700784"/>
+          </a:xfrm>
+          <a:prstGeom prst="roundRect">
+            <a:avLst>
+              <a:gd name="adj" fmla="val 2688"/>
+            </a:avLst>
           </a:prstGeom>
           <a:solidFill>
-            <a:srgbClr val="6D2E46"/>
+            <a:srgbClr val="F7F3F4"/>
           </a:solidFill>
-          <a:ln/>
-        </p:spPr>
-      </p:sp>
-      <p:sp>
-        <p:nvSpPr>
-          <p:cNvPr id="16" name="Text 12"/>
+          <a:ln w="9525">
+            <a:solidFill>
+              <a:srgbClr val="E4DADD"/>
+            </a:solidFill>
+            <a:prstDash val="solid"/>
+          </a:ln>
+        </p:spPr>
+      </p:sp>
+      <p:sp>
+        <p:nvSpPr>
+          <p:cNvPr id="11" name="Text 8"/>
           <p:cNvSpPr txBox="1"/>
           <p:nvPr/>
         </p:nvSpPr>
         <p:spPr>
           <a:xfrm>
-            <a:off x="7717536" y="2423160"/>
-            <a:ext cx="256032" cy="256032"/>
-          </a:xfrm>
-          <a:prstGeom prst="rect">
-            <a:avLst/>
-          </a:prstGeom>
-          <a:noFill/>
-          <a:ln/>
-        </p:spPr>
-        <p:txBody>
-          <a:bodyPr wrap="square" lIns="0" tIns="0" rIns="0" bIns="0" rtlCol="0" anchor="ctr"/>
-          <a:lstStyle/>
-          <a:p>
-            <a:pPr algn="ctr" indent="0" marL="0">
-              <a:buNone/>
-            </a:pPr>
-            <a:r>
-              <a:rPr lang="en-US" sz="1100" b="1" dirty="0">
-                <a:solidFill>
-                  <a:srgbClr val="FFFFFF"/>
-                </a:solidFill>
-                <a:latin typeface="Calibri" pitchFamily="34" charset="0"/>
-                <a:ea typeface="Calibri" pitchFamily="34" charset="-122"/>
-                <a:cs typeface="Calibri" pitchFamily="34" charset="-120"/>
-              </a:rPr>
-              <a:t>2</a:t>
-            </a:r>
-            <a:endParaRPr lang="en-US" sz="1100" dirty="0"/>
-          </a:p>
-        </p:txBody>
-      </p:sp>
-      <p:sp>
-        <p:nvSpPr>
-          <p:cNvPr id="17" name="Text 13"/>
-          <p:cNvSpPr txBox="1"/>
-          <p:nvPr/>
-        </p:nvSpPr>
-        <p:spPr>
-          <a:xfrm>
-            <a:off x="8065008" y="2377440"/>
-            <a:ext cx="3337560" cy="438912"/>
+            <a:off x="4498848" y="4681728"/>
+            <a:ext cx="3127248" cy="420624"/>
           </a:xfrm>
           <a:prstGeom prst="rect">
             <a:avLst/>
@@ -5883,12 +9481,54 @@
           <a:p>
             <a:pPr indent="0" marL="0">
               <a:lnSpc>
-                <a:spcPts val="1300"/>
+                <a:spcPts val="1400"/>
               </a:lnSpc>
               <a:buNone/>
             </a:pPr>
             <a:r>
-              <a:rPr lang="en-US" sz="950" dirty="0">
+              <a:rPr lang="en-US" sz="1050" b="1" dirty="0">
+                <a:solidFill>
+                  <a:srgbClr val="6D2E46"/>
+                </a:solidFill>
+                <a:latin typeface="Calibri" pitchFamily="34" charset="0"/>
+                <a:ea typeface="Calibri" pitchFamily="34" charset="-122"/>
+                <a:cs typeface="Calibri" pitchFamily="34" charset="-120"/>
+              </a:rPr>
+              <a:t>② 67%／33%は合意による配分</a:t>
+            </a:r>
+            <a:endParaRPr lang="en-US" sz="1050" dirty="0"/>
+          </a:p>
+        </p:txBody>
+      </p:sp>
+      <p:sp>
+        <p:nvSpPr>
+          <p:cNvPr id="12" name="Text 9"/>
+          <p:cNvSpPr txBox="1"/>
+          <p:nvPr/>
+        </p:nvSpPr>
+        <p:spPr>
+          <a:xfrm>
+            <a:off x="4498848" y="5138928"/>
+            <a:ext cx="3127248" cy="1060704"/>
+          </a:xfrm>
+          <a:prstGeom prst="rect">
+            <a:avLst/>
+          </a:prstGeom>
+          <a:noFill/>
+          <a:ln/>
+        </p:spPr>
+        <p:txBody>
+          <a:bodyPr wrap="square" lIns="0" tIns="0" rIns="0" bIns="0" rtlCol="0" anchor="ctr"/>
+          <a:lstStyle/>
+          <a:p>
+            <a:pPr indent="0" marL="0">
+              <a:lnSpc>
+                <a:spcPts val="1250"/>
+              </a:lnSpc>
+              <a:buNone/>
+            </a:pPr>
+            <a:r>
+              <a:rPr lang="en-US" sz="900" dirty="0">
                 <a:solidFill>
                   <a:srgbClr val="1F1A1C"/>
                 </a:solidFill>
@@ -5896,81 +9536,49 @@
                 <a:ea typeface="Calibri" pitchFamily="34" charset="-122"/>
                 <a:cs typeface="Calibri" pitchFamily="34" charset="-120"/>
               </a:rPr>
-              <a:t>みずほ銀行よりLBOローン20.0億円を実行</a:t>
+              <a:t>資本金10万円に対し榊原氏が10.0億円を払い込むため、金額按分では榊原氏がほぼ全量となる。67%／33%は、案件の持込み・みずほとの与信交渉・買収後の運営を中野氏が担うことへの評価である旨を、株主間契約に明記しておく必要がある。</a:t>
             </a:r>
-            <a:endParaRPr lang="en-US" sz="950" dirty="0"/>
+            <a:endParaRPr lang="en-US" sz="900" dirty="0"/>
           </a:p>
         </p:txBody>
       </p:sp>
       <p:sp>
         <p:nvSpPr>
-          <p:cNvPr id="18" name="Shape 14"/>
+          <p:cNvPr id="13" name="Shape 10"/>
           <p:cNvSpPr/>
           <p:nvPr/>
         </p:nvSpPr>
         <p:spPr>
           <a:xfrm>
-            <a:off x="7717536" y="2898648"/>
-            <a:ext cx="256032" cy="256032"/>
-          </a:xfrm>
-          <a:prstGeom prst="ellipse">
-            <a:avLst/>
+            <a:off x="8028432" y="4572000"/>
+            <a:ext cx="3520440" cy="1700784"/>
+          </a:xfrm>
+          <a:prstGeom prst="roundRect">
+            <a:avLst>
+              <a:gd name="adj" fmla="val 2688"/>
+            </a:avLst>
           </a:prstGeom>
           <a:solidFill>
-            <a:srgbClr val="6D2E46"/>
+            <a:srgbClr val="F7F3F4"/>
           </a:solidFill>
-          <a:ln/>
-        </p:spPr>
-      </p:sp>
-      <p:sp>
-        <p:nvSpPr>
-          <p:cNvPr id="19" name="Text 15"/>
+          <a:ln w="9525">
+            <a:solidFill>
+              <a:srgbClr val="E4DADD"/>
+            </a:solidFill>
+            <a:prstDash val="solid"/>
+          </a:ln>
+        </p:spPr>
+      </p:sp>
+      <p:sp>
+        <p:nvSpPr>
+          <p:cNvPr id="14" name="Text 11"/>
           <p:cNvSpPr txBox="1"/>
           <p:nvPr/>
         </p:nvSpPr>
         <p:spPr>
           <a:xfrm>
-            <a:off x="7717536" y="2898648"/>
-            <a:ext cx="256032" cy="256032"/>
-          </a:xfrm>
-          <a:prstGeom prst="rect">
-            <a:avLst/>
-          </a:prstGeom>
-          <a:noFill/>
-          <a:ln/>
-        </p:spPr>
-        <p:txBody>
-          <a:bodyPr wrap="square" lIns="0" tIns="0" rIns="0" bIns="0" rtlCol="0" anchor="ctr"/>
-          <a:lstStyle/>
-          <a:p>
-            <a:pPr algn="ctr" indent="0" marL="0">
-              <a:buNone/>
-            </a:pPr>
-            <a:r>
-              <a:rPr lang="en-US" sz="1100" b="1" dirty="0">
-                <a:solidFill>
-                  <a:srgbClr val="FFFFFF"/>
-                </a:solidFill>
-                <a:latin typeface="Calibri" pitchFamily="34" charset="0"/>
-                <a:ea typeface="Calibri" pitchFamily="34" charset="-122"/>
-                <a:cs typeface="Calibri" pitchFamily="34" charset="-120"/>
-              </a:rPr>
-              <a:t>3</a:t>
-            </a:r>
-            <a:endParaRPr lang="en-US" sz="1100" dirty="0"/>
-          </a:p>
-        </p:txBody>
-      </p:sp>
-      <p:sp>
-        <p:nvSpPr>
-          <p:cNvPr id="20" name="Text 16"/>
-          <p:cNvSpPr txBox="1"/>
-          <p:nvPr/>
-        </p:nvSpPr>
-        <p:spPr>
-          <a:xfrm>
-            <a:off x="8065008" y="2852928"/>
-            <a:ext cx="3337560" cy="438912"/>
+            <a:off x="8229600" y="4681728"/>
+            <a:ext cx="3127248" cy="420624"/>
           </a:xfrm>
           <a:prstGeom prst="rect">
             <a:avLst/>
@@ -5984,12 +9592,54 @@
           <a:p>
             <a:pPr indent="0" marL="0">
               <a:lnSpc>
-                <a:spcPts val="1300"/>
+                <a:spcPts val="1400"/>
               </a:lnSpc>
               <a:buNone/>
             </a:pPr>
             <a:r>
-              <a:rPr lang="en-US" sz="950" dirty="0">
+              <a:rPr lang="en-US" sz="1050" b="1" dirty="0">
+                <a:solidFill>
+                  <a:srgbClr val="6D2E46"/>
+                </a:solidFill>
+                <a:latin typeface="Calibri" pitchFamily="34" charset="0"/>
+                <a:ea typeface="Calibri" pitchFamily="34" charset="-122"/>
+                <a:cs typeface="Calibri" pitchFamily="34" charset="-120"/>
+              </a:rPr>
+              <a:t>③ 現預金は「買った後」にしか使えない</a:t>
+            </a:r>
+            <a:endParaRPr lang="en-US" sz="1050" dirty="0"/>
+          </a:p>
+        </p:txBody>
+      </p:sp>
+      <p:sp>
+        <p:nvSpPr>
+          <p:cNvPr id="15" name="Text 12"/>
+          <p:cNvSpPr txBox="1"/>
+          <p:nvPr/>
+        </p:nvSpPr>
+        <p:spPr>
+          <a:xfrm>
+            <a:off x="8229600" y="5138928"/>
+            <a:ext cx="3127248" cy="1060704"/>
+          </a:xfrm>
+          <a:prstGeom prst="rect">
+            <a:avLst/>
+          </a:prstGeom>
+          <a:noFill/>
+          <a:ln/>
+        </p:spPr>
+        <p:txBody>
+          <a:bodyPr wrap="square" lIns="0" tIns="0" rIns="0" bIns="0" rtlCol="0" anchor="ctr"/>
+          <a:lstStyle/>
+          <a:p>
+            <a:pPr indent="0" marL="0">
+              <a:lnSpc>
+                <a:spcPts val="1250"/>
+              </a:lnSpc>
+              <a:buNone/>
+            </a:pPr>
+            <a:r>
+              <a:rPr lang="en-US" sz="900" dirty="0">
                 <a:solidFill>
                   <a:srgbClr val="1F1A1C"/>
                 </a:solidFill>
@@ -5997,592 +9647,15 @@
                 <a:ea typeface="Calibri" pitchFamily="34" charset="-122"/>
                 <a:cs typeface="Calibri" pitchFamily="34" charset="-120"/>
               </a:rPr>
-              <a:t>株式譲渡実行。同時に役員貸付金5.0億円を現金精算</a:t>
+              <a:t>クロージング時点でSPCは対象会社を保有していないため、現預金20億円を支払原資に充てることはできない。ブリッジローンで立て替え、合併後に返済する以外に方法がない。ここがスキーム上の最大の実務論点。</a:t>
             </a:r>
-            <a:endParaRPr lang="en-US" sz="950" dirty="0"/>
+            <a:endParaRPr lang="en-US" sz="900" dirty="0"/>
           </a:p>
         </p:txBody>
       </p:sp>
       <p:sp>
         <p:nvSpPr>
-          <p:cNvPr id="21" name="Shape 17"/>
-          <p:cNvSpPr/>
-          <p:nvPr/>
-        </p:nvSpPr>
-        <p:spPr>
-          <a:xfrm>
-            <a:off x="7717536" y="3374136"/>
-            <a:ext cx="256032" cy="256032"/>
-          </a:xfrm>
-          <a:prstGeom prst="ellipse">
-            <a:avLst/>
-          </a:prstGeom>
-          <a:solidFill>
-            <a:srgbClr val="6D2E46"/>
-          </a:solidFill>
-          <a:ln/>
-        </p:spPr>
-      </p:sp>
-      <p:sp>
-        <p:nvSpPr>
-          <p:cNvPr id="22" name="Text 18"/>
-          <p:cNvSpPr txBox="1"/>
-          <p:nvPr/>
-        </p:nvSpPr>
-        <p:spPr>
-          <a:xfrm>
-            <a:off x="7717536" y="3374136"/>
-            <a:ext cx="256032" cy="256032"/>
-          </a:xfrm>
-          <a:prstGeom prst="rect">
-            <a:avLst/>
-          </a:prstGeom>
-          <a:noFill/>
-          <a:ln/>
-        </p:spPr>
-        <p:txBody>
-          <a:bodyPr wrap="square" lIns="0" tIns="0" rIns="0" bIns="0" rtlCol="0" anchor="ctr"/>
-          <a:lstStyle/>
-          <a:p>
-            <a:pPr algn="ctr" indent="0" marL="0">
-              <a:buNone/>
-            </a:pPr>
-            <a:r>
-              <a:rPr lang="en-US" sz="1100" b="1" dirty="0">
-                <a:solidFill>
-                  <a:srgbClr val="FFFFFF"/>
-                </a:solidFill>
-                <a:latin typeface="Calibri" pitchFamily="34" charset="0"/>
-                <a:ea typeface="Calibri" pitchFamily="34" charset="-122"/>
-                <a:cs typeface="Calibri" pitchFamily="34" charset="-120"/>
-              </a:rPr>
-              <a:t>4</a:t>
-            </a:r>
-            <a:endParaRPr lang="en-US" sz="1100" dirty="0"/>
-          </a:p>
-        </p:txBody>
-      </p:sp>
-      <p:sp>
-        <p:nvSpPr>
-          <p:cNvPr id="23" name="Text 19"/>
-          <p:cNvSpPr txBox="1"/>
-          <p:nvPr/>
-        </p:nvSpPr>
-        <p:spPr>
-          <a:xfrm>
-            <a:off x="8065008" y="3328416"/>
-            <a:ext cx="3337560" cy="438912"/>
-          </a:xfrm>
-          <a:prstGeom prst="rect">
-            <a:avLst/>
-          </a:prstGeom>
-          <a:noFill/>
-          <a:ln/>
-        </p:spPr>
-        <p:txBody>
-          <a:bodyPr wrap="square" lIns="0" tIns="0" rIns="0" bIns="0" rtlCol="0" anchor="ctr"/>
-          <a:lstStyle/>
-          <a:p>
-            <a:pPr indent="0" marL="0">
-              <a:lnSpc>
-                <a:spcPts val="1300"/>
-              </a:lnSpc>
-              <a:buNone/>
-            </a:pPr>
-            <a:r>
-              <a:rPr lang="en-US" sz="950" dirty="0">
-                <a:solidFill>
-                  <a:srgbClr val="1F1A1C"/>
-                </a:solidFill>
-                <a:latin typeface="Calibri" pitchFamily="34" charset="0"/>
-                <a:ea typeface="Calibri" pitchFamily="34" charset="-122"/>
-                <a:cs typeface="Calibri" pitchFamily="34" charset="-120"/>
-              </a:rPr>
-              <a:t>SPCと対象会社を合併し、借入と事業を一体化</a:t>
-            </a:r>
-            <a:endParaRPr lang="en-US" sz="950" dirty="0"/>
-          </a:p>
-        </p:txBody>
-      </p:sp>
-      <p:sp>
-        <p:nvSpPr>
-          <p:cNvPr id="24" name="Shape 20"/>
-          <p:cNvSpPr/>
-          <p:nvPr/>
-        </p:nvSpPr>
-        <p:spPr>
-          <a:xfrm>
-            <a:off x="7717536" y="3849624"/>
-            <a:ext cx="256032" cy="256032"/>
-          </a:xfrm>
-          <a:prstGeom prst="ellipse">
-            <a:avLst/>
-          </a:prstGeom>
-          <a:solidFill>
-            <a:srgbClr val="6D2E46"/>
-          </a:solidFill>
-          <a:ln/>
-        </p:spPr>
-      </p:sp>
-      <p:sp>
-        <p:nvSpPr>
-          <p:cNvPr id="25" name="Text 21"/>
-          <p:cNvSpPr txBox="1"/>
-          <p:nvPr/>
-        </p:nvSpPr>
-        <p:spPr>
-          <a:xfrm>
-            <a:off x="7717536" y="3849624"/>
-            <a:ext cx="256032" cy="256032"/>
-          </a:xfrm>
-          <a:prstGeom prst="rect">
-            <a:avLst/>
-          </a:prstGeom>
-          <a:noFill/>
-          <a:ln/>
-        </p:spPr>
-        <p:txBody>
-          <a:bodyPr wrap="square" lIns="0" tIns="0" rIns="0" bIns="0" rtlCol="0" anchor="ctr"/>
-          <a:lstStyle/>
-          <a:p>
-            <a:pPr algn="ctr" indent="0" marL="0">
-              <a:buNone/>
-            </a:pPr>
-            <a:r>
-              <a:rPr lang="en-US" sz="1100" b="1" dirty="0">
-                <a:solidFill>
-                  <a:srgbClr val="FFFFFF"/>
-                </a:solidFill>
-                <a:latin typeface="Calibri" pitchFamily="34" charset="0"/>
-                <a:ea typeface="Calibri" pitchFamily="34" charset="-122"/>
-                <a:cs typeface="Calibri" pitchFamily="34" charset="-120"/>
-              </a:rPr>
-              <a:t>5</a:t>
-            </a:r>
-            <a:endParaRPr lang="en-US" sz="1100" dirty="0"/>
-          </a:p>
-        </p:txBody>
-      </p:sp>
-      <p:sp>
-        <p:nvSpPr>
-          <p:cNvPr id="26" name="Text 22"/>
-          <p:cNvSpPr txBox="1"/>
-          <p:nvPr/>
-        </p:nvSpPr>
-        <p:spPr>
-          <a:xfrm>
-            <a:off x="8065008" y="3803904"/>
-            <a:ext cx="3337560" cy="438912"/>
-          </a:xfrm>
-          <a:prstGeom prst="rect">
-            <a:avLst/>
-          </a:prstGeom>
-          <a:noFill/>
-          <a:ln/>
-        </p:spPr>
-        <p:txBody>
-          <a:bodyPr wrap="square" lIns="0" tIns="0" rIns="0" bIns="0" rtlCol="0" anchor="ctr"/>
-          <a:lstStyle/>
-          <a:p>
-            <a:pPr indent="0" marL="0">
-              <a:lnSpc>
-                <a:spcPts val="1300"/>
-              </a:lnSpc>
-              <a:buNone/>
-            </a:pPr>
-            <a:r>
-              <a:rPr lang="en-US" sz="950" dirty="0">
-                <a:solidFill>
-                  <a:srgbClr val="1F1A1C"/>
-                </a:solidFill>
-                <a:latin typeface="Calibri" pitchFamily="34" charset="0"/>
-                <a:ea typeface="Calibri" pitchFamily="34" charset="-122"/>
-                <a:cs typeface="Calibri" pitchFamily="34" charset="-120"/>
-              </a:rPr>
-              <a:t>岸田氏3年ロックアップのもとで運営。後継料理長を招聘</a:t>
-            </a:r>
-            <a:endParaRPr lang="en-US" sz="950" dirty="0"/>
-          </a:p>
-        </p:txBody>
-      </p:sp>
-      <p:sp>
-        <p:nvSpPr>
-          <p:cNvPr id="27" name="Shape 23"/>
-          <p:cNvSpPr/>
-          <p:nvPr/>
-        </p:nvSpPr>
-        <p:spPr>
-          <a:xfrm>
-            <a:off x="7498080" y="4480560"/>
-            <a:ext cx="4123944" cy="1188720"/>
-          </a:xfrm>
-          <a:prstGeom prst="roundRect">
-            <a:avLst>
-              <a:gd name="adj" fmla="val 3846"/>
-            </a:avLst>
-          </a:prstGeom>
-          <a:solidFill>
-            <a:srgbClr val="FFFFFF"/>
-          </a:solidFill>
-          <a:ln w="9525">
-            <a:solidFill>
-              <a:srgbClr val="E4DADD"/>
-            </a:solidFill>
-            <a:prstDash val="solid"/>
-          </a:ln>
-        </p:spPr>
-      </p:sp>
-      <p:sp>
-        <p:nvSpPr>
-          <p:cNvPr id="28" name="Text 24"/>
-          <p:cNvSpPr txBox="1"/>
-          <p:nvPr/>
-        </p:nvSpPr>
-        <p:spPr>
-          <a:xfrm>
-            <a:off x="7717536" y="4572000"/>
-            <a:ext cx="3657600" cy="219456"/>
-          </a:xfrm>
-          <a:prstGeom prst="rect">
-            <a:avLst/>
-          </a:prstGeom>
-          <a:noFill/>
-          <a:ln/>
-        </p:spPr>
-        <p:txBody>
-          <a:bodyPr wrap="square" lIns="0" tIns="0" rIns="0" bIns="0" rtlCol="0" anchor="ctr"/>
-          <a:lstStyle/>
-          <a:p>
-            <a:pPr indent="0" marL="0">
-              <a:buNone/>
-            </a:pPr>
-            <a:r>
-              <a:rPr lang="en-US" sz="1000" b="1" dirty="0">
-                <a:solidFill>
-                  <a:srgbClr val="B58B2A"/>
-                </a:solidFill>
-                <a:latin typeface="Calibri" pitchFamily="34" charset="0"/>
-                <a:ea typeface="Calibri" pitchFamily="34" charset="-122"/>
-                <a:cs typeface="Calibri" pitchFamily="34" charset="-120"/>
-              </a:rPr>
-              <a:t>日程</a:t>
-            </a:r>
-            <a:endParaRPr lang="en-US" sz="1000" dirty="0"/>
-          </a:p>
-        </p:txBody>
-      </p:sp>
-      <p:sp>
-        <p:nvSpPr>
-          <p:cNvPr id="29" name="Text 25"/>
-          <p:cNvSpPr txBox="1"/>
-          <p:nvPr/>
-        </p:nvSpPr>
-        <p:spPr>
-          <a:xfrm>
-            <a:off x="7717536" y="4809744"/>
-            <a:ext cx="1920240" cy="237744"/>
-          </a:xfrm>
-          <a:prstGeom prst="rect">
-            <a:avLst/>
-          </a:prstGeom>
-          <a:noFill/>
-          <a:ln/>
-        </p:spPr>
-        <p:txBody>
-          <a:bodyPr wrap="square" lIns="0" tIns="0" rIns="0" bIns="0" rtlCol="0" anchor="ctr"/>
-          <a:lstStyle/>
-          <a:p>
-            <a:pPr indent="0" marL="0">
-              <a:buNone/>
-            </a:pPr>
-            <a:r>
-              <a:rPr lang="en-US" sz="950" dirty="0">
-                <a:solidFill>
-                  <a:srgbClr val="6E6368"/>
-                </a:solidFill>
-                <a:latin typeface="Calibri" pitchFamily="34" charset="0"/>
-                <a:ea typeface="Calibri" pitchFamily="34" charset="-122"/>
-                <a:cs typeface="Calibri" pitchFamily="34" charset="-120"/>
-              </a:rPr>
-              <a:t>意向表明書提出</a:t>
-            </a:r>
-            <a:endParaRPr lang="en-US" sz="950" dirty="0"/>
-          </a:p>
-        </p:txBody>
-      </p:sp>
-      <p:sp>
-        <p:nvSpPr>
-          <p:cNvPr id="30" name="Text 26"/>
-          <p:cNvSpPr txBox="1"/>
-          <p:nvPr/>
-        </p:nvSpPr>
-        <p:spPr>
-          <a:xfrm>
-            <a:off x="9601200" y="4809744"/>
-            <a:ext cx="1801368" cy="237744"/>
-          </a:xfrm>
-          <a:prstGeom prst="rect">
-            <a:avLst/>
-          </a:prstGeom>
-          <a:noFill/>
-          <a:ln/>
-        </p:spPr>
-        <p:txBody>
-          <a:bodyPr wrap="square" lIns="0" tIns="0" rIns="0" bIns="0" rtlCol="0" anchor="ctr"/>
-          <a:lstStyle/>
-          <a:p>
-            <a:pPr algn="r" indent="0" marL="0">
-              <a:buNone/>
-            </a:pPr>
-            <a:r>
-              <a:rPr lang="en-US" sz="950" b="1" dirty="0">
-                <a:solidFill>
-                  <a:srgbClr val="1F1A1C"/>
-                </a:solidFill>
-                <a:latin typeface="Calibri" pitchFamily="34" charset="0"/>
-                <a:ea typeface="Calibri" pitchFamily="34" charset="-122"/>
-                <a:cs typeface="Calibri" pitchFamily="34" charset="-120"/>
-              </a:rPr>
-              <a:t>2026年9月30日</a:t>
-            </a:r>
-            <a:endParaRPr lang="en-US" sz="950" dirty="0"/>
-          </a:p>
-        </p:txBody>
-      </p:sp>
-      <p:sp>
-        <p:nvSpPr>
-          <p:cNvPr id="31" name="Text 27"/>
-          <p:cNvSpPr txBox="1"/>
-          <p:nvPr/>
-        </p:nvSpPr>
-        <p:spPr>
-          <a:xfrm>
-            <a:off x="7717536" y="5074920"/>
-            <a:ext cx="1920240" cy="237744"/>
-          </a:xfrm>
-          <a:prstGeom prst="rect">
-            <a:avLst/>
-          </a:prstGeom>
-          <a:noFill/>
-          <a:ln/>
-        </p:spPr>
-        <p:txBody>
-          <a:bodyPr wrap="square" lIns="0" tIns="0" rIns="0" bIns="0" rtlCol="0" anchor="ctr"/>
-          <a:lstStyle/>
-          <a:p>
-            <a:pPr indent="0" marL="0">
-              <a:buNone/>
-            </a:pPr>
-            <a:r>
-              <a:rPr lang="en-US" sz="950" dirty="0">
-                <a:solidFill>
-                  <a:srgbClr val="6E6368"/>
-                </a:solidFill>
-                <a:latin typeface="Calibri" pitchFamily="34" charset="0"/>
-                <a:ea typeface="Calibri" pitchFamily="34" charset="-122"/>
-                <a:cs typeface="Calibri" pitchFamily="34" charset="-120"/>
-              </a:rPr>
-              <a:t>DD</a:t>
-            </a:r>
-            <a:endParaRPr lang="en-US" sz="950" dirty="0"/>
-          </a:p>
-        </p:txBody>
-      </p:sp>
-      <p:sp>
-        <p:nvSpPr>
-          <p:cNvPr id="32" name="Text 28"/>
-          <p:cNvSpPr txBox="1"/>
-          <p:nvPr/>
-        </p:nvSpPr>
-        <p:spPr>
-          <a:xfrm>
-            <a:off x="9601200" y="5074920"/>
-            <a:ext cx="1801368" cy="237744"/>
-          </a:xfrm>
-          <a:prstGeom prst="rect">
-            <a:avLst/>
-          </a:prstGeom>
-          <a:noFill/>
-          <a:ln/>
-        </p:spPr>
-        <p:txBody>
-          <a:bodyPr wrap="square" lIns="0" tIns="0" rIns="0" bIns="0" rtlCol="0" anchor="ctr"/>
-          <a:lstStyle/>
-          <a:p>
-            <a:pPr algn="r" indent="0" marL="0">
-              <a:buNone/>
-            </a:pPr>
-            <a:r>
-              <a:rPr lang="en-US" sz="950" b="1" dirty="0">
-                <a:solidFill>
-                  <a:srgbClr val="1F1A1C"/>
-                </a:solidFill>
-                <a:latin typeface="Calibri" pitchFamily="34" charset="0"/>
-                <a:ea typeface="Calibri" pitchFamily="34" charset="-122"/>
-                <a:cs typeface="Calibri" pitchFamily="34" charset="-120"/>
-              </a:rPr>
-              <a:t>10月上旬〜11月中旬</a:t>
-            </a:r>
-            <a:endParaRPr lang="en-US" sz="950" dirty="0"/>
-          </a:p>
-        </p:txBody>
-      </p:sp>
-      <p:sp>
-        <p:nvSpPr>
-          <p:cNvPr id="33" name="Text 29"/>
-          <p:cNvSpPr txBox="1"/>
-          <p:nvPr/>
-        </p:nvSpPr>
-        <p:spPr>
-          <a:xfrm>
-            <a:off x="7717536" y="5340096"/>
-            <a:ext cx="1920240" cy="237744"/>
-          </a:xfrm>
-          <a:prstGeom prst="rect">
-            <a:avLst/>
-          </a:prstGeom>
-          <a:noFill/>
-          <a:ln/>
-        </p:spPr>
-        <p:txBody>
-          <a:bodyPr wrap="square" lIns="0" tIns="0" rIns="0" bIns="0" rtlCol="0" anchor="ctr"/>
-          <a:lstStyle/>
-          <a:p>
-            <a:pPr indent="0" marL="0">
-              <a:buNone/>
-            </a:pPr>
-            <a:r>
-              <a:rPr lang="en-US" sz="950" dirty="0">
-                <a:solidFill>
-                  <a:srgbClr val="6E6368"/>
-                </a:solidFill>
-                <a:latin typeface="Calibri" pitchFamily="34" charset="0"/>
-                <a:ea typeface="Calibri" pitchFamily="34" charset="-122"/>
-                <a:cs typeface="Calibri" pitchFamily="34" charset="-120"/>
-              </a:rPr>
-              <a:t>クロージング</a:t>
-            </a:r>
-            <a:endParaRPr lang="en-US" sz="950" dirty="0"/>
-          </a:p>
-        </p:txBody>
-      </p:sp>
-      <p:sp>
-        <p:nvSpPr>
-          <p:cNvPr id="34" name="Text 30"/>
-          <p:cNvSpPr txBox="1"/>
-          <p:nvPr/>
-        </p:nvSpPr>
-        <p:spPr>
-          <a:xfrm>
-            <a:off x="9601200" y="5340096"/>
-            <a:ext cx="1801368" cy="237744"/>
-          </a:xfrm>
-          <a:prstGeom prst="rect">
-            <a:avLst/>
-          </a:prstGeom>
-          <a:noFill/>
-          <a:ln/>
-        </p:spPr>
-        <p:txBody>
-          <a:bodyPr wrap="square" lIns="0" tIns="0" rIns="0" bIns="0" rtlCol="0" anchor="ctr"/>
-          <a:lstStyle/>
-          <a:p>
-            <a:pPr algn="r" indent="0" marL="0">
-              <a:buNone/>
-            </a:pPr>
-            <a:r>
-              <a:rPr lang="en-US" sz="950" b="1" dirty="0">
-                <a:solidFill>
-                  <a:srgbClr val="1F1A1C"/>
-                </a:solidFill>
-                <a:latin typeface="Calibri" pitchFamily="34" charset="0"/>
-                <a:ea typeface="Calibri" pitchFamily="34" charset="-122"/>
-                <a:cs typeface="Calibri" pitchFamily="34" charset="-120"/>
-              </a:rPr>
-              <a:t>11月末（最短）〜年末</a:t>
-            </a:r>
-            <a:endParaRPr lang="en-US" sz="950" dirty="0"/>
-          </a:p>
-        </p:txBody>
-      </p:sp>
-      <p:sp>
-        <p:nvSpPr>
-          <p:cNvPr id="35" name="Shape 31"/>
-          <p:cNvSpPr/>
-          <p:nvPr/>
-        </p:nvSpPr>
-        <p:spPr>
-          <a:xfrm>
-            <a:off x="566928" y="5760720"/>
-            <a:ext cx="11055096" cy="530352"/>
-          </a:xfrm>
-          <a:prstGeom prst="roundRect">
-            <a:avLst>
-              <a:gd name="adj" fmla="val 6897"/>
-            </a:avLst>
-          </a:prstGeom>
-          <a:solidFill>
-            <a:srgbClr val="6D2E46"/>
-          </a:solidFill>
-          <a:ln/>
-        </p:spPr>
-      </p:sp>
-      <p:sp>
-        <p:nvSpPr>
-          <p:cNvPr id="36" name="Text 32"/>
-          <p:cNvSpPr txBox="1"/>
-          <p:nvPr/>
-        </p:nvSpPr>
-        <p:spPr>
-          <a:xfrm>
-            <a:off x="804672" y="5815584"/>
-            <a:ext cx="10579608" cy="420624"/>
-          </a:xfrm>
-          <a:prstGeom prst="rect">
-            <a:avLst/>
-          </a:prstGeom>
-          <a:noFill/>
-          <a:ln/>
-        </p:spPr>
-        <p:txBody>
-          <a:bodyPr wrap="square" lIns="0" tIns="0" rIns="0" bIns="0" rtlCol="0" anchor="ctr"/>
-          <a:lstStyle/>
-          <a:p>
-            <a:pPr indent="0" marL="0">
-              <a:lnSpc>
-                <a:spcPts val="1500"/>
-              </a:lnSpc>
-              <a:buNone/>
-            </a:pPr>
-            <a:r>
-              <a:rPr lang="en-US" sz="1100" b="1" dirty="0">
-                <a:solidFill>
-                  <a:srgbClr val="FFFFFF"/>
-                </a:solidFill>
-              </a:rPr>
-              <a:t>残る論点　</a:t>
-            </a:r>
-            <a:pPr indent="0" marL="0">
-              <a:lnSpc>
-                <a:spcPts val="1500"/>
-              </a:lnSpc>
-              <a:buNone/>
-            </a:pPr>
-            <a:r>
-              <a:rPr lang="en-US" sz="1000" dirty="0">
-                <a:solidFill>
-                  <a:srgbClr val="EBDCE1"/>
-                </a:solidFill>
-              </a:rPr>
-              <a:t>① WineBank出資20.0億円の資金手当て　② 株主間契約（取締役指名・譲渡制限・出口）　③ 譲受価額が50.0億円を超える場合、投資家10.0億円の持分は33.3%を下回る（53.0億円なら30.3%）</a:t>
-            </a:r>
-            <a:endParaRPr lang="en-US" sz="1100" dirty="0"/>
-          </a:p>
-        </p:txBody>
-      </p:sp>
-      <p:sp>
-        <p:nvSpPr>
-          <p:cNvPr id="37" name="Text 33"/>
+          <p:cNvPr id="16" name="Text 13"/>
           <p:cNvSpPr txBox="1"/>
           <p:nvPr/>
         </p:nvSpPr>
@@ -6621,7 +9694,7 @@
       </p:sp>
       <p:sp>
         <p:nvSpPr>
-          <p:cNvPr id="38" name="Text 34"/>
+          <p:cNvPr id="17" name="Text 14"/>
           <p:cNvSpPr txBox="1"/>
           <p:nvPr/>
         </p:nvSpPr>
@@ -6652,7 +9725,7 @@
                 <a:ea typeface="Calibri" pitchFamily="34" charset="-122"/>
                 <a:cs typeface="Calibri" pitchFamily="34" charset="-120"/>
               </a:rPr>
-              <a:t>2</a:t>
+              <a:t>3</a:t>
             </a:r>
             <a:endParaRPr lang="en-US" sz="900" dirty="0"/>
           </a:p>

--- a/M&A/カンテサンス/カンテサンス_M&Aスキーム図.pptx
+++ b/M&A/カンテサンス/カンテサンス_M&Aスキーム図.pptx
@@ -8,9 +8,10 @@
     <p:sldId id="256" r:id="rId2"/>
     <p:sldId id="257" r:id="rId3"/>
     <p:sldId id="258" r:id="rId4"/>
+    <p:sldId id="259" r:id="rId5"/>
   </p:sldIdLst>
   <p:notesMasterIdLst>
-    <p:notesMasterId r:id="rId5"/>
+    <p:notesMasterId r:id="rId6"/>
   </p:notesMasterIdLst>
   <p:sldSz cx="12192000" cy="6858000"/>
   <p:notesSz cx="6858000" cy="12192000"/>
@@ -704,6 +705,94 @@
             <a:fld id="{F7021451-1387-4CA6-816F-3879F97B5CBC}" type="slidenum">
               <a:rPr lang="en-US"/>
               <a:t>3</a:t>
+            </a:fld>
+            <a:endParaRPr lang="en-US"/>
+          </a:p>
+        </p:txBody>
+      </p:sp>
+    </p:spTree>
+    <p:extLst>
+      <p:ext uri="{BB962C8B-B14F-4D97-AF65-F5344CB8AC3E}">
+        <p14:creationId xmlns:p14="http://schemas.microsoft.com/office/powerpoint/2010/main" val="1024086991"/>
+      </p:ext>
+    </p:extLst>
+  </p:cSld>
+  <p:clrMapOvr>
+    <a:masterClrMapping/>
+  </p:clrMapOvr>
+</p:notes>
+</file>
+
+<file path=ppt/notesSlides/notesSlide4.xml><?xml version="1.0" encoding="utf-8"?>
+<p:notes xmlns:a="http://schemas.openxmlformats.org/drawingml/2006/main" xmlns:r="http://schemas.openxmlformats.org/officeDocument/2006/relationships" xmlns:p="http://schemas.openxmlformats.org/presentationml/2006/main">
+  <p:cSld>
+    <p:spTree>
+      <p:nvGrpSpPr>
+        <p:cNvPr id="1" name=""/>
+        <p:cNvGrpSpPr/>
+        <p:nvPr/>
+      </p:nvGrpSpPr>
+      <p:grpSpPr>
+        <a:xfrm>
+          <a:off x="0" y="0"/>
+          <a:ext cx="0" cy="0"/>
+          <a:chOff x="0" y="0"/>
+          <a:chExt cx="0" cy="0"/>
+        </a:xfrm>
+      </p:grpSpPr>
+      <p:sp>
+        <p:nvSpPr>
+          <p:cNvPr id="2" name="Slide Image Placeholder 1"/>
+          <p:cNvSpPr>
+            <a:spLocks noGrp="1" noRot="1" noChangeAspect="1"/>
+          </p:cNvSpPr>
+          <p:nvPr>
+            <p:ph type="sldImg"/>
+          </p:nvPr>
+        </p:nvSpPr>
+        <p:spPr/>
+      </p:sp>
+      <p:sp>
+        <p:nvSpPr>
+          <p:cNvPr id="3" name="Notes Placeholder 2"/>
+          <p:cNvSpPr>
+            <a:spLocks noGrp="1"/>
+          </p:cNvSpPr>
+          <p:nvPr>
+            <p:ph type="body" idx="1"/>
+          </p:nvPr>
+        </p:nvSpPr>
+        <p:spPr/>
+        <p:txBody>
+          <a:bodyPr/>
+          <a:lstStyle/>
+          <a:p>
+            <a:r>
+              <a:rPr lang="en-US" dirty="0"/>
+              <a:t/>
+            </a:r>
+            <a:endParaRPr lang="en-US" dirty="0"/>
+          </a:p>
+        </p:txBody>
+      </p:sp>
+      <p:sp>
+        <p:nvSpPr>
+          <p:cNvPr id="4" name="Slide Number Placeholder 3"/>
+          <p:cNvSpPr>
+            <a:spLocks noGrp="1"/>
+          </p:cNvSpPr>
+          <p:nvPr>
+            <p:ph type="sldNum" sz="quarter" idx="10"/>
+          </p:nvPr>
+        </p:nvSpPr>
+        <p:spPr/>
+        <p:txBody>
+          <a:bodyPr/>
+          <a:lstStyle/>
+          <a:p>
+            <a:fld id="{F7021451-1387-4CA6-816F-3879F97B5CBC}" type="slidenum">
+              <a:rPr lang="en-US"/>
+              <a:t>4</a:t>
             </a:fld>
             <a:endParaRPr lang="en-US"/>
           </a:p>
@@ -1160,7 +1249,7 @@
                 <a:ea typeface="Calibri" pitchFamily="34" charset="-122"/>
                 <a:cs typeface="Calibri" pitchFamily="34" charset="-120"/>
               </a:rPr>
-              <a:t>資本金10万円のSPCを設立し、みずほ銀行のローンと投資家の出資をもって対象会社の全株式を取得。クロージング後にSPCと対象会社を合併する。</a:t>
+              <a:t>資本金10万円のSPCを設立し、みずほ銀行のローンと投資家の出資をもって対象会社の全株式を取得。クロージング後にSPCと対象会社を合併する。譲受価額はレンジ（50.0〜55.0億円）で提示する。</a:t>
             </a:r>
             <a:endParaRPr lang="en-US" sz="1250" dirty="0"/>
           </a:p>
@@ -1764,7 +1853,7 @@
                 <a:ea typeface="Calibri" pitchFamily="34" charset="-122"/>
                 <a:cs typeface="Calibri" pitchFamily="34" charset="-120"/>
               </a:rPr>
-              <a:t>資本金10万円／借入36.4億円</a:t>
+              <a:t>資本金10万円／借入36.4億円（ターム20.0＋ブリッジ16.4）</a:t>
             </a:r>
             <a:endParaRPr lang="en-US" sz="900" dirty="0"/>
           </a:p>
@@ -2062,8 +2151,8 @@
         </p:nvSpPr>
         <p:spPr>
           <a:xfrm>
-            <a:off x="8092440" y="3419856"/>
-            <a:ext cx="1097280" cy="329184"/>
+            <a:off x="8065008" y="3419856"/>
+            <a:ext cx="1152144" cy="329184"/>
           </a:xfrm>
           <a:prstGeom prst="rect">
             <a:avLst/>
@@ -2082,7 +2171,7 @@
               <a:buNone/>
             </a:pPr>
             <a:r>
-              <a:rPr lang="en-US" sz="850" b="1" dirty="0">
+              <a:rPr lang="en-US" sz="800" b="1" dirty="0">
                 <a:solidFill>
                   <a:srgbClr val="6D2E46"/>
                 </a:solidFill>
@@ -2092,7 +2181,7 @@
               </a:rPr>
               <a:t>譲受代金</a:t>
             </a:r>
-            <a:endParaRPr lang="en-US" sz="850" dirty="0"/>
+            <a:endParaRPr lang="en-US" sz="800" dirty="0"/>
           </a:p>
           <a:p>
             <a:pPr algn="ctr" indent="0" marL="0">
@@ -2102,7 +2191,7 @@
               <a:buNone/>
             </a:pPr>
             <a:r>
-              <a:rPr lang="en-US" sz="850" b="1" dirty="0">
+              <a:rPr lang="en-US" sz="800" b="1" dirty="0">
                 <a:solidFill>
                   <a:srgbClr val="6D2E46"/>
                 </a:solidFill>
@@ -2110,9 +2199,9 @@
                 <a:ea typeface="Calibri" pitchFamily="34" charset="-122"/>
                 <a:cs typeface="Calibri" pitchFamily="34" charset="-120"/>
               </a:rPr>
-              <a:t>50.0億円</a:t>
+              <a:t>50.0〜55.0億円</a:t>
             </a:r>
-            <a:endParaRPr lang="en-US" sz="850" dirty="0"/>
+            <a:endParaRPr lang="en-US" sz="800" dirty="0"/>
           </a:p>
         </p:txBody>
       </p:sp>
@@ -2432,7 +2521,7 @@
                 <a:ea typeface="Calibri" pitchFamily="34" charset="-122"/>
                 <a:cs typeface="Calibri" pitchFamily="34" charset="-120"/>
               </a:rPr>
-              <a:t>持分</a:t>
+              <a:t>譲受価額</a:t>
             </a:r>
             <a:endParaRPr lang="en-US" sz="950" dirty="0"/>
           </a:p>
@@ -2447,7 +2536,7 @@
         <p:spPr>
           <a:xfrm>
             <a:off x="731520" y="5522976"/>
-            <a:ext cx="2231136" cy="365760"/>
+            <a:ext cx="2286000" cy="365760"/>
           </a:xfrm>
           <a:prstGeom prst="rect">
             <a:avLst/>
@@ -2463,7 +2552,7 @@
               <a:buNone/>
             </a:pPr>
             <a:r>
-              <a:rPr lang="en-US" sz="2000" b="1" dirty="0">
+              <a:rPr lang="en-US" sz="1700" b="1" dirty="0">
                 <a:solidFill>
                   <a:srgbClr val="6D2E46"/>
                 </a:solidFill>
@@ -2471,9 +2560,9 @@
                 <a:ea typeface="Cambria" pitchFamily="34" charset="-122"/>
                 <a:cs typeface="Cambria" pitchFamily="34" charset="-120"/>
               </a:rPr>
-              <a:t>67％ ／ 33％</a:t>
+              <a:t>50.0〜55.0億円</a:t>
             </a:r>
-            <a:endParaRPr lang="en-US" sz="2000" dirty="0"/>
+            <a:endParaRPr lang="en-US" sz="1700" dirty="0"/>
           </a:p>
         </p:txBody>
       </p:sp>
@@ -2510,7 +2599,7 @@
                 <a:ea typeface="Calibri" pitchFamily="34" charset="-122"/>
                 <a:cs typeface="Calibri" pitchFamily="34" charset="-120"/>
               </a:rPr>
-              <a:t>中野氏 ／ 榊原氏（合意による配分）</a:t>
+              <a:t>レンジで提示</a:t>
             </a:r>
             <a:endParaRPr lang="en-US" sz="850" dirty="0"/>
           </a:p>
@@ -2525,150 +2614,6 @@
         <p:spPr>
           <a:xfrm>
             <a:off x="3355848" y="5230368"/>
-            <a:ext cx="2560320" cy="914400"/>
-          </a:xfrm>
-          <a:prstGeom prst="roundRect">
-            <a:avLst>
-              <a:gd name="adj" fmla="val 5000"/>
-            </a:avLst>
-          </a:prstGeom>
-          <a:solidFill>
-            <a:srgbClr val="F7F3F4"/>
-          </a:solidFill>
-          <a:ln w="9525">
-            <a:solidFill>
-              <a:srgbClr val="E4DADD"/>
-            </a:solidFill>
-            <a:prstDash val="solid"/>
-          </a:ln>
-        </p:spPr>
-      </p:sp>
-      <p:sp>
-        <p:nvSpPr>
-          <p:cNvPr id="41" name="Text 39"/>
-          <p:cNvSpPr txBox="1"/>
-          <p:nvPr/>
-        </p:nvSpPr>
-        <p:spPr>
-          <a:xfrm>
-            <a:off x="3520440" y="5321808"/>
-            <a:ext cx="2231136" cy="219456"/>
-          </a:xfrm>
-          <a:prstGeom prst="rect">
-            <a:avLst/>
-          </a:prstGeom>
-          <a:noFill/>
-          <a:ln/>
-        </p:spPr>
-        <p:txBody>
-          <a:bodyPr wrap="square" lIns="0" tIns="0" rIns="0" bIns="0" rtlCol="0" anchor="ctr"/>
-          <a:lstStyle/>
-          <a:p>
-            <a:pPr indent="0" marL="0">
-              <a:buNone/>
-            </a:pPr>
-            <a:r>
-              <a:rPr lang="en-US" sz="950" b="1" dirty="0">
-                <a:solidFill>
-                  <a:srgbClr val="B58B2A"/>
-                </a:solidFill>
-                <a:latin typeface="Calibri" pitchFamily="34" charset="0"/>
-                <a:ea typeface="Calibri" pitchFamily="34" charset="-122"/>
-                <a:cs typeface="Calibri" pitchFamily="34" charset="-120"/>
-              </a:rPr>
-              <a:t>クロージング所要</a:t>
-            </a:r>
-            <a:endParaRPr lang="en-US" sz="950" dirty="0"/>
-          </a:p>
-        </p:txBody>
-      </p:sp>
-      <p:sp>
-        <p:nvSpPr>
-          <p:cNvPr id="42" name="Text 40"/>
-          <p:cNvSpPr txBox="1"/>
-          <p:nvPr/>
-        </p:nvSpPr>
-        <p:spPr>
-          <a:xfrm>
-            <a:off x="3520440" y="5522976"/>
-            <a:ext cx="2231136" cy="365760"/>
-          </a:xfrm>
-          <a:prstGeom prst="rect">
-            <a:avLst/>
-          </a:prstGeom>
-          <a:noFill/>
-          <a:ln/>
-        </p:spPr>
-        <p:txBody>
-          <a:bodyPr wrap="square" lIns="0" tIns="0" rIns="0" bIns="0" rtlCol="0" anchor="ctr"/>
-          <a:lstStyle/>
-          <a:p>
-            <a:pPr indent="0" marL="0">
-              <a:buNone/>
-            </a:pPr>
-            <a:r>
-              <a:rPr lang="en-US" sz="2000" b="1" dirty="0">
-                <a:solidFill>
-                  <a:srgbClr val="6D2E46"/>
-                </a:solidFill>
-                <a:latin typeface="Cambria" pitchFamily="34" charset="0"/>
-                <a:ea typeface="Cambria" pitchFamily="34" charset="-122"/>
-                <a:cs typeface="Cambria" pitchFamily="34" charset="-120"/>
-              </a:rPr>
-              <a:t>51.5億円</a:t>
-            </a:r>
-            <a:endParaRPr lang="en-US" sz="2000" dirty="0"/>
-          </a:p>
-        </p:txBody>
-      </p:sp>
-      <p:sp>
-        <p:nvSpPr>
-          <p:cNvPr id="43" name="Text 41"/>
-          <p:cNvSpPr txBox="1"/>
-          <p:nvPr/>
-        </p:nvSpPr>
-        <p:spPr>
-          <a:xfrm>
-            <a:off x="3520440" y="5888736"/>
-            <a:ext cx="2286000" cy="201168"/>
-          </a:xfrm>
-          <a:prstGeom prst="rect">
-            <a:avLst/>
-          </a:prstGeom>
-          <a:noFill/>
-          <a:ln/>
-        </p:spPr>
-        <p:txBody>
-          <a:bodyPr wrap="square" lIns="0" tIns="0" rIns="0" bIns="0" rtlCol="0" anchor="ctr"/>
-          <a:lstStyle/>
-          <a:p>
-            <a:pPr indent="0" marL="0">
-              <a:buNone/>
-            </a:pPr>
-            <a:r>
-              <a:rPr lang="en-US" sz="850" dirty="0">
-                <a:solidFill>
-                  <a:srgbClr val="6E6368"/>
-                </a:solidFill>
-                <a:latin typeface="Calibri" pitchFamily="34" charset="0"/>
-                <a:ea typeface="Calibri" pitchFamily="34" charset="-122"/>
-                <a:cs typeface="Calibri" pitchFamily="34" charset="-120"/>
-              </a:rPr>
-              <a:t>株価50.0＋費用1.5</a:t>
-            </a:r>
-            <a:endParaRPr lang="en-US" sz="850" dirty="0"/>
-          </a:p>
-        </p:txBody>
-      </p:sp>
-      <p:sp>
-        <p:nvSpPr>
-          <p:cNvPr id="44" name="Shape 42"/>
-          <p:cNvSpPr/>
-          <p:nvPr/>
-        </p:nvSpPr>
-        <p:spPr>
-          <a:xfrm>
-            <a:off x="6144768" y="5230368"/>
             <a:ext cx="2560320" cy="914400"/>
           </a:xfrm>
           <a:prstGeom prst="roundRect">
@@ -2689,13 +2634,13 @@
       </p:sp>
       <p:sp>
         <p:nvSpPr>
-          <p:cNvPr id="45" name="Text 43"/>
+          <p:cNvPr id="41" name="Text 39"/>
           <p:cNvSpPr txBox="1"/>
           <p:nvPr/>
         </p:nvSpPr>
         <p:spPr>
           <a:xfrm>
-            <a:off x="6309360" y="5321808"/>
+            <a:off x="3520440" y="5321808"/>
             <a:ext cx="2231136" cy="219456"/>
           </a:xfrm>
           <a:prstGeom prst="rect">
@@ -2728,14 +2673,14 @@
       </p:sp>
       <p:sp>
         <p:nvSpPr>
-          <p:cNvPr id="46" name="Text 44"/>
+          <p:cNvPr id="42" name="Text 40"/>
           <p:cNvSpPr txBox="1"/>
           <p:nvPr/>
         </p:nvSpPr>
         <p:spPr>
           <a:xfrm>
-            <a:off x="6309360" y="5522976"/>
-            <a:ext cx="2231136" cy="365760"/>
+            <a:off x="3520440" y="5522976"/>
+            <a:ext cx="2286000" cy="365760"/>
           </a:xfrm>
           <a:prstGeom prst="rect">
             <a:avLst/>
@@ -2767,13 +2712,13 @@
       </p:sp>
       <p:sp>
         <p:nvSpPr>
-          <p:cNvPr id="47" name="Text 45"/>
+          <p:cNvPr id="43" name="Text 41"/>
           <p:cNvSpPr txBox="1"/>
           <p:nvPr/>
         </p:nvSpPr>
         <p:spPr>
           <a:xfrm>
-            <a:off x="6309360" y="5888736"/>
+            <a:off x="3520440" y="5888736"/>
             <a:ext cx="2286000" cy="201168"/>
           </a:xfrm>
           <a:prstGeom prst="rect">
@@ -2806,13 +2751,13 @@
       </p:sp>
       <p:sp>
         <p:nvSpPr>
-          <p:cNvPr id="48" name="Shape 46"/>
+          <p:cNvPr id="44" name="Shape 42"/>
           <p:cNvSpPr/>
           <p:nvPr/>
         </p:nvSpPr>
         <p:spPr>
           <a:xfrm>
-            <a:off x="8933688" y="5230368"/>
+            <a:off x="6144768" y="5230368"/>
             <a:ext cx="2560320" cy="914400"/>
           </a:xfrm>
           <a:prstGeom prst="roundRect">
@@ -2833,13 +2778,13 @@
       </p:sp>
       <p:sp>
         <p:nvSpPr>
-          <p:cNvPr id="49" name="Text 47"/>
+          <p:cNvPr id="45" name="Text 43"/>
           <p:cNvSpPr txBox="1"/>
           <p:nvPr/>
         </p:nvSpPr>
         <p:spPr>
           <a:xfrm>
-            <a:off x="9098280" y="5321808"/>
+            <a:off x="6309360" y="5321808"/>
             <a:ext cx="2231136" cy="219456"/>
           </a:xfrm>
           <a:prstGeom prst="rect">
@@ -2872,14 +2817,14 @@
       </p:sp>
       <p:sp>
         <p:nvSpPr>
-          <p:cNvPr id="50" name="Text 48"/>
+          <p:cNvPr id="46" name="Text 44"/>
           <p:cNvSpPr txBox="1"/>
           <p:nvPr/>
         </p:nvSpPr>
         <p:spPr>
           <a:xfrm>
-            <a:off x="9098280" y="5522976"/>
-            <a:ext cx="2231136" cy="365760"/>
+            <a:off x="6309360" y="5522976"/>
+            <a:ext cx="2286000" cy="365760"/>
           </a:xfrm>
           <a:prstGeom prst="rect">
             <a:avLst/>
@@ -2911,13 +2856,13 @@
       </p:sp>
       <p:sp>
         <p:nvSpPr>
-          <p:cNvPr id="51" name="Text 49"/>
+          <p:cNvPr id="47" name="Text 45"/>
           <p:cNvSpPr txBox="1"/>
           <p:nvPr/>
         </p:nvSpPr>
         <p:spPr>
           <a:xfrm>
-            <a:off x="9098280" y="5888736"/>
+            <a:off x="6309360" y="5888736"/>
             <a:ext cx="2286000" cy="201168"/>
           </a:xfrm>
           <a:prstGeom prst="rect">
@@ -2943,6 +2888,150 @@
                 <a:cs typeface="Calibri" pitchFamily="34" charset="-120"/>
               </a:rPr>
               <a:t>これ以下は成立しない</a:t>
+            </a:r>
+            <a:endParaRPr lang="en-US" sz="850" dirty="0"/>
+          </a:p>
+        </p:txBody>
+      </p:sp>
+      <p:sp>
+        <p:nvSpPr>
+          <p:cNvPr id="48" name="Shape 46"/>
+          <p:cNvSpPr/>
+          <p:nvPr/>
+        </p:nvSpPr>
+        <p:spPr>
+          <a:xfrm>
+            <a:off x="8933688" y="5230368"/>
+            <a:ext cx="2560320" cy="914400"/>
+          </a:xfrm>
+          <a:prstGeom prst="roundRect">
+            <a:avLst>
+              <a:gd name="adj" fmla="val 5000"/>
+            </a:avLst>
+          </a:prstGeom>
+          <a:solidFill>
+            <a:srgbClr val="F7F3F4"/>
+          </a:solidFill>
+          <a:ln w="9525">
+            <a:solidFill>
+              <a:srgbClr val="E4DADD"/>
+            </a:solidFill>
+            <a:prstDash val="solid"/>
+          </a:ln>
+        </p:spPr>
+      </p:sp>
+      <p:sp>
+        <p:nvSpPr>
+          <p:cNvPr id="49" name="Text 47"/>
+          <p:cNvSpPr txBox="1"/>
+          <p:nvPr/>
+        </p:nvSpPr>
+        <p:spPr>
+          <a:xfrm>
+            <a:off x="9098280" y="5321808"/>
+            <a:ext cx="2231136" cy="219456"/>
+          </a:xfrm>
+          <a:prstGeom prst="rect">
+            <a:avLst/>
+          </a:prstGeom>
+          <a:noFill/>
+          <a:ln/>
+        </p:spPr>
+        <p:txBody>
+          <a:bodyPr wrap="square" lIns="0" tIns="0" rIns="0" bIns="0" rtlCol="0" anchor="ctr"/>
+          <a:lstStyle/>
+          <a:p>
+            <a:pPr indent="0" marL="0">
+              <a:buNone/>
+            </a:pPr>
+            <a:r>
+              <a:rPr lang="en-US" sz="950" b="1" dirty="0">
+                <a:solidFill>
+                  <a:srgbClr val="B58B2A"/>
+                </a:solidFill>
+                <a:latin typeface="Calibri" pitchFamily="34" charset="0"/>
+                <a:ea typeface="Calibri" pitchFamily="34" charset="-122"/>
+                <a:cs typeface="Calibri" pitchFamily="34" charset="-120"/>
+              </a:rPr>
+              <a:t>合併後の有利子負債</a:t>
+            </a:r>
+            <a:endParaRPr lang="en-US" sz="950" dirty="0"/>
+          </a:p>
+        </p:txBody>
+      </p:sp>
+      <p:sp>
+        <p:nvSpPr>
+          <p:cNvPr id="50" name="Text 48"/>
+          <p:cNvSpPr txBox="1"/>
+          <p:nvPr/>
+        </p:nvSpPr>
+        <p:spPr>
+          <a:xfrm>
+            <a:off x="9098280" y="5522976"/>
+            <a:ext cx="2286000" cy="365760"/>
+          </a:xfrm>
+          <a:prstGeom prst="rect">
+            <a:avLst/>
+          </a:prstGeom>
+          <a:noFill/>
+          <a:ln/>
+        </p:spPr>
+        <p:txBody>
+          <a:bodyPr wrap="square" lIns="0" tIns="0" rIns="0" bIns="0" rtlCol="0" anchor="ctr"/>
+          <a:lstStyle/>
+          <a:p>
+            <a:pPr indent="0" marL="0">
+              <a:buNone/>
+            </a:pPr>
+            <a:r>
+              <a:rPr lang="en-US" sz="2000" b="1" dirty="0">
+                <a:solidFill>
+                  <a:srgbClr val="6D2E46"/>
+                </a:solidFill>
+                <a:latin typeface="Cambria" pitchFamily="34" charset="0"/>
+                <a:ea typeface="Cambria" pitchFamily="34" charset="-122"/>
+                <a:cs typeface="Cambria" pitchFamily="34" charset="-120"/>
+              </a:rPr>
+              <a:t>20.0億円</a:t>
+            </a:r>
+            <a:endParaRPr lang="en-US" sz="2000" dirty="0"/>
+          </a:p>
+        </p:txBody>
+      </p:sp>
+      <p:sp>
+        <p:nvSpPr>
+          <p:cNvPr id="51" name="Text 49"/>
+          <p:cNvSpPr txBox="1"/>
+          <p:nvPr/>
+        </p:nvSpPr>
+        <p:spPr>
+          <a:xfrm>
+            <a:off x="9098280" y="5888736"/>
+            <a:ext cx="2286000" cy="201168"/>
+          </a:xfrm>
+          <a:prstGeom prst="rect">
+            <a:avLst/>
+          </a:prstGeom>
+          <a:noFill/>
+          <a:ln/>
+        </p:spPr>
+        <p:txBody>
+          <a:bodyPr wrap="square" lIns="0" tIns="0" rIns="0" bIns="0" rtlCol="0" anchor="ctr"/>
+          <a:lstStyle/>
+          <a:p>
+            <a:pPr indent="0" marL="0">
+              <a:buNone/>
+            </a:pPr>
+            <a:r>
+              <a:rPr lang="en-US" sz="850" dirty="0">
+                <a:solidFill>
+                  <a:srgbClr val="6E6368"/>
+                </a:solidFill>
+                <a:latin typeface="Calibri" pitchFamily="34" charset="0"/>
+                <a:ea typeface="Calibri" pitchFamily="34" charset="-122"/>
+                <a:cs typeface="Calibri" pitchFamily="34" charset="-120"/>
+              </a:rPr>
+              <a:t>DSCR 1.35倍</a:t>
             </a:r>
             <a:endParaRPr lang="en-US" sz="850" dirty="0"/>
           </a:p>
@@ -3238,7 +3327,7 @@
                 <a:gridCol w="2834640"/>
                 <a:gridCol w="1097280"/>
               </a:tblGrid>
-              <a:tr h="347472">
+              <a:tr h="329184">
                 <a:tc>
                   <a:txBody>
                     <a:bodyPr/>
@@ -3512,7 +3601,7 @@
                   </a:tcPr>
                 </a:tc>
               </a:tr>
-              <a:tr h="347472">
+              <a:tr h="329184">
                 <a:tc>
                   <a:txBody>
                     <a:bodyPr/>
@@ -3774,7 +3863,7 @@
                   </a:tcPr>
                 </a:tc>
               </a:tr>
-              <a:tr h="347472">
+              <a:tr h="329184">
                 <a:tc>
                   <a:txBody>
                     <a:bodyPr/>
@@ -4036,7 +4125,7 @@
                   </a:tcPr>
                 </a:tc>
               </a:tr>
-              <a:tr h="347472">
+              <a:tr h="329184">
                 <a:tc>
                   <a:txBody>
                     <a:bodyPr/>
@@ -4276,7 +4365,7 @@
                   </a:tcPr>
                 </a:tc>
               </a:tr>
-              <a:tr h="347472">
+              <a:tr h="329184">
                 <a:tc>
                   <a:txBody>
                     <a:bodyPr/>
@@ -4516,7 +4605,7 @@
                   </a:tcPr>
                 </a:tc>
               </a:tr>
-              <a:tr h="347472">
+              <a:tr h="329184">
                 <a:tc>
                   <a:txBody>
                     <a:bodyPr/>
@@ -4802,7 +4891,46 @@
         </p:nvSpPr>
         <p:spPr>
           <a:xfrm>
-            <a:off x="566928" y="4041648"/>
+            <a:off x="566928" y="3858768"/>
+            <a:ext cx="6675120" cy="237744"/>
+          </a:xfrm>
+          <a:prstGeom prst="rect">
+            <a:avLst/>
+          </a:prstGeom>
+          <a:noFill/>
+          <a:ln/>
+        </p:spPr>
+        <p:txBody>
+          <a:bodyPr wrap="square" lIns="0" tIns="0" rIns="0" bIns="0" rtlCol="0" anchor="ctr"/>
+          <a:lstStyle/>
+          <a:p>
+            <a:pPr indent="0" marL="0">
+              <a:buNone/>
+            </a:pPr>
+            <a:r>
+              <a:rPr lang="en-US" sz="900" dirty="0">
+                <a:solidFill>
+                  <a:srgbClr val="6E6368"/>
+                </a:solidFill>
+                <a:latin typeface="Calibri" pitchFamily="34" charset="0"/>
+                <a:ea typeface="Calibri" pitchFamily="34" charset="-122"/>
+                <a:cs typeface="Calibri" pitchFamily="34" charset="-120"/>
+              </a:rPr>
+              <a:t>※ 譲受価額が55.0億円となる場合、差額5.0億円は追加投資家の第三者割当増資で調達する（p.4）。借入額および合併後の財務は変わらない。</a:t>
+            </a:r>
+            <a:endParaRPr lang="en-US" sz="900" dirty="0"/>
+          </a:p>
+        </p:txBody>
+      </p:sp>
+      <p:sp>
+        <p:nvSpPr>
+          <p:cNvPr id="8" name="Text 5"/>
+          <p:cNvSpPr txBox="1"/>
+          <p:nvPr/>
+        </p:nvSpPr>
+        <p:spPr>
+          <a:xfrm>
+            <a:off x="566928" y="4151376"/>
             <a:ext cx="4572000" cy="256032"/>
           </a:xfrm>
           <a:prstGeom prst="rect">
@@ -4848,7 +4976,7 @@
           </p:nvPr>
         </p:nvGraphicFramePr>
         <p:xfrm>
-          <a:off x="566928" y="4352544"/>
+          <a:off x="566928" y="4462272"/>
           <a:ext cx="6675120" cy="914400"/>
         </p:xfrm>
         <a:graphic>
@@ -4860,7 +4988,7 @@
                 <a:gridCol w="1097280"/>
                 <a:gridCol w="3657600"/>
               </a:tblGrid>
-              <a:tr h="329184">
+              <a:tr h="310896">
                 <a:tc>
                   <a:txBody>
                     <a:bodyPr/>
@@ -5066,7 +5194,7 @@
                   </a:tcPr>
                 </a:tc>
               </a:tr>
-              <a:tr h="329184">
+              <a:tr h="310896">
                 <a:tc>
                   <a:txBody>
                     <a:bodyPr/>
@@ -5263,7 +5391,7 @@
                   </a:tcPr>
                 </a:tc>
               </a:tr>
-              <a:tr h="329184">
+              <a:tr h="310896">
                 <a:tc>
                   <a:txBody>
                     <a:bodyPr/>
@@ -5460,7 +5588,7 @@
                   </a:tcPr>
                 </a:tc>
               </a:tr>
-              <a:tr h="329184">
+              <a:tr h="310896">
                 <a:tc>
                   <a:txBody>
                     <a:bodyPr/>
@@ -5672,7 +5800,7 @@
       </p:graphicFrame>
       <p:sp>
         <p:nvSpPr>
-          <p:cNvPr id="9" name="Shape 5"/>
+          <p:cNvPr id="10" name="Shape 6"/>
           <p:cNvSpPr/>
           <p:nvPr/>
         </p:nvSpPr>
@@ -5699,7 +5827,7 @@
       </p:sp>
       <p:sp>
         <p:nvSpPr>
-          <p:cNvPr id="10" name="Text 6"/>
+          <p:cNvPr id="11" name="Text 7"/>
           <p:cNvSpPr txBox="1"/>
           <p:nvPr/>
         </p:nvSpPr>
@@ -5738,7 +5866,7 @@
       </p:sp>
       <p:sp>
         <p:nvSpPr>
-          <p:cNvPr id="11" name="Text 7"/>
+          <p:cNvPr id="12" name="Text 8"/>
           <p:cNvSpPr txBox="1"/>
           <p:nvPr/>
         </p:nvSpPr>
@@ -5777,7 +5905,7 @@
       </p:sp>
       <p:sp>
         <p:nvSpPr>
-          <p:cNvPr id="12" name="Text 8"/>
+          <p:cNvPr id="13" name="Text 9"/>
           <p:cNvSpPr txBox="1"/>
           <p:nvPr/>
         </p:nvSpPr>
@@ -5816,7 +5944,7 @@
       </p:sp>
       <p:sp>
         <p:nvSpPr>
-          <p:cNvPr id="13" name="Text 9"/>
+          <p:cNvPr id="14" name="Text 10"/>
           <p:cNvSpPr txBox="1"/>
           <p:nvPr/>
         </p:nvSpPr>
@@ -5855,7 +5983,7 @@
       </p:sp>
       <p:sp>
         <p:nvSpPr>
-          <p:cNvPr id="14" name="Text 10"/>
+          <p:cNvPr id="15" name="Text 11"/>
           <p:cNvSpPr txBox="1"/>
           <p:nvPr/>
         </p:nvSpPr>
@@ -5894,7 +6022,7 @@
       </p:sp>
       <p:sp>
         <p:nvSpPr>
-          <p:cNvPr id="15" name="Text 11"/>
+          <p:cNvPr id="16" name="Text 12"/>
           <p:cNvSpPr txBox="1"/>
           <p:nvPr/>
         </p:nvSpPr>
@@ -5933,7 +6061,7 @@
       </p:sp>
       <p:sp>
         <p:nvSpPr>
-          <p:cNvPr id="16" name="Text 12"/>
+          <p:cNvPr id="17" name="Text 13"/>
           <p:cNvSpPr txBox="1"/>
           <p:nvPr/>
         </p:nvSpPr>
@@ -5972,7 +6100,7 @@
       </p:sp>
       <p:sp>
         <p:nvSpPr>
-          <p:cNvPr id="17" name="Text 13"/>
+          <p:cNvPr id="18" name="Text 14"/>
           <p:cNvSpPr txBox="1"/>
           <p:nvPr/>
         </p:nvSpPr>
@@ -6011,7 +6139,7 @@
       </p:sp>
       <p:sp>
         <p:nvSpPr>
-          <p:cNvPr id="18" name="Text 14"/>
+          <p:cNvPr id="19" name="Text 15"/>
           <p:cNvSpPr txBox="1"/>
           <p:nvPr/>
         </p:nvSpPr>
@@ -6050,7 +6178,7 @@
       </p:sp>
       <p:sp>
         <p:nvSpPr>
-          <p:cNvPr id="19" name="Text 15"/>
+          <p:cNvPr id="20" name="Text 16"/>
           <p:cNvSpPr txBox="1"/>
           <p:nvPr/>
         </p:nvSpPr>
@@ -6089,7 +6217,7 @@
       </p:sp>
       <p:sp>
         <p:nvSpPr>
-          <p:cNvPr id="20" name="Text 16"/>
+          <p:cNvPr id="21" name="Text 17"/>
           <p:cNvSpPr txBox="1"/>
           <p:nvPr/>
         </p:nvSpPr>
@@ -6128,7 +6256,7 @@
       </p:sp>
       <p:sp>
         <p:nvSpPr>
-          <p:cNvPr id="21" name="Text 17"/>
+          <p:cNvPr id="22" name="Text 18"/>
           <p:cNvSpPr txBox="1"/>
           <p:nvPr/>
         </p:nvSpPr>
@@ -6167,7 +6295,7 @@
       </p:sp>
       <p:sp>
         <p:nvSpPr>
-          <p:cNvPr id="22" name="Text 18"/>
+          <p:cNvPr id="23" name="Text 19"/>
           <p:cNvSpPr txBox="1"/>
           <p:nvPr/>
         </p:nvSpPr>
@@ -6206,7 +6334,7 @@
       </p:sp>
       <p:sp>
         <p:nvSpPr>
-          <p:cNvPr id="23" name="Text 19"/>
+          <p:cNvPr id="24" name="Text 20"/>
           <p:cNvSpPr txBox="1"/>
           <p:nvPr/>
         </p:nvSpPr>
@@ -6245,7 +6373,7 @@
       </p:sp>
       <p:sp>
         <p:nvSpPr>
-          <p:cNvPr id="24" name="Text 20"/>
+          <p:cNvPr id="25" name="Text 21"/>
           <p:cNvSpPr txBox="1"/>
           <p:nvPr/>
         </p:nvSpPr>
@@ -6284,7 +6412,7 @@
       </p:sp>
       <p:sp>
         <p:nvSpPr>
-          <p:cNvPr id="25" name="Text 21"/>
+          <p:cNvPr id="26" name="Text 22"/>
           <p:cNvSpPr txBox="1"/>
           <p:nvPr/>
         </p:nvSpPr>
@@ -6323,18 +6451,18 @@
       </p:sp>
       <p:sp>
         <p:nvSpPr>
-          <p:cNvPr id="26" name="Shape 22"/>
+          <p:cNvPr id="27" name="Shape 23"/>
           <p:cNvSpPr/>
           <p:nvPr/>
         </p:nvSpPr>
         <p:spPr>
           <a:xfrm>
-            <a:off x="7498080" y="4535424"/>
-            <a:ext cx="4123944" cy="1133856"/>
+            <a:off x="7498080" y="4480560"/>
+            <a:ext cx="4123944" cy="1243584"/>
           </a:xfrm>
           <a:prstGeom prst="roundRect">
             <a:avLst>
-              <a:gd name="adj" fmla="val 4032"/>
+              <a:gd name="adj" fmla="val 3676"/>
             </a:avLst>
           </a:prstGeom>
           <a:solidFill>
@@ -6350,13 +6478,13 @@
       </p:sp>
       <p:sp>
         <p:nvSpPr>
-          <p:cNvPr id="27" name="Text 23"/>
+          <p:cNvPr id="28" name="Text 24"/>
           <p:cNvSpPr txBox="1"/>
           <p:nvPr/>
         </p:nvSpPr>
         <p:spPr>
           <a:xfrm>
-            <a:off x="7717536" y="4626864"/>
+            <a:off x="7717536" y="4572000"/>
             <a:ext cx="3657600" cy="219456"/>
           </a:xfrm>
           <a:prstGeom prst="rect">
@@ -6389,13 +6517,13 @@
       </p:sp>
       <p:sp>
         <p:nvSpPr>
-          <p:cNvPr id="28" name="Text 24"/>
+          <p:cNvPr id="29" name="Text 25"/>
           <p:cNvSpPr txBox="1"/>
           <p:nvPr/>
         </p:nvSpPr>
         <p:spPr>
           <a:xfrm>
-            <a:off x="7717536" y="4864608"/>
+            <a:off x="7717536" y="4791456"/>
             <a:ext cx="1920240" cy="237744"/>
           </a:xfrm>
           <a:prstGeom prst="rect">
@@ -6428,13 +6556,13 @@
       </p:sp>
       <p:sp>
         <p:nvSpPr>
-          <p:cNvPr id="29" name="Text 25"/>
+          <p:cNvPr id="30" name="Text 26"/>
           <p:cNvSpPr txBox="1"/>
           <p:nvPr/>
         </p:nvSpPr>
         <p:spPr>
           <a:xfrm>
-            <a:off x="9601200" y="4864608"/>
+            <a:off x="9601200" y="4791456"/>
             <a:ext cx="1801368" cy="237744"/>
           </a:xfrm>
           <a:prstGeom prst="rect">
@@ -6467,13 +6595,13 @@
       </p:sp>
       <p:sp>
         <p:nvSpPr>
-          <p:cNvPr id="30" name="Text 26"/>
+          <p:cNvPr id="31" name="Text 27"/>
           <p:cNvSpPr txBox="1"/>
           <p:nvPr/>
         </p:nvSpPr>
         <p:spPr>
           <a:xfrm>
-            <a:off x="7717536" y="5120640"/>
+            <a:off x="7717536" y="5015484"/>
             <a:ext cx="1920240" cy="237744"/>
           </a:xfrm>
           <a:prstGeom prst="rect">
@@ -6506,13 +6634,13 @@
       </p:sp>
       <p:sp>
         <p:nvSpPr>
-          <p:cNvPr id="31" name="Text 27"/>
+          <p:cNvPr id="32" name="Text 28"/>
           <p:cNvSpPr txBox="1"/>
           <p:nvPr/>
         </p:nvSpPr>
         <p:spPr>
           <a:xfrm>
-            <a:off x="9601200" y="5120640"/>
+            <a:off x="9601200" y="5015484"/>
             <a:ext cx="1801368" cy="237744"/>
           </a:xfrm>
           <a:prstGeom prst="rect">
@@ -6545,13 +6673,91 @@
       </p:sp>
       <p:sp>
         <p:nvSpPr>
-          <p:cNvPr id="32" name="Text 28"/>
+          <p:cNvPr id="33" name="Text 29"/>
           <p:cNvSpPr txBox="1"/>
           <p:nvPr/>
         </p:nvSpPr>
         <p:spPr>
           <a:xfrm>
-            <a:off x="7717536" y="5376672"/>
+            <a:off x="7717536" y="5239512"/>
+            <a:ext cx="1920240" cy="237744"/>
+          </a:xfrm>
+          <a:prstGeom prst="rect">
+            <a:avLst/>
+          </a:prstGeom>
+          <a:noFill/>
+          <a:ln/>
+        </p:spPr>
+        <p:txBody>
+          <a:bodyPr wrap="square" lIns="0" tIns="0" rIns="0" bIns="0" rtlCol="0" anchor="ctr"/>
+          <a:lstStyle/>
+          <a:p>
+            <a:pPr indent="0" marL="0">
+              <a:buNone/>
+            </a:pPr>
+            <a:r>
+              <a:rPr lang="en-US" sz="950" dirty="0">
+                <a:solidFill>
+                  <a:srgbClr val="6E6368"/>
+                </a:solidFill>
+                <a:latin typeface="Calibri" pitchFamily="34" charset="0"/>
+                <a:ea typeface="Calibri" pitchFamily="34" charset="-122"/>
+                <a:cs typeface="Calibri" pitchFamily="34" charset="-120"/>
+              </a:rPr>
+              <a:t>最終契約締結</a:t>
+            </a:r>
+            <a:endParaRPr lang="en-US" sz="950" dirty="0"/>
+          </a:p>
+        </p:txBody>
+      </p:sp>
+      <p:sp>
+        <p:nvSpPr>
+          <p:cNvPr id="34" name="Text 30"/>
+          <p:cNvSpPr txBox="1"/>
+          <p:nvPr/>
+        </p:nvSpPr>
+        <p:spPr>
+          <a:xfrm>
+            <a:off x="9601200" y="5239512"/>
+            <a:ext cx="1801368" cy="237744"/>
+          </a:xfrm>
+          <a:prstGeom prst="rect">
+            <a:avLst/>
+          </a:prstGeom>
+          <a:noFill/>
+          <a:ln/>
+        </p:spPr>
+        <p:txBody>
+          <a:bodyPr wrap="square" lIns="0" tIns="0" rIns="0" bIns="0" rtlCol="0" anchor="ctr"/>
+          <a:lstStyle/>
+          <a:p>
+            <a:pPr algn="r" indent="0" marL="0">
+              <a:buNone/>
+            </a:pPr>
+            <a:r>
+              <a:rPr lang="en-US" sz="950" b="1" dirty="0">
+                <a:solidFill>
+                  <a:srgbClr val="1F1A1C"/>
+                </a:solidFill>
+                <a:latin typeface="Calibri" pitchFamily="34" charset="0"/>
+                <a:ea typeface="Calibri" pitchFamily="34" charset="-122"/>
+                <a:cs typeface="Calibri" pitchFamily="34" charset="-120"/>
+              </a:rPr>
+              <a:t>2026年12月中旬</a:t>
+            </a:r>
+            <a:endParaRPr lang="en-US" sz="950" dirty="0"/>
+          </a:p>
+        </p:txBody>
+      </p:sp>
+      <p:sp>
+        <p:nvSpPr>
+          <p:cNvPr id="35" name="Text 31"/>
+          <p:cNvSpPr txBox="1"/>
+          <p:nvPr/>
+        </p:nvSpPr>
+        <p:spPr>
+          <a:xfrm>
+            <a:off x="7717536" y="5463540"/>
             <a:ext cx="1920240" cy="237744"/>
           </a:xfrm>
           <a:prstGeom prst="rect">
@@ -6584,13 +6790,13 @@
       </p:sp>
       <p:sp>
         <p:nvSpPr>
-          <p:cNvPr id="33" name="Text 29"/>
+          <p:cNvPr id="36" name="Text 32"/>
           <p:cNvSpPr txBox="1"/>
           <p:nvPr/>
         </p:nvSpPr>
         <p:spPr>
           <a:xfrm>
-            <a:off x="9601200" y="5376672"/>
+            <a:off x="9601200" y="5463540"/>
             <a:ext cx="1801368" cy="237744"/>
           </a:xfrm>
           <a:prstGeom prst="rect">
@@ -6615,7 +6821,7 @@
                 <a:ea typeface="Calibri" pitchFamily="34" charset="-122"/>
                 <a:cs typeface="Calibri" pitchFamily="34" charset="-120"/>
               </a:rPr>
-              <a:t>11月末（最短）〜年末</a:t>
+              <a:t>2026年12月末（合意済）</a:t>
             </a:r>
             <a:endParaRPr lang="en-US" sz="950" dirty="0"/>
           </a:p>
@@ -6623,7 +6829,7 @@
       </p:sp>
       <p:sp>
         <p:nvSpPr>
-          <p:cNvPr id="34" name="Shape 30"/>
+          <p:cNvPr id="37" name="Shape 33"/>
           <p:cNvSpPr/>
           <p:nvPr/>
         </p:nvSpPr>
@@ -6645,7 +6851,7 @@
       </p:sp>
       <p:sp>
         <p:nvSpPr>
-          <p:cNvPr id="35" name="Text 31"/>
+          <p:cNvPr id="38" name="Text 34"/>
           <p:cNvSpPr txBox="1"/>
           <p:nvPr/>
         </p:nvSpPr>
@@ -6698,7 +6904,7 @@
       </p:sp>
       <p:sp>
         <p:nvSpPr>
-          <p:cNvPr id="36" name="Text 32"/>
+          <p:cNvPr id="39" name="Text 35"/>
           <p:cNvSpPr txBox="1"/>
           <p:nvPr/>
         </p:nvSpPr>
@@ -6737,7 +6943,7 @@
       </p:sp>
       <p:sp>
         <p:nvSpPr>
-          <p:cNvPr id="37" name="Text 33"/>
+          <p:cNvPr id="40" name="Text 36"/>
           <p:cNvSpPr txBox="1"/>
           <p:nvPr/>
         </p:nvSpPr>
@@ -9726,6 +9932,2818 @@
                 <a:cs typeface="Calibri" pitchFamily="34" charset="-120"/>
               </a:rPr>
               <a:t>3</a:t>
+            </a:r>
+            <a:endParaRPr lang="en-US" sz="900" dirty="0"/>
+          </a:p>
+        </p:txBody>
+      </p:sp>
+    </p:spTree>
+  </p:cSld>
+  <p:clrMapOvr>
+    <a:masterClrMapping/>
+  </p:clrMapOvr>
+</p:sld>
+</file>
+
+<file path=ppt/slides/slide4.xml><?xml version="1.0" encoding="utf-8"?>
+<p:sld xmlns:a="http://schemas.openxmlformats.org/drawingml/2006/main" xmlns:r="http://schemas.openxmlformats.org/officeDocument/2006/relationships" xmlns:p="http://schemas.openxmlformats.org/presentationml/2006/main">
+  <p:cSld name="Slide 4">
+    <p:spTree>
+      <p:nvGrpSpPr>
+        <p:cNvPr id="1" name=""/>
+        <p:cNvGrpSpPr/>
+        <p:nvPr/>
+      </p:nvGrpSpPr>
+      <p:grpSpPr>
+        <a:xfrm>
+          <a:off x="0" y="0"/>
+          <a:ext cx="0" cy="0"/>
+          <a:chOff x="0" y="0"/>
+          <a:chExt cx="0" cy="0"/>
+        </a:xfrm>
+      </p:grpSpPr>
+      <p:sp>
+        <p:nvSpPr>
+          <p:cNvPr id="2" name="Text 0"/>
+          <p:cNvSpPr txBox="1"/>
+          <p:nvPr/>
+        </p:nvSpPr>
+        <p:spPr>
+          <a:xfrm>
+            <a:off x="566928" y="310896"/>
+            <a:ext cx="9144000" cy="237744"/>
+          </a:xfrm>
+          <a:prstGeom prst="rect">
+            <a:avLst/>
+          </a:prstGeom>
+          <a:noFill/>
+          <a:ln/>
+        </p:spPr>
+        <p:txBody>
+          <a:bodyPr wrap="square" lIns="0" tIns="0" rIns="0" bIns="0" rtlCol="0" anchor="ctr"/>
+          <a:lstStyle/>
+          <a:p>
+            <a:pPr indent="0" marL="0">
+              <a:buNone/>
+            </a:pPr>
+            <a:r>
+              <a:rPr lang="en-US" sz="1100" b="1" spc="140" kern="0" dirty="0">
+                <a:solidFill>
+                  <a:srgbClr val="B58B2A"/>
+                </a:solidFill>
+                <a:latin typeface="Calibri" pitchFamily="34" charset="0"/>
+                <a:ea typeface="Calibri" pitchFamily="34" charset="-122"/>
+                <a:cs typeface="Calibri" pitchFamily="34" charset="-120"/>
+              </a:rPr>
+              <a:t>SHAREHOLDERS</a:t>
+            </a:r>
+            <a:endParaRPr lang="en-US" sz="1100" dirty="0"/>
+          </a:p>
+        </p:txBody>
+      </p:sp>
+      <p:sp>
+        <p:nvSpPr>
+          <p:cNvPr id="3" name="Text 1"/>
+          <p:cNvSpPr txBox="1"/>
+          <p:nvPr/>
+        </p:nvSpPr>
+        <p:spPr>
+          <a:xfrm>
+            <a:off x="566928" y="566928"/>
+            <a:ext cx="11055096" cy="475488"/>
+          </a:xfrm>
+          <a:prstGeom prst="rect">
+            <a:avLst/>
+          </a:prstGeom>
+          <a:noFill/>
+          <a:ln/>
+        </p:spPr>
+        <p:txBody>
+          <a:bodyPr wrap="square" lIns="0" tIns="0" rIns="0" bIns="0" rtlCol="0" anchor="ctr"/>
+          <a:lstStyle/>
+          <a:p>
+            <a:pPr indent="0" marL="0">
+              <a:buNone/>
+            </a:pPr>
+            <a:r>
+              <a:rPr lang="en-US" sz="2900" b="1" dirty="0">
+                <a:solidFill>
+                  <a:srgbClr val="1F1A1C"/>
+                </a:solidFill>
+                <a:latin typeface="Cambria" pitchFamily="34" charset="0"/>
+                <a:ea typeface="Cambria" pitchFamily="34" charset="-122"/>
+                <a:cs typeface="Cambria" pitchFamily="34" charset="-120"/>
+              </a:rPr>
+              <a:t>株主構成 ― 譲受価額50.0億円の場合と55.0億円の場合</a:t>
+            </a:r>
+            <a:endParaRPr lang="en-US" sz="2900" dirty="0"/>
+          </a:p>
+        </p:txBody>
+      </p:sp>
+      <p:sp>
+        <p:nvSpPr>
+          <p:cNvPr id="4" name="Text 2"/>
+          <p:cNvSpPr txBox="1"/>
+          <p:nvPr/>
+        </p:nvSpPr>
+        <p:spPr>
+          <a:xfrm>
+            <a:off x="566928" y="1088136"/>
+            <a:ext cx="11055096" cy="329184"/>
+          </a:xfrm>
+          <a:prstGeom prst="rect">
+            <a:avLst/>
+          </a:prstGeom>
+          <a:noFill/>
+          <a:ln/>
+        </p:spPr>
+        <p:txBody>
+          <a:bodyPr wrap="square" lIns="0" tIns="0" rIns="0" bIns="0" rtlCol="0" anchor="ctr"/>
+          <a:lstStyle/>
+          <a:p>
+            <a:pPr indent="0" marL="0">
+              <a:lnSpc>
+                <a:spcPts val="1700"/>
+              </a:lnSpc>
+              <a:buNone/>
+            </a:pPr>
+            <a:r>
+              <a:rPr lang="en-US" sz="1250" dirty="0">
+                <a:solidFill>
+                  <a:srgbClr val="6E6368"/>
+                </a:solidFill>
+                <a:latin typeface="Calibri" pitchFamily="34" charset="0"/>
+                <a:ea typeface="Calibri" pitchFamily="34" charset="-122"/>
+                <a:cs typeface="Calibri" pitchFamily="34" charset="-120"/>
+              </a:rPr>
+              <a:t>上限で決着した場合、差額5.0億円は第三者割当増資により、外部の追加投資家から同一のバリュエーションで調達する。</a:t>
+            </a:r>
+            <a:endParaRPr lang="en-US" sz="1250" dirty="0"/>
+          </a:p>
+        </p:txBody>
+      </p:sp>
+      <p:sp>
+        <p:nvSpPr>
+          <p:cNvPr id="5" name="Shape 3"/>
+          <p:cNvSpPr/>
+          <p:nvPr/>
+        </p:nvSpPr>
+        <p:spPr>
+          <a:xfrm>
+            <a:off x="566928" y="1554480"/>
+            <a:ext cx="5394960" cy="3017520"/>
+          </a:xfrm>
+          <a:prstGeom prst="roundRect">
+            <a:avLst>
+              <a:gd name="adj" fmla="val 1515"/>
+            </a:avLst>
+          </a:prstGeom>
+          <a:solidFill>
+            <a:srgbClr val="FFFFFF"/>
+          </a:solidFill>
+          <a:ln w="9525">
+            <a:solidFill>
+              <a:srgbClr val="E4DADD"/>
+            </a:solidFill>
+            <a:prstDash val="solid"/>
+          </a:ln>
+        </p:spPr>
+      </p:sp>
+      <p:sp>
+        <p:nvSpPr>
+          <p:cNvPr id="6" name="Text 4"/>
+          <p:cNvSpPr txBox="1"/>
+          <p:nvPr/>
+        </p:nvSpPr>
+        <p:spPr>
+          <a:xfrm>
+            <a:off x="786384" y="1664208"/>
+            <a:ext cx="4937760" cy="256032"/>
+          </a:xfrm>
+          <a:prstGeom prst="rect">
+            <a:avLst/>
+          </a:prstGeom>
+          <a:noFill/>
+          <a:ln/>
+        </p:spPr>
+        <p:txBody>
+          <a:bodyPr wrap="square" lIns="0" tIns="0" rIns="0" bIns="0" rtlCol="0" anchor="ctr"/>
+          <a:lstStyle/>
+          <a:p>
+            <a:pPr indent="0" marL="0">
+              <a:buNone/>
+            </a:pPr>
+            <a:r>
+              <a:rPr lang="en-US" sz="1500" b="1" dirty="0">
+                <a:solidFill>
+                  <a:srgbClr val="1F1A1C"/>
+                </a:solidFill>
+                <a:latin typeface="Cambria" pitchFamily="34" charset="0"/>
+                <a:ea typeface="Cambria" pitchFamily="34" charset="-122"/>
+                <a:cs typeface="Cambria" pitchFamily="34" charset="-120"/>
+              </a:rPr>
+              <a:t>① 譲受価額 50.0億円</a:t>
+            </a:r>
+            <a:endParaRPr lang="en-US" sz="1500" dirty="0"/>
+          </a:p>
+        </p:txBody>
+      </p:sp>
+      <p:sp>
+        <p:nvSpPr>
+          <p:cNvPr id="7" name="Shape 5"/>
+          <p:cNvSpPr/>
+          <p:nvPr/>
+        </p:nvSpPr>
+        <p:spPr>
+          <a:xfrm>
+            <a:off x="676656" y="2029968"/>
+            <a:ext cx="3450509" cy="457200"/>
+          </a:xfrm>
+          <a:prstGeom prst="rect">
+            <a:avLst/>
+          </a:prstGeom>
+          <a:solidFill>
+            <a:srgbClr val="6D2E46"/>
+          </a:solidFill>
+          <a:ln/>
+        </p:spPr>
+      </p:sp>
+      <p:sp>
+        <p:nvSpPr>
+          <p:cNvPr id="8" name="Text 6"/>
+          <p:cNvSpPr txBox="1"/>
+          <p:nvPr/>
+        </p:nvSpPr>
+        <p:spPr>
+          <a:xfrm>
+            <a:off x="676656" y="2029968"/>
+            <a:ext cx="3450509" cy="457200"/>
+          </a:xfrm>
+          <a:prstGeom prst="rect">
+            <a:avLst/>
+          </a:prstGeom>
+          <a:noFill/>
+          <a:ln/>
+        </p:spPr>
+        <p:txBody>
+          <a:bodyPr wrap="square" lIns="0" tIns="0" rIns="0" bIns="0" rtlCol="0" anchor="ctr"/>
+          <a:lstStyle/>
+          <a:p>
+            <a:pPr algn="ctr" indent="0" marL="0">
+              <a:buNone/>
+            </a:pPr>
+            <a:r>
+              <a:rPr lang="en-US" sz="1150" b="1" dirty="0">
+                <a:solidFill>
+                  <a:srgbClr val="FFFFFF"/>
+                </a:solidFill>
+                <a:latin typeface="Calibri" pitchFamily="34" charset="0"/>
+                <a:ea typeface="Calibri" pitchFamily="34" charset="-122"/>
+                <a:cs typeface="Calibri" pitchFamily="34" charset="-120"/>
+              </a:rPr>
+              <a:t>中野 66.7%</a:t>
+            </a:r>
+            <a:endParaRPr lang="en-US" sz="1150" dirty="0"/>
+          </a:p>
+        </p:txBody>
+      </p:sp>
+      <p:sp>
+        <p:nvSpPr>
+          <p:cNvPr id="9" name="Shape 7"/>
+          <p:cNvSpPr/>
+          <p:nvPr/>
+        </p:nvSpPr>
+        <p:spPr>
+          <a:xfrm>
+            <a:off x="4127165" y="2029968"/>
+            <a:ext cx="1724995" cy="457200"/>
+          </a:xfrm>
+          <a:prstGeom prst="rect">
+            <a:avLst/>
+          </a:prstGeom>
+          <a:solidFill>
+            <a:srgbClr val="A26769"/>
+          </a:solidFill>
+          <a:ln/>
+        </p:spPr>
+      </p:sp>
+      <p:sp>
+        <p:nvSpPr>
+          <p:cNvPr id="10" name="Text 8"/>
+          <p:cNvSpPr txBox="1"/>
+          <p:nvPr/>
+        </p:nvSpPr>
+        <p:spPr>
+          <a:xfrm>
+            <a:off x="4127165" y="2029968"/>
+            <a:ext cx="1724995" cy="457200"/>
+          </a:xfrm>
+          <a:prstGeom prst="rect">
+            <a:avLst/>
+          </a:prstGeom>
+          <a:noFill/>
+          <a:ln/>
+        </p:spPr>
+        <p:txBody>
+          <a:bodyPr wrap="square" lIns="0" tIns="0" rIns="0" bIns="0" rtlCol="0" anchor="ctr"/>
+          <a:lstStyle/>
+          <a:p>
+            <a:pPr algn="ctr" indent="0" marL="0">
+              <a:buNone/>
+            </a:pPr>
+            <a:r>
+              <a:rPr lang="en-US" sz="1150" b="1" dirty="0">
+                <a:solidFill>
+                  <a:srgbClr val="FFFFFF"/>
+                </a:solidFill>
+                <a:latin typeface="Calibri" pitchFamily="34" charset="0"/>
+                <a:ea typeface="Calibri" pitchFamily="34" charset="-122"/>
+                <a:cs typeface="Calibri" pitchFamily="34" charset="-120"/>
+              </a:rPr>
+              <a:t>榊原 33.3%</a:t>
+            </a:r>
+            <a:endParaRPr lang="en-US" sz="1150" dirty="0"/>
+          </a:p>
+        </p:txBody>
+      </p:sp>
+      <p:graphicFrame>
+        <p:nvGraphicFramePr>
+          <p:cNvPr id="5" name="Table 0"/>
+          <p:cNvGraphicFramePr>
+            <a:graphicFrameLocks noGrp="1"/>
+          </p:cNvGraphicFramePr>
+          <p:nvPr>
+            <p:extLst>
+              <p:ext uri="{D42A27DB-BD31-4B8C-83A1-F6EECF244321}">
+                <p14:modId xmlns:p14="http://schemas.microsoft.com/office/powerpoint/2010/main" val="1579011935"/>
+              </p:ext>
+            </p:extLst>
+          </p:nvPr>
+        </p:nvGraphicFramePr>
+        <p:xfrm>
+          <a:off x="676656" y="2670048"/>
+          <a:ext cx="5175504" cy="914400"/>
+        </p:xfrm>
+        <a:graphic>
+          <a:graphicData uri="http://schemas.openxmlformats.org/drawingml/2006/table">
+            <a:tbl>
+              <a:tblPr/>
+              <a:tblGrid>
+                <a:gridCol w="1554480"/>
+                <a:gridCol w="2523744"/>
+                <a:gridCol w="1097280"/>
+              </a:tblGrid>
+              <a:tr h="365760">
+                <a:tc>
+                  <a:txBody>
+                    <a:bodyPr/>
+                    <a:lstStyle/>
+                    <a:p>
+                      <a:pPr indent="0" marL="0">
+                        <a:buNone/>
+                      </a:pPr>
+                      <a:r>
+                        <a:rPr lang="en-US" sz="1000" b="1" dirty="0">
+                          <a:solidFill>
+                            <a:srgbClr val="FFFFFF"/>
+                          </a:solidFill>
+                          <a:latin typeface="Calibri" pitchFamily="34" charset="0"/>
+                          <a:ea typeface="Calibri" pitchFamily="34" charset="-122"/>
+                          <a:cs typeface="Calibri" pitchFamily="34" charset="-120"/>
+                        </a:rPr>
+                        <a:t>株主</a:t>
+                      </a:r>
+                      <a:endParaRPr lang="en-US" sz="1000" dirty="0">
+                        <a:latin typeface="Calibri" charset="0"/>
+                        <a:ea typeface="Calibri" charset="0"/>
+                        <a:cs typeface="Calibri" charset="0"/>
+                      </a:endParaRPr>
+                    </a:p>
+                  </a:txBody>
+                  <a:tcPr marL="91440" marR="91440" marT="45720" marB="45720" anchor="ctr">
+                    <a:lnL w="6350" cap="flat" cmpd="sng" algn="ctr">
+                      <a:solidFill>
+                        <a:srgbClr val="E4DADD"/>
+                      </a:solidFill>
+                      <a:prstDash val="solid"/>
+                      <a:round/>
+                      <a:headEnd type="none" w="med" len="med"/>
+                      <a:tailEnd type="none" w="med" len="med"/>
+                    </a:lnL>
+                    <a:lnR w="6350" cap="flat" cmpd="sng" algn="ctr">
+                      <a:solidFill>
+                        <a:srgbClr val="E4DADD"/>
+                      </a:solidFill>
+                      <a:prstDash val="solid"/>
+                      <a:round/>
+                      <a:headEnd type="none" w="med" len="med"/>
+                      <a:tailEnd type="none" w="med" len="med"/>
+                    </a:lnR>
+                    <a:lnT w="6350" cap="flat" cmpd="sng" algn="ctr">
+                      <a:solidFill>
+                        <a:srgbClr val="E4DADD"/>
+                      </a:solidFill>
+                      <a:prstDash val="solid"/>
+                      <a:round/>
+                      <a:headEnd type="none" w="med" len="med"/>
+                      <a:tailEnd type="none" w="med" len="med"/>
+                    </a:lnT>
+                    <a:lnB w="6350" cap="flat" cmpd="sng" algn="ctr">
+                      <a:solidFill>
+                        <a:srgbClr val="E4DADD"/>
+                      </a:solidFill>
+                      <a:prstDash val="solid"/>
+                      <a:round/>
+                      <a:headEnd type="none" w="med" len="med"/>
+                      <a:tailEnd type="none" w="med" len="med"/>
+                    </a:lnB>
+                    <a:solidFill>
+                      <a:srgbClr val="6D2E46"/>
+                    </a:solidFill>
+                  </a:tcPr>
+                </a:tc>
+                <a:tc>
+                  <a:txBody>
+                    <a:bodyPr/>
+                    <a:lstStyle/>
+                    <a:p>
+                      <a:pPr indent="0" marL="0">
+                        <a:buNone/>
+                      </a:pPr>
+                      <a:r>
+                        <a:rPr lang="en-US" sz="1000" b="1" dirty="0">
+                          <a:solidFill>
+                            <a:srgbClr val="FFFFFF"/>
+                          </a:solidFill>
+                          <a:latin typeface="Calibri" pitchFamily="34" charset="0"/>
+                          <a:ea typeface="Calibri" pitchFamily="34" charset="-122"/>
+                          <a:cs typeface="Calibri" pitchFamily="34" charset="-120"/>
+                        </a:rPr>
+                        <a:t>拠出額</a:t>
+                      </a:r>
+                      <a:endParaRPr lang="en-US" sz="1000" dirty="0">
+                        <a:latin typeface="Calibri" charset="0"/>
+                        <a:ea typeface="Calibri" charset="0"/>
+                        <a:cs typeface="Calibri" charset="0"/>
+                      </a:endParaRPr>
+                    </a:p>
+                  </a:txBody>
+                  <a:tcPr marL="91440" marR="91440" marT="45720" marB="45720" anchor="ctr">
+                    <a:lnL w="6350" cap="flat" cmpd="sng" algn="ctr">
+                      <a:solidFill>
+                        <a:srgbClr val="E4DADD"/>
+                      </a:solidFill>
+                      <a:prstDash val="solid"/>
+                      <a:round/>
+                      <a:headEnd type="none" w="med" len="med"/>
+                      <a:tailEnd type="none" w="med" len="med"/>
+                    </a:lnL>
+                    <a:lnR w="6350" cap="flat" cmpd="sng" algn="ctr">
+                      <a:solidFill>
+                        <a:srgbClr val="E4DADD"/>
+                      </a:solidFill>
+                      <a:prstDash val="solid"/>
+                      <a:round/>
+                      <a:headEnd type="none" w="med" len="med"/>
+                      <a:tailEnd type="none" w="med" len="med"/>
+                    </a:lnR>
+                    <a:lnT w="6350" cap="flat" cmpd="sng" algn="ctr">
+                      <a:solidFill>
+                        <a:srgbClr val="E4DADD"/>
+                      </a:solidFill>
+                      <a:prstDash val="solid"/>
+                      <a:round/>
+                      <a:headEnd type="none" w="med" len="med"/>
+                      <a:tailEnd type="none" w="med" len="med"/>
+                    </a:lnT>
+                    <a:lnB w="6350" cap="flat" cmpd="sng" algn="ctr">
+                      <a:solidFill>
+                        <a:srgbClr val="E4DADD"/>
+                      </a:solidFill>
+                      <a:prstDash val="solid"/>
+                      <a:round/>
+                      <a:headEnd type="none" w="med" len="med"/>
+                      <a:tailEnd type="none" w="med" len="med"/>
+                    </a:lnB>
+                    <a:solidFill>
+                      <a:srgbClr val="6D2E46"/>
+                    </a:solidFill>
+                  </a:tcPr>
+                </a:tc>
+                <a:tc>
+                  <a:txBody>
+                    <a:bodyPr/>
+                    <a:lstStyle/>
+                    <a:p>
+                      <a:pPr indent="0" marL="0">
+                        <a:buNone/>
+                      </a:pPr>
+                      <a:r>
+                        <a:rPr lang="en-US" sz="1000" b="1" dirty="0">
+                          <a:solidFill>
+                            <a:srgbClr val="FFFFFF"/>
+                          </a:solidFill>
+                          <a:latin typeface="Calibri" pitchFamily="34" charset="0"/>
+                          <a:ea typeface="Calibri" pitchFamily="34" charset="-122"/>
+                          <a:cs typeface="Calibri" pitchFamily="34" charset="-120"/>
+                        </a:rPr>
+                        <a:t>持分</a:t>
+                      </a:r>
+                      <a:endParaRPr lang="en-US" sz="1000" dirty="0">
+                        <a:latin typeface="Calibri" charset="0"/>
+                        <a:ea typeface="Calibri" charset="0"/>
+                        <a:cs typeface="Calibri" charset="0"/>
+                      </a:endParaRPr>
+                    </a:p>
+                  </a:txBody>
+                  <a:tcPr marL="91440" marR="91440" marT="45720" marB="45720" anchor="ctr">
+                    <a:lnL w="6350" cap="flat" cmpd="sng" algn="ctr">
+                      <a:solidFill>
+                        <a:srgbClr val="E4DADD"/>
+                      </a:solidFill>
+                      <a:prstDash val="solid"/>
+                      <a:round/>
+                      <a:headEnd type="none" w="med" len="med"/>
+                      <a:tailEnd type="none" w="med" len="med"/>
+                    </a:lnL>
+                    <a:lnR w="6350" cap="flat" cmpd="sng" algn="ctr">
+                      <a:solidFill>
+                        <a:srgbClr val="E4DADD"/>
+                      </a:solidFill>
+                      <a:prstDash val="solid"/>
+                      <a:round/>
+                      <a:headEnd type="none" w="med" len="med"/>
+                      <a:tailEnd type="none" w="med" len="med"/>
+                    </a:lnR>
+                    <a:lnT w="6350" cap="flat" cmpd="sng" algn="ctr">
+                      <a:solidFill>
+                        <a:srgbClr val="E4DADD"/>
+                      </a:solidFill>
+                      <a:prstDash val="solid"/>
+                      <a:round/>
+                      <a:headEnd type="none" w="med" len="med"/>
+                      <a:tailEnd type="none" w="med" len="med"/>
+                    </a:lnT>
+                    <a:lnB w="6350" cap="flat" cmpd="sng" algn="ctr">
+                      <a:solidFill>
+                        <a:srgbClr val="E4DADD"/>
+                      </a:solidFill>
+                      <a:prstDash val="solid"/>
+                      <a:round/>
+                      <a:headEnd type="none" w="med" len="med"/>
+                      <a:tailEnd type="none" w="med" len="med"/>
+                    </a:lnB>
+                    <a:solidFill>
+                      <a:srgbClr val="6D2E46"/>
+                    </a:solidFill>
+                  </a:tcPr>
+                </a:tc>
+              </a:tr>
+              <a:tr h="365760">
+                <a:tc>
+                  <a:txBody>
+                    <a:bodyPr/>
+                    <a:lstStyle/>
+                    <a:p>
+                      <a:pPr indent="0" marL="0">
+                        <a:buNone/>
+                      </a:pPr>
+                      <a:r>
+                        <a:rPr lang="en-US" sz="950" b="1" dirty="0">
+                          <a:solidFill>
+                            <a:srgbClr val="1F1A1C"/>
+                          </a:solidFill>
+                          <a:latin typeface="Calibri" pitchFamily="34" charset="0"/>
+                          <a:ea typeface="Calibri" pitchFamily="34" charset="-122"/>
+                          <a:cs typeface="Calibri" pitchFamily="34" charset="-120"/>
+                        </a:rPr>
+                        <a:t>中野 邦人 氏</a:t>
+                      </a:r>
+                      <a:endParaRPr lang="en-US" sz="950" dirty="0">
+                        <a:latin typeface="Calibri" charset="0"/>
+                        <a:ea typeface="Calibri" charset="0"/>
+                        <a:cs typeface="Calibri" charset="0"/>
+                      </a:endParaRPr>
+                    </a:p>
+                  </a:txBody>
+                  <a:tcPr marL="91440" marR="91440" marT="45720" marB="45720" anchor="ctr">
+                    <a:lnL w="6350" cap="flat" cmpd="sng" algn="ctr">
+                      <a:solidFill>
+                        <a:srgbClr val="E4DADD"/>
+                      </a:solidFill>
+                      <a:prstDash val="solid"/>
+                      <a:round/>
+                      <a:headEnd type="none" w="med" len="med"/>
+                      <a:tailEnd type="none" w="med" len="med"/>
+                    </a:lnL>
+                    <a:lnR w="6350" cap="flat" cmpd="sng" algn="ctr">
+                      <a:solidFill>
+                        <a:srgbClr val="E4DADD"/>
+                      </a:solidFill>
+                      <a:prstDash val="solid"/>
+                      <a:round/>
+                      <a:headEnd type="none" w="med" len="med"/>
+                      <a:tailEnd type="none" w="med" len="med"/>
+                    </a:lnR>
+                    <a:lnT w="6350" cap="flat" cmpd="sng" algn="ctr">
+                      <a:solidFill>
+                        <a:srgbClr val="E4DADD"/>
+                      </a:solidFill>
+                      <a:prstDash val="solid"/>
+                      <a:round/>
+                      <a:headEnd type="none" w="med" len="med"/>
+                      <a:tailEnd type="none" w="med" len="med"/>
+                    </a:lnT>
+                    <a:lnB w="6350" cap="flat" cmpd="sng" algn="ctr">
+                      <a:solidFill>
+                        <a:srgbClr val="E4DADD"/>
+                      </a:solidFill>
+                      <a:prstDash val="solid"/>
+                      <a:round/>
+                      <a:headEnd type="none" w="med" len="med"/>
+                      <a:tailEnd type="none" w="med" len="med"/>
+                    </a:lnB>
+                  </a:tcPr>
+                </a:tc>
+                <a:tc>
+                  <a:txBody>
+                    <a:bodyPr/>
+                    <a:lstStyle/>
+                    <a:p>
+                      <a:pPr indent="0" marL="0">
+                        <a:buNone/>
+                      </a:pPr>
+                      <a:r>
+                        <a:rPr lang="en-US" sz="900" dirty="0">
+                          <a:solidFill>
+                            <a:srgbClr val="1F1A1C"/>
+                          </a:solidFill>
+                          <a:latin typeface="Calibri" pitchFamily="34" charset="0"/>
+                          <a:ea typeface="Calibri" pitchFamily="34" charset="-122"/>
+                          <a:cs typeface="Calibri" pitchFamily="34" charset="-120"/>
+                        </a:rPr>
+                        <a:t>出資10万円＋株主貸付5.07億円</a:t>
+                      </a:r>
+                      <a:endParaRPr lang="en-US" sz="900" dirty="0">
+                        <a:latin typeface="Calibri" charset="0"/>
+                        <a:ea typeface="Calibri" charset="0"/>
+                        <a:cs typeface="Calibri" charset="0"/>
+                      </a:endParaRPr>
+                    </a:p>
+                  </a:txBody>
+                  <a:tcPr marL="91440" marR="91440" marT="45720" marB="45720" anchor="ctr">
+                    <a:lnL w="6350" cap="flat" cmpd="sng" algn="ctr">
+                      <a:solidFill>
+                        <a:srgbClr val="E4DADD"/>
+                      </a:solidFill>
+                      <a:prstDash val="solid"/>
+                      <a:round/>
+                      <a:headEnd type="none" w="med" len="med"/>
+                      <a:tailEnd type="none" w="med" len="med"/>
+                    </a:lnL>
+                    <a:lnR w="6350" cap="flat" cmpd="sng" algn="ctr">
+                      <a:solidFill>
+                        <a:srgbClr val="E4DADD"/>
+                      </a:solidFill>
+                      <a:prstDash val="solid"/>
+                      <a:round/>
+                      <a:headEnd type="none" w="med" len="med"/>
+                      <a:tailEnd type="none" w="med" len="med"/>
+                    </a:lnR>
+                    <a:lnT w="6350" cap="flat" cmpd="sng" algn="ctr">
+                      <a:solidFill>
+                        <a:srgbClr val="E4DADD"/>
+                      </a:solidFill>
+                      <a:prstDash val="solid"/>
+                      <a:round/>
+                      <a:headEnd type="none" w="med" len="med"/>
+                      <a:tailEnd type="none" w="med" len="med"/>
+                    </a:lnT>
+                    <a:lnB w="6350" cap="flat" cmpd="sng" algn="ctr">
+                      <a:solidFill>
+                        <a:srgbClr val="E4DADD"/>
+                      </a:solidFill>
+                      <a:prstDash val="solid"/>
+                      <a:round/>
+                      <a:headEnd type="none" w="med" len="med"/>
+                      <a:tailEnd type="none" w="med" len="med"/>
+                    </a:lnB>
+                  </a:tcPr>
+                </a:tc>
+                <a:tc>
+                  <a:txBody>
+                    <a:bodyPr/>
+                    <a:lstStyle/>
+                    <a:p>
+                      <a:pPr algn="r" indent="0" marL="0">
+                        <a:buNone/>
+                      </a:pPr>
+                      <a:r>
+                        <a:rPr lang="en-US" sz="950" b="1" dirty="0">
+                          <a:solidFill>
+                            <a:srgbClr val="1F1A1C"/>
+                          </a:solidFill>
+                          <a:latin typeface="Calibri" pitchFamily="34" charset="0"/>
+                          <a:ea typeface="Calibri" pitchFamily="34" charset="-122"/>
+                          <a:cs typeface="Calibri" pitchFamily="34" charset="-120"/>
+                        </a:rPr>
+                        <a:t>66.7%</a:t>
+                      </a:r>
+                      <a:endParaRPr lang="en-US" sz="950" dirty="0">
+                        <a:latin typeface="Calibri" charset="0"/>
+                        <a:ea typeface="Calibri" charset="0"/>
+                        <a:cs typeface="Calibri" charset="0"/>
+                      </a:endParaRPr>
+                    </a:p>
+                  </a:txBody>
+                  <a:tcPr marL="91440" marR="91440" marT="45720" marB="45720" anchor="ctr">
+                    <a:lnL w="6350" cap="flat" cmpd="sng" algn="ctr">
+                      <a:solidFill>
+                        <a:srgbClr val="E4DADD"/>
+                      </a:solidFill>
+                      <a:prstDash val="solid"/>
+                      <a:round/>
+                      <a:headEnd type="none" w="med" len="med"/>
+                      <a:tailEnd type="none" w="med" len="med"/>
+                    </a:lnL>
+                    <a:lnR w="6350" cap="flat" cmpd="sng" algn="ctr">
+                      <a:solidFill>
+                        <a:srgbClr val="E4DADD"/>
+                      </a:solidFill>
+                      <a:prstDash val="solid"/>
+                      <a:round/>
+                      <a:headEnd type="none" w="med" len="med"/>
+                      <a:tailEnd type="none" w="med" len="med"/>
+                    </a:lnR>
+                    <a:lnT w="6350" cap="flat" cmpd="sng" algn="ctr">
+                      <a:solidFill>
+                        <a:srgbClr val="E4DADD"/>
+                      </a:solidFill>
+                      <a:prstDash val="solid"/>
+                      <a:round/>
+                      <a:headEnd type="none" w="med" len="med"/>
+                      <a:tailEnd type="none" w="med" len="med"/>
+                    </a:lnT>
+                    <a:lnB w="6350" cap="flat" cmpd="sng" algn="ctr">
+                      <a:solidFill>
+                        <a:srgbClr val="E4DADD"/>
+                      </a:solidFill>
+                      <a:prstDash val="solid"/>
+                      <a:round/>
+                      <a:headEnd type="none" w="med" len="med"/>
+                      <a:tailEnd type="none" w="med" len="med"/>
+                    </a:lnB>
+                  </a:tcPr>
+                </a:tc>
+              </a:tr>
+              <a:tr h="365760">
+                <a:tc>
+                  <a:txBody>
+                    <a:bodyPr/>
+                    <a:lstStyle/>
+                    <a:p>
+                      <a:pPr indent="0" marL="0">
+                        <a:buNone/>
+                      </a:pPr>
+                      <a:r>
+                        <a:rPr lang="en-US" sz="950" b="1" dirty="0">
+                          <a:solidFill>
+                            <a:srgbClr val="1F1A1C"/>
+                          </a:solidFill>
+                          <a:latin typeface="Calibri" pitchFamily="34" charset="0"/>
+                          <a:ea typeface="Calibri" pitchFamily="34" charset="-122"/>
+                          <a:cs typeface="Calibri" pitchFamily="34" charset="-120"/>
+                        </a:rPr>
+                        <a:t>榊原 氏</a:t>
+                      </a:r>
+                      <a:endParaRPr lang="en-US" sz="950" dirty="0">
+                        <a:latin typeface="Calibri" charset="0"/>
+                        <a:ea typeface="Calibri" charset="0"/>
+                        <a:cs typeface="Calibri" charset="0"/>
+                      </a:endParaRPr>
+                    </a:p>
+                  </a:txBody>
+                  <a:tcPr marL="91440" marR="91440" marT="45720" marB="45720" anchor="ctr">
+                    <a:lnL w="6350" cap="flat" cmpd="sng" algn="ctr">
+                      <a:solidFill>
+                        <a:srgbClr val="E4DADD"/>
+                      </a:solidFill>
+                      <a:prstDash val="solid"/>
+                      <a:round/>
+                      <a:headEnd type="none" w="med" len="med"/>
+                      <a:tailEnd type="none" w="med" len="med"/>
+                    </a:lnL>
+                    <a:lnR w="6350" cap="flat" cmpd="sng" algn="ctr">
+                      <a:solidFill>
+                        <a:srgbClr val="E4DADD"/>
+                      </a:solidFill>
+                      <a:prstDash val="solid"/>
+                      <a:round/>
+                      <a:headEnd type="none" w="med" len="med"/>
+                      <a:tailEnd type="none" w="med" len="med"/>
+                    </a:lnR>
+                    <a:lnT w="6350" cap="flat" cmpd="sng" algn="ctr">
+                      <a:solidFill>
+                        <a:srgbClr val="E4DADD"/>
+                      </a:solidFill>
+                      <a:prstDash val="solid"/>
+                      <a:round/>
+                      <a:headEnd type="none" w="med" len="med"/>
+                      <a:tailEnd type="none" w="med" len="med"/>
+                    </a:lnT>
+                    <a:lnB w="6350" cap="flat" cmpd="sng" algn="ctr">
+                      <a:solidFill>
+                        <a:srgbClr val="E4DADD"/>
+                      </a:solidFill>
+                      <a:prstDash val="solid"/>
+                      <a:round/>
+                      <a:headEnd type="none" w="med" len="med"/>
+                      <a:tailEnd type="none" w="med" len="med"/>
+                    </a:lnB>
+                  </a:tcPr>
+                </a:tc>
+                <a:tc>
+                  <a:txBody>
+                    <a:bodyPr/>
+                    <a:lstStyle/>
+                    <a:p>
+                      <a:pPr indent="0" marL="0">
+                        <a:buNone/>
+                      </a:pPr>
+                      <a:r>
+                        <a:rPr lang="en-US" sz="950" dirty="0">
+                          <a:solidFill>
+                            <a:srgbClr val="1F1A1C"/>
+                          </a:solidFill>
+                          <a:latin typeface="Calibri" pitchFamily="34" charset="0"/>
+                          <a:ea typeface="Calibri" pitchFamily="34" charset="-122"/>
+                          <a:cs typeface="Calibri" pitchFamily="34" charset="-120"/>
+                        </a:rPr>
+                        <a:t>10.00億円</a:t>
+                      </a:r>
+                      <a:endParaRPr lang="en-US" sz="950" dirty="0">
+                        <a:latin typeface="Calibri" charset="0"/>
+                        <a:ea typeface="Calibri" charset="0"/>
+                        <a:cs typeface="Calibri" charset="0"/>
+                      </a:endParaRPr>
+                    </a:p>
+                  </a:txBody>
+                  <a:tcPr marL="91440" marR="91440" marT="45720" marB="45720" anchor="ctr">
+                    <a:lnL w="6350" cap="flat" cmpd="sng" algn="ctr">
+                      <a:solidFill>
+                        <a:srgbClr val="E4DADD"/>
+                      </a:solidFill>
+                      <a:prstDash val="solid"/>
+                      <a:round/>
+                      <a:headEnd type="none" w="med" len="med"/>
+                      <a:tailEnd type="none" w="med" len="med"/>
+                    </a:lnL>
+                    <a:lnR w="6350" cap="flat" cmpd="sng" algn="ctr">
+                      <a:solidFill>
+                        <a:srgbClr val="E4DADD"/>
+                      </a:solidFill>
+                      <a:prstDash val="solid"/>
+                      <a:round/>
+                      <a:headEnd type="none" w="med" len="med"/>
+                      <a:tailEnd type="none" w="med" len="med"/>
+                    </a:lnR>
+                    <a:lnT w="6350" cap="flat" cmpd="sng" algn="ctr">
+                      <a:solidFill>
+                        <a:srgbClr val="E4DADD"/>
+                      </a:solidFill>
+                      <a:prstDash val="solid"/>
+                      <a:round/>
+                      <a:headEnd type="none" w="med" len="med"/>
+                      <a:tailEnd type="none" w="med" len="med"/>
+                    </a:lnT>
+                    <a:lnB w="6350" cap="flat" cmpd="sng" algn="ctr">
+                      <a:solidFill>
+                        <a:srgbClr val="E4DADD"/>
+                      </a:solidFill>
+                      <a:prstDash val="solid"/>
+                      <a:round/>
+                      <a:headEnd type="none" w="med" len="med"/>
+                      <a:tailEnd type="none" w="med" len="med"/>
+                    </a:lnB>
+                  </a:tcPr>
+                </a:tc>
+                <a:tc>
+                  <a:txBody>
+                    <a:bodyPr/>
+                    <a:lstStyle/>
+                    <a:p>
+                      <a:pPr algn="r" indent="0" marL="0">
+                        <a:buNone/>
+                      </a:pPr>
+                      <a:r>
+                        <a:rPr lang="en-US" sz="950" b="1" dirty="0">
+                          <a:solidFill>
+                            <a:srgbClr val="6D2E46"/>
+                          </a:solidFill>
+                          <a:latin typeface="Calibri" pitchFamily="34" charset="0"/>
+                          <a:ea typeface="Calibri" pitchFamily="34" charset="-122"/>
+                          <a:cs typeface="Calibri" pitchFamily="34" charset="-120"/>
+                        </a:rPr>
+                        <a:t>33.3%</a:t>
+                      </a:r>
+                      <a:endParaRPr lang="en-US" sz="950" dirty="0">
+                        <a:latin typeface="Calibri" charset="0"/>
+                        <a:ea typeface="Calibri" charset="0"/>
+                        <a:cs typeface="Calibri" charset="0"/>
+                      </a:endParaRPr>
+                    </a:p>
+                  </a:txBody>
+                  <a:tcPr marL="91440" marR="91440" marT="45720" marB="45720" anchor="ctr">
+                    <a:lnL w="6350" cap="flat" cmpd="sng" algn="ctr">
+                      <a:solidFill>
+                        <a:srgbClr val="E4DADD"/>
+                      </a:solidFill>
+                      <a:prstDash val="solid"/>
+                      <a:round/>
+                      <a:headEnd type="none" w="med" len="med"/>
+                      <a:tailEnd type="none" w="med" len="med"/>
+                    </a:lnL>
+                    <a:lnR w="6350" cap="flat" cmpd="sng" algn="ctr">
+                      <a:solidFill>
+                        <a:srgbClr val="E4DADD"/>
+                      </a:solidFill>
+                      <a:prstDash val="solid"/>
+                      <a:round/>
+                      <a:headEnd type="none" w="med" len="med"/>
+                      <a:tailEnd type="none" w="med" len="med"/>
+                    </a:lnR>
+                    <a:lnT w="6350" cap="flat" cmpd="sng" algn="ctr">
+                      <a:solidFill>
+                        <a:srgbClr val="E4DADD"/>
+                      </a:solidFill>
+                      <a:prstDash val="solid"/>
+                      <a:round/>
+                      <a:headEnd type="none" w="med" len="med"/>
+                      <a:tailEnd type="none" w="med" len="med"/>
+                    </a:lnT>
+                    <a:lnB w="6350" cap="flat" cmpd="sng" algn="ctr">
+                      <a:solidFill>
+                        <a:srgbClr val="E4DADD"/>
+                      </a:solidFill>
+                      <a:prstDash val="solid"/>
+                      <a:round/>
+                      <a:headEnd type="none" w="med" len="med"/>
+                      <a:tailEnd type="none" w="med" len="med"/>
+                    </a:lnB>
+                  </a:tcPr>
+                </a:tc>
+              </a:tr>
+              <a:tr h="365760">
+                <a:tc>
+                  <a:txBody>
+                    <a:bodyPr/>
+                    <a:lstStyle/>
+                    <a:p>
+                      <a:pPr indent="0" marL="0">
+                        <a:buNone/>
+                      </a:pPr>
+                      <a:r>
+                        <a:rPr lang="en-US" sz="950" b="1" dirty="0">
+                          <a:solidFill>
+                            <a:srgbClr val="1F1A1C"/>
+                          </a:solidFill>
+                          <a:latin typeface="Calibri" pitchFamily="34" charset="0"/>
+                          <a:ea typeface="Calibri" pitchFamily="34" charset="-122"/>
+                          <a:cs typeface="Calibri" pitchFamily="34" charset="-120"/>
+                        </a:rPr>
+                        <a:t>合計</a:t>
+                      </a:r>
+                      <a:endParaRPr lang="en-US" sz="950" dirty="0">
+                        <a:latin typeface="Calibri" charset="0"/>
+                        <a:ea typeface="Calibri" charset="0"/>
+                        <a:cs typeface="Calibri" charset="0"/>
+                      </a:endParaRPr>
+                    </a:p>
+                  </a:txBody>
+                  <a:tcPr marL="91440" marR="91440" marT="45720" marB="45720" anchor="ctr">
+                    <a:lnL w="6350" cap="flat" cmpd="sng" algn="ctr">
+                      <a:solidFill>
+                        <a:srgbClr val="E4DADD"/>
+                      </a:solidFill>
+                      <a:prstDash val="solid"/>
+                      <a:round/>
+                      <a:headEnd type="none" w="med" len="med"/>
+                      <a:tailEnd type="none" w="med" len="med"/>
+                    </a:lnL>
+                    <a:lnR w="6350" cap="flat" cmpd="sng" algn="ctr">
+                      <a:solidFill>
+                        <a:srgbClr val="E4DADD"/>
+                      </a:solidFill>
+                      <a:prstDash val="solid"/>
+                      <a:round/>
+                      <a:headEnd type="none" w="med" len="med"/>
+                      <a:tailEnd type="none" w="med" len="med"/>
+                    </a:lnR>
+                    <a:lnT w="6350" cap="flat" cmpd="sng" algn="ctr">
+                      <a:solidFill>
+                        <a:srgbClr val="E4DADD"/>
+                      </a:solidFill>
+                      <a:prstDash val="solid"/>
+                      <a:round/>
+                      <a:headEnd type="none" w="med" len="med"/>
+                      <a:tailEnd type="none" w="med" len="med"/>
+                    </a:lnT>
+                    <a:lnB w="6350" cap="flat" cmpd="sng" algn="ctr">
+                      <a:solidFill>
+                        <a:srgbClr val="E4DADD"/>
+                      </a:solidFill>
+                      <a:prstDash val="solid"/>
+                      <a:round/>
+                      <a:headEnd type="none" w="med" len="med"/>
+                      <a:tailEnd type="none" w="med" len="med"/>
+                    </a:lnB>
+                    <a:solidFill>
+                      <a:srgbClr val="F7F3F4"/>
+                    </a:solidFill>
+                  </a:tcPr>
+                </a:tc>
+                <a:tc>
+                  <a:txBody>
+                    <a:bodyPr/>
+                    <a:lstStyle/>
+                    <a:p>
+                      <a:pPr indent="0" marL="0">
+                        <a:buNone/>
+                      </a:pPr>
+                      <a:r>
+                        <a:rPr lang="en-US" sz="950" dirty="0">
+                          <a:solidFill>
+                            <a:srgbClr val="1F1A1C"/>
+                          </a:solidFill>
+                          <a:latin typeface="Calibri" pitchFamily="34" charset="0"/>
+                          <a:ea typeface="Calibri" pitchFamily="34" charset="-122"/>
+                          <a:cs typeface="Calibri" pitchFamily="34" charset="-120"/>
+                        </a:rPr>
+                        <a:t>15.07億円</a:t>
+                      </a:r>
+                      <a:endParaRPr lang="en-US" sz="950" dirty="0">
+                        <a:latin typeface="Calibri" charset="0"/>
+                        <a:ea typeface="Calibri" charset="0"/>
+                        <a:cs typeface="Calibri" charset="0"/>
+                      </a:endParaRPr>
+                    </a:p>
+                  </a:txBody>
+                  <a:tcPr marL="91440" marR="91440" marT="45720" marB="45720" anchor="ctr">
+                    <a:lnL w="6350" cap="flat" cmpd="sng" algn="ctr">
+                      <a:solidFill>
+                        <a:srgbClr val="E4DADD"/>
+                      </a:solidFill>
+                      <a:prstDash val="solid"/>
+                      <a:round/>
+                      <a:headEnd type="none" w="med" len="med"/>
+                      <a:tailEnd type="none" w="med" len="med"/>
+                    </a:lnL>
+                    <a:lnR w="6350" cap="flat" cmpd="sng" algn="ctr">
+                      <a:solidFill>
+                        <a:srgbClr val="E4DADD"/>
+                      </a:solidFill>
+                      <a:prstDash val="solid"/>
+                      <a:round/>
+                      <a:headEnd type="none" w="med" len="med"/>
+                      <a:tailEnd type="none" w="med" len="med"/>
+                    </a:lnR>
+                    <a:lnT w="6350" cap="flat" cmpd="sng" algn="ctr">
+                      <a:solidFill>
+                        <a:srgbClr val="E4DADD"/>
+                      </a:solidFill>
+                      <a:prstDash val="solid"/>
+                      <a:round/>
+                      <a:headEnd type="none" w="med" len="med"/>
+                      <a:tailEnd type="none" w="med" len="med"/>
+                    </a:lnT>
+                    <a:lnB w="6350" cap="flat" cmpd="sng" algn="ctr">
+                      <a:solidFill>
+                        <a:srgbClr val="E4DADD"/>
+                      </a:solidFill>
+                      <a:prstDash val="solid"/>
+                      <a:round/>
+                      <a:headEnd type="none" w="med" len="med"/>
+                      <a:tailEnd type="none" w="med" len="med"/>
+                    </a:lnB>
+                    <a:solidFill>
+                      <a:srgbClr val="F7F3F4"/>
+                    </a:solidFill>
+                  </a:tcPr>
+                </a:tc>
+                <a:tc>
+                  <a:txBody>
+                    <a:bodyPr/>
+                    <a:lstStyle/>
+                    <a:p>
+                      <a:pPr algn="r" indent="0" marL="0">
+                        <a:buNone/>
+                      </a:pPr>
+                      <a:r>
+                        <a:rPr lang="en-US" sz="950" b="1" dirty="0">
+                          <a:solidFill>
+                            <a:srgbClr val="1F1A1C"/>
+                          </a:solidFill>
+                          <a:latin typeface="Calibri" pitchFamily="34" charset="0"/>
+                          <a:ea typeface="Calibri" pitchFamily="34" charset="-122"/>
+                          <a:cs typeface="Calibri" pitchFamily="34" charset="-120"/>
+                        </a:rPr>
+                        <a:t>100%</a:t>
+                      </a:r>
+                      <a:endParaRPr lang="en-US" sz="950" dirty="0">
+                        <a:latin typeface="Calibri" charset="0"/>
+                        <a:ea typeface="Calibri" charset="0"/>
+                        <a:cs typeface="Calibri" charset="0"/>
+                      </a:endParaRPr>
+                    </a:p>
+                  </a:txBody>
+                  <a:tcPr marL="91440" marR="91440" marT="45720" marB="45720" anchor="ctr">
+                    <a:lnL w="6350" cap="flat" cmpd="sng" algn="ctr">
+                      <a:solidFill>
+                        <a:srgbClr val="E4DADD"/>
+                      </a:solidFill>
+                      <a:prstDash val="solid"/>
+                      <a:round/>
+                      <a:headEnd type="none" w="med" len="med"/>
+                      <a:tailEnd type="none" w="med" len="med"/>
+                    </a:lnL>
+                    <a:lnR w="6350" cap="flat" cmpd="sng" algn="ctr">
+                      <a:solidFill>
+                        <a:srgbClr val="E4DADD"/>
+                      </a:solidFill>
+                      <a:prstDash val="solid"/>
+                      <a:round/>
+                      <a:headEnd type="none" w="med" len="med"/>
+                      <a:tailEnd type="none" w="med" len="med"/>
+                    </a:lnR>
+                    <a:lnT w="6350" cap="flat" cmpd="sng" algn="ctr">
+                      <a:solidFill>
+                        <a:srgbClr val="E4DADD"/>
+                      </a:solidFill>
+                      <a:prstDash val="solid"/>
+                      <a:round/>
+                      <a:headEnd type="none" w="med" len="med"/>
+                      <a:tailEnd type="none" w="med" len="med"/>
+                    </a:lnT>
+                    <a:lnB w="6350" cap="flat" cmpd="sng" algn="ctr">
+                      <a:solidFill>
+                        <a:srgbClr val="E4DADD"/>
+                      </a:solidFill>
+                      <a:prstDash val="solid"/>
+                      <a:round/>
+                      <a:headEnd type="none" w="med" len="med"/>
+                      <a:tailEnd type="none" w="med" len="med"/>
+                    </a:lnB>
+                    <a:solidFill>
+                      <a:srgbClr val="F7F3F4"/>
+                    </a:solidFill>
+                  </a:tcPr>
+                </a:tc>
+              </a:tr>
+            </a:tbl>
+          </a:graphicData>
+        </a:graphic>
+      </p:graphicFrame>
+      <p:sp>
+        <p:nvSpPr>
+          <p:cNvPr id="12" name="Shape 9"/>
+          <p:cNvSpPr/>
+          <p:nvPr/>
+        </p:nvSpPr>
+        <p:spPr>
+          <a:xfrm>
+            <a:off x="6227064" y="1554480"/>
+            <a:ext cx="5394960" cy="3017520"/>
+          </a:xfrm>
+          <a:prstGeom prst="roundRect">
+            <a:avLst>
+              <a:gd name="adj" fmla="val 1515"/>
+            </a:avLst>
+          </a:prstGeom>
+          <a:solidFill>
+            <a:srgbClr val="FFFFFF"/>
+          </a:solidFill>
+          <a:ln w="9525">
+            <a:solidFill>
+              <a:srgbClr val="E4DADD"/>
+            </a:solidFill>
+            <a:prstDash val="solid"/>
+          </a:ln>
+        </p:spPr>
+      </p:sp>
+      <p:sp>
+        <p:nvSpPr>
+          <p:cNvPr id="13" name="Text 10"/>
+          <p:cNvSpPr txBox="1"/>
+          <p:nvPr/>
+        </p:nvSpPr>
+        <p:spPr>
+          <a:xfrm>
+            <a:off x="6446520" y="1664208"/>
+            <a:ext cx="4937760" cy="256032"/>
+          </a:xfrm>
+          <a:prstGeom prst="rect">
+            <a:avLst/>
+          </a:prstGeom>
+          <a:noFill/>
+          <a:ln/>
+        </p:spPr>
+        <p:txBody>
+          <a:bodyPr wrap="square" lIns="0" tIns="0" rIns="0" bIns="0" rtlCol="0" anchor="ctr"/>
+          <a:lstStyle/>
+          <a:p>
+            <a:pPr indent="0" marL="0">
+              <a:buNone/>
+            </a:pPr>
+            <a:r>
+              <a:rPr lang="en-US" sz="1500" b="1" dirty="0">
+                <a:solidFill>
+                  <a:srgbClr val="1F1A1C"/>
+                </a:solidFill>
+                <a:latin typeface="Cambria" pitchFamily="34" charset="0"/>
+                <a:ea typeface="Cambria" pitchFamily="34" charset="-122"/>
+                <a:cs typeface="Cambria" pitchFamily="34" charset="-120"/>
+              </a:rPr>
+              <a:t>② 譲受価額 55.0億円</a:t>
+            </a:r>
+            <a:endParaRPr lang="en-US" sz="1500" dirty="0"/>
+          </a:p>
+        </p:txBody>
+      </p:sp>
+      <p:sp>
+        <p:nvSpPr>
+          <p:cNvPr id="14" name="Shape 11"/>
+          <p:cNvSpPr/>
+          <p:nvPr/>
+        </p:nvSpPr>
+        <p:spPr>
+          <a:xfrm>
+            <a:off x="6336792" y="2029968"/>
+            <a:ext cx="2957283" cy="457200"/>
+          </a:xfrm>
+          <a:prstGeom prst="rect">
+            <a:avLst/>
+          </a:prstGeom>
+          <a:solidFill>
+            <a:srgbClr val="6D2E46"/>
+          </a:solidFill>
+          <a:ln/>
+        </p:spPr>
+      </p:sp>
+      <p:sp>
+        <p:nvSpPr>
+          <p:cNvPr id="15" name="Text 12"/>
+          <p:cNvSpPr txBox="1"/>
+          <p:nvPr/>
+        </p:nvSpPr>
+        <p:spPr>
+          <a:xfrm>
+            <a:off x="6336792" y="2029968"/>
+            <a:ext cx="2957283" cy="457200"/>
+          </a:xfrm>
+          <a:prstGeom prst="rect">
+            <a:avLst/>
+          </a:prstGeom>
+          <a:noFill/>
+          <a:ln/>
+        </p:spPr>
+        <p:txBody>
+          <a:bodyPr wrap="square" lIns="0" tIns="0" rIns="0" bIns="0" rtlCol="0" anchor="ctr"/>
+          <a:lstStyle/>
+          <a:p>
+            <a:pPr algn="ctr" indent="0" marL="0">
+              <a:buNone/>
+            </a:pPr>
+            <a:r>
+              <a:rPr lang="en-US" sz="1150" b="1" dirty="0">
+                <a:solidFill>
+                  <a:srgbClr val="FFFFFF"/>
+                </a:solidFill>
+                <a:latin typeface="Calibri" pitchFamily="34" charset="0"/>
+                <a:ea typeface="Calibri" pitchFamily="34" charset="-122"/>
+                <a:cs typeface="Calibri" pitchFamily="34" charset="-120"/>
+              </a:rPr>
+              <a:t>中野 57.1%</a:t>
+            </a:r>
+            <a:endParaRPr lang="en-US" sz="1150" dirty="0"/>
+          </a:p>
+        </p:txBody>
+      </p:sp>
+      <p:sp>
+        <p:nvSpPr>
+          <p:cNvPr id="16" name="Shape 13"/>
+          <p:cNvSpPr/>
+          <p:nvPr/>
+        </p:nvSpPr>
+        <p:spPr>
+          <a:xfrm>
+            <a:off x="9294075" y="2029968"/>
+            <a:ext cx="1478641" cy="457200"/>
+          </a:xfrm>
+          <a:prstGeom prst="rect">
+            <a:avLst/>
+          </a:prstGeom>
+          <a:solidFill>
+            <a:srgbClr val="A26769"/>
+          </a:solidFill>
+          <a:ln/>
+        </p:spPr>
+      </p:sp>
+      <p:sp>
+        <p:nvSpPr>
+          <p:cNvPr id="17" name="Text 14"/>
+          <p:cNvSpPr txBox="1"/>
+          <p:nvPr/>
+        </p:nvSpPr>
+        <p:spPr>
+          <a:xfrm>
+            <a:off x="9294075" y="2029968"/>
+            <a:ext cx="1478641" cy="457200"/>
+          </a:xfrm>
+          <a:prstGeom prst="rect">
+            <a:avLst/>
+          </a:prstGeom>
+          <a:noFill/>
+          <a:ln/>
+        </p:spPr>
+        <p:txBody>
+          <a:bodyPr wrap="square" lIns="0" tIns="0" rIns="0" bIns="0" rtlCol="0" anchor="ctr"/>
+          <a:lstStyle/>
+          <a:p>
+            <a:pPr algn="ctr" indent="0" marL="0">
+              <a:buNone/>
+            </a:pPr>
+            <a:r>
+              <a:rPr lang="en-US" sz="1150" b="1" dirty="0">
+                <a:solidFill>
+                  <a:srgbClr val="FFFFFF"/>
+                </a:solidFill>
+                <a:latin typeface="Calibri" pitchFamily="34" charset="0"/>
+                <a:ea typeface="Calibri" pitchFamily="34" charset="-122"/>
+                <a:cs typeface="Calibri" pitchFamily="34" charset="-120"/>
+              </a:rPr>
+              <a:t>榊原 28.6%</a:t>
+            </a:r>
+            <a:endParaRPr lang="en-US" sz="1150" dirty="0"/>
+          </a:p>
+        </p:txBody>
+      </p:sp>
+      <p:sp>
+        <p:nvSpPr>
+          <p:cNvPr id="18" name="Shape 15"/>
+          <p:cNvSpPr/>
+          <p:nvPr/>
+        </p:nvSpPr>
+        <p:spPr>
+          <a:xfrm>
+            <a:off x="10772716" y="2029968"/>
+            <a:ext cx="739580" cy="457200"/>
+          </a:xfrm>
+          <a:prstGeom prst="rect">
+            <a:avLst/>
+          </a:prstGeom>
+          <a:solidFill>
+            <a:srgbClr val="B58B2A"/>
+          </a:solidFill>
+          <a:ln/>
+        </p:spPr>
+      </p:sp>
+      <p:sp>
+        <p:nvSpPr>
+          <p:cNvPr id="19" name="Text 16"/>
+          <p:cNvSpPr txBox="1"/>
+          <p:nvPr/>
+        </p:nvSpPr>
+        <p:spPr>
+          <a:xfrm>
+            <a:off x="10772716" y="2029968"/>
+            <a:ext cx="739580" cy="457200"/>
+          </a:xfrm>
+          <a:prstGeom prst="rect">
+            <a:avLst/>
+          </a:prstGeom>
+          <a:noFill/>
+          <a:ln/>
+        </p:spPr>
+        <p:txBody>
+          <a:bodyPr wrap="square" lIns="0" tIns="0" rIns="0" bIns="0" rtlCol="0" anchor="ctr"/>
+          <a:lstStyle/>
+          <a:p>
+            <a:pPr algn="ctr" indent="0" marL="0">
+              <a:buNone/>
+            </a:pPr>
+            <a:r>
+              <a:rPr lang="en-US" sz="900" b="1" dirty="0">
+                <a:solidFill>
+                  <a:srgbClr val="FFFFFF"/>
+                </a:solidFill>
+                <a:latin typeface="Calibri" pitchFamily="34" charset="0"/>
+                <a:ea typeface="Calibri" pitchFamily="34" charset="-122"/>
+                <a:cs typeface="Calibri" pitchFamily="34" charset="-120"/>
+              </a:rPr>
+              <a:t>14.3%</a:t>
+            </a:r>
+            <a:endParaRPr lang="en-US" sz="900" dirty="0"/>
+          </a:p>
+        </p:txBody>
+      </p:sp>
+      <p:graphicFrame>
+        <p:nvGraphicFramePr>
+          <p:cNvPr id="9" name="Table 1"/>
+          <p:cNvGraphicFramePr>
+            <a:graphicFrameLocks noGrp="1"/>
+          </p:cNvGraphicFramePr>
+          <p:nvPr>
+            <p:extLst>
+              <p:ext uri="{D42A27DB-BD31-4B8C-83A1-F6EECF244321}">
+                <p14:modId xmlns:p14="http://schemas.microsoft.com/office/powerpoint/2010/main" val="1579011935"/>
+              </p:ext>
+            </p:extLst>
+          </p:nvPr>
+        </p:nvGraphicFramePr>
+        <p:xfrm>
+          <a:off x="6336792" y="2670048"/>
+          <a:ext cx="5175504" cy="914400"/>
+        </p:xfrm>
+        <a:graphic>
+          <a:graphicData uri="http://schemas.openxmlformats.org/drawingml/2006/table">
+            <a:tbl>
+              <a:tblPr/>
+              <a:tblGrid>
+                <a:gridCol w="1554480"/>
+                <a:gridCol w="2523744"/>
+                <a:gridCol w="1097280"/>
+              </a:tblGrid>
+              <a:tr h="365760">
+                <a:tc>
+                  <a:txBody>
+                    <a:bodyPr/>
+                    <a:lstStyle/>
+                    <a:p>
+                      <a:pPr indent="0" marL="0">
+                        <a:buNone/>
+                      </a:pPr>
+                      <a:r>
+                        <a:rPr lang="en-US" sz="1000" b="1" dirty="0">
+                          <a:solidFill>
+                            <a:srgbClr val="FFFFFF"/>
+                          </a:solidFill>
+                          <a:latin typeface="Calibri" pitchFamily="34" charset="0"/>
+                          <a:ea typeface="Calibri" pitchFamily="34" charset="-122"/>
+                          <a:cs typeface="Calibri" pitchFamily="34" charset="-120"/>
+                        </a:rPr>
+                        <a:t>株主</a:t>
+                      </a:r>
+                      <a:endParaRPr lang="en-US" sz="1000" dirty="0">
+                        <a:latin typeface="Calibri" charset="0"/>
+                        <a:ea typeface="Calibri" charset="0"/>
+                        <a:cs typeface="Calibri" charset="0"/>
+                      </a:endParaRPr>
+                    </a:p>
+                  </a:txBody>
+                  <a:tcPr marL="91440" marR="91440" marT="45720" marB="45720" anchor="ctr">
+                    <a:lnL w="6350" cap="flat" cmpd="sng" algn="ctr">
+                      <a:solidFill>
+                        <a:srgbClr val="E4DADD"/>
+                      </a:solidFill>
+                      <a:prstDash val="solid"/>
+                      <a:round/>
+                      <a:headEnd type="none" w="med" len="med"/>
+                      <a:tailEnd type="none" w="med" len="med"/>
+                    </a:lnL>
+                    <a:lnR w="6350" cap="flat" cmpd="sng" algn="ctr">
+                      <a:solidFill>
+                        <a:srgbClr val="E4DADD"/>
+                      </a:solidFill>
+                      <a:prstDash val="solid"/>
+                      <a:round/>
+                      <a:headEnd type="none" w="med" len="med"/>
+                      <a:tailEnd type="none" w="med" len="med"/>
+                    </a:lnR>
+                    <a:lnT w="6350" cap="flat" cmpd="sng" algn="ctr">
+                      <a:solidFill>
+                        <a:srgbClr val="E4DADD"/>
+                      </a:solidFill>
+                      <a:prstDash val="solid"/>
+                      <a:round/>
+                      <a:headEnd type="none" w="med" len="med"/>
+                      <a:tailEnd type="none" w="med" len="med"/>
+                    </a:lnT>
+                    <a:lnB w="6350" cap="flat" cmpd="sng" algn="ctr">
+                      <a:solidFill>
+                        <a:srgbClr val="E4DADD"/>
+                      </a:solidFill>
+                      <a:prstDash val="solid"/>
+                      <a:round/>
+                      <a:headEnd type="none" w="med" len="med"/>
+                      <a:tailEnd type="none" w="med" len="med"/>
+                    </a:lnB>
+                    <a:solidFill>
+                      <a:srgbClr val="6D2E46"/>
+                    </a:solidFill>
+                  </a:tcPr>
+                </a:tc>
+                <a:tc>
+                  <a:txBody>
+                    <a:bodyPr/>
+                    <a:lstStyle/>
+                    <a:p>
+                      <a:pPr indent="0" marL="0">
+                        <a:buNone/>
+                      </a:pPr>
+                      <a:r>
+                        <a:rPr lang="en-US" sz="1000" b="1" dirty="0">
+                          <a:solidFill>
+                            <a:srgbClr val="FFFFFF"/>
+                          </a:solidFill>
+                          <a:latin typeface="Calibri" pitchFamily="34" charset="0"/>
+                          <a:ea typeface="Calibri" pitchFamily="34" charset="-122"/>
+                          <a:cs typeface="Calibri" pitchFamily="34" charset="-120"/>
+                        </a:rPr>
+                        <a:t>拠出額</a:t>
+                      </a:r>
+                      <a:endParaRPr lang="en-US" sz="1000" dirty="0">
+                        <a:latin typeface="Calibri" charset="0"/>
+                        <a:ea typeface="Calibri" charset="0"/>
+                        <a:cs typeface="Calibri" charset="0"/>
+                      </a:endParaRPr>
+                    </a:p>
+                  </a:txBody>
+                  <a:tcPr marL="91440" marR="91440" marT="45720" marB="45720" anchor="ctr">
+                    <a:lnL w="6350" cap="flat" cmpd="sng" algn="ctr">
+                      <a:solidFill>
+                        <a:srgbClr val="E4DADD"/>
+                      </a:solidFill>
+                      <a:prstDash val="solid"/>
+                      <a:round/>
+                      <a:headEnd type="none" w="med" len="med"/>
+                      <a:tailEnd type="none" w="med" len="med"/>
+                    </a:lnL>
+                    <a:lnR w="6350" cap="flat" cmpd="sng" algn="ctr">
+                      <a:solidFill>
+                        <a:srgbClr val="E4DADD"/>
+                      </a:solidFill>
+                      <a:prstDash val="solid"/>
+                      <a:round/>
+                      <a:headEnd type="none" w="med" len="med"/>
+                      <a:tailEnd type="none" w="med" len="med"/>
+                    </a:lnR>
+                    <a:lnT w="6350" cap="flat" cmpd="sng" algn="ctr">
+                      <a:solidFill>
+                        <a:srgbClr val="E4DADD"/>
+                      </a:solidFill>
+                      <a:prstDash val="solid"/>
+                      <a:round/>
+                      <a:headEnd type="none" w="med" len="med"/>
+                      <a:tailEnd type="none" w="med" len="med"/>
+                    </a:lnT>
+                    <a:lnB w="6350" cap="flat" cmpd="sng" algn="ctr">
+                      <a:solidFill>
+                        <a:srgbClr val="E4DADD"/>
+                      </a:solidFill>
+                      <a:prstDash val="solid"/>
+                      <a:round/>
+                      <a:headEnd type="none" w="med" len="med"/>
+                      <a:tailEnd type="none" w="med" len="med"/>
+                    </a:lnB>
+                    <a:solidFill>
+                      <a:srgbClr val="6D2E46"/>
+                    </a:solidFill>
+                  </a:tcPr>
+                </a:tc>
+                <a:tc>
+                  <a:txBody>
+                    <a:bodyPr/>
+                    <a:lstStyle/>
+                    <a:p>
+                      <a:pPr indent="0" marL="0">
+                        <a:buNone/>
+                      </a:pPr>
+                      <a:r>
+                        <a:rPr lang="en-US" sz="1000" b="1" dirty="0">
+                          <a:solidFill>
+                            <a:srgbClr val="FFFFFF"/>
+                          </a:solidFill>
+                          <a:latin typeface="Calibri" pitchFamily="34" charset="0"/>
+                          <a:ea typeface="Calibri" pitchFamily="34" charset="-122"/>
+                          <a:cs typeface="Calibri" pitchFamily="34" charset="-120"/>
+                        </a:rPr>
+                        <a:t>持分</a:t>
+                      </a:r>
+                      <a:endParaRPr lang="en-US" sz="1000" dirty="0">
+                        <a:latin typeface="Calibri" charset="0"/>
+                        <a:ea typeface="Calibri" charset="0"/>
+                        <a:cs typeface="Calibri" charset="0"/>
+                      </a:endParaRPr>
+                    </a:p>
+                  </a:txBody>
+                  <a:tcPr marL="91440" marR="91440" marT="45720" marB="45720" anchor="ctr">
+                    <a:lnL w="6350" cap="flat" cmpd="sng" algn="ctr">
+                      <a:solidFill>
+                        <a:srgbClr val="E4DADD"/>
+                      </a:solidFill>
+                      <a:prstDash val="solid"/>
+                      <a:round/>
+                      <a:headEnd type="none" w="med" len="med"/>
+                      <a:tailEnd type="none" w="med" len="med"/>
+                    </a:lnL>
+                    <a:lnR w="6350" cap="flat" cmpd="sng" algn="ctr">
+                      <a:solidFill>
+                        <a:srgbClr val="E4DADD"/>
+                      </a:solidFill>
+                      <a:prstDash val="solid"/>
+                      <a:round/>
+                      <a:headEnd type="none" w="med" len="med"/>
+                      <a:tailEnd type="none" w="med" len="med"/>
+                    </a:lnR>
+                    <a:lnT w="6350" cap="flat" cmpd="sng" algn="ctr">
+                      <a:solidFill>
+                        <a:srgbClr val="E4DADD"/>
+                      </a:solidFill>
+                      <a:prstDash val="solid"/>
+                      <a:round/>
+                      <a:headEnd type="none" w="med" len="med"/>
+                      <a:tailEnd type="none" w="med" len="med"/>
+                    </a:lnT>
+                    <a:lnB w="6350" cap="flat" cmpd="sng" algn="ctr">
+                      <a:solidFill>
+                        <a:srgbClr val="E4DADD"/>
+                      </a:solidFill>
+                      <a:prstDash val="solid"/>
+                      <a:round/>
+                      <a:headEnd type="none" w="med" len="med"/>
+                      <a:tailEnd type="none" w="med" len="med"/>
+                    </a:lnB>
+                    <a:solidFill>
+                      <a:srgbClr val="6D2E46"/>
+                    </a:solidFill>
+                  </a:tcPr>
+                </a:tc>
+              </a:tr>
+              <a:tr h="365760">
+                <a:tc>
+                  <a:txBody>
+                    <a:bodyPr/>
+                    <a:lstStyle/>
+                    <a:p>
+                      <a:pPr indent="0" marL="0">
+                        <a:buNone/>
+                      </a:pPr>
+                      <a:r>
+                        <a:rPr lang="en-US" sz="950" b="1" dirty="0">
+                          <a:solidFill>
+                            <a:srgbClr val="1F1A1C"/>
+                          </a:solidFill>
+                          <a:latin typeface="Calibri" pitchFamily="34" charset="0"/>
+                          <a:ea typeface="Calibri" pitchFamily="34" charset="-122"/>
+                          <a:cs typeface="Calibri" pitchFamily="34" charset="-120"/>
+                        </a:rPr>
+                        <a:t>中野 邦人 氏</a:t>
+                      </a:r>
+                      <a:endParaRPr lang="en-US" sz="950" dirty="0">
+                        <a:latin typeface="Calibri" charset="0"/>
+                        <a:ea typeface="Calibri" charset="0"/>
+                        <a:cs typeface="Calibri" charset="0"/>
+                      </a:endParaRPr>
+                    </a:p>
+                  </a:txBody>
+                  <a:tcPr marL="91440" marR="91440" marT="45720" marB="45720" anchor="ctr">
+                    <a:lnL w="6350" cap="flat" cmpd="sng" algn="ctr">
+                      <a:solidFill>
+                        <a:srgbClr val="E4DADD"/>
+                      </a:solidFill>
+                      <a:prstDash val="solid"/>
+                      <a:round/>
+                      <a:headEnd type="none" w="med" len="med"/>
+                      <a:tailEnd type="none" w="med" len="med"/>
+                    </a:lnL>
+                    <a:lnR w="6350" cap="flat" cmpd="sng" algn="ctr">
+                      <a:solidFill>
+                        <a:srgbClr val="E4DADD"/>
+                      </a:solidFill>
+                      <a:prstDash val="solid"/>
+                      <a:round/>
+                      <a:headEnd type="none" w="med" len="med"/>
+                      <a:tailEnd type="none" w="med" len="med"/>
+                    </a:lnR>
+                    <a:lnT w="6350" cap="flat" cmpd="sng" algn="ctr">
+                      <a:solidFill>
+                        <a:srgbClr val="E4DADD"/>
+                      </a:solidFill>
+                      <a:prstDash val="solid"/>
+                      <a:round/>
+                      <a:headEnd type="none" w="med" len="med"/>
+                      <a:tailEnd type="none" w="med" len="med"/>
+                    </a:lnT>
+                    <a:lnB w="6350" cap="flat" cmpd="sng" algn="ctr">
+                      <a:solidFill>
+                        <a:srgbClr val="E4DADD"/>
+                      </a:solidFill>
+                      <a:prstDash val="solid"/>
+                      <a:round/>
+                      <a:headEnd type="none" w="med" len="med"/>
+                      <a:tailEnd type="none" w="med" len="med"/>
+                    </a:lnB>
+                  </a:tcPr>
+                </a:tc>
+                <a:tc>
+                  <a:txBody>
+                    <a:bodyPr/>
+                    <a:lstStyle/>
+                    <a:p>
+                      <a:pPr indent="0" marL="0">
+                        <a:buNone/>
+                      </a:pPr>
+                      <a:r>
+                        <a:rPr lang="en-US" sz="900" dirty="0">
+                          <a:solidFill>
+                            <a:srgbClr val="1F1A1C"/>
+                          </a:solidFill>
+                          <a:latin typeface="Calibri" pitchFamily="34" charset="0"/>
+                          <a:ea typeface="Calibri" pitchFamily="34" charset="-122"/>
+                          <a:cs typeface="Calibri" pitchFamily="34" charset="-120"/>
+                        </a:rPr>
+                        <a:t>出資10万円＋株主貸付5.07億円</a:t>
+                      </a:r>
+                      <a:endParaRPr lang="en-US" sz="900" dirty="0">
+                        <a:latin typeface="Calibri" charset="0"/>
+                        <a:ea typeface="Calibri" charset="0"/>
+                        <a:cs typeface="Calibri" charset="0"/>
+                      </a:endParaRPr>
+                    </a:p>
+                  </a:txBody>
+                  <a:tcPr marL="91440" marR="91440" marT="45720" marB="45720" anchor="ctr">
+                    <a:lnL w="6350" cap="flat" cmpd="sng" algn="ctr">
+                      <a:solidFill>
+                        <a:srgbClr val="E4DADD"/>
+                      </a:solidFill>
+                      <a:prstDash val="solid"/>
+                      <a:round/>
+                      <a:headEnd type="none" w="med" len="med"/>
+                      <a:tailEnd type="none" w="med" len="med"/>
+                    </a:lnL>
+                    <a:lnR w="6350" cap="flat" cmpd="sng" algn="ctr">
+                      <a:solidFill>
+                        <a:srgbClr val="E4DADD"/>
+                      </a:solidFill>
+                      <a:prstDash val="solid"/>
+                      <a:round/>
+                      <a:headEnd type="none" w="med" len="med"/>
+                      <a:tailEnd type="none" w="med" len="med"/>
+                    </a:lnR>
+                    <a:lnT w="6350" cap="flat" cmpd="sng" algn="ctr">
+                      <a:solidFill>
+                        <a:srgbClr val="E4DADD"/>
+                      </a:solidFill>
+                      <a:prstDash val="solid"/>
+                      <a:round/>
+                      <a:headEnd type="none" w="med" len="med"/>
+                      <a:tailEnd type="none" w="med" len="med"/>
+                    </a:lnT>
+                    <a:lnB w="6350" cap="flat" cmpd="sng" algn="ctr">
+                      <a:solidFill>
+                        <a:srgbClr val="E4DADD"/>
+                      </a:solidFill>
+                      <a:prstDash val="solid"/>
+                      <a:round/>
+                      <a:headEnd type="none" w="med" len="med"/>
+                      <a:tailEnd type="none" w="med" len="med"/>
+                    </a:lnB>
+                  </a:tcPr>
+                </a:tc>
+                <a:tc>
+                  <a:txBody>
+                    <a:bodyPr/>
+                    <a:lstStyle/>
+                    <a:p>
+                      <a:pPr algn="r" indent="0" marL="0">
+                        <a:buNone/>
+                      </a:pPr>
+                      <a:r>
+                        <a:rPr lang="en-US" sz="950" b="1" dirty="0">
+                          <a:solidFill>
+                            <a:srgbClr val="1F1A1C"/>
+                          </a:solidFill>
+                          <a:latin typeface="Calibri" pitchFamily="34" charset="0"/>
+                          <a:ea typeface="Calibri" pitchFamily="34" charset="-122"/>
+                          <a:cs typeface="Calibri" pitchFamily="34" charset="-120"/>
+                        </a:rPr>
+                        <a:t>57.1%</a:t>
+                      </a:r>
+                      <a:endParaRPr lang="en-US" sz="950" dirty="0">
+                        <a:latin typeface="Calibri" charset="0"/>
+                        <a:ea typeface="Calibri" charset="0"/>
+                        <a:cs typeface="Calibri" charset="0"/>
+                      </a:endParaRPr>
+                    </a:p>
+                  </a:txBody>
+                  <a:tcPr marL="91440" marR="91440" marT="45720" marB="45720" anchor="ctr">
+                    <a:lnL w="6350" cap="flat" cmpd="sng" algn="ctr">
+                      <a:solidFill>
+                        <a:srgbClr val="E4DADD"/>
+                      </a:solidFill>
+                      <a:prstDash val="solid"/>
+                      <a:round/>
+                      <a:headEnd type="none" w="med" len="med"/>
+                      <a:tailEnd type="none" w="med" len="med"/>
+                    </a:lnL>
+                    <a:lnR w="6350" cap="flat" cmpd="sng" algn="ctr">
+                      <a:solidFill>
+                        <a:srgbClr val="E4DADD"/>
+                      </a:solidFill>
+                      <a:prstDash val="solid"/>
+                      <a:round/>
+                      <a:headEnd type="none" w="med" len="med"/>
+                      <a:tailEnd type="none" w="med" len="med"/>
+                    </a:lnR>
+                    <a:lnT w="6350" cap="flat" cmpd="sng" algn="ctr">
+                      <a:solidFill>
+                        <a:srgbClr val="E4DADD"/>
+                      </a:solidFill>
+                      <a:prstDash val="solid"/>
+                      <a:round/>
+                      <a:headEnd type="none" w="med" len="med"/>
+                      <a:tailEnd type="none" w="med" len="med"/>
+                    </a:lnT>
+                    <a:lnB w="6350" cap="flat" cmpd="sng" algn="ctr">
+                      <a:solidFill>
+                        <a:srgbClr val="E4DADD"/>
+                      </a:solidFill>
+                      <a:prstDash val="solid"/>
+                      <a:round/>
+                      <a:headEnd type="none" w="med" len="med"/>
+                      <a:tailEnd type="none" w="med" len="med"/>
+                    </a:lnB>
+                  </a:tcPr>
+                </a:tc>
+              </a:tr>
+              <a:tr h="365760">
+                <a:tc>
+                  <a:txBody>
+                    <a:bodyPr/>
+                    <a:lstStyle/>
+                    <a:p>
+                      <a:pPr indent="0" marL="0">
+                        <a:buNone/>
+                      </a:pPr>
+                      <a:r>
+                        <a:rPr lang="en-US" sz="950" b="1" dirty="0">
+                          <a:solidFill>
+                            <a:srgbClr val="1F1A1C"/>
+                          </a:solidFill>
+                          <a:latin typeface="Calibri" pitchFamily="34" charset="0"/>
+                          <a:ea typeface="Calibri" pitchFamily="34" charset="-122"/>
+                          <a:cs typeface="Calibri" pitchFamily="34" charset="-120"/>
+                        </a:rPr>
+                        <a:t>榊原 氏</a:t>
+                      </a:r>
+                      <a:endParaRPr lang="en-US" sz="950" dirty="0">
+                        <a:latin typeface="Calibri" charset="0"/>
+                        <a:ea typeface="Calibri" charset="0"/>
+                        <a:cs typeface="Calibri" charset="0"/>
+                      </a:endParaRPr>
+                    </a:p>
+                  </a:txBody>
+                  <a:tcPr marL="91440" marR="91440" marT="45720" marB="45720" anchor="ctr">
+                    <a:lnL w="6350" cap="flat" cmpd="sng" algn="ctr">
+                      <a:solidFill>
+                        <a:srgbClr val="E4DADD"/>
+                      </a:solidFill>
+                      <a:prstDash val="solid"/>
+                      <a:round/>
+                      <a:headEnd type="none" w="med" len="med"/>
+                      <a:tailEnd type="none" w="med" len="med"/>
+                    </a:lnL>
+                    <a:lnR w="6350" cap="flat" cmpd="sng" algn="ctr">
+                      <a:solidFill>
+                        <a:srgbClr val="E4DADD"/>
+                      </a:solidFill>
+                      <a:prstDash val="solid"/>
+                      <a:round/>
+                      <a:headEnd type="none" w="med" len="med"/>
+                      <a:tailEnd type="none" w="med" len="med"/>
+                    </a:lnR>
+                    <a:lnT w="6350" cap="flat" cmpd="sng" algn="ctr">
+                      <a:solidFill>
+                        <a:srgbClr val="E4DADD"/>
+                      </a:solidFill>
+                      <a:prstDash val="solid"/>
+                      <a:round/>
+                      <a:headEnd type="none" w="med" len="med"/>
+                      <a:tailEnd type="none" w="med" len="med"/>
+                    </a:lnT>
+                    <a:lnB w="6350" cap="flat" cmpd="sng" algn="ctr">
+                      <a:solidFill>
+                        <a:srgbClr val="E4DADD"/>
+                      </a:solidFill>
+                      <a:prstDash val="solid"/>
+                      <a:round/>
+                      <a:headEnd type="none" w="med" len="med"/>
+                      <a:tailEnd type="none" w="med" len="med"/>
+                    </a:lnB>
+                  </a:tcPr>
+                </a:tc>
+                <a:tc>
+                  <a:txBody>
+                    <a:bodyPr/>
+                    <a:lstStyle/>
+                    <a:p>
+                      <a:pPr indent="0" marL="0">
+                        <a:buNone/>
+                      </a:pPr>
+                      <a:r>
+                        <a:rPr lang="en-US" sz="950" dirty="0">
+                          <a:solidFill>
+                            <a:srgbClr val="1F1A1C"/>
+                          </a:solidFill>
+                          <a:latin typeface="Calibri" pitchFamily="34" charset="0"/>
+                          <a:ea typeface="Calibri" pitchFamily="34" charset="-122"/>
+                          <a:cs typeface="Calibri" pitchFamily="34" charset="-120"/>
+                        </a:rPr>
+                        <a:t>10.00億円</a:t>
+                      </a:r>
+                      <a:endParaRPr lang="en-US" sz="950" dirty="0">
+                        <a:latin typeface="Calibri" charset="0"/>
+                        <a:ea typeface="Calibri" charset="0"/>
+                        <a:cs typeface="Calibri" charset="0"/>
+                      </a:endParaRPr>
+                    </a:p>
+                  </a:txBody>
+                  <a:tcPr marL="91440" marR="91440" marT="45720" marB="45720" anchor="ctr">
+                    <a:lnL w="6350" cap="flat" cmpd="sng" algn="ctr">
+                      <a:solidFill>
+                        <a:srgbClr val="E4DADD"/>
+                      </a:solidFill>
+                      <a:prstDash val="solid"/>
+                      <a:round/>
+                      <a:headEnd type="none" w="med" len="med"/>
+                      <a:tailEnd type="none" w="med" len="med"/>
+                    </a:lnL>
+                    <a:lnR w="6350" cap="flat" cmpd="sng" algn="ctr">
+                      <a:solidFill>
+                        <a:srgbClr val="E4DADD"/>
+                      </a:solidFill>
+                      <a:prstDash val="solid"/>
+                      <a:round/>
+                      <a:headEnd type="none" w="med" len="med"/>
+                      <a:tailEnd type="none" w="med" len="med"/>
+                    </a:lnR>
+                    <a:lnT w="6350" cap="flat" cmpd="sng" algn="ctr">
+                      <a:solidFill>
+                        <a:srgbClr val="E4DADD"/>
+                      </a:solidFill>
+                      <a:prstDash val="solid"/>
+                      <a:round/>
+                      <a:headEnd type="none" w="med" len="med"/>
+                      <a:tailEnd type="none" w="med" len="med"/>
+                    </a:lnT>
+                    <a:lnB w="6350" cap="flat" cmpd="sng" algn="ctr">
+                      <a:solidFill>
+                        <a:srgbClr val="E4DADD"/>
+                      </a:solidFill>
+                      <a:prstDash val="solid"/>
+                      <a:round/>
+                      <a:headEnd type="none" w="med" len="med"/>
+                      <a:tailEnd type="none" w="med" len="med"/>
+                    </a:lnB>
+                  </a:tcPr>
+                </a:tc>
+                <a:tc>
+                  <a:txBody>
+                    <a:bodyPr/>
+                    <a:lstStyle/>
+                    <a:p>
+                      <a:pPr algn="r" indent="0" marL="0">
+                        <a:buNone/>
+                      </a:pPr>
+                      <a:r>
+                        <a:rPr lang="en-US" sz="950" b="1" dirty="0">
+                          <a:solidFill>
+                            <a:srgbClr val="A8741A"/>
+                          </a:solidFill>
+                          <a:latin typeface="Calibri" pitchFamily="34" charset="0"/>
+                          <a:ea typeface="Calibri" pitchFamily="34" charset="-122"/>
+                          <a:cs typeface="Calibri" pitchFamily="34" charset="-120"/>
+                        </a:rPr>
+                        <a:t>28.6%</a:t>
+                      </a:r>
+                      <a:endParaRPr lang="en-US" sz="950" dirty="0">
+                        <a:latin typeface="Calibri" charset="0"/>
+                        <a:ea typeface="Calibri" charset="0"/>
+                        <a:cs typeface="Calibri" charset="0"/>
+                      </a:endParaRPr>
+                    </a:p>
+                  </a:txBody>
+                  <a:tcPr marL="91440" marR="91440" marT="45720" marB="45720" anchor="ctr">
+                    <a:lnL w="6350" cap="flat" cmpd="sng" algn="ctr">
+                      <a:solidFill>
+                        <a:srgbClr val="E4DADD"/>
+                      </a:solidFill>
+                      <a:prstDash val="solid"/>
+                      <a:round/>
+                      <a:headEnd type="none" w="med" len="med"/>
+                      <a:tailEnd type="none" w="med" len="med"/>
+                    </a:lnL>
+                    <a:lnR w="6350" cap="flat" cmpd="sng" algn="ctr">
+                      <a:solidFill>
+                        <a:srgbClr val="E4DADD"/>
+                      </a:solidFill>
+                      <a:prstDash val="solid"/>
+                      <a:round/>
+                      <a:headEnd type="none" w="med" len="med"/>
+                      <a:tailEnd type="none" w="med" len="med"/>
+                    </a:lnR>
+                    <a:lnT w="6350" cap="flat" cmpd="sng" algn="ctr">
+                      <a:solidFill>
+                        <a:srgbClr val="E4DADD"/>
+                      </a:solidFill>
+                      <a:prstDash val="solid"/>
+                      <a:round/>
+                      <a:headEnd type="none" w="med" len="med"/>
+                      <a:tailEnd type="none" w="med" len="med"/>
+                    </a:lnT>
+                    <a:lnB w="6350" cap="flat" cmpd="sng" algn="ctr">
+                      <a:solidFill>
+                        <a:srgbClr val="E4DADD"/>
+                      </a:solidFill>
+                      <a:prstDash val="solid"/>
+                      <a:round/>
+                      <a:headEnd type="none" w="med" len="med"/>
+                      <a:tailEnd type="none" w="med" len="med"/>
+                    </a:lnB>
+                  </a:tcPr>
+                </a:tc>
+              </a:tr>
+              <a:tr h="365760">
+                <a:tc>
+                  <a:txBody>
+                    <a:bodyPr/>
+                    <a:lstStyle/>
+                    <a:p>
+                      <a:pPr indent="0" marL="0">
+                        <a:buNone/>
+                      </a:pPr>
+                      <a:r>
+                        <a:rPr lang="en-US" sz="950" b="1" dirty="0">
+                          <a:solidFill>
+                            <a:srgbClr val="1F1A1C"/>
+                          </a:solidFill>
+                          <a:latin typeface="Calibri" pitchFamily="34" charset="0"/>
+                          <a:ea typeface="Calibri" pitchFamily="34" charset="-122"/>
+                          <a:cs typeface="Calibri" pitchFamily="34" charset="-120"/>
+                        </a:rPr>
+                        <a:t>追加投資家</a:t>
+                      </a:r>
+                      <a:endParaRPr lang="en-US" sz="950" dirty="0">
+                        <a:latin typeface="Calibri" charset="0"/>
+                        <a:ea typeface="Calibri" charset="0"/>
+                        <a:cs typeface="Calibri" charset="0"/>
+                      </a:endParaRPr>
+                    </a:p>
+                  </a:txBody>
+                  <a:tcPr marL="91440" marR="91440" marT="45720" marB="45720" anchor="ctr">
+                    <a:lnL w="6350" cap="flat" cmpd="sng" algn="ctr">
+                      <a:solidFill>
+                        <a:srgbClr val="E4DADD"/>
+                      </a:solidFill>
+                      <a:prstDash val="solid"/>
+                      <a:round/>
+                      <a:headEnd type="none" w="med" len="med"/>
+                      <a:tailEnd type="none" w="med" len="med"/>
+                    </a:lnL>
+                    <a:lnR w="6350" cap="flat" cmpd="sng" algn="ctr">
+                      <a:solidFill>
+                        <a:srgbClr val="E4DADD"/>
+                      </a:solidFill>
+                      <a:prstDash val="solid"/>
+                      <a:round/>
+                      <a:headEnd type="none" w="med" len="med"/>
+                      <a:tailEnd type="none" w="med" len="med"/>
+                    </a:lnR>
+                    <a:lnT w="6350" cap="flat" cmpd="sng" algn="ctr">
+                      <a:solidFill>
+                        <a:srgbClr val="E4DADD"/>
+                      </a:solidFill>
+                      <a:prstDash val="solid"/>
+                      <a:round/>
+                      <a:headEnd type="none" w="med" len="med"/>
+                      <a:tailEnd type="none" w="med" len="med"/>
+                    </a:lnT>
+                    <a:lnB w="6350" cap="flat" cmpd="sng" algn="ctr">
+                      <a:solidFill>
+                        <a:srgbClr val="E4DADD"/>
+                      </a:solidFill>
+                      <a:prstDash val="solid"/>
+                      <a:round/>
+                      <a:headEnd type="none" w="med" len="med"/>
+                      <a:tailEnd type="none" w="med" len="med"/>
+                    </a:lnB>
+                  </a:tcPr>
+                </a:tc>
+                <a:tc>
+                  <a:txBody>
+                    <a:bodyPr/>
+                    <a:lstStyle/>
+                    <a:p>
+                      <a:pPr indent="0" marL="0">
+                        <a:buNone/>
+                      </a:pPr>
+                      <a:r>
+                        <a:rPr lang="en-US" sz="900" dirty="0">
+                          <a:solidFill>
+                            <a:srgbClr val="1F1A1C"/>
+                          </a:solidFill>
+                          <a:latin typeface="Calibri" pitchFamily="34" charset="0"/>
+                          <a:ea typeface="Calibri" pitchFamily="34" charset="-122"/>
+                          <a:cs typeface="Calibri" pitchFamily="34" charset="-120"/>
+                        </a:rPr>
+                        <a:t>5.00億円（第三者割当増資）</a:t>
+                      </a:r>
+                      <a:endParaRPr lang="en-US" sz="900" dirty="0">
+                        <a:latin typeface="Calibri" charset="0"/>
+                        <a:ea typeface="Calibri" charset="0"/>
+                        <a:cs typeface="Calibri" charset="0"/>
+                      </a:endParaRPr>
+                    </a:p>
+                  </a:txBody>
+                  <a:tcPr marL="91440" marR="91440" marT="45720" marB="45720" anchor="ctr">
+                    <a:lnL w="6350" cap="flat" cmpd="sng" algn="ctr">
+                      <a:solidFill>
+                        <a:srgbClr val="E4DADD"/>
+                      </a:solidFill>
+                      <a:prstDash val="solid"/>
+                      <a:round/>
+                      <a:headEnd type="none" w="med" len="med"/>
+                      <a:tailEnd type="none" w="med" len="med"/>
+                    </a:lnL>
+                    <a:lnR w="6350" cap="flat" cmpd="sng" algn="ctr">
+                      <a:solidFill>
+                        <a:srgbClr val="E4DADD"/>
+                      </a:solidFill>
+                      <a:prstDash val="solid"/>
+                      <a:round/>
+                      <a:headEnd type="none" w="med" len="med"/>
+                      <a:tailEnd type="none" w="med" len="med"/>
+                    </a:lnR>
+                    <a:lnT w="6350" cap="flat" cmpd="sng" algn="ctr">
+                      <a:solidFill>
+                        <a:srgbClr val="E4DADD"/>
+                      </a:solidFill>
+                      <a:prstDash val="solid"/>
+                      <a:round/>
+                      <a:headEnd type="none" w="med" len="med"/>
+                      <a:tailEnd type="none" w="med" len="med"/>
+                    </a:lnT>
+                    <a:lnB w="6350" cap="flat" cmpd="sng" algn="ctr">
+                      <a:solidFill>
+                        <a:srgbClr val="E4DADD"/>
+                      </a:solidFill>
+                      <a:prstDash val="solid"/>
+                      <a:round/>
+                      <a:headEnd type="none" w="med" len="med"/>
+                      <a:tailEnd type="none" w="med" len="med"/>
+                    </a:lnB>
+                  </a:tcPr>
+                </a:tc>
+                <a:tc>
+                  <a:txBody>
+                    <a:bodyPr/>
+                    <a:lstStyle/>
+                    <a:p>
+                      <a:pPr algn="r" indent="0" marL="0">
+                        <a:buNone/>
+                      </a:pPr>
+                      <a:r>
+                        <a:rPr lang="en-US" sz="950" b="1" dirty="0">
+                          <a:solidFill>
+                            <a:srgbClr val="B58B2A"/>
+                          </a:solidFill>
+                          <a:latin typeface="Calibri" pitchFamily="34" charset="0"/>
+                          <a:ea typeface="Calibri" pitchFamily="34" charset="-122"/>
+                          <a:cs typeface="Calibri" pitchFamily="34" charset="-120"/>
+                        </a:rPr>
+                        <a:t>14.3%</a:t>
+                      </a:r>
+                      <a:endParaRPr lang="en-US" sz="950" dirty="0">
+                        <a:latin typeface="Calibri" charset="0"/>
+                        <a:ea typeface="Calibri" charset="0"/>
+                        <a:cs typeface="Calibri" charset="0"/>
+                      </a:endParaRPr>
+                    </a:p>
+                  </a:txBody>
+                  <a:tcPr marL="91440" marR="91440" marT="45720" marB="45720" anchor="ctr">
+                    <a:lnL w="6350" cap="flat" cmpd="sng" algn="ctr">
+                      <a:solidFill>
+                        <a:srgbClr val="E4DADD"/>
+                      </a:solidFill>
+                      <a:prstDash val="solid"/>
+                      <a:round/>
+                      <a:headEnd type="none" w="med" len="med"/>
+                      <a:tailEnd type="none" w="med" len="med"/>
+                    </a:lnL>
+                    <a:lnR w="6350" cap="flat" cmpd="sng" algn="ctr">
+                      <a:solidFill>
+                        <a:srgbClr val="E4DADD"/>
+                      </a:solidFill>
+                      <a:prstDash val="solid"/>
+                      <a:round/>
+                      <a:headEnd type="none" w="med" len="med"/>
+                      <a:tailEnd type="none" w="med" len="med"/>
+                    </a:lnR>
+                    <a:lnT w="6350" cap="flat" cmpd="sng" algn="ctr">
+                      <a:solidFill>
+                        <a:srgbClr val="E4DADD"/>
+                      </a:solidFill>
+                      <a:prstDash val="solid"/>
+                      <a:round/>
+                      <a:headEnd type="none" w="med" len="med"/>
+                      <a:tailEnd type="none" w="med" len="med"/>
+                    </a:lnT>
+                    <a:lnB w="6350" cap="flat" cmpd="sng" algn="ctr">
+                      <a:solidFill>
+                        <a:srgbClr val="E4DADD"/>
+                      </a:solidFill>
+                      <a:prstDash val="solid"/>
+                      <a:round/>
+                      <a:headEnd type="none" w="med" len="med"/>
+                      <a:tailEnd type="none" w="med" len="med"/>
+                    </a:lnB>
+                  </a:tcPr>
+                </a:tc>
+              </a:tr>
+              <a:tr h="365760">
+                <a:tc>
+                  <a:txBody>
+                    <a:bodyPr/>
+                    <a:lstStyle/>
+                    <a:p>
+                      <a:pPr indent="0" marL="0">
+                        <a:buNone/>
+                      </a:pPr>
+                      <a:r>
+                        <a:rPr lang="en-US" sz="950" b="1" dirty="0">
+                          <a:solidFill>
+                            <a:srgbClr val="1F1A1C"/>
+                          </a:solidFill>
+                          <a:latin typeface="Calibri" pitchFamily="34" charset="0"/>
+                          <a:ea typeface="Calibri" pitchFamily="34" charset="-122"/>
+                          <a:cs typeface="Calibri" pitchFamily="34" charset="-120"/>
+                        </a:rPr>
+                        <a:t>合計</a:t>
+                      </a:r>
+                      <a:endParaRPr lang="en-US" sz="950" dirty="0">
+                        <a:latin typeface="Calibri" charset="0"/>
+                        <a:ea typeface="Calibri" charset="0"/>
+                        <a:cs typeface="Calibri" charset="0"/>
+                      </a:endParaRPr>
+                    </a:p>
+                  </a:txBody>
+                  <a:tcPr marL="91440" marR="91440" marT="45720" marB="45720" anchor="ctr">
+                    <a:lnL w="6350" cap="flat" cmpd="sng" algn="ctr">
+                      <a:solidFill>
+                        <a:srgbClr val="E4DADD"/>
+                      </a:solidFill>
+                      <a:prstDash val="solid"/>
+                      <a:round/>
+                      <a:headEnd type="none" w="med" len="med"/>
+                      <a:tailEnd type="none" w="med" len="med"/>
+                    </a:lnL>
+                    <a:lnR w="6350" cap="flat" cmpd="sng" algn="ctr">
+                      <a:solidFill>
+                        <a:srgbClr val="E4DADD"/>
+                      </a:solidFill>
+                      <a:prstDash val="solid"/>
+                      <a:round/>
+                      <a:headEnd type="none" w="med" len="med"/>
+                      <a:tailEnd type="none" w="med" len="med"/>
+                    </a:lnR>
+                    <a:lnT w="6350" cap="flat" cmpd="sng" algn="ctr">
+                      <a:solidFill>
+                        <a:srgbClr val="E4DADD"/>
+                      </a:solidFill>
+                      <a:prstDash val="solid"/>
+                      <a:round/>
+                      <a:headEnd type="none" w="med" len="med"/>
+                      <a:tailEnd type="none" w="med" len="med"/>
+                    </a:lnT>
+                    <a:lnB w="6350" cap="flat" cmpd="sng" algn="ctr">
+                      <a:solidFill>
+                        <a:srgbClr val="E4DADD"/>
+                      </a:solidFill>
+                      <a:prstDash val="solid"/>
+                      <a:round/>
+                      <a:headEnd type="none" w="med" len="med"/>
+                      <a:tailEnd type="none" w="med" len="med"/>
+                    </a:lnB>
+                    <a:solidFill>
+                      <a:srgbClr val="F7F3F4"/>
+                    </a:solidFill>
+                  </a:tcPr>
+                </a:tc>
+                <a:tc>
+                  <a:txBody>
+                    <a:bodyPr/>
+                    <a:lstStyle/>
+                    <a:p>
+                      <a:pPr indent="0" marL="0">
+                        <a:buNone/>
+                      </a:pPr>
+                      <a:r>
+                        <a:rPr lang="en-US" sz="950" dirty="0">
+                          <a:solidFill>
+                            <a:srgbClr val="1F1A1C"/>
+                          </a:solidFill>
+                          <a:latin typeface="Calibri" pitchFamily="34" charset="0"/>
+                          <a:ea typeface="Calibri" pitchFamily="34" charset="-122"/>
+                          <a:cs typeface="Calibri" pitchFamily="34" charset="-120"/>
+                        </a:rPr>
+                        <a:t>20.07億円</a:t>
+                      </a:r>
+                      <a:endParaRPr lang="en-US" sz="950" dirty="0">
+                        <a:latin typeface="Calibri" charset="0"/>
+                        <a:ea typeface="Calibri" charset="0"/>
+                        <a:cs typeface="Calibri" charset="0"/>
+                      </a:endParaRPr>
+                    </a:p>
+                  </a:txBody>
+                  <a:tcPr marL="91440" marR="91440" marT="45720" marB="45720" anchor="ctr">
+                    <a:lnL w="6350" cap="flat" cmpd="sng" algn="ctr">
+                      <a:solidFill>
+                        <a:srgbClr val="E4DADD"/>
+                      </a:solidFill>
+                      <a:prstDash val="solid"/>
+                      <a:round/>
+                      <a:headEnd type="none" w="med" len="med"/>
+                      <a:tailEnd type="none" w="med" len="med"/>
+                    </a:lnL>
+                    <a:lnR w="6350" cap="flat" cmpd="sng" algn="ctr">
+                      <a:solidFill>
+                        <a:srgbClr val="E4DADD"/>
+                      </a:solidFill>
+                      <a:prstDash val="solid"/>
+                      <a:round/>
+                      <a:headEnd type="none" w="med" len="med"/>
+                      <a:tailEnd type="none" w="med" len="med"/>
+                    </a:lnR>
+                    <a:lnT w="6350" cap="flat" cmpd="sng" algn="ctr">
+                      <a:solidFill>
+                        <a:srgbClr val="E4DADD"/>
+                      </a:solidFill>
+                      <a:prstDash val="solid"/>
+                      <a:round/>
+                      <a:headEnd type="none" w="med" len="med"/>
+                      <a:tailEnd type="none" w="med" len="med"/>
+                    </a:lnT>
+                    <a:lnB w="6350" cap="flat" cmpd="sng" algn="ctr">
+                      <a:solidFill>
+                        <a:srgbClr val="E4DADD"/>
+                      </a:solidFill>
+                      <a:prstDash val="solid"/>
+                      <a:round/>
+                      <a:headEnd type="none" w="med" len="med"/>
+                      <a:tailEnd type="none" w="med" len="med"/>
+                    </a:lnB>
+                    <a:solidFill>
+                      <a:srgbClr val="F7F3F4"/>
+                    </a:solidFill>
+                  </a:tcPr>
+                </a:tc>
+                <a:tc>
+                  <a:txBody>
+                    <a:bodyPr/>
+                    <a:lstStyle/>
+                    <a:p>
+                      <a:pPr algn="r" indent="0" marL="0">
+                        <a:buNone/>
+                      </a:pPr>
+                      <a:r>
+                        <a:rPr lang="en-US" sz="950" b="1" dirty="0">
+                          <a:solidFill>
+                            <a:srgbClr val="1F1A1C"/>
+                          </a:solidFill>
+                          <a:latin typeface="Calibri" pitchFamily="34" charset="0"/>
+                          <a:ea typeface="Calibri" pitchFamily="34" charset="-122"/>
+                          <a:cs typeface="Calibri" pitchFamily="34" charset="-120"/>
+                        </a:rPr>
+                        <a:t>100%</a:t>
+                      </a:r>
+                      <a:endParaRPr lang="en-US" sz="950" dirty="0">
+                        <a:latin typeface="Calibri" charset="0"/>
+                        <a:ea typeface="Calibri" charset="0"/>
+                        <a:cs typeface="Calibri" charset="0"/>
+                      </a:endParaRPr>
+                    </a:p>
+                  </a:txBody>
+                  <a:tcPr marL="91440" marR="91440" marT="45720" marB="45720" anchor="ctr">
+                    <a:lnL w="6350" cap="flat" cmpd="sng" algn="ctr">
+                      <a:solidFill>
+                        <a:srgbClr val="E4DADD"/>
+                      </a:solidFill>
+                      <a:prstDash val="solid"/>
+                      <a:round/>
+                      <a:headEnd type="none" w="med" len="med"/>
+                      <a:tailEnd type="none" w="med" len="med"/>
+                    </a:lnL>
+                    <a:lnR w="6350" cap="flat" cmpd="sng" algn="ctr">
+                      <a:solidFill>
+                        <a:srgbClr val="E4DADD"/>
+                      </a:solidFill>
+                      <a:prstDash val="solid"/>
+                      <a:round/>
+                      <a:headEnd type="none" w="med" len="med"/>
+                      <a:tailEnd type="none" w="med" len="med"/>
+                    </a:lnR>
+                    <a:lnT w="6350" cap="flat" cmpd="sng" algn="ctr">
+                      <a:solidFill>
+                        <a:srgbClr val="E4DADD"/>
+                      </a:solidFill>
+                      <a:prstDash val="solid"/>
+                      <a:round/>
+                      <a:headEnd type="none" w="med" len="med"/>
+                      <a:tailEnd type="none" w="med" len="med"/>
+                    </a:lnT>
+                    <a:lnB w="6350" cap="flat" cmpd="sng" algn="ctr">
+                      <a:solidFill>
+                        <a:srgbClr val="E4DADD"/>
+                      </a:solidFill>
+                      <a:prstDash val="solid"/>
+                      <a:round/>
+                      <a:headEnd type="none" w="med" len="med"/>
+                      <a:tailEnd type="none" w="med" len="med"/>
+                    </a:lnB>
+                    <a:solidFill>
+                      <a:srgbClr val="F7F3F4"/>
+                    </a:solidFill>
+                  </a:tcPr>
+                </a:tc>
+              </a:tr>
+            </a:tbl>
+          </a:graphicData>
+        </a:graphic>
+      </p:graphicFrame>
+      <p:sp>
+        <p:nvSpPr>
+          <p:cNvPr id="21" name="Shape 17"/>
+          <p:cNvSpPr/>
+          <p:nvPr/>
+        </p:nvSpPr>
+        <p:spPr>
+          <a:xfrm>
+            <a:off x="566928" y="4700016"/>
+            <a:ext cx="5394960" cy="987552"/>
+          </a:xfrm>
+          <a:prstGeom prst="roundRect">
+            <a:avLst>
+              <a:gd name="adj" fmla="val 4630"/>
+            </a:avLst>
+          </a:prstGeom>
+          <a:solidFill>
+            <a:srgbClr val="F7F3F4"/>
+          </a:solidFill>
+          <a:ln w="9525">
+            <a:solidFill>
+              <a:srgbClr val="E4DADD"/>
+            </a:solidFill>
+            <a:prstDash val="solid"/>
+          </a:ln>
+        </p:spPr>
+      </p:sp>
+      <p:sp>
+        <p:nvSpPr>
+          <p:cNvPr id="22" name="Text 18"/>
+          <p:cNvSpPr txBox="1"/>
+          <p:nvPr/>
+        </p:nvSpPr>
+        <p:spPr>
+          <a:xfrm>
+            <a:off x="768096" y="4791456"/>
+            <a:ext cx="4992624" cy="237744"/>
+          </a:xfrm>
+          <a:prstGeom prst="rect">
+            <a:avLst/>
+          </a:prstGeom>
+          <a:noFill/>
+          <a:ln/>
+        </p:spPr>
+        <p:txBody>
+          <a:bodyPr wrap="square" lIns="0" tIns="0" rIns="0" bIns="0" rtlCol="0" anchor="ctr"/>
+          <a:lstStyle/>
+          <a:p>
+            <a:pPr indent="0" marL="0">
+              <a:buNone/>
+            </a:pPr>
+            <a:r>
+              <a:rPr lang="en-US" sz="1050" b="1" dirty="0">
+                <a:solidFill>
+                  <a:srgbClr val="6D2E46"/>
+                </a:solidFill>
+                <a:latin typeface="Calibri" pitchFamily="34" charset="0"/>
+                <a:ea typeface="Calibri" pitchFamily="34" charset="-122"/>
+                <a:cs typeface="Calibri" pitchFamily="34" charset="-120"/>
+              </a:rPr>
+              <a:t>銀行から見た財務は、どちらでも変わらない</a:t>
+            </a:r>
+            <a:endParaRPr lang="en-US" sz="1050" dirty="0"/>
+          </a:p>
+        </p:txBody>
+      </p:sp>
+      <p:sp>
+        <p:nvSpPr>
+          <p:cNvPr id="23" name="Text 19"/>
+          <p:cNvSpPr txBox="1"/>
+          <p:nvPr/>
+        </p:nvSpPr>
+        <p:spPr>
+          <a:xfrm>
+            <a:off x="768096" y="5029200"/>
+            <a:ext cx="4992624" cy="566928"/>
+          </a:xfrm>
+          <a:prstGeom prst="rect">
+            <a:avLst/>
+          </a:prstGeom>
+          <a:noFill/>
+          <a:ln/>
+        </p:spPr>
+        <p:txBody>
+          <a:bodyPr wrap="square" lIns="0" tIns="0" rIns="0" bIns="0" rtlCol="0" anchor="ctr"/>
+          <a:lstStyle/>
+          <a:p>
+            <a:pPr indent="0" marL="0">
+              <a:lnSpc>
+                <a:spcPts val="1250"/>
+              </a:lnSpc>
+              <a:buNone/>
+            </a:pPr>
+            <a:r>
+              <a:rPr lang="en-US" sz="900" dirty="0">
+                <a:solidFill>
+                  <a:srgbClr val="1F1A1C"/>
+                </a:solidFill>
+                <a:latin typeface="Calibri" pitchFamily="34" charset="0"/>
+                <a:ea typeface="Calibri" pitchFamily="34" charset="-122"/>
+                <a:cs typeface="Calibri" pitchFamily="34" charset="-120"/>
+              </a:rPr>
+              <a:t>差額5.0億円を全額エクイティで吸収するため、みずほ銀行への依頼額36.4億円、合併後の有利子負債20.0億円、初年度DSCR1.35倍は、いずれのケースでも同一となる。</a:t>
+            </a:r>
+            <a:endParaRPr lang="en-US" sz="900" dirty="0"/>
+          </a:p>
+        </p:txBody>
+      </p:sp>
+      <p:sp>
+        <p:nvSpPr>
+          <p:cNvPr id="24" name="Shape 20"/>
+          <p:cNvSpPr/>
+          <p:nvPr/>
+        </p:nvSpPr>
+        <p:spPr>
+          <a:xfrm>
+            <a:off x="6227064" y="4700016"/>
+            <a:ext cx="5394960" cy="987552"/>
+          </a:xfrm>
+          <a:prstGeom prst="roundRect">
+            <a:avLst>
+              <a:gd name="adj" fmla="val 4630"/>
+            </a:avLst>
+          </a:prstGeom>
+          <a:solidFill>
+            <a:srgbClr val="F7F3F4"/>
+          </a:solidFill>
+          <a:ln w="9525">
+            <a:solidFill>
+              <a:srgbClr val="E4DADD"/>
+            </a:solidFill>
+            <a:prstDash val="solid"/>
+          </a:ln>
+        </p:spPr>
+      </p:sp>
+      <p:sp>
+        <p:nvSpPr>
+          <p:cNvPr id="25" name="Text 21"/>
+          <p:cNvSpPr txBox="1"/>
+          <p:nvPr/>
+        </p:nvSpPr>
+        <p:spPr>
+          <a:xfrm>
+            <a:off x="6428232" y="4791456"/>
+            <a:ext cx="4992624" cy="237744"/>
+          </a:xfrm>
+          <a:prstGeom prst="rect">
+            <a:avLst/>
+          </a:prstGeom>
+          <a:noFill/>
+          <a:ln/>
+        </p:spPr>
+        <p:txBody>
+          <a:bodyPr wrap="square" lIns="0" tIns="0" rIns="0" bIns="0" rtlCol="0" anchor="ctr"/>
+          <a:lstStyle/>
+          <a:p>
+            <a:pPr indent="0" marL="0">
+              <a:buNone/>
+            </a:pPr>
+            <a:r>
+              <a:rPr lang="en-US" sz="1050" b="1" dirty="0">
+                <a:solidFill>
+                  <a:srgbClr val="6D2E46"/>
+                </a:solidFill>
+                <a:latin typeface="Calibri" pitchFamily="34" charset="0"/>
+                <a:ea typeface="Calibri" pitchFamily="34" charset="-122"/>
+                <a:cs typeface="Calibri" pitchFamily="34" charset="-120"/>
+              </a:rPr>
+              <a:t>同一バリュエーションでの追加調達</a:t>
+            </a:r>
+            <a:endParaRPr lang="en-US" sz="1050" dirty="0"/>
+          </a:p>
+        </p:txBody>
+      </p:sp>
+      <p:sp>
+        <p:nvSpPr>
+          <p:cNvPr id="26" name="Text 22"/>
+          <p:cNvSpPr txBox="1"/>
+          <p:nvPr/>
+        </p:nvSpPr>
+        <p:spPr>
+          <a:xfrm>
+            <a:off x="6428232" y="5029200"/>
+            <a:ext cx="4992624" cy="566928"/>
+          </a:xfrm>
+          <a:prstGeom prst="rect">
+            <a:avLst/>
+          </a:prstGeom>
+          <a:noFill/>
+          <a:ln/>
+        </p:spPr>
+        <p:txBody>
+          <a:bodyPr wrap="square" lIns="0" tIns="0" rIns="0" bIns="0" rtlCol="0" anchor="ctr"/>
+          <a:lstStyle/>
+          <a:p>
+            <a:pPr indent="0" marL="0">
+              <a:lnSpc>
+                <a:spcPts val="1250"/>
+              </a:lnSpc>
+              <a:buNone/>
+            </a:pPr>
+            <a:r>
+              <a:rPr lang="en-US" sz="900" dirty="0">
+                <a:solidFill>
+                  <a:srgbClr val="1F1A1C"/>
+                </a:solidFill>
+                <a:latin typeface="Calibri" pitchFamily="34" charset="0"/>
+                <a:ea typeface="Calibri" pitchFamily="34" charset="-122"/>
+                <a:cs typeface="Calibri" pitchFamily="34" charset="-120"/>
+              </a:rPr>
+              <a:t>榊原氏の10.0億円＝33.3%が示すポストマネー30.0億円を基準とし、追加投資家は同じ条件で5.0億円を引き受ける。既存株主は一律に希薄化する（30.0億円 → 35.0億円）。</a:t>
+            </a:r>
+            <a:endParaRPr lang="en-US" sz="900" dirty="0"/>
+          </a:p>
+        </p:txBody>
+      </p:sp>
+      <p:sp>
+        <p:nvSpPr>
+          <p:cNvPr id="27" name="Shape 23"/>
+          <p:cNvSpPr/>
+          <p:nvPr/>
+        </p:nvSpPr>
+        <p:spPr>
+          <a:xfrm>
+            <a:off x="566928" y="5779008"/>
+            <a:ext cx="11055096" cy="512064"/>
+          </a:xfrm>
+          <a:prstGeom prst="roundRect">
+            <a:avLst>
+              <a:gd name="adj" fmla="val 7143"/>
+            </a:avLst>
+          </a:prstGeom>
+          <a:solidFill>
+            <a:srgbClr val="6D2E46"/>
+          </a:solidFill>
+          <a:ln/>
+        </p:spPr>
+      </p:sp>
+      <p:sp>
+        <p:nvSpPr>
+          <p:cNvPr id="28" name="Text 24"/>
+          <p:cNvSpPr txBox="1"/>
+          <p:nvPr/>
+        </p:nvSpPr>
+        <p:spPr>
+          <a:xfrm>
+            <a:off x="804672" y="5833872"/>
+            <a:ext cx="10579608" cy="402336"/>
+          </a:xfrm>
+          <a:prstGeom prst="rect">
+            <a:avLst/>
+          </a:prstGeom>
+          <a:noFill/>
+          <a:ln/>
+        </p:spPr>
+        <p:txBody>
+          <a:bodyPr wrap="square" lIns="0" tIns="0" rIns="0" bIns="0" rtlCol="0" anchor="ctr"/>
+          <a:lstStyle/>
+          <a:p>
+            <a:pPr indent="0" marL="0">
+              <a:lnSpc>
+                <a:spcPts val="1500"/>
+              </a:lnSpc>
+              <a:buNone/>
+            </a:pPr>
+            <a:r>
+              <a:rPr lang="en-US" sz="1100" b="1" dirty="0">
+                <a:solidFill>
+                  <a:srgbClr val="FFFFFF"/>
+                </a:solidFill>
+              </a:rPr>
+              <a:t>先に握っておくこと　</a:t>
+            </a:r>
+            <a:pPr indent="0" marL="0">
+              <a:lnSpc>
+                <a:spcPts val="1500"/>
+              </a:lnSpc>
+              <a:buNone/>
+            </a:pPr>
+            <a:r>
+              <a:rPr lang="en-US" sz="1000" dirty="0">
+                <a:solidFill>
+                  <a:srgbClr val="EBDCE1"/>
+                </a:solidFill>
+              </a:rPr>
+              <a:t>55.0億円ケースでは榊原氏の持分が28.6%となり、会社法上の特別決議に対する拒否権（1/3超）を失う。中野氏も57.1%となり単独での2/3可決ができなくなる。追加投資家を受け入れる際の優先引受権の扱いを、株主間契約に先に定めておく必要がある。</a:t>
+            </a:r>
+            <a:endParaRPr lang="en-US" sz="1100" dirty="0"/>
+          </a:p>
+        </p:txBody>
+      </p:sp>
+      <p:sp>
+        <p:nvSpPr>
+          <p:cNvPr id="29" name="Text 25"/>
+          <p:cNvSpPr txBox="1"/>
+          <p:nvPr/>
+        </p:nvSpPr>
+        <p:spPr>
+          <a:xfrm>
+            <a:off x="566928" y="6419088"/>
+            <a:ext cx="8686800" cy="228600"/>
+          </a:xfrm>
+          <a:prstGeom prst="rect">
+            <a:avLst/>
+          </a:prstGeom>
+          <a:noFill/>
+          <a:ln/>
+        </p:spPr>
+        <p:txBody>
+          <a:bodyPr wrap="square" lIns="0" tIns="0" rIns="0" bIns="0" rtlCol="0" anchor="ctr"/>
+          <a:lstStyle/>
+          <a:p>
+            <a:pPr indent="0" marL="0">
+              <a:buNone/>
+            </a:pPr>
+            <a:r>
+              <a:rPr lang="en-US" sz="800" dirty="0">
+                <a:solidFill>
+                  <a:srgbClr val="6E6368"/>
+                </a:solidFill>
+                <a:latin typeface="Calibri" pitchFamily="34" charset="0"/>
+                <a:ea typeface="Calibri" pitchFamily="34" charset="-122"/>
+                <a:cs typeface="Calibri" pitchFamily="34" charset="-120"/>
+              </a:rPr>
+              <a:t>カンテサンス（株式会社プティ・ボノム）M&amp;Aスキーム ／ 2026年9月20日 株式会社WineBank</a:t>
+            </a:r>
+            <a:endParaRPr lang="en-US" sz="800" dirty="0"/>
+          </a:p>
+        </p:txBody>
+      </p:sp>
+      <p:sp>
+        <p:nvSpPr>
+          <p:cNvPr id="30" name="Text 26"/>
+          <p:cNvSpPr txBox="1"/>
+          <p:nvPr/>
+        </p:nvSpPr>
+        <p:spPr>
+          <a:xfrm>
+            <a:off x="10799064" y="6419088"/>
+            <a:ext cx="822960" cy="228600"/>
+          </a:xfrm>
+          <a:prstGeom prst="rect">
+            <a:avLst/>
+          </a:prstGeom>
+          <a:noFill/>
+          <a:ln/>
+        </p:spPr>
+        <p:txBody>
+          <a:bodyPr wrap="square" lIns="0" tIns="0" rIns="0" bIns="0" rtlCol="0" anchor="ctr"/>
+          <a:lstStyle/>
+          <a:p>
+            <a:pPr algn="r" indent="0" marL="0">
+              <a:buNone/>
+            </a:pPr>
+            <a:r>
+              <a:rPr lang="en-US" sz="900" dirty="0">
+                <a:solidFill>
+                  <a:srgbClr val="6E6368"/>
+                </a:solidFill>
+                <a:latin typeface="Calibri" pitchFamily="34" charset="0"/>
+                <a:ea typeface="Calibri" pitchFamily="34" charset="-122"/>
+                <a:cs typeface="Calibri" pitchFamily="34" charset="-120"/>
+              </a:rPr>
+              <a:t>4</a:t>
             </a:r>
             <a:endParaRPr lang="en-US" sz="900" dirty="0"/>
           </a:p>

--- a/M&A/カンテサンス/カンテサンス_M&Aスキーム図.pptx
+++ b/M&A/カンテサンス/カンテサンス_M&Aスキーム図.pptx
@@ -1575,7 +1575,7 @@
                 <a:ea typeface="Calibri" pitchFamily="34" charset="-122"/>
                 <a:cs typeface="Calibri" pitchFamily="34" charset="-120"/>
               </a:rPr>
-              <a:t>＋ 株主貸付 5.1億円</a:t>
+              <a:t>＋ 株主貸付 700万円</a:t>
             </a:r>
             <a:endParaRPr lang="en-US" sz="850" dirty="0"/>
           </a:p>
@@ -1853,7 +1853,7 @@
                 <a:ea typeface="Calibri" pitchFamily="34" charset="-122"/>
                 <a:cs typeface="Calibri" pitchFamily="34" charset="-120"/>
               </a:rPr>
-              <a:t>資本金10万円／借入36.4億円（ターム20.0＋ブリッジ16.4）</a:t>
+              <a:t>資本金10万円／借入41.4億円（ターム20.0＋ブリッジ21.4）</a:t>
             </a:r>
             <a:endParaRPr lang="en-US" sz="900" dirty="0"/>
           </a:p>
@@ -2023,7 +2023,7 @@
                 <a:ea typeface="Calibri" pitchFamily="34" charset="-122"/>
                 <a:cs typeface="Calibri" pitchFamily="34" charset="-120"/>
               </a:rPr>
-              <a:t>＋ブリッジ 16.4億円</a:t>
+              <a:t>＋ブリッジ 21.4億円</a:t>
             </a:r>
             <a:endParaRPr lang="en-US" sz="850" dirty="0"/>
           </a:p>
@@ -2415,7 +2415,7 @@
                 <a:ea typeface="Calibri" pitchFamily="34" charset="-122"/>
                 <a:cs typeface="Calibri" pitchFamily="34" charset="-120"/>
               </a:rPr>
-              <a:t>合併後、対象会社の余剰現金16.4億円</a:t>
+              <a:t>合併後、対象会社の余剰現金21.4億円</a:t>
             </a:r>
             <a:endParaRPr lang="en-US" sz="900" dirty="0"/>
           </a:p>
@@ -2435,7 +2435,7 @@
                 <a:ea typeface="Calibri" pitchFamily="34" charset="-122"/>
                 <a:cs typeface="Calibri" pitchFamily="34" charset="-120"/>
               </a:rPr>
-              <a:t>（現預金17.4＋役員貸付金5.0−留保6.0）</a:t>
+              <a:t>（現預金17.4＋役員貸付金5.0−留保1.0）</a:t>
             </a:r>
             <a:endParaRPr lang="en-US" sz="900" dirty="0"/>
           </a:p>
@@ -2704,7 +2704,7 @@
                 <a:ea typeface="Cambria" pitchFamily="34" charset="-122"/>
                 <a:cs typeface="Cambria" pitchFamily="34" charset="-120"/>
               </a:rPr>
-              <a:t>36.4億円</a:t>
+              <a:t>41.4億円</a:t>
             </a:r>
             <a:endParaRPr lang="en-US" sz="2000" dirty="0"/>
           </a:p>
@@ -2743,7 +2743,7 @@
                 <a:ea typeface="Calibri" pitchFamily="34" charset="-122"/>
                 <a:cs typeface="Calibri" pitchFamily="34" charset="-120"/>
               </a:rPr>
-              <a:t>ターム20.0＋ブリッジ16.4</a:t>
+              <a:t>ターム20.0＋ブリッジ21.4</a:t>
             </a:r>
             <a:endParaRPr lang="en-US" sz="850" dirty="0"/>
           </a:p>
@@ -2848,7 +2848,7 @@
                 <a:ea typeface="Cambria" pitchFamily="34" charset="-122"/>
                 <a:cs typeface="Cambria" pitchFamily="34" charset="-120"/>
               </a:rPr>
-              <a:t>5.1億円</a:t>
+              <a:t>700万円</a:t>
             </a:r>
             <a:endParaRPr lang="en-US" sz="2000" dirty="0"/>
           </a:p>
@@ -2887,7 +2887,7 @@
                 <a:ea typeface="Calibri" pitchFamily="34" charset="-122"/>
                 <a:cs typeface="Calibri" pitchFamily="34" charset="-120"/>
               </a:rPr>
-              <a:t>これ以下は成立しない</a:t>
+              <a:t>留保現金1.0億円とした場合</a:t>
             </a:r>
             <a:endParaRPr lang="en-US" sz="850" dirty="0"/>
           </a:p>
@@ -4076,7 +4076,7 @@
                           <a:ea typeface="Calibri" pitchFamily="34" charset="-122"/>
                           <a:cs typeface="Calibri" pitchFamily="34" charset="-120"/>
                         </a:rPr>
-                        <a:t>16.4億円</a:t>
+                        <a:t>21.4億円</a:t>
                       </a:r>
                       <a:endParaRPr lang="en-US" sz="1000" dirty="0">
                         <a:latin typeface="Calibri" charset="0"/>
@@ -4556,7 +4556,7 @@
                           <a:ea typeface="Calibri" pitchFamily="34" charset="-122"/>
                           <a:cs typeface="Calibri" pitchFamily="34" charset="-120"/>
                         </a:rPr>
-                        <a:t>5.1億円</a:t>
+                        <a:t>0.1億円</a:t>
                       </a:r>
                       <a:endParaRPr lang="en-US" sz="1000" dirty="0">
                         <a:latin typeface="Calibri" charset="0"/>
@@ -5342,7 +5342,7 @@
                           <a:ea typeface="Calibri" pitchFamily="34" charset="-122"/>
                           <a:cs typeface="Calibri" pitchFamily="34" charset="-120"/>
                         </a:rPr>
-                        <a:t>うち6.0億円は運転資金として留保</a:t>
+                        <a:t>うち1.0億円は運転資金として留保</a:t>
                       </a:r>
                       <a:endParaRPr lang="en-US" sz="950" dirty="0">
                         <a:latin typeface="Calibri" charset="0"/>
@@ -5674,7 +5674,7 @@
                           <a:ea typeface="Calibri" pitchFamily="34" charset="-122"/>
                           <a:cs typeface="Calibri" pitchFamily="34" charset="-120"/>
                         </a:rPr>
-                        <a:t>16.4億円</a:t>
+                        <a:t>21.4億円</a:t>
                       </a:r>
                       <a:endParaRPr lang="en-US" sz="1000" dirty="0">
                         <a:latin typeface="Calibri" charset="0"/>
@@ -6053,7 +6053,7 @@
                 <a:ea typeface="Calibri" pitchFamily="34" charset="-122"/>
                 <a:cs typeface="Calibri" pitchFamily="34" charset="-120"/>
               </a:rPr>
-              <a:t>6.0億円</a:t>
+              <a:t>1.0億円</a:t>
             </a:r>
             <a:endParaRPr lang="en-US" sz="1150" dirty="0"/>
           </a:p>
@@ -6170,7 +6170,7 @@
                 <a:ea typeface="Calibri" pitchFamily="34" charset="-122"/>
                 <a:cs typeface="Calibri" pitchFamily="34" charset="-120"/>
               </a:rPr>
-              <a:t>14.0億円</a:t>
+              <a:t>19.0億円</a:t>
             </a:r>
             <a:endParaRPr lang="en-US" sz="1150" dirty="0"/>
           </a:p>
@@ -6209,7 +6209,7 @@
                 <a:ea typeface="Calibri" pitchFamily="34" charset="-122"/>
                 <a:cs typeface="Calibri" pitchFamily="34" charset="-120"/>
               </a:rPr>
-              <a:t>EBITDA 2.6倍</a:t>
+              <a:t>EBITDA 3.6倍</a:t>
             </a:r>
             <a:endParaRPr lang="en-US" sz="850" dirty="0"/>
           </a:p>
@@ -6365,7 +6365,7 @@
                 <a:ea typeface="Calibri" pitchFamily="34" charset="-122"/>
                 <a:cs typeface="Calibri" pitchFamily="34" charset="-120"/>
               </a:rPr>
-              <a:t>7年累積余剰CF</a:t>
+              <a:t>2027年 最低現金残高</a:t>
             </a:r>
             <a:endParaRPr lang="en-US" sz="1000" dirty="0"/>
           </a:p>
@@ -6404,7 +6404,7 @@
                 <a:ea typeface="Calibri" pitchFamily="34" charset="-122"/>
                 <a:cs typeface="Calibri" pitchFamily="34" charset="-120"/>
               </a:rPr>
-              <a:t>7.56億円</a:t>
+              <a:t>0.44億円</a:t>
             </a:r>
             <a:endParaRPr lang="en-US" sz="1150" dirty="0"/>
           </a:p>
@@ -6443,7 +6443,7 @@
                 <a:ea typeface="Calibri" pitchFamily="34" charset="-122"/>
                 <a:cs typeface="Calibri" pitchFamily="34" charset="-120"/>
               </a:rPr>
-              <a:t>期限一括6.0億円を上回る</a:t>
+              <a:t>3月末。月次固定費の2.3か月分</a:t>
             </a:r>
             <a:endParaRPr lang="en-US" sz="850" dirty="0"/>
           </a:p>
@@ -6882,7 +6882,7 @@
                   <a:srgbClr val="FFFFFF"/>
                 </a:solidFill>
               </a:rPr>
-              <a:t>みずほ銀行への依頼は20.0億円ではなく36.4億円　</a:t>
+              <a:t>みずほ銀行への依頼は20.0億円ではなく41.4億円　</a:t>
             </a:r>
             <a:pPr indent="0" marL="0">
               <a:lnSpc>
@@ -6896,7 +6896,7 @@
                   <a:srgbClr val="EBDCE1"/>
                 </a:solidFill>
               </a:rPr>
-              <a:t>タームローン20.0億円に加え、クロージング時の資金繰りを埋めるブリッジローン16.4億円が必要。ブリッジは合併直後に対象会社の余剰現金で全額返済する。</a:t>
+              <a:t>タームローン20.0億円に加え、クロージング時の資金繰りを埋めるブリッジローン21.4億円が必要。ブリッジは合併直後に対象会社の余剰現金で全額返済し、残る有利子負債は20.0億円となる。</a:t>
             </a:r>
             <a:endParaRPr lang="en-US" sz="1100" dirty="0"/>
           </a:p>
@@ -7077,7 +7077,7 @@
                 <a:ea typeface="Cambria" pitchFamily="34" charset="-122"/>
                 <a:cs typeface="Cambria" pitchFamily="34" charset="-120"/>
               </a:rPr>
-              <a:t>中野氏の拠出額によって、成立するかどうかが決まる</a:t>
+              <a:t>対象会社に留保する現金をいくらにするか</a:t>
             </a:r>
             <a:endParaRPr lang="en-US" sz="2900" dirty="0"/>
           </a:p>
@@ -7119,7 +7119,7 @@
                 <a:ea typeface="Calibri" pitchFamily="34" charset="-122"/>
                 <a:cs typeface="Calibri" pitchFamily="34" charset="-120"/>
               </a:rPr>
-              <a:t>榊原氏の10.0億円は固定。中野氏の拠出額を変えると、合併後に残る有利子負債が動き、返済可能性が変わる。</a:t>
+              <a:t>留保額を1億円増やすと、中野氏の必要拠出額も1億円増え、2027年の最低現金残高も1億円増える。合併後の有利子負債20.0億円と初年度DSCR1.35倍は、いずれの場合も変わらない。</a:t>
             </a:r>
             <a:endParaRPr lang="en-US" sz="1250" dirty="0"/>
           </a:p>
@@ -7140,7 +7140,7 @@
           </p:nvPr>
         </p:nvGraphicFramePr>
         <p:xfrm>
-          <a:off x="566928" y="1792224"/>
+          <a:off x="566928" y="1920240"/>
           <a:ext cx="11055096" cy="914400"/>
         </p:xfrm>
         <a:graphic>
@@ -7148,15 +7148,15 @@
             <a:tbl>
               <a:tblPr/>
               <a:tblGrid>
+                <a:gridCol w="1417320"/>
+                <a:gridCol w="1600200"/>
+                <a:gridCol w="1417320"/>
                 <a:gridCol w="1828800"/>
-                <a:gridCol w="1691640"/>
-                <a:gridCol w="1691640"/>
-                <a:gridCol w="1143000"/>
-                <a:gridCol w="1097280"/>
+                <a:gridCol w="1234440"/>
                 <a:gridCol w="1920240"/>
-                <a:gridCol w="1682496"/>
+                <a:gridCol w="1636776"/>
               </a:tblGrid>
-              <a:tr h="457200">
+              <a:tr h="402336">
                 <a:tc>
                   <a:txBody>
                     <a:bodyPr/>
@@ -7174,7 +7174,7 @@
                           <a:ea typeface="Calibri" pitchFamily="34" charset="-122"/>
                           <a:cs typeface="Calibri" pitchFamily="34" charset="-120"/>
                         </a:rPr>
-                        <a:t>中野氏の拠出</a:t>
+                        <a:t>留保する現金</a:t>
                       </a:r>
                       <a:endParaRPr lang="en-US" sz="1000" dirty="0">
                         <a:latin typeface="Calibri" charset="0"/>
@@ -7242,7 +7242,75 @@
                           <a:ea typeface="Calibri" pitchFamily="34" charset="-122"/>
                           <a:cs typeface="Calibri" pitchFamily="34" charset="-120"/>
                         </a:rPr>
-                        <a:t>クロージング時の借入</a:t>
+                        <a:t>ブリッジローン</a:t>
+                      </a:r>
+                      <a:endParaRPr lang="en-US" sz="1000" dirty="0">
+                        <a:latin typeface="Calibri" charset="0"/>
+                        <a:ea typeface="Calibri" charset="0"/>
+                        <a:cs typeface="Calibri" charset="0"/>
+                      </a:endParaRPr>
+                    </a:p>
+                  </a:txBody>
+                  <a:tcPr marL="91440" marR="91440" marT="45720" marB="45720" anchor="ctr">
+                    <a:lnL w="6350" cap="flat" cmpd="sng" algn="ctr">
+                      <a:solidFill>
+                        <a:srgbClr val="E4DADD"/>
+                      </a:solidFill>
+                      <a:prstDash val="solid"/>
+                      <a:round/>
+                      <a:headEnd type="none" w="med" len="med"/>
+                      <a:tailEnd type="none" w="med" len="med"/>
+                    </a:lnL>
+                    <a:lnR w="6350" cap="flat" cmpd="sng" algn="ctr">
+                      <a:solidFill>
+                        <a:srgbClr val="E4DADD"/>
+                      </a:solidFill>
+                      <a:prstDash val="solid"/>
+                      <a:round/>
+                      <a:headEnd type="none" w="med" len="med"/>
+                      <a:tailEnd type="none" w="med" len="med"/>
+                    </a:lnR>
+                    <a:lnT w="6350" cap="flat" cmpd="sng" algn="ctr">
+                      <a:solidFill>
+                        <a:srgbClr val="E4DADD"/>
+                      </a:solidFill>
+                      <a:prstDash val="solid"/>
+                      <a:round/>
+                      <a:headEnd type="none" w="med" len="med"/>
+                      <a:tailEnd type="none" w="med" len="med"/>
+                    </a:lnT>
+                    <a:lnB w="6350" cap="flat" cmpd="sng" algn="ctr">
+                      <a:solidFill>
+                        <a:srgbClr val="E4DADD"/>
+                      </a:solidFill>
+                      <a:prstDash val="solid"/>
+                      <a:round/>
+                      <a:headEnd type="none" w="med" len="med"/>
+                      <a:tailEnd type="none" w="med" len="med"/>
+                    </a:lnB>
+                    <a:solidFill>
+                      <a:srgbClr val="6D2E46"/>
+                    </a:solidFill>
+                  </a:tcPr>
+                </a:tc>
+                <a:tc>
+                  <a:txBody>
+                    <a:bodyPr/>
+                    <a:lstStyle/>
+                    <a:p>
+                      <a:pPr indent="0" marL="0">
+                        <a:buNone/>
+                      </a:pPr>
+                      <a:r>
+                        <a:rPr lang="en-US" sz="1000" b="1" dirty="0">
+                          <a:solidFill>
+                            <a:srgbClr val="FFFFFF"/>
+                          </a:solidFill>
+                          <a:latin typeface="Calibri" pitchFamily="34" charset="0"/>
+                          <a:ea typeface="Calibri" pitchFamily="34" charset="-122"/>
+                          <a:cs typeface="Calibri" pitchFamily="34" charset="-120"/>
+                        </a:rPr>
+                        <a:t>中野氏の拠出</a:t>
                       </a:r>
                       <a:endParaRPr lang="en-US" sz="1000" dirty="0">
                         <a:latin typeface="Calibri" charset="0"/>
@@ -7378,7 +7446,7 @@
                           <a:ea typeface="Calibri" pitchFamily="34" charset="-122"/>
                           <a:cs typeface="Calibri" pitchFamily="34" charset="-120"/>
                         </a:rPr>
-                        <a:t>Debt/EBITDA</a:t>
+                        <a:t>ネット/EBITDA</a:t>
                       </a:r>
                       <a:endParaRPr lang="en-US" sz="1000" dirty="0">
                         <a:latin typeface="Calibri" charset="0"/>
@@ -7446,75 +7514,7 @@
                           <a:ea typeface="Calibri" pitchFamily="34" charset="-122"/>
                           <a:cs typeface="Calibri" pitchFamily="34" charset="-120"/>
                         </a:rPr>
-                        <a:t>初年度DSCR</a:t>
-                      </a:r>
-                      <a:endParaRPr lang="en-US" sz="1000" dirty="0">
-                        <a:latin typeface="Calibri" charset="0"/>
-                        <a:ea typeface="Calibri" charset="0"/>
-                        <a:cs typeface="Calibri" charset="0"/>
-                      </a:endParaRPr>
-                    </a:p>
-                  </a:txBody>
-                  <a:tcPr marL="91440" marR="91440" marT="45720" marB="45720" anchor="ctr">
-                    <a:lnL w="6350" cap="flat" cmpd="sng" algn="ctr">
-                      <a:solidFill>
-                        <a:srgbClr val="E4DADD"/>
-                      </a:solidFill>
-                      <a:prstDash val="solid"/>
-                      <a:round/>
-                      <a:headEnd type="none" w="med" len="med"/>
-                      <a:tailEnd type="none" w="med" len="med"/>
-                    </a:lnL>
-                    <a:lnR w="6350" cap="flat" cmpd="sng" algn="ctr">
-                      <a:solidFill>
-                        <a:srgbClr val="E4DADD"/>
-                      </a:solidFill>
-                      <a:prstDash val="solid"/>
-                      <a:round/>
-                      <a:headEnd type="none" w="med" len="med"/>
-                      <a:tailEnd type="none" w="med" len="med"/>
-                    </a:lnR>
-                    <a:lnT w="6350" cap="flat" cmpd="sng" algn="ctr">
-                      <a:solidFill>
-                        <a:srgbClr val="E4DADD"/>
-                      </a:solidFill>
-                      <a:prstDash val="solid"/>
-                      <a:round/>
-                      <a:headEnd type="none" w="med" len="med"/>
-                      <a:tailEnd type="none" w="med" len="med"/>
-                    </a:lnT>
-                    <a:lnB w="6350" cap="flat" cmpd="sng" algn="ctr">
-                      <a:solidFill>
-                        <a:srgbClr val="E4DADD"/>
-                      </a:solidFill>
-                      <a:prstDash val="solid"/>
-                      <a:round/>
-                      <a:headEnd type="none" w="med" len="med"/>
-                      <a:tailEnd type="none" w="med" len="med"/>
-                    </a:lnB>
-                    <a:solidFill>
-                      <a:srgbClr val="6D2E46"/>
-                    </a:solidFill>
-                  </a:tcPr>
-                </a:tc>
-                <a:tc>
-                  <a:txBody>
-                    <a:bodyPr/>
-                    <a:lstStyle/>
-                    <a:p>
-                      <a:pPr indent="0" marL="0">
-                        <a:buNone/>
-                      </a:pPr>
-                      <a:r>
-                        <a:rPr lang="en-US" sz="1000" b="1" dirty="0">
-                          <a:solidFill>
-                            <a:srgbClr val="FFFFFF"/>
-                          </a:solidFill>
-                          <a:latin typeface="Calibri" pitchFamily="34" charset="0"/>
-                          <a:ea typeface="Calibri" pitchFamily="34" charset="-122"/>
-                          <a:cs typeface="Calibri" pitchFamily="34" charset="-120"/>
-                        </a:rPr>
-                        <a:t>7年累積余剰CF vs 期限一括</a:t>
+                        <a:t>2027年の最低現金残高</a:t>
                       </a:r>
                       <a:endParaRPr lang="en-US" sz="1000" dirty="0">
                         <a:latin typeface="Calibri" charset="0"/>
@@ -7634,7 +7634,7 @@
                   </a:tcPr>
                 </a:tc>
               </a:tr>
-              <a:tr h="457200">
+              <a:tr h="402336">
                 <a:tc>
                   <a:txBody>
                     <a:bodyPr/>
@@ -7652,464 +7652,7 @@
                           <a:ea typeface="Calibri" pitchFamily="34" charset="-122"/>
                           <a:cs typeface="Calibri" pitchFamily="34" charset="-120"/>
                         </a:rPr>
-                        <a:t>0円（資本金10万円のみ）</a:t>
-                      </a:r>
-                      <a:endParaRPr lang="en-US" sz="1000" dirty="0">
-                        <a:latin typeface="Calibri" charset="0"/>
-                        <a:ea typeface="Calibri" charset="0"/>
-                        <a:cs typeface="Calibri" charset="0"/>
-                      </a:endParaRPr>
-                    </a:p>
-                  </a:txBody>
-                  <a:tcPr marL="91440" marR="91440" marT="45720" marB="45720" anchor="ctr">
-                    <a:lnL w="6350" cap="flat" cmpd="sng" algn="ctr">
-                      <a:solidFill>
-                        <a:srgbClr val="E4DADD"/>
-                      </a:solidFill>
-                      <a:prstDash val="solid"/>
-                      <a:round/>
-                      <a:headEnd type="none" w="med" len="med"/>
-                      <a:tailEnd type="none" w="med" len="med"/>
-                    </a:lnL>
-                    <a:lnR w="6350" cap="flat" cmpd="sng" algn="ctr">
-                      <a:solidFill>
-                        <a:srgbClr val="E4DADD"/>
-                      </a:solidFill>
-                      <a:prstDash val="solid"/>
-                      <a:round/>
-                      <a:headEnd type="none" w="med" len="med"/>
-                      <a:tailEnd type="none" w="med" len="med"/>
-                    </a:lnR>
-                    <a:lnT w="6350" cap="flat" cmpd="sng" algn="ctr">
-                      <a:solidFill>
-                        <a:srgbClr val="E4DADD"/>
-                      </a:solidFill>
-                      <a:prstDash val="solid"/>
-                      <a:round/>
-                      <a:headEnd type="none" w="med" len="med"/>
-                      <a:tailEnd type="none" w="med" len="med"/>
-                    </a:lnT>
-                    <a:lnB w="6350" cap="flat" cmpd="sng" algn="ctr">
-                      <a:solidFill>
-                        <a:srgbClr val="E4DADD"/>
-                      </a:solidFill>
-                      <a:prstDash val="solid"/>
-                      <a:round/>
-                      <a:headEnd type="none" w="med" len="med"/>
-                      <a:tailEnd type="none" w="med" len="med"/>
-                    </a:lnB>
-                  </a:tcPr>
-                </a:tc>
-                <a:tc>
-                  <a:txBody>
-                    <a:bodyPr/>
-                    <a:lstStyle/>
-                    <a:p>
-                      <a:pPr algn="r" indent="0" marL="0">
-                        <a:buNone/>
-                      </a:pPr>
-                      <a:r>
-                        <a:rPr lang="en-US" sz="1000" dirty="0">
-                          <a:solidFill>
-                            <a:srgbClr val="1F1A1C"/>
-                          </a:solidFill>
-                          <a:latin typeface="Calibri" pitchFamily="34" charset="0"/>
-                          <a:ea typeface="Calibri" pitchFamily="34" charset="-122"/>
-                          <a:cs typeface="Calibri" pitchFamily="34" charset="-120"/>
-                        </a:rPr>
-                        <a:t>41.5億円</a:t>
-                      </a:r>
-                      <a:endParaRPr lang="en-US" sz="1000" dirty="0">
-                        <a:latin typeface="Calibri" charset="0"/>
-                        <a:ea typeface="Calibri" charset="0"/>
-                        <a:cs typeface="Calibri" charset="0"/>
-                      </a:endParaRPr>
-                    </a:p>
-                  </a:txBody>
-                  <a:tcPr marL="91440" marR="91440" marT="45720" marB="45720" anchor="ctr">
-                    <a:lnL w="6350" cap="flat" cmpd="sng" algn="ctr">
-                      <a:solidFill>
-                        <a:srgbClr val="E4DADD"/>
-                      </a:solidFill>
-                      <a:prstDash val="solid"/>
-                      <a:round/>
-                      <a:headEnd type="none" w="med" len="med"/>
-                      <a:tailEnd type="none" w="med" len="med"/>
-                    </a:lnL>
-                    <a:lnR w="6350" cap="flat" cmpd="sng" algn="ctr">
-                      <a:solidFill>
-                        <a:srgbClr val="E4DADD"/>
-                      </a:solidFill>
-                      <a:prstDash val="solid"/>
-                      <a:round/>
-                      <a:headEnd type="none" w="med" len="med"/>
-                      <a:tailEnd type="none" w="med" len="med"/>
-                    </a:lnR>
-                    <a:lnT w="6350" cap="flat" cmpd="sng" algn="ctr">
-                      <a:solidFill>
-                        <a:srgbClr val="E4DADD"/>
-                      </a:solidFill>
-                      <a:prstDash val="solid"/>
-                      <a:round/>
-                      <a:headEnd type="none" w="med" len="med"/>
-                      <a:tailEnd type="none" w="med" len="med"/>
-                    </a:lnT>
-                    <a:lnB w="6350" cap="flat" cmpd="sng" algn="ctr">
-                      <a:solidFill>
-                        <a:srgbClr val="E4DADD"/>
-                      </a:solidFill>
-                      <a:prstDash val="solid"/>
-                      <a:round/>
-                      <a:headEnd type="none" w="med" len="med"/>
-                      <a:tailEnd type="none" w="med" len="med"/>
-                    </a:lnB>
-                  </a:tcPr>
-                </a:tc>
-                <a:tc>
-                  <a:txBody>
-                    <a:bodyPr/>
-                    <a:lstStyle/>
-                    <a:p>
-                      <a:pPr algn="r" indent="0" marL="0">
-                        <a:buNone/>
-                      </a:pPr>
-                      <a:r>
-                        <a:rPr lang="en-US" sz="1000" dirty="0">
-                          <a:solidFill>
-                            <a:srgbClr val="1F1A1C"/>
-                          </a:solidFill>
-                          <a:latin typeface="Calibri" pitchFamily="34" charset="0"/>
-                          <a:ea typeface="Calibri" pitchFamily="34" charset="-122"/>
-                          <a:cs typeface="Calibri" pitchFamily="34" charset="-120"/>
-                        </a:rPr>
-                        <a:t>25.1億円</a:t>
-                      </a:r>
-                      <a:endParaRPr lang="en-US" sz="1000" dirty="0">
-                        <a:latin typeface="Calibri" charset="0"/>
-                        <a:ea typeface="Calibri" charset="0"/>
-                        <a:cs typeface="Calibri" charset="0"/>
-                      </a:endParaRPr>
-                    </a:p>
-                  </a:txBody>
-                  <a:tcPr marL="91440" marR="91440" marT="45720" marB="45720" anchor="ctr">
-                    <a:lnL w="6350" cap="flat" cmpd="sng" algn="ctr">
-                      <a:solidFill>
-                        <a:srgbClr val="E4DADD"/>
-                      </a:solidFill>
-                      <a:prstDash val="solid"/>
-                      <a:round/>
-                      <a:headEnd type="none" w="med" len="med"/>
-                      <a:tailEnd type="none" w="med" len="med"/>
-                    </a:lnL>
-                    <a:lnR w="6350" cap="flat" cmpd="sng" algn="ctr">
-                      <a:solidFill>
-                        <a:srgbClr val="E4DADD"/>
-                      </a:solidFill>
-                      <a:prstDash val="solid"/>
-                      <a:round/>
-                      <a:headEnd type="none" w="med" len="med"/>
-                      <a:tailEnd type="none" w="med" len="med"/>
-                    </a:lnR>
-                    <a:lnT w="6350" cap="flat" cmpd="sng" algn="ctr">
-                      <a:solidFill>
-                        <a:srgbClr val="E4DADD"/>
-                      </a:solidFill>
-                      <a:prstDash val="solid"/>
-                      <a:round/>
-                      <a:headEnd type="none" w="med" len="med"/>
-                      <a:tailEnd type="none" w="med" len="med"/>
-                    </a:lnT>
-                    <a:lnB w="6350" cap="flat" cmpd="sng" algn="ctr">
-                      <a:solidFill>
-                        <a:srgbClr val="E4DADD"/>
-                      </a:solidFill>
-                      <a:prstDash val="solid"/>
-                      <a:round/>
-                      <a:headEnd type="none" w="med" len="med"/>
-                      <a:tailEnd type="none" w="med" len="med"/>
-                    </a:lnB>
-                  </a:tcPr>
-                </a:tc>
-                <a:tc>
-                  <a:txBody>
-                    <a:bodyPr/>
-                    <a:lstStyle/>
-                    <a:p>
-                      <a:pPr algn="r" indent="0" marL="0">
-                        <a:buNone/>
-                      </a:pPr>
-                      <a:r>
-                        <a:rPr lang="en-US" sz="1000" dirty="0">
-                          <a:solidFill>
-                            <a:srgbClr val="9B2C2C"/>
-                          </a:solidFill>
-                          <a:latin typeface="Calibri" pitchFamily="34" charset="0"/>
-                          <a:ea typeface="Calibri" pitchFamily="34" charset="-122"/>
-                          <a:cs typeface="Calibri" pitchFamily="34" charset="-120"/>
-                        </a:rPr>
-                        <a:t>4.7倍</a:t>
-                      </a:r>
-                      <a:endParaRPr lang="en-US" sz="1000" dirty="0">
-                        <a:latin typeface="Calibri" charset="0"/>
-                        <a:ea typeface="Calibri" charset="0"/>
-                        <a:cs typeface="Calibri" charset="0"/>
-                      </a:endParaRPr>
-                    </a:p>
-                  </a:txBody>
-                  <a:tcPr marL="91440" marR="91440" marT="45720" marB="45720" anchor="ctr">
-                    <a:lnL w="6350" cap="flat" cmpd="sng" algn="ctr">
-                      <a:solidFill>
-                        <a:srgbClr val="E4DADD"/>
-                      </a:solidFill>
-                      <a:prstDash val="solid"/>
-                      <a:round/>
-                      <a:headEnd type="none" w="med" len="med"/>
-                      <a:tailEnd type="none" w="med" len="med"/>
-                    </a:lnL>
-                    <a:lnR w="6350" cap="flat" cmpd="sng" algn="ctr">
-                      <a:solidFill>
-                        <a:srgbClr val="E4DADD"/>
-                      </a:solidFill>
-                      <a:prstDash val="solid"/>
-                      <a:round/>
-                      <a:headEnd type="none" w="med" len="med"/>
-                      <a:tailEnd type="none" w="med" len="med"/>
-                    </a:lnR>
-                    <a:lnT w="6350" cap="flat" cmpd="sng" algn="ctr">
-                      <a:solidFill>
-                        <a:srgbClr val="E4DADD"/>
-                      </a:solidFill>
-                      <a:prstDash val="solid"/>
-                      <a:round/>
-                      <a:headEnd type="none" w="med" len="med"/>
-                      <a:tailEnd type="none" w="med" len="med"/>
-                    </a:lnT>
-                    <a:lnB w="6350" cap="flat" cmpd="sng" algn="ctr">
-                      <a:solidFill>
-                        <a:srgbClr val="E4DADD"/>
-                      </a:solidFill>
-                      <a:prstDash val="solid"/>
-                      <a:round/>
-                      <a:headEnd type="none" w="med" len="med"/>
-                      <a:tailEnd type="none" w="med" len="med"/>
-                    </a:lnB>
-                  </a:tcPr>
-                </a:tc>
-                <a:tc>
-                  <a:txBody>
-                    <a:bodyPr/>
-                    <a:lstStyle/>
-                    <a:p>
-                      <a:pPr algn="r" indent="0" marL="0">
-                        <a:buNone/>
-                      </a:pPr>
-                      <a:r>
-                        <a:rPr lang="en-US" sz="1000" dirty="0">
-                          <a:solidFill>
-                            <a:srgbClr val="A8741A"/>
-                          </a:solidFill>
-                          <a:latin typeface="Calibri" pitchFamily="34" charset="0"/>
-                          <a:ea typeface="Calibri" pitchFamily="34" charset="-122"/>
-                          <a:cs typeface="Calibri" pitchFamily="34" charset="-120"/>
-                        </a:rPr>
-                        <a:t>1.07</a:t>
-                      </a:r>
-                      <a:endParaRPr lang="en-US" sz="1000" dirty="0">
-                        <a:latin typeface="Calibri" charset="0"/>
-                        <a:ea typeface="Calibri" charset="0"/>
-                        <a:cs typeface="Calibri" charset="0"/>
-                      </a:endParaRPr>
-                    </a:p>
-                  </a:txBody>
-                  <a:tcPr marL="91440" marR="91440" marT="45720" marB="45720" anchor="ctr">
-                    <a:lnL w="6350" cap="flat" cmpd="sng" algn="ctr">
-                      <a:solidFill>
-                        <a:srgbClr val="E4DADD"/>
-                      </a:solidFill>
-                      <a:prstDash val="solid"/>
-                      <a:round/>
-                      <a:headEnd type="none" w="med" len="med"/>
-                      <a:tailEnd type="none" w="med" len="med"/>
-                    </a:lnL>
-                    <a:lnR w="6350" cap="flat" cmpd="sng" algn="ctr">
-                      <a:solidFill>
-                        <a:srgbClr val="E4DADD"/>
-                      </a:solidFill>
-                      <a:prstDash val="solid"/>
-                      <a:round/>
-                      <a:headEnd type="none" w="med" len="med"/>
-                      <a:tailEnd type="none" w="med" len="med"/>
-                    </a:lnR>
-                    <a:lnT w="6350" cap="flat" cmpd="sng" algn="ctr">
-                      <a:solidFill>
-                        <a:srgbClr val="E4DADD"/>
-                      </a:solidFill>
-                      <a:prstDash val="solid"/>
-                      <a:round/>
-                      <a:headEnd type="none" w="med" len="med"/>
-                      <a:tailEnd type="none" w="med" len="med"/>
-                    </a:lnT>
-                    <a:lnB w="6350" cap="flat" cmpd="sng" algn="ctr">
-                      <a:solidFill>
-                        <a:srgbClr val="E4DADD"/>
-                      </a:solidFill>
-                      <a:prstDash val="solid"/>
-                      <a:round/>
-                      <a:headEnd type="none" w="med" len="med"/>
-                      <a:tailEnd type="none" w="med" len="med"/>
-                    </a:lnB>
-                  </a:tcPr>
-                </a:tc>
-                <a:tc>
-                  <a:txBody>
-                    <a:bodyPr/>
-                    <a:lstStyle/>
-                    <a:p>
-                      <a:pPr indent="0" marL="0">
-                        <a:buNone/>
-                      </a:pPr>
-                      <a:r>
-                        <a:rPr lang="en-US" sz="1000" dirty="0">
-                          <a:solidFill>
-                            <a:srgbClr val="9B2C2C"/>
-                          </a:solidFill>
-                          <a:latin typeface="Calibri" pitchFamily="34" charset="0"/>
-                          <a:ea typeface="Calibri" pitchFamily="34" charset="-122"/>
-                          <a:cs typeface="Calibri" pitchFamily="34" charset="-120"/>
-                        </a:rPr>
-                        <a:t>3.27億円 &lt; 7.52億円</a:t>
-                      </a:r>
-                      <a:endParaRPr lang="en-US" sz="1000" dirty="0">
-                        <a:latin typeface="Calibri" charset="0"/>
-                        <a:ea typeface="Calibri" charset="0"/>
-                        <a:cs typeface="Calibri" charset="0"/>
-                      </a:endParaRPr>
-                    </a:p>
-                  </a:txBody>
-                  <a:tcPr marL="91440" marR="91440" marT="45720" marB="45720" anchor="ctr">
-                    <a:lnL w="6350" cap="flat" cmpd="sng" algn="ctr">
-                      <a:solidFill>
-                        <a:srgbClr val="E4DADD"/>
-                      </a:solidFill>
-                      <a:prstDash val="solid"/>
-                      <a:round/>
-                      <a:headEnd type="none" w="med" len="med"/>
-                      <a:tailEnd type="none" w="med" len="med"/>
-                    </a:lnL>
-                    <a:lnR w="6350" cap="flat" cmpd="sng" algn="ctr">
-                      <a:solidFill>
-                        <a:srgbClr val="E4DADD"/>
-                      </a:solidFill>
-                      <a:prstDash val="solid"/>
-                      <a:round/>
-                      <a:headEnd type="none" w="med" len="med"/>
-                      <a:tailEnd type="none" w="med" len="med"/>
-                    </a:lnR>
-                    <a:lnT w="6350" cap="flat" cmpd="sng" algn="ctr">
-                      <a:solidFill>
-                        <a:srgbClr val="E4DADD"/>
-                      </a:solidFill>
-                      <a:prstDash val="solid"/>
-                      <a:round/>
-                      <a:headEnd type="none" w="med" len="med"/>
-                      <a:tailEnd type="none" w="med" len="med"/>
-                    </a:lnT>
-                    <a:lnB w="6350" cap="flat" cmpd="sng" algn="ctr">
-                      <a:solidFill>
-                        <a:srgbClr val="E4DADD"/>
-                      </a:solidFill>
-                      <a:prstDash val="solid"/>
-                      <a:round/>
-                      <a:headEnd type="none" w="med" len="med"/>
-                      <a:tailEnd type="none" w="med" len="med"/>
-                    </a:lnB>
-                  </a:tcPr>
-                </a:tc>
-                <a:tc>
-                  <a:txBody>
-                    <a:bodyPr/>
-                    <a:lstStyle/>
-                    <a:p>
-                      <a:pPr indent="0" marL="0">
-                        <a:buNone/>
-                      </a:pPr>
-                      <a:r>
-                        <a:rPr lang="en-US" sz="1000" b="1" dirty="0">
-                          <a:solidFill>
-                            <a:srgbClr val="9B2C2C"/>
-                          </a:solidFill>
-                          <a:latin typeface="Calibri" pitchFamily="34" charset="0"/>
-                          <a:ea typeface="Calibri" pitchFamily="34" charset="-122"/>
-                          <a:cs typeface="Calibri" pitchFamily="34" charset="-120"/>
-                        </a:rPr>
-                        <a:t>× 7年で返し切れない</a:t>
-                      </a:r>
-                      <a:endParaRPr lang="en-US" sz="1000" dirty="0">
-                        <a:latin typeface="Calibri" charset="0"/>
-                        <a:ea typeface="Calibri" charset="0"/>
-                        <a:cs typeface="Calibri" charset="0"/>
-                      </a:endParaRPr>
-                    </a:p>
-                  </a:txBody>
-                  <a:tcPr marL="91440" marR="91440" marT="45720" marB="45720" anchor="ctr">
-                    <a:lnL w="6350" cap="flat" cmpd="sng" algn="ctr">
-                      <a:solidFill>
-                        <a:srgbClr val="E4DADD"/>
-                      </a:solidFill>
-                      <a:prstDash val="solid"/>
-                      <a:round/>
-                      <a:headEnd type="none" w="med" len="med"/>
-                      <a:tailEnd type="none" w="med" len="med"/>
-                    </a:lnL>
-                    <a:lnR w="6350" cap="flat" cmpd="sng" algn="ctr">
-                      <a:solidFill>
-                        <a:srgbClr val="E4DADD"/>
-                      </a:solidFill>
-                      <a:prstDash val="solid"/>
-                      <a:round/>
-                      <a:headEnd type="none" w="med" len="med"/>
-                      <a:tailEnd type="none" w="med" len="med"/>
-                    </a:lnR>
-                    <a:lnT w="6350" cap="flat" cmpd="sng" algn="ctr">
-                      <a:solidFill>
-                        <a:srgbClr val="E4DADD"/>
-                      </a:solidFill>
-                      <a:prstDash val="solid"/>
-                      <a:round/>
-                      <a:headEnd type="none" w="med" len="med"/>
-                      <a:tailEnd type="none" w="med" len="med"/>
-                    </a:lnT>
-                    <a:lnB w="6350" cap="flat" cmpd="sng" algn="ctr">
-                      <a:solidFill>
-                        <a:srgbClr val="E4DADD"/>
-                      </a:solidFill>
-                      <a:prstDash val="solid"/>
-                      <a:round/>
-                      <a:headEnd type="none" w="med" len="med"/>
-                      <a:tailEnd type="none" w="med" len="med"/>
-                    </a:lnB>
-                  </a:tcPr>
-                </a:tc>
-              </a:tr>
-              <a:tr h="457200">
-                <a:tc>
-                  <a:txBody>
-                    <a:bodyPr/>
-                    <a:lstStyle/>
-                    <a:p>
-                      <a:pPr indent="0" marL="0">
-                        <a:buNone/>
-                      </a:pPr>
-                      <a:r>
-                        <a:rPr lang="en-US" sz="1000" b="1" dirty="0">
-                          <a:solidFill>
-                            <a:srgbClr val="1F1A1C"/>
-                          </a:solidFill>
-                          <a:latin typeface="Calibri" pitchFamily="34" charset="0"/>
-                          <a:ea typeface="Calibri" pitchFamily="34" charset="-122"/>
-                          <a:cs typeface="Calibri" pitchFamily="34" charset="-120"/>
-                        </a:rPr>
-                        <a:t>5.1億円</a:t>
+                        <a:t>1.0億円</a:t>
                       </a:r>
                       <a:endParaRPr lang="en-US" sz="1000" dirty="0">
                         <a:latin typeface="Calibri" charset="0"/>
@@ -8177,7 +7720,7 @@
                           <a:ea typeface="Calibri" pitchFamily="34" charset="-122"/>
                           <a:cs typeface="Calibri" pitchFamily="34" charset="-120"/>
                         </a:rPr>
-                        <a:t>36.4億円</a:t>
+                        <a:t>21.43億円</a:t>
                       </a:r>
                       <a:endParaRPr lang="en-US" sz="1000" dirty="0">
                         <a:latin typeface="Calibri" charset="0"/>
@@ -8245,7 +7788,7 @@
                           <a:ea typeface="Calibri" pitchFamily="34" charset="-122"/>
                           <a:cs typeface="Calibri" pitchFamily="34" charset="-120"/>
                         </a:rPr>
-                        <a:t>20.0億円</a:t>
+                        <a:t>0.07億円</a:t>
                       </a:r>
                       <a:endParaRPr lang="en-US" sz="1000" dirty="0">
                         <a:latin typeface="Calibri" charset="0"/>
@@ -8313,7 +7856,75 @@
                           <a:ea typeface="Calibri" pitchFamily="34" charset="-122"/>
                           <a:cs typeface="Calibri" pitchFamily="34" charset="-120"/>
                         </a:rPr>
-                        <a:t>3.8倍</a:t>
+                        <a:t>20.0億円</a:t>
+                      </a:r>
+                      <a:endParaRPr lang="en-US" sz="1000" dirty="0">
+                        <a:latin typeface="Calibri" charset="0"/>
+                        <a:ea typeface="Calibri" charset="0"/>
+                        <a:cs typeface="Calibri" charset="0"/>
+                      </a:endParaRPr>
+                    </a:p>
+                  </a:txBody>
+                  <a:tcPr marL="91440" marR="91440" marT="45720" marB="45720" anchor="ctr">
+                    <a:lnL w="6350" cap="flat" cmpd="sng" algn="ctr">
+                      <a:solidFill>
+                        <a:srgbClr val="E4DADD"/>
+                      </a:solidFill>
+                      <a:prstDash val="solid"/>
+                      <a:round/>
+                      <a:headEnd type="none" w="med" len="med"/>
+                      <a:tailEnd type="none" w="med" len="med"/>
+                    </a:lnL>
+                    <a:lnR w="6350" cap="flat" cmpd="sng" algn="ctr">
+                      <a:solidFill>
+                        <a:srgbClr val="E4DADD"/>
+                      </a:solidFill>
+                      <a:prstDash val="solid"/>
+                      <a:round/>
+                      <a:headEnd type="none" w="med" len="med"/>
+                      <a:tailEnd type="none" w="med" len="med"/>
+                    </a:lnR>
+                    <a:lnT w="6350" cap="flat" cmpd="sng" algn="ctr">
+                      <a:solidFill>
+                        <a:srgbClr val="E4DADD"/>
+                      </a:solidFill>
+                      <a:prstDash val="solid"/>
+                      <a:round/>
+                      <a:headEnd type="none" w="med" len="med"/>
+                      <a:tailEnd type="none" w="med" len="med"/>
+                    </a:lnT>
+                    <a:lnB w="6350" cap="flat" cmpd="sng" algn="ctr">
+                      <a:solidFill>
+                        <a:srgbClr val="E4DADD"/>
+                      </a:solidFill>
+                      <a:prstDash val="solid"/>
+                      <a:round/>
+                      <a:headEnd type="none" w="med" len="med"/>
+                      <a:tailEnd type="none" w="med" len="med"/>
+                    </a:lnB>
+                    <a:solidFill>
+                      <a:srgbClr val="EFE6E9"/>
+                    </a:solidFill>
+                  </a:tcPr>
+                </a:tc>
+                <a:tc>
+                  <a:txBody>
+                    <a:bodyPr/>
+                    <a:lstStyle/>
+                    <a:p>
+                      <a:pPr algn="r" indent="0" marL="0">
+                        <a:buNone/>
+                      </a:pPr>
+                      <a:r>
+                        <a:rPr lang="en-US" sz="1000" dirty="0">
+                          <a:solidFill>
+                            <a:srgbClr val="1F1A1C"/>
+                          </a:solidFill>
+                          <a:latin typeface="Calibri" pitchFamily="34" charset="0"/>
+                          <a:ea typeface="Calibri" pitchFamily="34" charset="-122"/>
+                          <a:cs typeface="Calibri" pitchFamily="34" charset="-120"/>
+                        </a:rPr>
+                        <a:t>3.6倍</a:t>
                       </a:r>
                       <a:endParaRPr lang="en-US" sz="1000" dirty="0">
                         <a:latin typeface="Calibri" charset="0"/>
@@ -8375,81 +7986,13 @@
                       <a:r>
                         <a:rPr lang="en-US" sz="1000" b="1" dirty="0">
                           <a:solidFill>
-                            <a:srgbClr val="2E6F4E"/>
+                            <a:srgbClr val="A8741A"/>
                           </a:solidFill>
                           <a:latin typeface="Calibri" pitchFamily="34" charset="0"/>
                           <a:ea typeface="Calibri" pitchFamily="34" charset="-122"/>
                           <a:cs typeface="Calibri" pitchFamily="34" charset="-120"/>
                         </a:rPr>
-                        <a:t>1.35</a:t>
-                      </a:r>
-                      <a:endParaRPr lang="en-US" sz="1000" dirty="0">
-                        <a:latin typeface="Calibri" charset="0"/>
-                        <a:ea typeface="Calibri" charset="0"/>
-                        <a:cs typeface="Calibri" charset="0"/>
-                      </a:endParaRPr>
-                    </a:p>
-                  </a:txBody>
-                  <a:tcPr marL="91440" marR="91440" marT="45720" marB="45720" anchor="ctr">
-                    <a:lnL w="6350" cap="flat" cmpd="sng" algn="ctr">
-                      <a:solidFill>
-                        <a:srgbClr val="E4DADD"/>
-                      </a:solidFill>
-                      <a:prstDash val="solid"/>
-                      <a:round/>
-                      <a:headEnd type="none" w="med" len="med"/>
-                      <a:tailEnd type="none" w="med" len="med"/>
-                    </a:lnL>
-                    <a:lnR w="6350" cap="flat" cmpd="sng" algn="ctr">
-                      <a:solidFill>
-                        <a:srgbClr val="E4DADD"/>
-                      </a:solidFill>
-                      <a:prstDash val="solid"/>
-                      <a:round/>
-                      <a:headEnd type="none" w="med" len="med"/>
-                      <a:tailEnd type="none" w="med" len="med"/>
-                    </a:lnR>
-                    <a:lnT w="6350" cap="flat" cmpd="sng" algn="ctr">
-                      <a:solidFill>
-                        <a:srgbClr val="E4DADD"/>
-                      </a:solidFill>
-                      <a:prstDash val="solid"/>
-                      <a:round/>
-                      <a:headEnd type="none" w="med" len="med"/>
-                      <a:tailEnd type="none" w="med" len="med"/>
-                    </a:lnT>
-                    <a:lnB w="6350" cap="flat" cmpd="sng" algn="ctr">
-                      <a:solidFill>
-                        <a:srgbClr val="E4DADD"/>
-                      </a:solidFill>
-                      <a:prstDash val="solid"/>
-                      <a:round/>
-                      <a:headEnd type="none" w="med" len="med"/>
-                      <a:tailEnd type="none" w="med" len="med"/>
-                    </a:lnB>
-                    <a:solidFill>
-                      <a:srgbClr val="EFE6E9"/>
-                    </a:solidFill>
-                  </a:tcPr>
-                </a:tc>
-                <a:tc>
-                  <a:txBody>
-                    <a:bodyPr/>
-                    <a:lstStyle/>
-                    <a:p>
-                      <a:pPr indent="0" marL="0">
-                        <a:buNone/>
-                      </a:pPr>
-                      <a:r>
-                        <a:rPr lang="en-US" sz="1000" dirty="0">
-                          <a:solidFill>
-                            <a:srgbClr val="2E6F4E"/>
-                          </a:solidFill>
-                          <a:latin typeface="Calibri" pitchFamily="34" charset="0"/>
-                          <a:ea typeface="Calibri" pitchFamily="34" charset="-122"/>
-                          <a:cs typeface="Calibri" pitchFamily="34" charset="-120"/>
-                        </a:rPr>
-                        <a:t>7.56億円 &gt; 6.00億円</a:t>
+                        <a:t>0.44億円</a:t>
                       </a:r>
                       <a:endParaRPr lang="en-US" sz="1000" dirty="0">
                         <a:latin typeface="Calibri" charset="0"/>
@@ -8511,13 +8054,13 @@
                       <a:r>
                         <a:rPr lang="en-US" sz="1000" b="1" dirty="0">
                           <a:solidFill>
-                            <a:srgbClr val="2E6F4E"/>
+                            <a:srgbClr val="A8741A"/>
                           </a:solidFill>
                           <a:latin typeface="Calibri" pitchFamily="34" charset="0"/>
                           <a:ea typeface="Calibri" pitchFamily="34" charset="-122"/>
                           <a:cs typeface="Calibri" pitchFamily="34" charset="-120"/>
                         </a:rPr>
-                        <a:t>◎ 最小構成</a:t>
+                        <a:t>△ 固定費2.3か月分</a:t>
                       </a:r>
                       <a:endParaRPr lang="en-US" sz="1000" dirty="0">
                         <a:latin typeface="Calibri" charset="0"/>
@@ -8569,7 +8112,7 @@
                   </a:tcPr>
                 </a:tc>
               </a:tr>
-              <a:tr h="457200">
+              <a:tr h="402336">
                 <a:tc>
                   <a:txBody>
                     <a:bodyPr/>
@@ -8587,7 +8130,7 @@
                           <a:ea typeface="Calibri" pitchFamily="34" charset="-122"/>
                           <a:cs typeface="Calibri" pitchFamily="34" charset="-120"/>
                         </a:rPr>
-                        <a:t>10.0億円</a:t>
+                        <a:t>2.0億円</a:t>
                       </a:r>
                       <a:endParaRPr lang="en-US" sz="1000" dirty="0">
                         <a:latin typeface="Calibri" charset="0"/>
@@ -8652,7 +8195,7 @@
                           <a:ea typeface="Calibri" pitchFamily="34" charset="-122"/>
                           <a:cs typeface="Calibri" pitchFamily="34" charset="-120"/>
                         </a:rPr>
-                        <a:t>31.5億円</a:t>
+                        <a:t>20.43億円</a:t>
                       </a:r>
                       <a:endParaRPr lang="en-US" sz="1000" dirty="0">
                         <a:latin typeface="Calibri" charset="0"/>
@@ -8717,7 +8260,7 @@
                           <a:ea typeface="Calibri" pitchFamily="34" charset="-122"/>
                           <a:cs typeface="Calibri" pitchFamily="34" charset="-120"/>
                         </a:rPr>
-                        <a:t>15.1億円</a:t>
+                        <a:t>1.07億円</a:t>
                       </a:r>
                       <a:endParaRPr lang="en-US" sz="1000" dirty="0">
                         <a:latin typeface="Calibri" charset="0"/>
@@ -8782,7 +8325,72 @@
                           <a:ea typeface="Calibri" pitchFamily="34" charset="-122"/>
                           <a:cs typeface="Calibri" pitchFamily="34" charset="-120"/>
                         </a:rPr>
-                        <a:t>2.8倍</a:t>
+                        <a:t>20.0億円</a:t>
+                      </a:r>
+                      <a:endParaRPr lang="en-US" sz="1000" dirty="0">
+                        <a:latin typeface="Calibri" charset="0"/>
+                        <a:ea typeface="Calibri" charset="0"/>
+                        <a:cs typeface="Calibri" charset="0"/>
+                      </a:endParaRPr>
+                    </a:p>
+                  </a:txBody>
+                  <a:tcPr marL="91440" marR="91440" marT="45720" marB="45720" anchor="ctr">
+                    <a:lnL w="6350" cap="flat" cmpd="sng" algn="ctr">
+                      <a:solidFill>
+                        <a:srgbClr val="E4DADD"/>
+                      </a:solidFill>
+                      <a:prstDash val="solid"/>
+                      <a:round/>
+                      <a:headEnd type="none" w="med" len="med"/>
+                      <a:tailEnd type="none" w="med" len="med"/>
+                    </a:lnL>
+                    <a:lnR w="6350" cap="flat" cmpd="sng" algn="ctr">
+                      <a:solidFill>
+                        <a:srgbClr val="E4DADD"/>
+                      </a:solidFill>
+                      <a:prstDash val="solid"/>
+                      <a:round/>
+                      <a:headEnd type="none" w="med" len="med"/>
+                      <a:tailEnd type="none" w="med" len="med"/>
+                    </a:lnR>
+                    <a:lnT w="6350" cap="flat" cmpd="sng" algn="ctr">
+                      <a:solidFill>
+                        <a:srgbClr val="E4DADD"/>
+                      </a:solidFill>
+                      <a:prstDash val="solid"/>
+                      <a:round/>
+                      <a:headEnd type="none" w="med" len="med"/>
+                      <a:tailEnd type="none" w="med" len="med"/>
+                    </a:lnT>
+                    <a:lnB w="6350" cap="flat" cmpd="sng" algn="ctr">
+                      <a:solidFill>
+                        <a:srgbClr val="E4DADD"/>
+                      </a:solidFill>
+                      <a:prstDash val="solid"/>
+                      <a:round/>
+                      <a:headEnd type="none" w="med" len="med"/>
+                      <a:tailEnd type="none" w="med" len="med"/>
+                    </a:lnB>
+                  </a:tcPr>
+                </a:tc>
+                <a:tc>
+                  <a:txBody>
+                    <a:bodyPr/>
+                    <a:lstStyle/>
+                    <a:p>
+                      <a:pPr algn="r" indent="0" marL="0">
+                        <a:buNone/>
+                      </a:pPr>
+                      <a:r>
+                        <a:rPr lang="en-US" sz="1000" dirty="0">
+                          <a:solidFill>
+                            <a:srgbClr val="1F1A1C"/>
+                          </a:solidFill>
+                          <a:latin typeface="Calibri" pitchFamily="34" charset="0"/>
+                          <a:ea typeface="Calibri" pitchFamily="34" charset="-122"/>
+                          <a:cs typeface="Calibri" pitchFamily="34" charset="-120"/>
+                        </a:rPr>
+                        <a:t>3.4倍</a:t>
                       </a:r>
                       <a:endParaRPr lang="en-US" sz="1000" dirty="0">
                         <a:latin typeface="Calibri" charset="0"/>
@@ -8847,7 +8455,7 @@
                           <a:ea typeface="Calibri" pitchFamily="34" charset="-122"/>
                           <a:cs typeface="Calibri" pitchFamily="34" charset="-120"/>
                         </a:rPr>
-                        <a:t>1.79</a:t>
+                        <a:t>1.44億円</a:t>
                       </a:r>
                       <a:endParaRPr lang="en-US" sz="1000" dirty="0">
                         <a:latin typeface="Calibri" charset="0"/>
@@ -8912,7 +8520,399 @@
                           <a:ea typeface="Calibri" pitchFamily="34" charset="-122"/>
                           <a:cs typeface="Calibri" pitchFamily="34" charset="-120"/>
                         </a:rPr>
-                        <a:t>11.74億円 &gt; 4.52億円</a:t>
+                        <a:t>○ 固定費7.5か月分</a:t>
+                      </a:r>
+                      <a:endParaRPr lang="en-US" sz="1000" dirty="0">
+                        <a:latin typeface="Calibri" charset="0"/>
+                        <a:ea typeface="Calibri" charset="0"/>
+                        <a:cs typeface="Calibri" charset="0"/>
+                      </a:endParaRPr>
+                    </a:p>
+                  </a:txBody>
+                  <a:tcPr marL="91440" marR="91440" marT="45720" marB="45720" anchor="ctr">
+                    <a:lnL w="6350" cap="flat" cmpd="sng" algn="ctr">
+                      <a:solidFill>
+                        <a:srgbClr val="E4DADD"/>
+                      </a:solidFill>
+                      <a:prstDash val="solid"/>
+                      <a:round/>
+                      <a:headEnd type="none" w="med" len="med"/>
+                      <a:tailEnd type="none" w="med" len="med"/>
+                    </a:lnL>
+                    <a:lnR w="6350" cap="flat" cmpd="sng" algn="ctr">
+                      <a:solidFill>
+                        <a:srgbClr val="E4DADD"/>
+                      </a:solidFill>
+                      <a:prstDash val="solid"/>
+                      <a:round/>
+                      <a:headEnd type="none" w="med" len="med"/>
+                      <a:tailEnd type="none" w="med" len="med"/>
+                    </a:lnR>
+                    <a:lnT w="6350" cap="flat" cmpd="sng" algn="ctr">
+                      <a:solidFill>
+                        <a:srgbClr val="E4DADD"/>
+                      </a:solidFill>
+                      <a:prstDash val="solid"/>
+                      <a:round/>
+                      <a:headEnd type="none" w="med" len="med"/>
+                      <a:tailEnd type="none" w="med" len="med"/>
+                    </a:lnT>
+                    <a:lnB w="6350" cap="flat" cmpd="sng" algn="ctr">
+                      <a:solidFill>
+                        <a:srgbClr val="E4DADD"/>
+                      </a:solidFill>
+                      <a:prstDash val="solid"/>
+                      <a:round/>
+                      <a:headEnd type="none" w="med" len="med"/>
+                      <a:tailEnd type="none" w="med" len="med"/>
+                    </a:lnB>
+                  </a:tcPr>
+                </a:tc>
+              </a:tr>
+              <a:tr h="402336">
+                <a:tc>
+                  <a:txBody>
+                    <a:bodyPr/>
+                    <a:lstStyle/>
+                    <a:p>
+                      <a:pPr indent="0" marL="0">
+                        <a:buNone/>
+                      </a:pPr>
+                      <a:r>
+                        <a:rPr lang="en-US" sz="1000" b="1" dirty="0">
+                          <a:solidFill>
+                            <a:srgbClr val="1F1A1C"/>
+                          </a:solidFill>
+                          <a:latin typeface="Calibri" pitchFamily="34" charset="0"/>
+                          <a:ea typeface="Calibri" pitchFamily="34" charset="-122"/>
+                          <a:cs typeface="Calibri" pitchFamily="34" charset="-120"/>
+                        </a:rPr>
+                        <a:t>3.0億円</a:t>
+                      </a:r>
+                      <a:endParaRPr lang="en-US" sz="1000" dirty="0">
+                        <a:latin typeface="Calibri" charset="0"/>
+                        <a:ea typeface="Calibri" charset="0"/>
+                        <a:cs typeface="Calibri" charset="0"/>
+                      </a:endParaRPr>
+                    </a:p>
+                  </a:txBody>
+                  <a:tcPr marL="91440" marR="91440" marT="45720" marB="45720" anchor="ctr">
+                    <a:lnL w="6350" cap="flat" cmpd="sng" algn="ctr">
+                      <a:solidFill>
+                        <a:srgbClr val="E4DADD"/>
+                      </a:solidFill>
+                      <a:prstDash val="solid"/>
+                      <a:round/>
+                      <a:headEnd type="none" w="med" len="med"/>
+                      <a:tailEnd type="none" w="med" len="med"/>
+                    </a:lnL>
+                    <a:lnR w="6350" cap="flat" cmpd="sng" algn="ctr">
+                      <a:solidFill>
+                        <a:srgbClr val="E4DADD"/>
+                      </a:solidFill>
+                      <a:prstDash val="solid"/>
+                      <a:round/>
+                      <a:headEnd type="none" w="med" len="med"/>
+                      <a:tailEnd type="none" w="med" len="med"/>
+                    </a:lnR>
+                    <a:lnT w="6350" cap="flat" cmpd="sng" algn="ctr">
+                      <a:solidFill>
+                        <a:srgbClr val="E4DADD"/>
+                      </a:solidFill>
+                      <a:prstDash val="solid"/>
+                      <a:round/>
+                      <a:headEnd type="none" w="med" len="med"/>
+                      <a:tailEnd type="none" w="med" len="med"/>
+                    </a:lnT>
+                    <a:lnB w="6350" cap="flat" cmpd="sng" algn="ctr">
+                      <a:solidFill>
+                        <a:srgbClr val="E4DADD"/>
+                      </a:solidFill>
+                      <a:prstDash val="solid"/>
+                      <a:round/>
+                      <a:headEnd type="none" w="med" len="med"/>
+                      <a:tailEnd type="none" w="med" len="med"/>
+                    </a:lnB>
+                  </a:tcPr>
+                </a:tc>
+                <a:tc>
+                  <a:txBody>
+                    <a:bodyPr/>
+                    <a:lstStyle/>
+                    <a:p>
+                      <a:pPr algn="r" indent="0" marL="0">
+                        <a:buNone/>
+                      </a:pPr>
+                      <a:r>
+                        <a:rPr lang="en-US" sz="1000" dirty="0">
+                          <a:solidFill>
+                            <a:srgbClr val="1F1A1C"/>
+                          </a:solidFill>
+                          <a:latin typeface="Calibri" pitchFamily="34" charset="0"/>
+                          <a:ea typeface="Calibri" pitchFamily="34" charset="-122"/>
+                          <a:cs typeface="Calibri" pitchFamily="34" charset="-120"/>
+                        </a:rPr>
+                        <a:t>19.43億円</a:t>
+                      </a:r>
+                      <a:endParaRPr lang="en-US" sz="1000" dirty="0">
+                        <a:latin typeface="Calibri" charset="0"/>
+                        <a:ea typeface="Calibri" charset="0"/>
+                        <a:cs typeface="Calibri" charset="0"/>
+                      </a:endParaRPr>
+                    </a:p>
+                  </a:txBody>
+                  <a:tcPr marL="91440" marR="91440" marT="45720" marB="45720" anchor="ctr">
+                    <a:lnL w="6350" cap="flat" cmpd="sng" algn="ctr">
+                      <a:solidFill>
+                        <a:srgbClr val="E4DADD"/>
+                      </a:solidFill>
+                      <a:prstDash val="solid"/>
+                      <a:round/>
+                      <a:headEnd type="none" w="med" len="med"/>
+                      <a:tailEnd type="none" w="med" len="med"/>
+                    </a:lnL>
+                    <a:lnR w="6350" cap="flat" cmpd="sng" algn="ctr">
+                      <a:solidFill>
+                        <a:srgbClr val="E4DADD"/>
+                      </a:solidFill>
+                      <a:prstDash val="solid"/>
+                      <a:round/>
+                      <a:headEnd type="none" w="med" len="med"/>
+                      <a:tailEnd type="none" w="med" len="med"/>
+                    </a:lnR>
+                    <a:lnT w="6350" cap="flat" cmpd="sng" algn="ctr">
+                      <a:solidFill>
+                        <a:srgbClr val="E4DADD"/>
+                      </a:solidFill>
+                      <a:prstDash val="solid"/>
+                      <a:round/>
+                      <a:headEnd type="none" w="med" len="med"/>
+                      <a:tailEnd type="none" w="med" len="med"/>
+                    </a:lnT>
+                    <a:lnB w="6350" cap="flat" cmpd="sng" algn="ctr">
+                      <a:solidFill>
+                        <a:srgbClr val="E4DADD"/>
+                      </a:solidFill>
+                      <a:prstDash val="solid"/>
+                      <a:round/>
+                      <a:headEnd type="none" w="med" len="med"/>
+                      <a:tailEnd type="none" w="med" len="med"/>
+                    </a:lnB>
+                  </a:tcPr>
+                </a:tc>
+                <a:tc>
+                  <a:txBody>
+                    <a:bodyPr/>
+                    <a:lstStyle/>
+                    <a:p>
+                      <a:pPr algn="r" indent="0" marL="0">
+                        <a:buNone/>
+                      </a:pPr>
+                      <a:r>
+                        <a:rPr lang="en-US" sz="1000" dirty="0">
+                          <a:solidFill>
+                            <a:srgbClr val="1F1A1C"/>
+                          </a:solidFill>
+                          <a:latin typeface="Calibri" pitchFamily="34" charset="0"/>
+                          <a:ea typeface="Calibri" pitchFamily="34" charset="-122"/>
+                          <a:cs typeface="Calibri" pitchFamily="34" charset="-120"/>
+                        </a:rPr>
+                        <a:t>2.07億円</a:t>
+                      </a:r>
+                      <a:endParaRPr lang="en-US" sz="1000" dirty="0">
+                        <a:latin typeface="Calibri" charset="0"/>
+                        <a:ea typeface="Calibri" charset="0"/>
+                        <a:cs typeface="Calibri" charset="0"/>
+                      </a:endParaRPr>
+                    </a:p>
+                  </a:txBody>
+                  <a:tcPr marL="91440" marR="91440" marT="45720" marB="45720" anchor="ctr">
+                    <a:lnL w="6350" cap="flat" cmpd="sng" algn="ctr">
+                      <a:solidFill>
+                        <a:srgbClr val="E4DADD"/>
+                      </a:solidFill>
+                      <a:prstDash val="solid"/>
+                      <a:round/>
+                      <a:headEnd type="none" w="med" len="med"/>
+                      <a:tailEnd type="none" w="med" len="med"/>
+                    </a:lnL>
+                    <a:lnR w="6350" cap="flat" cmpd="sng" algn="ctr">
+                      <a:solidFill>
+                        <a:srgbClr val="E4DADD"/>
+                      </a:solidFill>
+                      <a:prstDash val="solid"/>
+                      <a:round/>
+                      <a:headEnd type="none" w="med" len="med"/>
+                      <a:tailEnd type="none" w="med" len="med"/>
+                    </a:lnR>
+                    <a:lnT w="6350" cap="flat" cmpd="sng" algn="ctr">
+                      <a:solidFill>
+                        <a:srgbClr val="E4DADD"/>
+                      </a:solidFill>
+                      <a:prstDash val="solid"/>
+                      <a:round/>
+                      <a:headEnd type="none" w="med" len="med"/>
+                      <a:tailEnd type="none" w="med" len="med"/>
+                    </a:lnT>
+                    <a:lnB w="6350" cap="flat" cmpd="sng" algn="ctr">
+                      <a:solidFill>
+                        <a:srgbClr val="E4DADD"/>
+                      </a:solidFill>
+                      <a:prstDash val="solid"/>
+                      <a:round/>
+                      <a:headEnd type="none" w="med" len="med"/>
+                      <a:tailEnd type="none" w="med" len="med"/>
+                    </a:lnB>
+                  </a:tcPr>
+                </a:tc>
+                <a:tc>
+                  <a:txBody>
+                    <a:bodyPr/>
+                    <a:lstStyle/>
+                    <a:p>
+                      <a:pPr algn="r" indent="0" marL="0">
+                        <a:buNone/>
+                      </a:pPr>
+                      <a:r>
+                        <a:rPr lang="en-US" sz="1000" dirty="0">
+                          <a:solidFill>
+                            <a:srgbClr val="1F1A1C"/>
+                          </a:solidFill>
+                          <a:latin typeface="Calibri" pitchFamily="34" charset="0"/>
+                          <a:ea typeface="Calibri" pitchFamily="34" charset="-122"/>
+                          <a:cs typeface="Calibri" pitchFamily="34" charset="-120"/>
+                        </a:rPr>
+                        <a:t>20.0億円</a:t>
+                      </a:r>
+                      <a:endParaRPr lang="en-US" sz="1000" dirty="0">
+                        <a:latin typeface="Calibri" charset="0"/>
+                        <a:ea typeface="Calibri" charset="0"/>
+                        <a:cs typeface="Calibri" charset="0"/>
+                      </a:endParaRPr>
+                    </a:p>
+                  </a:txBody>
+                  <a:tcPr marL="91440" marR="91440" marT="45720" marB="45720" anchor="ctr">
+                    <a:lnL w="6350" cap="flat" cmpd="sng" algn="ctr">
+                      <a:solidFill>
+                        <a:srgbClr val="E4DADD"/>
+                      </a:solidFill>
+                      <a:prstDash val="solid"/>
+                      <a:round/>
+                      <a:headEnd type="none" w="med" len="med"/>
+                      <a:tailEnd type="none" w="med" len="med"/>
+                    </a:lnL>
+                    <a:lnR w="6350" cap="flat" cmpd="sng" algn="ctr">
+                      <a:solidFill>
+                        <a:srgbClr val="E4DADD"/>
+                      </a:solidFill>
+                      <a:prstDash val="solid"/>
+                      <a:round/>
+                      <a:headEnd type="none" w="med" len="med"/>
+                      <a:tailEnd type="none" w="med" len="med"/>
+                    </a:lnR>
+                    <a:lnT w="6350" cap="flat" cmpd="sng" algn="ctr">
+                      <a:solidFill>
+                        <a:srgbClr val="E4DADD"/>
+                      </a:solidFill>
+                      <a:prstDash val="solid"/>
+                      <a:round/>
+                      <a:headEnd type="none" w="med" len="med"/>
+                      <a:tailEnd type="none" w="med" len="med"/>
+                    </a:lnT>
+                    <a:lnB w="6350" cap="flat" cmpd="sng" algn="ctr">
+                      <a:solidFill>
+                        <a:srgbClr val="E4DADD"/>
+                      </a:solidFill>
+                      <a:prstDash val="solid"/>
+                      <a:round/>
+                      <a:headEnd type="none" w="med" len="med"/>
+                      <a:tailEnd type="none" w="med" len="med"/>
+                    </a:lnB>
+                  </a:tcPr>
+                </a:tc>
+                <a:tc>
+                  <a:txBody>
+                    <a:bodyPr/>
+                    <a:lstStyle/>
+                    <a:p>
+                      <a:pPr algn="r" indent="0" marL="0">
+                        <a:buNone/>
+                      </a:pPr>
+                      <a:r>
+                        <a:rPr lang="en-US" sz="1000" dirty="0">
+                          <a:solidFill>
+                            <a:srgbClr val="1F1A1C"/>
+                          </a:solidFill>
+                          <a:latin typeface="Calibri" pitchFamily="34" charset="0"/>
+                          <a:ea typeface="Calibri" pitchFamily="34" charset="-122"/>
+                          <a:cs typeface="Calibri" pitchFamily="34" charset="-120"/>
+                        </a:rPr>
+                        <a:t>3.2倍</a:t>
+                      </a:r>
+                      <a:endParaRPr lang="en-US" sz="1000" dirty="0">
+                        <a:latin typeface="Calibri" charset="0"/>
+                        <a:ea typeface="Calibri" charset="0"/>
+                        <a:cs typeface="Calibri" charset="0"/>
+                      </a:endParaRPr>
+                    </a:p>
+                  </a:txBody>
+                  <a:tcPr marL="91440" marR="91440" marT="45720" marB="45720" anchor="ctr">
+                    <a:lnL w="6350" cap="flat" cmpd="sng" algn="ctr">
+                      <a:solidFill>
+                        <a:srgbClr val="E4DADD"/>
+                      </a:solidFill>
+                      <a:prstDash val="solid"/>
+                      <a:round/>
+                      <a:headEnd type="none" w="med" len="med"/>
+                      <a:tailEnd type="none" w="med" len="med"/>
+                    </a:lnL>
+                    <a:lnR w="6350" cap="flat" cmpd="sng" algn="ctr">
+                      <a:solidFill>
+                        <a:srgbClr val="E4DADD"/>
+                      </a:solidFill>
+                      <a:prstDash val="solid"/>
+                      <a:round/>
+                      <a:headEnd type="none" w="med" len="med"/>
+                      <a:tailEnd type="none" w="med" len="med"/>
+                    </a:lnR>
+                    <a:lnT w="6350" cap="flat" cmpd="sng" algn="ctr">
+                      <a:solidFill>
+                        <a:srgbClr val="E4DADD"/>
+                      </a:solidFill>
+                      <a:prstDash val="solid"/>
+                      <a:round/>
+                      <a:headEnd type="none" w="med" len="med"/>
+                      <a:tailEnd type="none" w="med" len="med"/>
+                    </a:lnT>
+                    <a:lnB w="6350" cap="flat" cmpd="sng" algn="ctr">
+                      <a:solidFill>
+                        <a:srgbClr val="E4DADD"/>
+                      </a:solidFill>
+                      <a:prstDash val="solid"/>
+                      <a:round/>
+                      <a:headEnd type="none" w="med" len="med"/>
+                      <a:tailEnd type="none" w="med" len="med"/>
+                    </a:lnB>
+                  </a:tcPr>
+                </a:tc>
+                <a:tc>
+                  <a:txBody>
+                    <a:bodyPr/>
+                    <a:lstStyle/>
+                    <a:p>
+                      <a:pPr algn="r" indent="0" marL="0">
+                        <a:buNone/>
+                      </a:pPr>
+                      <a:r>
+                        <a:rPr lang="en-US" sz="1000" dirty="0">
+                          <a:solidFill>
+                            <a:srgbClr val="2E6F4E"/>
+                          </a:solidFill>
+                          <a:latin typeface="Calibri" pitchFamily="34" charset="0"/>
+                          <a:ea typeface="Calibri" pitchFamily="34" charset="-122"/>
+                          <a:cs typeface="Calibri" pitchFamily="34" charset="-120"/>
+                        </a:rPr>
+                        <a:t>2.44億円</a:t>
                       </a:r>
                       <a:endParaRPr lang="en-US" sz="1000" dirty="0">
                         <a:latin typeface="Calibri" charset="0"/>
@@ -9026,7 +9026,7 @@
                   </a:tcPr>
                 </a:tc>
               </a:tr>
-              <a:tr h="457200">
+              <a:tr h="402336">
                 <a:tc>
                   <a:txBody>
                     <a:bodyPr/>
@@ -9044,7 +9044,137 @@
                           <a:ea typeface="Calibri" pitchFamily="34" charset="-122"/>
                           <a:cs typeface="Calibri" pitchFamily="34" charset="-120"/>
                         </a:rPr>
-                        <a:t>21.5億円</a:t>
+                        <a:t>6.0億円</a:t>
+                      </a:r>
+                      <a:endParaRPr lang="en-US" sz="1000" dirty="0">
+                        <a:latin typeface="Calibri" charset="0"/>
+                        <a:ea typeface="Calibri" charset="0"/>
+                        <a:cs typeface="Calibri" charset="0"/>
+                      </a:endParaRPr>
+                    </a:p>
+                  </a:txBody>
+                  <a:tcPr marL="91440" marR="91440" marT="45720" marB="45720" anchor="ctr">
+                    <a:lnL w="6350" cap="flat" cmpd="sng" algn="ctr">
+                      <a:solidFill>
+                        <a:srgbClr val="E4DADD"/>
+                      </a:solidFill>
+                      <a:prstDash val="solid"/>
+                      <a:round/>
+                      <a:headEnd type="none" w="med" len="med"/>
+                      <a:tailEnd type="none" w="med" len="med"/>
+                    </a:lnL>
+                    <a:lnR w="6350" cap="flat" cmpd="sng" algn="ctr">
+                      <a:solidFill>
+                        <a:srgbClr val="E4DADD"/>
+                      </a:solidFill>
+                      <a:prstDash val="solid"/>
+                      <a:round/>
+                      <a:headEnd type="none" w="med" len="med"/>
+                      <a:tailEnd type="none" w="med" len="med"/>
+                    </a:lnR>
+                    <a:lnT w="6350" cap="flat" cmpd="sng" algn="ctr">
+                      <a:solidFill>
+                        <a:srgbClr val="E4DADD"/>
+                      </a:solidFill>
+                      <a:prstDash val="solid"/>
+                      <a:round/>
+                      <a:headEnd type="none" w="med" len="med"/>
+                      <a:tailEnd type="none" w="med" len="med"/>
+                    </a:lnT>
+                    <a:lnB w="6350" cap="flat" cmpd="sng" algn="ctr">
+                      <a:solidFill>
+                        <a:srgbClr val="E4DADD"/>
+                      </a:solidFill>
+                      <a:prstDash val="solid"/>
+                      <a:round/>
+                      <a:headEnd type="none" w="med" len="med"/>
+                      <a:tailEnd type="none" w="med" len="med"/>
+                    </a:lnB>
+                  </a:tcPr>
+                </a:tc>
+                <a:tc>
+                  <a:txBody>
+                    <a:bodyPr/>
+                    <a:lstStyle/>
+                    <a:p>
+                      <a:pPr algn="r" indent="0" marL="0">
+                        <a:buNone/>
+                      </a:pPr>
+                      <a:r>
+                        <a:rPr lang="en-US" sz="1000" dirty="0">
+                          <a:solidFill>
+                            <a:srgbClr val="1F1A1C"/>
+                          </a:solidFill>
+                          <a:latin typeface="Calibri" pitchFamily="34" charset="0"/>
+                          <a:ea typeface="Calibri" pitchFamily="34" charset="-122"/>
+                          <a:cs typeface="Calibri" pitchFamily="34" charset="-120"/>
+                        </a:rPr>
+                        <a:t>16.43億円</a:t>
+                      </a:r>
+                      <a:endParaRPr lang="en-US" sz="1000" dirty="0">
+                        <a:latin typeface="Calibri" charset="0"/>
+                        <a:ea typeface="Calibri" charset="0"/>
+                        <a:cs typeface="Calibri" charset="0"/>
+                      </a:endParaRPr>
+                    </a:p>
+                  </a:txBody>
+                  <a:tcPr marL="91440" marR="91440" marT="45720" marB="45720" anchor="ctr">
+                    <a:lnL w="6350" cap="flat" cmpd="sng" algn="ctr">
+                      <a:solidFill>
+                        <a:srgbClr val="E4DADD"/>
+                      </a:solidFill>
+                      <a:prstDash val="solid"/>
+                      <a:round/>
+                      <a:headEnd type="none" w="med" len="med"/>
+                      <a:tailEnd type="none" w="med" len="med"/>
+                    </a:lnL>
+                    <a:lnR w="6350" cap="flat" cmpd="sng" algn="ctr">
+                      <a:solidFill>
+                        <a:srgbClr val="E4DADD"/>
+                      </a:solidFill>
+                      <a:prstDash val="solid"/>
+                      <a:round/>
+                      <a:headEnd type="none" w="med" len="med"/>
+                      <a:tailEnd type="none" w="med" len="med"/>
+                    </a:lnR>
+                    <a:lnT w="6350" cap="flat" cmpd="sng" algn="ctr">
+                      <a:solidFill>
+                        <a:srgbClr val="E4DADD"/>
+                      </a:solidFill>
+                      <a:prstDash val="solid"/>
+                      <a:round/>
+                      <a:headEnd type="none" w="med" len="med"/>
+                      <a:tailEnd type="none" w="med" len="med"/>
+                    </a:lnT>
+                    <a:lnB w="6350" cap="flat" cmpd="sng" algn="ctr">
+                      <a:solidFill>
+                        <a:srgbClr val="E4DADD"/>
+                      </a:solidFill>
+                      <a:prstDash val="solid"/>
+                      <a:round/>
+                      <a:headEnd type="none" w="med" len="med"/>
+                      <a:tailEnd type="none" w="med" len="med"/>
+                    </a:lnB>
+                  </a:tcPr>
+                </a:tc>
+                <a:tc>
+                  <a:txBody>
+                    <a:bodyPr/>
+                    <a:lstStyle/>
+                    <a:p>
+                      <a:pPr algn="r" indent="0" marL="0">
+                        <a:buNone/>
+                      </a:pPr>
+                      <a:r>
+                        <a:rPr lang="en-US" sz="1000" dirty="0">
+                          <a:solidFill>
+                            <a:srgbClr val="1F1A1C"/>
+                          </a:solidFill>
+                          <a:latin typeface="Calibri" pitchFamily="34" charset="0"/>
+                          <a:ea typeface="Calibri" pitchFamily="34" charset="-122"/>
+                          <a:cs typeface="Calibri" pitchFamily="34" charset="-120"/>
+                        </a:rPr>
+                        <a:t>5.07億円</a:t>
                       </a:r>
                       <a:endParaRPr lang="en-US" sz="1000" dirty="0">
                         <a:latin typeface="Calibri" charset="0"/>
@@ -9174,72 +9304,7 @@
                           <a:ea typeface="Calibri" pitchFamily="34" charset="-122"/>
                           <a:cs typeface="Calibri" pitchFamily="34" charset="-120"/>
                         </a:rPr>
-                        <a:t>20.0億円</a:t>
-                      </a:r>
-                      <a:endParaRPr lang="en-US" sz="1000" dirty="0">
-                        <a:latin typeface="Calibri" charset="0"/>
-                        <a:ea typeface="Calibri" charset="0"/>
-                        <a:cs typeface="Calibri" charset="0"/>
-                      </a:endParaRPr>
-                    </a:p>
-                  </a:txBody>
-                  <a:tcPr marL="91440" marR="91440" marT="45720" marB="45720" anchor="ctr">
-                    <a:lnL w="6350" cap="flat" cmpd="sng" algn="ctr">
-                      <a:solidFill>
-                        <a:srgbClr val="E4DADD"/>
-                      </a:solidFill>
-                      <a:prstDash val="solid"/>
-                      <a:round/>
-                      <a:headEnd type="none" w="med" len="med"/>
-                      <a:tailEnd type="none" w="med" len="med"/>
-                    </a:lnL>
-                    <a:lnR w="6350" cap="flat" cmpd="sng" algn="ctr">
-                      <a:solidFill>
-                        <a:srgbClr val="E4DADD"/>
-                      </a:solidFill>
-                      <a:prstDash val="solid"/>
-                      <a:round/>
-                      <a:headEnd type="none" w="med" len="med"/>
-                      <a:tailEnd type="none" w="med" len="med"/>
-                    </a:lnR>
-                    <a:lnT w="6350" cap="flat" cmpd="sng" algn="ctr">
-                      <a:solidFill>
-                        <a:srgbClr val="E4DADD"/>
-                      </a:solidFill>
-                      <a:prstDash val="solid"/>
-                      <a:round/>
-                      <a:headEnd type="none" w="med" len="med"/>
-                      <a:tailEnd type="none" w="med" len="med"/>
-                    </a:lnT>
-                    <a:lnB w="6350" cap="flat" cmpd="sng" algn="ctr">
-                      <a:solidFill>
-                        <a:srgbClr val="E4DADD"/>
-                      </a:solidFill>
-                      <a:prstDash val="solid"/>
-                      <a:round/>
-                      <a:headEnd type="none" w="med" len="med"/>
-                      <a:tailEnd type="none" w="med" len="med"/>
-                    </a:lnB>
-                  </a:tcPr>
-                </a:tc>
-                <a:tc>
-                  <a:txBody>
-                    <a:bodyPr/>
-                    <a:lstStyle/>
-                    <a:p>
-                      <a:pPr algn="r" indent="0" marL="0">
-                        <a:buNone/>
-                      </a:pPr>
-                      <a:r>
-                        <a:rPr lang="en-US" sz="1000" dirty="0">
-                          <a:solidFill>
-                            <a:srgbClr val="1F1A1C"/>
-                          </a:solidFill>
-                          <a:latin typeface="Calibri" pitchFamily="34" charset="0"/>
-                          <a:ea typeface="Calibri" pitchFamily="34" charset="-122"/>
-                          <a:cs typeface="Calibri" pitchFamily="34" charset="-120"/>
-                        </a:rPr>
-                        <a:t>3.8倍</a:t>
+                        <a:t>2.6倍</a:t>
                       </a:r>
                       <a:endParaRPr lang="en-US" sz="1000" dirty="0">
                         <a:latin typeface="Calibri" charset="0"/>
@@ -9304,72 +9369,7 @@
                           <a:ea typeface="Calibri" pitchFamily="34" charset="-122"/>
                           <a:cs typeface="Calibri" pitchFamily="34" charset="-120"/>
                         </a:rPr>
-                        <a:t>1.35</a:t>
-                      </a:r>
-                      <a:endParaRPr lang="en-US" sz="1000" dirty="0">
-                        <a:latin typeface="Calibri" charset="0"/>
-                        <a:ea typeface="Calibri" charset="0"/>
-                        <a:cs typeface="Calibri" charset="0"/>
-                      </a:endParaRPr>
-                    </a:p>
-                  </a:txBody>
-                  <a:tcPr marL="91440" marR="91440" marT="45720" marB="45720" anchor="ctr">
-                    <a:lnL w="6350" cap="flat" cmpd="sng" algn="ctr">
-                      <a:solidFill>
-                        <a:srgbClr val="E4DADD"/>
-                      </a:solidFill>
-                      <a:prstDash val="solid"/>
-                      <a:round/>
-                      <a:headEnd type="none" w="med" len="med"/>
-                      <a:tailEnd type="none" w="med" len="med"/>
-                    </a:lnL>
-                    <a:lnR w="6350" cap="flat" cmpd="sng" algn="ctr">
-                      <a:solidFill>
-                        <a:srgbClr val="E4DADD"/>
-                      </a:solidFill>
-                      <a:prstDash val="solid"/>
-                      <a:round/>
-                      <a:headEnd type="none" w="med" len="med"/>
-                      <a:tailEnd type="none" w="med" len="med"/>
-                    </a:lnR>
-                    <a:lnT w="6350" cap="flat" cmpd="sng" algn="ctr">
-                      <a:solidFill>
-                        <a:srgbClr val="E4DADD"/>
-                      </a:solidFill>
-                      <a:prstDash val="solid"/>
-                      <a:round/>
-                      <a:headEnd type="none" w="med" len="med"/>
-                      <a:tailEnd type="none" w="med" len="med"/>
-                    </a:lnT>
-                    <a:lnB w="6350" cap="flat" cmpd="sng" algn="ctr">
-                      <a:solidFill>
-                        <a:srgbClr val="E4DADD"/>
-                      </a:solidFill>
-                      <a:prstDash val="solid"/>
-                      <a:round/>
-                      <a:headEnd type="none" w="med" len="med"/>
-                      <a:tailEnd type="none" w="med" len="med"/>
-                    </a:lnB>
-                  </a:tcPr>
-                </a:tc>
-                <a:tc>
-                  <a:txBody>
-                    <a:bodyPr/>
-                    <a:lstStyle/>
-                    <a:p>
-                      <a:pPr indent="0" marL="0">
-                        <a:buNone/>
-                      </a:pPr>
-                      <a:r>
-                        <a:rPr lang="en-US" sz="1000" dirty="0">
-                          <a:solidFill>
-                            <a:srgbClr val="1F1A1C"/>
-                          </a:solidFill>
-                          <a:latin typeface="Calibri" pitchFamily="34" charset="0"/>
-                          <a:ea typeface="Calibri" pitchFamily="34" charset="-122"/>
-                          <a:cs typeface="Calibri" pitchFamily="34" charset="-120"/>
-                        </a:rPr>
-                        <a:t>ブリッジ不要</a:t>
+                        <a:t>5.44億円</a:t>
                       </a:r>
                       <a:endParaRPr lang="en-US" sz="1000" dirty="0">
                         <a:latin typeface="Calibri" charset="0"/>
@@ -9434,7 +9434,7 @@
                           <a:ea typeface="Calibri" pitchFamily="34" charset="-122"/>
                           <a:cs typeface="Calibri" pitchFamily="34" charset="-120"/>
                         </a:rPr>
-                        <a:t>◎ 実質無借金</a:t>
+                        <a:t>◎ 当初案</a:t>
                       </a:r>
                       <a:endParaRPr lang="en-US" sz="1000" dirty="0">
                         <a:latin typeface="Calibri" charset="0"/>
@@ -9495,7 +9495,7 @@
         </p:nvSpPr>
         <p:spPr>
           <a:xfrm>
-            <a:off x="566928" y="4224528"/>
+            <a:off x="566928" y="3931920"/>
             <a:ext cx="11055096" cy="237744"/>
           </a:xfrm>
           <a:prstGeom prst="rect">
@@ -9520,7 +9520,7 @@
                 <a:ea typeface="Calibri" pitchFamily="34" charset="-122"/>
                 <a:cs typeface="Calibri" pitchFamily="34" charset="-120"/>
               </a:rPr>
-              <a:t>※ 期限一括分はいずれも有利子負債の30%と仮定。7年・金利3%・元金均等。FCFは年3.50億円で一定。</a:t>
+              <a:t>※ 2027年の最低現金残高は3月末。2月に2026年12月期の未払税金1.14億円、8月に2027年度の法人税中間納付0.92億円が発生する。</a:t>
             </a:r>
             <a:endParaRPr lang="en-US" sz="900" dirty="0"/>
           </a:p>
@@ -9534,12 +9534,12 @@
         </p:nvSpPr>
         <p:spPr>
           <a:xfrm>
-            <a:off x="566928" y="4572000"/>
-            <a:ext cx="3520440" cy="1700784"/>
+            <a:off x="566928" y="4279392"/>
+            <a:ext cx="3520440" cy="1993392"/>
           </a:xfrm>
           <a:prstGeom prst="roundRect">
             <a:avLst>
-              <a:gd name="adj" fmla="val 2688"/>
+              <a:gd name="adj" fmla="val 2294"/>
             </a:avLst>
           </a:prstGeom>
           <a:solidFill>
@@ -9561,7 +9561,7 @@
         </p:nvSpPr>
         <p:spPr>
           <a:xfrm>
-            <a:off x="768096" y="4681728"/>
+            <a:off x="768096" y="4389120"/>
             <a:ext cx="3127248" cy="420624"/>
           </a:xfrm>
           <a:prstGeom prst="rect">
@@ -9589,7 +9589,7 @@
                 <a:ea typeface="Calibri" pitchFamily="34" charset="-122"/>
                 <a:cs typeface="Calibri" pitchFamily="34" charset="-120"/>
               </a:rPr>
-              <a:t>① 中野氏の5.1億円は「出資」か「貸付」か</a:t>
+              <a:t>① 1.0億円は「計画どおりなら回る」水準</a:t>
             </a:r>
             <a:endParaRPr lang="en-US" sz="1050" dirty="0"/>
           </a:p>
@@ -9603,8 +9603,8 @@
         </p:nvSpPr>
         <p:spPr>
           <a:xfrm>
-            <a:off x="768096" y="5138928"/>
-            <a:ext cx="3127248" cy="1060704"/>
+            <a:off x="768096" y="4846320"/>
+            <a:ext cx="3127248" cy="1335024"/>
           </a:xfrm>
           <a:prstGeom prst="rect">
             <a:avLst/>
@@ -9631,7 +9631,7 @@
                 <a:ea typeface="Calibri" pitchFamily="34" charset="-122"/>
                 <a:cs typeface="Calibri" pitchFamily="34" charset="-120"/>
               </a:rPr>
-              <a:t>株主貸付とすれば持分67%を維持したまま資金を入れられるが、榊原氏の10.0億円がリスクを負う資本であるのに対し、中野氏の5.1億円は資本より優先して回収される債権となる。榊原氏が同順位の出資を求める可能性が高い。</a:t>
+              <a:t>2027年の最低現金残高は3月末の0.44億円で、月次固定費の2.3か月分にあたる。計画どおりに推移すれば資金はショートしないが、想定外の支出に対する余裕はほとんどない。ワインの一次価格アロケーションがまとまって入荷する月や、設備の突発的な修繕が重なると、一時的な借入が必要になる。</a:t>
             </a:r>
             <a:endParaRPr lang="en-US" sz="900" dirty="0"/>
           </a:p>
@@ -9645,12 +9645,12 @@
         </p:nvSpPr>
         <p:spPr>
           <a:xfrm>
-            <a:off x="4297680" y="4572000"/>
-            <a:ext cx="3520440" cy="1700784"/>
+            <a:off x="4297680" y="4279392"/>
+            <a:ext cx="3520440" cy="1993392"/>
           </a:xfrm>
           <a:prstGeom prst="roundRect">
             <a:avLst>
-              <a:gd name="adj" fmla="val 2688"/>
+              <a:gd name="adj" fmla="val 2294"/>
             </a:avLst>
           </a:prstGeom>
           <a:solidFill>
@@ -9672,7 +9672,7 @@
         </p:nvSpPr>
         <p:spPr>
           <a:xfrm>
-            <a:off x="4498848" y="4681728"/>
+            <a:off x="4498848" y="4389120"/>
             <a:ext cx="3127248" cy="420624"/>
           </a:xfrm>
           <a:prstGeom prst="rect">
@@ -9700,7 +9700,7 @@
                 <a:ea typeface="Calibri" pitchFamily="34" charset="-122"/>
                 <a:cs typeface="Calibri" pitchFamily="34" charset="-120"/>
               </a:rPr>
-              <a:t>② 67%／33%は合意による配分</a:t>
+              <a:t>② 銀行にはネット3.6倍で説明することになる</a:t>
             </a:r>
             <a:endParaRPr lang="en-US" sz="1050" dirty="0"/>
           </a:p>
@@ -9714,8 +9714,8 @@
         </p:nvSpPr>
         <p:spPr>
           <a:xfrm>
-            <a:off x="4498848" y="5138928"/>
-            <a:ext cx="3127248" cy="1060704"/>
+            <a:off x="4498848" y="4846320"/>
+            <a:ext cx="3127248" cy="1335024"/>
           </a:xfrm>
           <a:prstGeom prst="rect">
             <a:avLst/>
@@ -9742,7 +9742,7 @@
                 <a:ea typeface="Calibri" pitchFamily="34" charset="-122"/>
                 <a:cs typeface="Calibri" pitchFamily="34" charset="-120"/>
               </a:rPr>
-              <a:t>資本金10万円に対し榊原氏が10.0億円を払い込むため、金額按分では榊原氏がほぼ全量となる。67%／33%は、案件の持込み・みずほとの与信交渉・買収後の運営を中野氏が担うことへの評価である旨を、株主間契約に明記しておく必要がある。</a:t>
+              <a:t>留保を6.0億円とした当初案ではネットデット14.0億円（EBITDA2.6倍）だったが、1.0億円とするとネットデットは19.0億円（3.6倍）となる。有利子負債の総額とDSCRは変わらないものの、コベナンツとして現預金の最低維持水準を求められた場合、1.0億円では抵触する可能性がある。</a:t>
             </a:r>
             <a:endParaRPr lang="en-US" sz="900" dirty="0"/>
           </a:p>
@@ -9756,12 +9756,12 @@
         </p:nvSpPr>
         <p:spPr>
           <a:xfrm>
-            <a:off x="8028432" y="4572000"/>
-            <a:ext cx="3520440" cy="1700784"/>
+            <a:off x="8028432" y="4279392"/>
+            <a:ext cx="3520440" cy="1993392"/>
           </a:xfrm>
           <a:prstGeom prst="roundRect">
             <a:avLst>
-              <a:gd name="adj" fmla="val 2688"/>
+              <a:gd name="adj" fmla="val 2294"/>
             </a:avLst>
           </a:prstGeom>
           <a:solidFill>
@@ -9783,7 +9783,7 @@
         </p:nvSpPr>
         <p:spPr>
           <a:xfrm>
-            <a:off x="8229600" y="4681728"/>
+            <a:off x="8229600" y="4389120"/>
             <a:ext cx="3127248" cy="420624"/>
           </a:xfrm>
           <a:prstGeom prst="rect">
@@ -9811,7 +9811,7 @@
                 <a:ea typeface="Calibri" pitchFamily="34" charset="-122"/>
                 <a:cs typeface="Calibri" pitchFamily="34" charset="-120"/>
               </a:rPr>
-              <a:t>③ 現預金は「買った後」にしか使えない</a:t>
+              <a:t>③ 中野氏の拠出が700万円になることの副作用</a:t>
             </a:r>
             <a:endParaRPr lang="en-US" sz="1050" dirty="0"/>
           </a:p>
@@ -9825,8 +9825,8 @@
         </p:nvSpPr>
         <p:spPr>
           <a:xfrm>
-            <a:off x="8229600" y="5138928"/>
-            <a:ext cx="3127248" cy="1060704"/>
+            <a:off x="8229600" y="4846320"/>
+            <a:ext cx="3127248" cy="1335024"/>
           </a:xfrm>
           <a:prstGeom prst="rect">
             <a:avLst/>
@@ -9853,7 +9853,7 @@
                 <a:ea typeface="Calibri" pitchFamily="34" charset="-122"/>
                 <a:cs typeface="Calibri" pitchFamily="34" charset="-120"/>
               </a:rPr>
-              <a:t>クロージング時点でSPCは対象会社を保有していないため、現預金20億円を支払原資に充てることはできない。ブリッジローンで立て替え、合併後に返済する以外に方法がない。ここがスキーム上の最大の実務論点。</a:t>
+              <a:t>榊原氏が10.0億円を払い込むのに対し、中野氏の拠出は資本金10万円と株主貸付700万円のみとなる。67%／33%という配分は合意によるものだが、その根拠を株主間契約でより丁寧に定める必要が生じる。</a:t>
             </a:r>
             <a:endParaRPr lang="en-US" sz="900" dirty="0"/>
           </a:p>

--- a/M&A/カンテサンス/カンテサンス_M&Aスキーム図.pptx
+++ b/M&A/カンテサンス/カンテサンス_M&Aスキーム図.pptx
@@ -5975,7 +5975,7 @@
                 <a:ea typeface="Calibri" pitchFamily="34" charset="-122"/>
                 <a:cs typeface="Calibri" pitchFamily="34" charset="-120"/>
               </a:rPr>
-              <a:t>TLA14.0億（元金均等7年）＋TLB6.0億（期限一括）</a:t>
+              <a:t>TLA14.0億（元金均等7年・毎月返済）＋TLB6.0億（期限一括）</a:t>
             </a:r>
             <a:endParaRPr lang="en-US" sz="850" dirty="0"/>
           </a:p>
@@ -6404,7 +6404,7 @@
                 <a:ea typeface="Calibri" pitchFamily="34" charset="-122"/>
                 <a:cs typeface="Calibri" pitchFamily="34" charset="-120"/>
               </a:rPr>
-              <a:t>0.44億円</a:t>
+              <a:t>0.19億円</a:t>
             </a:r>
             <a:endParaRPr lang="en-US" sz="1150" dirty="0"/>
           </a:p>
@@ -6443,7 +6443,7 @@
                 <a:ea typeface="Calibri" pitchFamily="34" charset="-122"/>
                 <a:cs typeface="Calibri" pitchFamily="34" charset="-120"/>
               </a:rPr>
-              <a:t>3月末。月次固定費の2.3か月分</a:t>
+              <a:t>2月末。月次固定費の1.0か月分</a:t>
             </a:r>
             <a:endParaRPr lang="en-US" sz="850" dirty="0"/>
           </a:p>
@@ -7986,13 +7986,13 @@
                       <a:r>
                         <a:rPr lang="en-US" sz="1000" b="1" dirty="0">
                           <a:solidFill>
-                            <a:srgbClr val="A8741A"/>
+                            <a:srgbClr val="9B2C2C"/>
                           </a:solidFill>
                           <a:latin typeface="Calibri" pitchFamily="34" charset="0"/>
                           <a:ea typeface="Calibri" pitchFamily="34" charset="-122"/>
                           <a:cs typeface="Calibri" pitchFamily="34" charset="-120"/>
                         </a:rPr>
-                        <a:t>0.44億円</a:t>
+                        <a:t>0.19億円</a:t>
                       </a:r>
                       <a:endParaRPr lang="en-US" sz="1000" dirty="0">
                         <a:latin typeface="Calibri" charset="0"/>
@@ -8054,13 +8054,13 @@
                       <a:r>
                         <a:rPr lang="en-US" sz="1000" b="1" dirty="0">
                           <a:solidFill>
-                            <a:srgbClr val="A8741A"/>
+                            <a:srgbClr val="9B2C2C"/>
                           </a:solidFill>
                           <a:latin typeface="Calibri" pitchFamily="34" charset="0"/>
                           <a:ea typeface="Calibri" pitchFamily="34" charset="-122"/>
                           <a:cs typeface="Calibri" pitchFamily="34" charset="-120"/>
                         </a:rPr>
-                        <a:t>△ 固定費2.3か月分</a:t>
+                        <a:t>× 固定費1.0か月分</a:t>
                       </a:r>
                       <a:endParaRPr lang="en-US" sz="1000" dirty="0">
                         <a:latin typeface="Calibri" charset="0"/>
@@ -8455,7 +8455,7 @@
                           <a:ea typeface="Calibri" pitchFamily="34" charset="-122"/>
                           <a:cs typeface="Calibri" pitchFamily="34" charset="-120"/>
                         </a:rPr>
-                        <a:t>1.44億円</a:t>
+                        <a:t>1.19億円</a:t>
                       </a:r>
                       <a:endParaRPr lang="en-US" sz="1000" dirty="0">
                         <a:latin typeface="Calibri" charset="0"/>
@@ -8520,7 +8520,7 @@
                           <a:ea typeface="Calibri" pitchFamily="34" charset="-122"/>
                           <a:cs typeface="Calibri" pitchFamily="34" charset="-120"/>
                         </a:rPr>
-                        <a:t>○ 固定費7.5か月分</a:t>
+                        <a:t>○ 固定費6.2か月分</a:t>
                       </a:r>
                       <a:endParaRPr lang="en-US" sz="1000" dirty="0">
                         <a:latin typeface="Calibri" charset="0"/>
@@ -8912,7 +8912,7 @@
                           <a:ea typeface="Calibri" pitchFamily="34" charset="-122"/>
                           <a:cs typeface="Calibri" pitchFamily="34" charset="-120"/>
                         </a:rPr>
-                        <a:t>2.44億円</a:t>
+                        <a:t>2.19億円</a:t>
                       </a:r>
                       <a:endParaRPr lang="en-US" sz="1000" dirty="0">
                         <a:latin typeface="Calibri" charset="0"/>
@@ -9369,7 +9369,7 @@
                           <a:ea typeface="Calibri" pitchFamily="34" charset="-122"/>
                           <a:cs typeface="Calibri" pitchFamily="34" charset="-120"/>
                         </a:rPr>
-                        <a:t>5.44億円</a:t>
+                        <a:t>5.19億円</a:t>
                       </a:r>
                       <a:endParaRPr lang="en-US" sz="1000" dirty="0">
                         <a:latin typeface="Calibri" charset="0"/>
@@ -9520,7 +9520,7 @@
                 <a:ea typeface="Calibri" pitchFamily="34" charset="-122"/>
                 <a:cs typeface="Calibri" pitchFamily="34" charset="-120"/>
               </a:rPr>
-              <a:t>※ 2027年の最低現金残高は3月末。2月に2026年12月期の未払税金1.14億円、8月に2027年度の法人税中間納付0.92億円が発生する。</a:t>
+              <a:t>※ 最低現金残高は2月末。2月に2026年12月期の未払税金1.14億円を納付する一方、借入の元利返済は毎月発生するため、年間で最も薄くなる。</a:t>
             </a:r>
             <a:endParaRPr lang="en-US" sz="900" dirty="0"/>
           </a:p>
@@ -9589,7 +9589,7 @@
                 <a:ea typeface="Calibri" pitchFamily="34" charset="-122"/>
                 <a:cs typeface="Calibri" pitchFamily="34" charset="-120"/>
               </a:rPr>
-              <a:t>① 1.0億円は「計画どおりなら回る」水準</a:t>
+              <a:t>① 1.0億円では2月末に1,900万円まで落ちる</a:t>
             </a:r>
             <a:endParaRPr lang="en-US" sz="1050" dirty="0"/>
           </a:p>
@@ -9618,12 +9618,12 @@
           <a:p>
             <a:pPr indent="0" marL="0">
               <a:lnSpc>
-                <a:spcPts val="1250"/>
+                <a:spcPts val="1200"/>
               </a:lnSpc>
               <a:buNone/>
             </a:pPr>
             <a:r>
-              <a:rPr lang="en-US" sz="900" dirty="0">
+              <a:rPr lang="en-US" sz="850" dirty="0">
                 <a:solidFill>
                   <a:srgbClr val="1F1A1C"/>
                 </a:solidFill>
@@ -9631,9 +9631,9 @@
                 <a:ea typeface="Calibri" pitchFamily="34" charset="-122"/>
                 <a:cs typeface="Calibri" pitchFamily="34" charset="-120"/>
               </a:rPr>
-              <a:t>2027年の最低現金残高は3月末の0.44億円で、月次固定費の2.3か月分にあたる。計画どおりに推移すれば資金はショートしないが、想定外の支出に対する余裕はほとんどない。ワインの一次価格アロケーションがまとまって入荷する月や、設備の突発的な修繕が重なると、一時的な借入が必要になる。</a:t>
+              <a:t>借入の返済が毎月であるため、2026年12月期の未払税金1.14億円を納付する2月に底が来る。残高1,900万円は月次固定費の1.0か月分にすぎず、ワインの一次価格アロケーションがまとまって入荷する月や突発的な修繕が重なれば、一時的な借入が避けられない。留保を2.0億円とすれば底は1.19億円（6.2か月分）となる。</a:t>
             </a:r>
-            <a:endParaRPr lang="en-US" sz="900" dirty="0"/>
+            <a:endParaRPr lang="en-US" sz="850" dirty="0"/>
           </a:p>
         </p:txBody>
       </p:sp>
@@ -9700,7 +9700,7 @@
                 <a:ea typeface="Calibri" pitchFamily="34" charset="-122"/>
                 <a:cs typeface="Calibri" pitchFamily="34" charset="-120"/>
               </a:rPr>
-              <a:t>② 銀行にはネット3.6倍で説明することになる</a:t>
+              <a:t>② 資産調整勘定を織り込めば年1.8億円が浮く</a:t>
             </a:r>
             <a:endParaRPr lang="en-US" sz="1050" dirty="0"/>
           </a:p>
@@ -9729,12 +9729,12 @@
           <a:p>
             <a:pPr indent="0" marL="0">
               <a:lnSpc>
-                <a:spcPts val="1250"/>
+                <a:spcPts val="1200"/>
               </a:lnSpc>
               <a:buNone/>
             </a:pPr>
             <a:r>
-              <a:rPr lang="en-US" sz="900" dirty="0">
+              <a:rPr lang="en-US" sz="850" dirty="0">
                 <a:solidFill>
                   <a:srgbClr val="1F1A1C"/>
                 </a:solidFill>
@@ -9742,9 +9742,9 @@
                 <a:ea typeface="Calibri" pitchFamily="34" charset="-122"/>
                 <a:cs typeface="Calibri" pitchFamily="34" charset="-120"/>
               </a:rPr>
-              <a:t>留保を6.0億円とした当初案ではネットデット14.0億円（EBITDA2.6倍）だったが、1.0億円とするとネットデットは19.0億円（3.6倍）となる。有利子負債の総額とDSCRは変わらないものの、コベナンツとして現預金の最低維持水準を求められた場合、1.0億円では抵触する可能性がある。</a:t>
+              <a:t>株式譲受代金50.0億円と時価純資産23.15億円の差額26.85億円が税務上ののれんとして5年で損金算入されれば、年5.37億円の損金となり課税所得はマイナスとなる。8月の中間納付0.92億円は仮決算により回避でき、期末残高は1.65億円から2.57億円へ、DSCRは1.25倍から1.61倍へ改善する。ただし2月の納付は2026年12月期に対応するものであり回避できない。</a:t>
             </a:r>
-            <a:endParaRPr lang="en-US" sz="900" dirty="0"/>
+            <a:endParaRPr lang="en-US" sz="850" dirty="0"/>
           </a:p>
         </p:txBody>
       </p:sp>
@@ -9840,12 +9840,12 @@
           <a:p>
             <a:pPr indent="0" marL="0">
               <a:lnSpc>
-                <a:spcPts val="1250"/>
+                <a:spcPts val="1200"/>
               </a:lnSpc>
               <a:buNone/>
             </a:pPr>
             <a:r>
-              <a:rPr lang="en-US" sz="900" dirty="0">
+              <a:rPr lang="en-US" sz="850" dirty="0">
                 <a:solidFill>
                   <a:srgbClr val="1F1A1C"/>
                 </a:solidFill>
@@ -9855,7 +9855,7 @@
               </a:rPr>
               <a:t>榊原氏が10.0億円を払い込むのに対し、中野氏の拠出は資本金10万円と株主貸付700万円のみとなる。67%／33%という配分は合意によるものだが、その根拠を株主間契約でより丁寧に定める必要が生じる。</a:t>
             </a:r>
-            <a:endParaRPr lang="en-US" sz="900" dirty="0"/>
+            <a:endParaRPr lang="en-US" sz="850" dirty="0"/>
           </a:p>
         </p:txBody>
       </p:sp>
